--- a/protected-downloads/praesentation/M18.pptx
+++ b/protected-downloads/praesentation/M18.pptx
@@ -8,17 +8,17 @@
     <p:sldId id="256" r:id="rId7"/>
     <p:sldId id="257" r:id="rId8"/>
     <p:sldId id="258" r:id="rId9"/>
-    <p:sldId id="259" r:id="rId10"/>
-    <p:sldId id="260" r:id="rId11"/>
-    <p:sldId id="261" r:id="rId12"/>
-    <p:sldId id="262" r:id="rId13"/>
-    <p:sldId id="263" r:id="rId14"/>
-    <p:sldId id="264" r:id="rId15"/>
-    <p:sldId id="265" r:id="rId16"/>
-    <p:sldId id="266" r:id="rId17"/>
-    <p:sldId id="267" r:id="rId18"/>
-    <p:sldId id="268" r:id="rId19"/>
-    <p:sldId id="269" r:id="rId20"/>
+    <p:sldId id="259" r:id="rId11"/>
+    <p:sldId id="260" r:id="rId12"/>
+    <p:sldId id="261" r:id="rId13"/>
+    <p:sldId id="262" r:id="rId14"/>
+    <p:sldId id="263" r:id="rId15"/>
+    <p:sldId id="264" r:id="rId16"/>
+    <p:sldId id="265" r:id="rId17"/>
+    <p:sldId id="266" r:id="rId18"/>
+    <p:sldId id="267" r:id="rId19"/>
+    <p:sldId id="268" r:id="rId20"/>
+    <p:sldId id="269" r:id="rId21"/>
   </p:sldIdLst>
   <p:sldSz cx="12188952" cy="6858000" type="screen4x3"/>
   <p:notesSz cx="6858000" cy="9144000"/>
@@ -118,6 +118,1126 @@
     </a:lvl9pPr>
   </p:defaultTextStyle>
 </p:presentation>
+</file>
+
+<file path=ppt/notesMasters/notesMaster1.xml><?xml version="1.0" encoding="utf-8"?>
+<p:notesMaster xmlns:a="http://schemas.openxmlformats.org/drawingml/2006/main" xmlns:p="http://schemas.openxmlformats.org/presentationml/2006/main" xmlns:r="http://schemas.openxmlformats.org/officeDocument/2006/relationships">
+  <p:cSld>
+    <p:bg>
+      <p:bgRef idx="1001">
+        <a:schemeClr val="bg1"/>
+      </p:bgRef>
+    </p:bg>
+    <p:spTree>
+      <p:nvGrpSpPr>
+        <p:cNvPr id="1" name=""/>
+        <p:cNvGrpSpPr/>
+        <p:nvPr/>
+      </p:nvGrpSpPr>
+      <p:grpSpPr>
+        <a:xfrm>
+          <a:off x="0" y="0"/>
+          <a:ext cx="0" cy="0"/>
+          <a:chOff x="0" y="0"/>
+          <a:chExt cx="0" cy="0"/>
+        </a:xfrm>
+      </p:grpSpPr>
+      <p:sp>
+        <p:nvSpPr>
+          <p:cNvPr id="2" name="Header Placeholder 1"/>
+          <p:cNvSpPr>
+            <a:spLocks noGrp="1"/>
+          </p:cNvSpPr>
+          <p:nvPr>
+            <p:ph type="hdr" sz="quarter"/>
+          </p:nvPr>
+        </p:nvSpPr>
+        <p:spPr>
+          <a:xfrm>
+            <a:off x="0" y="0"/>
+            <a:ext cx="2971800" cy="457200"/>
+          </a:xfrm>
+          <a:prstGeom prst="rect">
+            <a:avLst/>
+          </a:prstGeom>
+        </p:spPr>
+        <p:txBody>
+          <a:bodyPr vert="horz" lIns="91440" tIns="45720" rIns="91440" bIns="45720" rtlCol="0"/>
+          <a:lstStyle>
+            <a:lvl1pPr algn="l">
+              <a:defRPr sz="1200"/>
+            </a:lvl1pPr>
+          </a:lstStyle>
+          <a:p>
+            <a:endParaRPr lang="en-US"/>
+          </a:p>
+        </p:txBody>
+      </p:sp>
+      <p:sp>
+        <p:nvSpPr>
+          <p:cNvPr id="3" name="Date Placeholder 2"/>
+          <p:cNvSpPr>
+            <a:spLocks noGrp="1"/>
+          </p:cNvSpPr>
+          <p:nvPr>
+            <p:ph type="dt" idx="1"/>
+          </p:nvPr>
+        </p:nvSpPr>
+        <p:spPr>
+          <a:xfrm>
+            <a:off x="3884613" y="0"/>
+            <a:ext cx="2971800" cy="457200"/>
+          </a:xfrm>
+          <a:prstGeom prst="rect">
+            <a:avLst/>
+          </a:prstGeom>
+        </p:spPr>
+        <p:txBody>
+          <a:bodyPr vert="horz" lIns="91440" tIns="45720" rIns="91440" bIns="45720" rtlCol="0"/>
+          <a:lstStyle>
+            <a:lvl1pPr algn="r">
+              <a:defRPr sz="1200"/>
+            </a:lvl1pPr>
+          </a:lstStyle>
+          <a:p>
+            <a:fld id="{0F89C1C7-3DCD-1040-A9CF-14679D8B5DDD}" type="datetimeFigureOut">
+              <a:rPr lang="en-US" smtClean="0"/>
+              <a:t>10/17/16</a:t>
+            </a:fld>
+            <a:endParaRPr lang="en-US"/>
+          </a:p>
+        </p:txBody>
+      </p:sp>
+      <p:sp>
+        <p:nvSpPr>
+          <p:cNvPr id="4" name="Slide Image Placeholder 3"/>
+          <p:cNvSpPr>
+            <a:spLocks noGrp="1" noRot="1" noChangeAspect="1"/>
+          </p:cNvSpPr>
+          <p:nvPr>
+            <p:ph type="sldImg" idx="2"/>
+          </p:nvPr>
+        </p:nvSpPr>
+        <p:spPr>
+          <a:xfrm>
+            <a:off x="1143000" y="685800"/>
+            <a:ext cx="4572000" cy="3429000"/>
+          </a:xfrm>
+          <a:prstGeom prst="rect">
+            <a:avLst/>
+          </a:prstGeom>
+          <a:noFill/>
+          <a:ln w="12700">
+            <a:solidFill>
+              <a:prstClr val="black"/>
+            </a:solidFill>
+          </a:ln>
+        </p:spPr>
+        <p:txBody>
+          <a:bodyPr vert="horz" lIns="91440" tIns="45720" rIns="91440" bIns="45720" rtlCol="0" anchor="ctr"/>
+          <a:lstStyle/>
+          <a:p>
+            <a:endParaRPr lang="en-US"/>
+          </a:p>
+        </p:txBody>
+      </p:sp>
+      <p:sp>
+        <p:nvSpPr>
+          <p:cNvPr id="5" name="Notes Placeholder 4"/>
+          <p:cNvSpPr>
+            <a:spLocks noGrp="1"/>
+          </p:cNvSpPr>
+          <p:nvPr>
+            <p:ph type="body" sz="quarter" idx="3"/>
+          </p:nvPr>
+        </p:nvSpPr>
+        <p:spPr>
+          <a:xfrm>
+            <a:off x="685800" y="4343400"/>
+            <a:ext cx="5486400" cy="4114800"/>
+          </a:xfrm>
+          <a:prstGeom prst="rect">
+            <a:avLst/>
+          </a:prstGeom>
+        </p:spPr>
+        <p:txBody>
+          <a:bodyPr vert="horz" lIns="91440" tIns="45720" rIns="91440" bIns="45720" rtlCol="0"/>
+          <a:lstStyle/>
+          <a:p>
+            <a:pPr lvl="0"/>
+            <a:r>
+              <a:rPr lang="en-US" smtClean="0"/>
+              <a:t>Click to edit Master text styles</a:t>
+            </a:r>
+          </a:p>
+          <a:p>
+            <a:pPr lvl="1"/>
+            <a:r>
+              <a:rPr lang="en-US" smtClean="0"/>
+              <a:t>Second level</a:t>
+            </a:r>
+          </a:p>
+          <a:p>
+            <a:pPr lvl="2"/>
+            <a:r>
+              <a:rPr lang="en-US" smtClean="0"/>
+              <a:t>Third level</a:t>
+            </a:r>
+          </a:p>
+          <a:p>
+            <a:pPr lvl="3"/>
+            <a:r>
+              <a:rPr lang="en-US" smtClean="0"/>
+              <a:t>Fourth level</a:t>
+            </a:r>
+          </a:p>
+          <a:p>
+            <a:pPr lvl="4"/>
+            <a:r>
+              <a:rPr lang="en-US" smtClean="0"/>
+              <a:t>Fifth level</a:t>
+            </a:r>
+            <a:endParaRPr lang="en-US"/>
+          </a:p>
+        </p:txBody>
+      </p:sp>
+      <p:sp>
+        <p:nvSpPr>
+          <p:cNvPr id="6" name="Footer Placeholder 5"/>
+          <p:cNvSpPr>
+            <a:spLocks noGrp="1"/>
+          </p:cNvSpPr>
+          <p:nvPr>
+            <p:ph type="ftr" sz="quarter" idx="4"/>
+          </p:nvPr>
+        </p:nvSpPr>
+        <p:spPr>
+          <a:xfrm>
+            <a:off x="0" y="8685213"/>
+            <a:ext cx="2971800" cy="457200"/>
+          </a:xfrm>
+          <a:prstGeom prst="rect">
+            <a:avLst/>
+          </a:prstGeom>
+        </p:spPr>
+        <p:txBody>
+          <a:bodyPr vert="horz" lIns="91440" tIns="45720" rIns="91440" bIns="45720" rtlCol="0" anchor="b"/>
+          <a:lstStyle>
+            <a:lvl1pPr algn="l">
+              <a:defRPr sz="1200"/>
+            </a:lvl1pPr>
+          </a:lstStyle>
+          <a:p>
+            <a:endParaRPr lang="en-US"/>
+          </a:p>
+        </p:txBody>
+      </p:sp>
+      <p:sp>
+        <p:nvSpPr>
+          <p:cNvPr id="7" name="Slide Number Placeholder 6"/>
+          <p:cNvSpPr>
+            <a:spLocks noGrp="1"/>
+          </p:cNvSpPr>
+          <p:nvPr>
+            <p:ph type="sldNum" sz="quarter" idx="5"/>
+          </p:nvPr>
+        </p:nvSpPr>
+        <p:spPr>
+          <a:xfrm>
+            <a:off x="3884613" y="8685213"/>
+            <a:ext cx="2971800" cy="457200"/>
+          </a:xfrm>
+          <a:prstGeom prst="rect">
+            <a:avLst/>
+          </a:prstGeom>
+        </p:spPr>
+        <p:txBody>
+          <a:bodyPr vert="horz" lIns="91440" tIns="45720" rIns="91440" bIns="45720" rtlCol="0" anchor="b"/>
+          <a:lstStyle>
+            <a:lvl1pPr algn="r">
+              <a:defRPr sz="1200"/>
+            </a:lvl1pPr>
+          </a:lstStyle>
+          <a:p>
+            <a:fld id="{BB5E49A5-4136-284D-997B-48E1D791AD67}" type="slidenum">
+              <a:rPr lang="en-US" smtClean="0"/>
+              <a:t>‹#›</a:t>
+            </a:fld>
+            <a:endParaRPr lang="en-US"/>
+          </a:p>
+        </p:txBody>
+      </p:sp>
+    </p:spTree>
+    <p:extLst>
+      <p:ext uri="{BB962C8B-B14F-4D97-AF65-F5344CB8AC3E}">
+        <p14:creationId xmlns:p14="http://schemas.microsoft.com/office/powerpoint/2010/main" val="2623252185"/>
+      </p:ext>
+    </p:extLst>
+  </p:cSld>
+  <p:clrMap bg1="lt1" tx1="dk1" bg2="lt2" tx2="dk2" accent1="accent1" accent2="accent2" accent3="accent3" accent4="accent4" accent5="accent5" accent6="accent6" hlink="hlink" folHlink="folHlink"/>
+  <p:notesStyle>
+    <a:lvl1pPr marL="0" algn="l" defTabSz="457200" rtl="0" eaLnBrk="1" latinLnBrk="0" hangingPunct="1">
+      <a:defRPr sz="1200" kern="1200">
+        <a:solidFill>
+          <a:schemeClr val="tx1"/>
+        </a:solidFill>
+        <a:latin typeface="+mn-lt"/>
+        <a:ea typeface="+mn-ea"/>
+        <a:cs typeface="+mn-cs"/>
+      </a:defRPr>
+    </a:lvl1pPr>
+    <a:lvl2pPr marL="457200" algn="l" defTabSz="457200" rtl="0" eaLnBrk="1" latinLnBrk="0" hangingPunct="1">
+      <a:defRPr sz="1200" kern="1200">
+        <a:solidFill>
+          <a:schemeClr val="tx1"/>
+        </a:solidFill>
+        <a:latin typeface="+mn-lt"/>
+        <a:ea typeface="+mn-ea"/>
+        <a:cs typeface="+mn-cs"/>
+      </a:defRPr>
+    </a:lvl2pPr>
+    <a:lvl3pPr marL="914400" algn="l" defTabSz="457200" rtl="0" eaLnBrk="1" latinLnBrk="0" hangingPunct="1">
+      <a:defRPr sz="1200" kern="1200">
+        <a:solidFill>
+          <a:schemeClr val="tx1"/>
+        </a:solidFill>
+        <a:latin typeface="+mn-lt"/>
+        <a:ea typeface="+mn-ea"/>
+        <a:cs typeface="+mn-cs"/>
+      </a:defRPr>
+    </a:lvl3pPr>
+    <a:lvl4pPr marL="1371600" algn="l" defTabSz="457200" rtl="0" eaLnBrk="1" latinLnBrk="0" hangingPunct="1">
+      <a:defRPr sz="1200" kern="1200">
+        <a:solidFill>
+          <a:schemeClr val="tx1"/>
+        </a:solidFill>
+        <a:latin typeface="+mn-lt"/>
+        <a:ea typeface="+mn-ea"/>
+        <a:cs typeface="+mn-cs"/>
+      </a:defRPr>
+    </a:lvl4pPr>
+    <a:lvl5pPr marL="1828800" algn="l" defTabSz="457200" rtl="0" eaLnBrk="1" latinLnBrk="0" hangingPunct="1">
+      <a:defRPr sz="1200" kern="1200">
+        <a:solidFill>
+          <a:schemeClr val="tx1"/>
+        </a:solidFill>
+        <a:latin typeface="+mn-lt"/>
+        <a:ea typeface="+mn-ea"/>
+        <a:cs typeface="+mn-cs"/>
+      </a:defRPr>
+    </a:lvl5pPr>
+    <a:lvl6pPr marL="2286000" algn="l" defTabSz="457200" rtl="0" eaLnBrk="1" latinLnBrk="0" hangingPunct="1">
+      <a:defRPr sz="1200" kern="1200">
+        <a:solidFill>
+          <a:schemeClr val="tx1"/>
+        </a:solidFill>
+        <a:latin typeface="+mn-lt"/>
+        <a:ea typeface="+mn-ea"/>
+        <a:cs typeface="+mn-cs"/>
+      </a:defRPr>
+    </a:lvl6pPr>
+    <a:lvl7pPr marL="2743200" algn="l" defTabSz="457200" rtl="0" eaLnBrk="1" latinLnBrk="0" hangingPunct="1">
+      <a:defRPr sz="1200" kern="1200">
+        <a:solidFill>
+          <a:schemeClr val="tx1"/>
+        </a:solidFill>
+        <a:latin typeface="+mn-lt"/>
+        <a:ea typeface="+mn-ea"/>
+        <a:cs typeface="+mn-cs"/>
+      </a:defRPr>
+    </a:lvl7pPr>
+    <a:lvl8pPr marL="3200400" algn="l" defTabSz="457200" rtl="0" eaLnBrk="1" latinLnBrk="0" hangingPunct="1">
+      <a:defRPr sz="1200" kern="1200">
+        <a:solidFill>
+          <a:schemeClr val="tx1"/>
+        </a:solidFill>
+        <a:latin typeface="+mn-lt"/>
+        <a:ea typeface="+mn-ea"/>
+        <a:cs typeface="+mn-cs"/>
+      </a:defRPr>
+    </a:lvl8pPr>
+    <a:lvl9pPr marL="3657600" algn="l" defTabSz="457200" rtl="0" eaLnBrk="1" latinLnBrk="0" hangingPunct="1">
+      <a:defRPr sz="1200" kern="1200">
+        <a:solidFill>
+          <a:schemeClr val="tx1"/>
+        </a:solidFill>
+        <a:latin typeface="+mn-lt"/>
+        <a:ea typeface="+mn-ea"/>
+        <a:cs typeface="+mn-cs"/>
+      </a:defRPr>
+    </a:lvl9pPr>
+  </p:notesStyle>
+</p:notesMaster>
+</file>
+
+<file path=ppt/notesSlides/notesSlide1.xml><?xml version="1.0" encoding="utf-8"?>
+<p:notes xmlns:a="http://schemas.openxmlformats.org/drawingml/2006/main" xmlns:p="http://schemas.openxmlformats.org/presentationml/2006/main" xmlns:r="http://schemas.openxmlformats.org/officeDocument/2006/relationships">
+  <p:cSld>
+    <p:spTree>
+      <p:nvGrpSpPr>
+        <p:cNvPr id="1" name=""/>
+        <p:cNvGrpSpPr/>
+        <p:nvPr/>
+      </p:nvGrpSpPr>
+      <p:grpSpPr>
+        <a:xfrm>
+          <a:off x="0" y="0"/>
+          <a:ext cx="0" cy="0"/>
+          <a:chOff x="0" y="0"/>
+          <a:chExt cx="0" cy="0"/>
+        </a:xfrm>
+      </p:grpSpPr>
+      <p:sp>
+        <p:nvSpPr>
+          <p:cNvPr id="2" name="Slide Image Placeholder 1"/>
+          <p:cNvSpPr>
+            <a:spLocks noGrp="1"/>
+          </p:cNvSpPr>
+          <p:nvPr>
+            <p:ph type="sldImg" idx="2"/>
+          </p:nvPr>
+        </p:nvSpPr>
+        <p:spPr/>
+      </p:sp>
+      <p:sp>
+        <p:nvSpPr>
+          <p:cNvPr id="3" name="Notes Placeholder 2"/>
+          <p:cNvSpPr>
+            <a:spLocks noGrp="1"/>
+          </p:cNvSpPr>
+          <p:nvPr>
+            <p:ph type="body" idx="3" sz="quarter"/>
+          </p:nvPr>
+        </p:nvSpPr>
+        <p:spPr/>
+        <p:txBody>
+          <a:bodyPr/>
+          <a:lstStyle/>
+          <a:p>
+            <a:r>
+              <a:t>Siehe Trainerhandbuch (Sektion 3) für Moderationshinweise, Timing und erwartete Teilnehmerreaktionen.</a:t>
+            </a:r>
+          </a:p>
+        </p:txBody>
+      </p:sp>
+      <p:sp>
+        <p:nvSpPr>
+          <p:cNvPr id="4" name="Slide Number Placeholder 3"/>
+          <p:cNvSpPr>
+            <a:spLocks noGrp="1"/>
+          </p:cNvSpPr>
+          <p:nvPr>
+            <p:ph type="sldNum" idx="5" sz="quarter"/>
+          </p:nvPr>
+        </p:nvSpPr>
+        <p:spPr/>
+      </p:sp>
+    </p:spTree>
+  </p:cSld>
+  <p:clrMapOvr>
+    <a:masterClrMapping/>
+  </p:clrMapOvr>
+</p:notes>
+</file>
+
+<file path=ppt/notesSlides/notesSlide10.xml><?xml version="1.0" encoding="utf-8"?>
+<p:notes xmlns:a="http://schemas.openxmlformats.org/drawingml/2006/main" xmlns:p="http://schemas.openxmlformats.org/presentationml/2006/main" xmlns:r="http://schemas.openxmlformats.org/officeDocument/2006/relationships">
+  <p:cSld>
+    <p:spTree>
+      <p:nvGrpSpPr>
+        <p:cNvPr id="1" name=""/>
+        <p:cNvGrpSpPr/>
+        <p:nvPr/>
+      </p:nvGrpSpPr>
+      <p:grpSpPr>
+        <a:xfrm>
+          <a:off x="0" y="0"/>
+          <a:ext cx="0" cy="0"/>
+          <a:chOff x="0" y="0"/>
+          <a:chExt cx="0" cy="0"/>
+        </a:xfrm>
+      </p:grpSpPr>
+      <p:sp>
+        <p:nvSpPr>
+          <p:cNvPr id="2" name="Slide Image Placeholder 1"/>
+          <p:cNvSpPr>
+            <a:spLocks noGrp="1"/>
+          </p:cNvSpPr>
+          <p:nvPr>
+            <p:ph type="sldImg" idx="2"/>
+          </p:nvPr>
+        </p:nvSpPr>
+        <p:spPr/>
+      </p:sp>
+      <p:sp>
+        <p:nvSpPr>
+          <p:cNvPr id="3" name="Notes Placeholder 2"/>
+          <p:cNvSpPr>
+            <a:spLocks noGrp="1"/>
+          </p:cNvSpPr>
+          <p:nvPr>
+            <p:ph type="body" idx="3" sz="quarter"/>
+          </p:nvPr>
+        </p:nvSpPr>
+        <p:spPr/>
+        <p:txBody>
+          <a:bodyPr/>
+          <a:lstStyle/>
+          <a:p>
+            <a:r>
+              <a:t>Siehe Trainerhandbuch (Sektion 3) für Moderationshinweise, Timing und erwartete Teilnehmerreaktionen.</a:t>
+            </a:r>
+          </a:p>
+        </p:txBody>
+      </p:sp>
+      <p:sp>
+        <p:nvSpPr>
+          <p:cNvPr id="4" name="Slide Number Placeholder 3"/>
+          <p:cNvSpPr>
+            <a:spLocks noGrp="1"/>
+          </p:cNvSpPr>
+          <p:nvPr>
+            <p:ph type="sldNum" idx="5" sz="quarter"/>
+          </p:nvPr>
+        </p:nvSpPr>
+        <p:spPr/>
+      </p:sp>
+    </p:spTree>
+  </p:cSld>
+  <p:clrMapOvr>
+    <a:masterClrMapping/>
+  </p:clrMapOvr>
+</p:notes>
+</file>
+
+<file path=ppt/notesSlides/notesSlide11.xml><?xml version="1.0" encoding="utf-8"?>
+<p:notes xmlns:a="http://schemas.openxmlformats.org/drawingml/2006/main" xmlns:p="http://schemas.openxmlformats.org/presentationml/2006/main" xmlns:r="http://schemas.openxmlformats.org/officeDocument/2006/relationships">
+  <p:cSld>
+    <p:spTree>
+      <p:nvGrpSpPr>
+        <p:cNvPr id="1" name=""/>
+        <p:cNvGrpSpPr/>
+        <p:nvPr/>
+      </p:nvGrpSpPr>
+      <p:grpSpPr>
+        <a:xfrm>
+          <a:off x="0" y="0"/>
+          <a:ext cx="0" cy="0"/>
+          <a:chOff x="0" y="0"/>
+          <a:chExt cx="0" cy="0"/>
+        </a:xfrm>
+      </p:grpSpPr>
+      <p:sp>
+        <p:nvSpPr>
+          <p:cNvPr id="2" name="Slide Image Placeholder 1"/>
+          <p:cNvSpPr>
+            <a:spLocks noGrp="1"/>
+          </p:cNvSpPr>
+          <p:nvPr>
+            <p:ph type="sldImg" idx="2"/>
+          </p:nvPr>
+        </p:nvSpPr>
+        <p:spPr/>
+      </p:sp>
+      <p:sp>
+        <p:nvSpPr>
+          <p:cNvPr id="3" name="Notes Placeholder 2"/>
+          <p:cNvSpPr>
+            <a:spLocks noGrp="1"/>
+          </p:cNvSpPr>
+          <p:nvPr>
+            <p:ph type="body" idx="3" sz="quarter"/>
+          </p:nvPr>
+        </p:nvSpPr>
+        <p:spPr/>
+        <p:txBody>
+          <a:bodyPr/>
+          <a:lstStyle/>
+          <a:p>
+            <a:r>
+              <a:t>Siehe Trainerhandbuch (Sektion 3) für Moderationshinweise, Timing und erwartete Teilnehmerreaktionen.</a:t>
+            </a:r>
+          </a:p>
+        </p:txBody>
+      </p:sp>
+      <p:sp>
+        <p:nvSpPr>
+          <p:cNvPr id="4" name="Slide Number Placeholder 3"/>
+          <p:cNvSpPr>
+            <a:spLocks noGrp="1"/>
+          </p:cNvSpPr>
+          <p:nvPr>
+            <p:ph type="sldNum" idx="5" sz="quarter"/>
+          </p:nvPr>
+        </p:nvSpPr>
+        <p:spPr/>
+      </p:sp>
+    </p:spTree>
+  </p:cSld>
+  <p:clrMapOvr>
+    <a:masterClrMapping/>
+  </p:clrMapOvr>
+</p:notes>
+</file>
+
+<file path=ppt/notesSlides/notesSlide2.xml><?xml version="1.0" encoding="utf-8"?>
+<p:notes xmlns:a="http://schemas.openxmlformats.org/drawingml/2006/main" xmlns:p="http://schemas.openxmlformats.org/presentationml/2006/main" xmlns:r="http://schemas.openxmlformats.org/officeDocument/2006/relationships">
+  <p:cSld>
+    <p:spTree>
+      <p:nvGrpSpPr>
+        <p:cNvPr id="1" name=""/>
+        <p:cNvGrpSpPr/>
+        <p:nvPr/>
+      </p:nvGrpSpPr>
+      <p:grpSpPr>
+        <a:xfrm>
+          <a:off x="0" y="0"/>
+          <a:ext cx="0" cy="0"/>
+          <a:chOff x="0" y="0"/>
+          <a:chExt cx="0" cy="0"/>
+        </a:xfrm>
+      </p:grpSpPr>
+      <p:sp>
+        <p:nvSpPr>
+          <p:cNvPr id="2" name="Slide Image Placeholder 1"/>
+          <p:cNvSpPr>
+            <a:spLocks noGrp="1"/>
+          </p:cNvSpPr>
+          <p:nvPr>
+            <p:ph type="sldImg" idx="2"/>
+          </p:nvPr>
+        </p:nvSpPr>
+        <p:spPr/>
+      </p:sp>
+      <p:sp>
+        <p:nvSpPr>
+          <p:cNvPr id="3" name="Notes Placeholder 2"/>
+          <p:cNvSpPr>
+            <a:spLocks noGrp="1"/>
+          </p:cNvSpPr>
+          <p:nvPr>
+            <p:ph type="body" idx="3" sz="quarter"/>
+          </p:nvPr>
+        </p:nvSpPr>
+        <p:spPr/>
+        <p:txBody>
+          <a:bodyPr/>
+          <a:lstStyle/>
+          <a:p>
+            <a:r>
+              <a:t>Siehe Trainerhandbuch (Sektion 3) für Moderationshinweise, Timing und erwartete Teilnehmerreaktionen.</a:t>
+            </a:r>
+          </a:p>
+        </p:txBody>
+      </p:sp>
+      <p:sp>
+        <p:nvSpPr>
+          <p:cNvPr id="4" name="Slide Number Placeholder 3"/>
+          <p:cNvSpPr>
+            <a:spLocks noGrp="1"/>
+          </p:cNvSpPr>
+          <p:nvPr>
+            <p:ph type="sldNum" idx="5" sz="quarter"/>
+          </p:nvPr>
+        </p:nvSpPr>
+        <p:spPr/>
+      </p:sp>
+    </p:spTree>
+  </p:cSld>
+  <p:clrMapOvr>
+    <a:masterClrMapping/>
+  </p:clrMapOvr>
+</p:notes>
+</file>
+
+<file path=ppt/notesSlides/notesSlide3.xml><?xml version="1.0" encoding="utf-8"?>
+<p:notes xmlns:a="http://schemas.openxmlformats.org/drawingml/2006/main" xmlns:p="http://schemas.openxmlformats.org/presentationml/2006/main" xmlns:r="http://schemas.openxmlformats.org/officeDocument/2006/relationships">
+  <p:cSld>
+    <p:spTree>
+      <p:nvGrpSpPr>
+        <p:cNvPr id="1" name=""/>
+        <p:cNvGrpSpPr/>
+        <p:nvPr/>
+      </p:nvGrpSpPr>
+      <p:grpSpPr>
+        <a:xfrm>
+          <a:off x="0" y="0"/>
+          <a:ext cx="0" cy="0"/>
+          <a:chOff x="0" y="0"/>
+          <a:chExt cx="0" cy="0"/>
+        </a:xfrm>
+      </p:grpSpPr>
+      <p:sp>
+        <p:nvSpPr>
+          <p:cNvPr id="2" name="Slide Image Placeholder 1"/>
+          <p:cNvSpPr>
+            <a:spLocks noGrp="1"/>
+          </p:cNvSpPr>
+          <p:nvPr>
+            <p:ph type="sldImg" idx="2"/>
+          </p:nvPr>
+        </p:nvSpPr>
+        <p:spPr/>
+      </p:sp>
+      <p:sp>
+        <p:nvSpPr>
+          <p:cNvPr id="3" name="Notes Placeholder 2"/>
+          <p:cNvSpPr>
+            <a:spLocks noGrp="1"/>
+          </p:cNvSpPr>
+          <p:nvPr>
+            <p:ph type="body" idx="3" sz="quarter"/>
+          </p:nvPr>
+        </p:nvSpPr>
+        <p:spPr/>
+        <p:txBody>
+          <a:bodyPr/>
+          <a:lstStyle/>
+          <a:p>
+            <a:r>
+              <a:t>Siehe Trainerhandbuch (Sektion 3) für Moderationshinweise, Timing und erwartete Teilnehmerreaktionen.</a:t>
+            </a:r>
+          </a:p>
+        </p:txBody>
+      </p:sp>
+      <p:sp>
+        <p:nvSpPr>
+          <p:cNvPr id="4" name="Slide Number Placeholder 3"/>
+          <p:cNvSpPr>
+            <a:spLocks noGrp="1"/>
+          </p:cNvSpPr>
+          <p:nvPr>
+            <p:ph type="sldNum" idx="5" sz="quarter"/>
+          </p:nvPr>
+        </p:nvSpPr>
+        <p:spPr/>
+      </p:sp>
+    </p:spTree>
+  </p:cSld>
+  <p:clrMapOvr>
+    <a:masterClrMapping/>
+  </p:clrMapOvr>
+</p:notes>
+</file>
+
+<file path=ppt/notesSlides/notesSlide4.xml><?xml version="1.0" encoding="utf-8"?>
+<p:notes xmlns:a="http://schemas.openxmlformats.org/drawingml/2006/main" xmlns:p="http://schemas.openxmlformats.org/presentationml/2006/main" xmlns:r="http://schemas.openxmlformats.org/officeDocument/2006/relationships">
+  <p:cSld>
+    <p:spTree>
+      <p:nvGrpSpPr>
+        <p:cNvPr id="1" name=""/>
+        <p:cNvGrpSpPr/>
+        <p:nvPr/>
+      </p:nvGrpSpPr>
+      <p:grpSpPr>
+        <a:xfrm>
+          <a:off x="0" y="0"/>
+          <a:ext cx="0" cy="0"/>
+          <a:chOff x="0" y="0"/>
+          <a:chExt cx="0" cy="0"/>
+        </a:xfrm>
+      </p:grpSpPr>
+      <p:sp>
+        <p:nvSpPr>
+          <p:cNvPr id="2" name="Slide Image Placeholder 1"/>
+          <p:cNvSpPr>
+            <a:spLocks noGrp="1"/>
+          </p:cNvSpPr>
+          <p:nvPr>
+            <p:ph type="sldImg" idx="2"/>
+          </p:nvPr>
+        </p:nvSpPr>
+        <p:spPr/>
+      </p:sp>
+      <p:sp>
+        <p:nvSpPr>
+          <p:cNvPr id="3" name="Notes Placeholder 2"/>
+          <p:cNvSpPr>
+            <a:spLocks noGrp="1"/>
+          </p:cNvSpPr>
+          <p:nvPr>
+            <p:ph type="body" idx="3" sz="quarter"/>
+          </p:nvPr>
+        </p:nvSpPr>
+        <p:spPr/>
+        <p:txBody>
+          <a:bodyPr/>
+          <a:lstStyle/>
+          <a:p>
+            <a:r>
+              <a:t>Siehe Trainerhandbuch (Sektion 3) für Moderationshinweise, Timing und erwartete Teilnehmerreaktionen.</a:t>
+            </a:r>
+          </a:p>
+        </p:txBody>
+      </p:sp>
+      <p:sp>
+        <p:nvSpPr>
+          <p:cNvPr id="4" name="Slide Number Placeholder 3"/>
+          <p:cNvSpPr>
+            <a:spLocks noGrp="1"/>
+          </p:cNvSpPr>
+          <p:nvPr>
+            <p:ph type="sldNum" idx="5" sz="quarter"/>
+          </p:nvPr>
+        </p:nvSpPr>
+        <p:spPr/>
+      </p:sp>
+    </p:spTree>
+  </p:cSld>
+  <p:clrMapOvr>
+    <a:masterClrMapping/>
+  </p:clrMapOvr>
+</p:notes>
+</file>
+
+<file path=ppt/notesSlides/notesSlide5.xml><?xml version="1.0" encoding="utf-8"?>
+<p:notes xmlns:a="http://schemas.openxmlformats.org/drawingml/2006/main" xmlns:p="http://schemas.openxmlformats.org/presentationml/2006/main" xmlns:r="http://schemas.openxmlformats.org/officeDocument/2006/relationships">
+  <p:cSld>
+    <p:spTree>
+      <p:nvGrpSpPr>
+        <p:cNvPr id="1" name=""/>
+        <p:cNvGrpSpPr/>
+        <p:nvPr/>
+      </p:nvGrpSpPr>
+      <p:grpSpPr>
+        <a:xfrm>
+          <a:off x="0" y="0"/>
+          <a:ext cx="0" cy="0"/>
+          <a:chOff x="0" y="0"/>
+          <a:chExt cx="0" cy="0"/>
+        </a:xfrm>
+      </p:grpSpPr>
+      <p:sp>
+        <p:nvSpPr>
+          <p:cNvPr id="2" name="Slide Image Placeholder 1"/>
+          <p:cNvSpPr>
+            <a:spLocks noGrp="1"/>
+          </p:cNvSpPr>
+          <p:nvPr>
+            <p:ph type="sldImg" idx="2"/>
+          </p:nvPr>
+        </p:nvSpPr>
+        <p:spPr/>
+      </p:sp>
+      <p:sp>
+        <p:nvSpPr>
+          <p:cNvPr id="3" name="Notes Placeholder 2"/>
+          <p:cNvSpPr>
+            <a:spLocks noGrp="1"/>
+          </p:cNvSpPr>
+          <p:nvPr>
+            <p:ph type="body" idx="3" sz="quarter"/>
+          </p:nvPr>
+        </p:nvSpPr>
+        <p:spPr/>
+        <p:txBody>
+          <a:bodyPr/>
+          <a:lstStyle/>
+          <a:p>
+            <a:r>
+              <a:t>Siehe Trainerhandbuch (Sektion 3) für Moderationshinweise, Timing und erwartete Teilnehmerreaktionen.</a:t>
+            </a:r>
+          </a:p>
+        </p:txBody>
+      </p:sp>
+      <p:sp>
+        <p:nvSpPr>
+          <p:cNvPr id="4" name="Slide Number Placeholder 3"/>
+          <p:cNvSpPr>
+            <a:spLocks noGrp="1"/>
+          </p:cNvSpPr>
+          <p:nvPr>
+            <p:ph type="sldNum" idx="5" sz="quarter"/>
+          </p:nvPr>
+        </p:nvSpPr>
+        <p:spPr/>
+      </p:sp>
+    </p:spTree>
+  </p:cSld>
+  <p:clrMapOvr>
+    <a:masterClrMapping/>
+  </p:clrMapOvr>
+</p:notes>
+</file>
+
+<file path=ppt/notesSlides/notesSlide6.xml><?xml version="1.0" encoding="utf-8"?>
+<p:notes xmlns:a="http://schemas.openxmlformats.org/drawingml/2006/main" xmlns:p="http://schemas.openxmlformats.org/presentationml/2006/main" xmlns:r="http://schemas.openxmlformats.org/officeDocument/2006/relationships">
+  <p:cSld>
+    <p:spTree>
+      <p:nvGrpSpPr>
+        <p:cNvPr id="1" name=""/>
+        <p:cNvGrpSpPr/>
+        <p:nvPr/>
+      </p:nvGrpSpPr>
+      <p:grpSpPr>
+        <a:xfrm>
+          <a:off x="0" y="0"/>
+          <a:ext cx="0" cy="0"/>
+          <a:chOff x="0" y="0"/>
+          <a:chExt cx="0" cy="0"/>
+        </a:xfrm>
+      </p:grpSpPr>
+      <p:sp>
+        <p:nvSpPr>
+          <p:cNvPr id="2" name="Slide Image Placeholder 1"/>
+          <p:cNvSpPr>
+            <a:spLocks noGrp="1"/>
+          </p:cNvSpPr>
+          <p:nvPr>
+            <p:ph type="sldImg" idx="2"/>
+          </p:nvPr>
+        </p:nvSpPr>
+        <p:spPr/>
+      </p:sp>
+      <p:sp>
+        <p:nvSpPr>
+          <p:cNvPr id="3" name="Notes Placeholder 2"/>
+          <p:cNvSpPr>
+            <a:spLocks noGrp="1"/>
+          </p:cNvSpPr>
+          <p:nvPr>
+            <p:ph type="body" idx="3" sz="quarter"/>
+          </p:nvPr>
+        </p:nvSpPr>
+        <p:spPr/>
+        <p:txBody>
+          <a:bodyPr/>
+          <a:lstStyle/>
+          <a:p>
+            <a:r>
+              <a:t>Siehe Trainerhandbuch (Sektion 3) für Moderationshinweise, Timing und erwartete Teilnehmerreaktionen.</a:t>
+            </a:r>
+          </a:p>
+        </p:txBody>
+      </p:sp>
+      <p:sp>
+        <p:nvSpPr>
+          <p:cNvPr id="4" name="Slide Number Placeholder 3"/>
+          <p:cNvSpPr>
+            <a:spLocks noGrp="1"/>
+          </p:cNvSpPr>
+          <p:nvPr>
+            <p:ph type="sldNum" idx="5" sz="quarter"/>
+          </p:nvPr>
+        </p:nvSpPr>
+        <p:spPr/>
+      </p:sp>
+    </p:spTree>
+  </p:cSld>
+  <p:clrMapOvr>
+    <a:masterClrMapping/>
+  </p:clrMapOvr>
+</p:notes>
+</file>
+
+<file path=ppt/notesSlides/notesSlide7.xml><?xml version="1.0" encoding="utf-8"?>
+<p:notes xmlns:a="http://schemas.openxmlformats.org/drawingml/2006/main" xmlns:p="http://schemas.openxmlformats.org/presentationml/2006/main" xmlns:r="http://schemas.openxmlformats.org/officeDocument/2006/relationships">
+  <p:cSld>
+    <p:spTree>
+      <p:nvGrpSpPr>
+        <p:cNvPr id="1" name=""/>
+        <p:cNvGrpSpPr/>
+        <p:nvPr/>
+      </p:nvGrpSpPr>
+      <p:grpSpPr>
+        <a:xfrm>
+          <a:off x="0" y="0"/>
+          <a:ext cx="0" cy="0"/>
+          <a:chOff x="0" y="0"/>
+          <a:chExt cx="0" cy="0"/>
+        </a:xfrm>
+      </p:grpSpPr>
+      <p:sp>
+        <p:nvSpPr>
+          <p:cNvPr id="2" name="Slide Image Placeholder 1"/>
+          <p:cNvSpPr>
+            <a:spLocks noGrp="1"/>
+          </p:cNvSpPr>
+          <p:nvPr>
+            <p:ph type="sldImg" idx="2"/>
+          </p:nvPr>
+        </p:nvSpPr>
+        <p:spPr/>
+      </p:sp>
+      <p:sp>
+        <p:nvSpPr>
+          <p:cNvPr id="3" name="Notes Placeholder 2"/>
+          <p:cNvSpPr>
+            <a:spLocks noGrp="1"/>
+          </p:cNvSpPr>
+          <p:nvPr>
+            <p:ph type="body" idx="3" sz="quarter"/>
+          </p:nvPr>
+        </p:nvSpPr>
+        <p:spPr/>
+        <p:txBody>
+          <a:bodyPr/>
+          <a:lstStyle/>
+          <a:p>
+            <a:r>
+              <a:t>Siehe Trainerhandbuch (Sektion 3) für Moderationshinweise, Timing und erwartete Teilnehmerreaktionen.</a:t>
+            </a:r>
+          </a:p>
+        </p:txBody>
+      </p:sp>
+      <p:sp>
+        <p:nvSpPr>
+          <p:cNvPr id="4" name="Slide Number Placeholder 3"/>
+          <p:cNvSpPr>
+            <a:spLocks noGrp="1"/>
+          </p:cNvSpPr>
+          <p:nvPr>
+            <p:ph type="sldNum" idx="5" sz="quarter"/>
+          </p:nvPr>
+        </p:nvSpPr>
+        <p:spPr/>
+      </p:sp>
+    </p:spTree>
+  </p:cSld>
+  <p:clrMapOvr>
+    <a:masterClrMapping/>
+  </p:clrMapOvr>
+</p:notes>
+</file>
+
+<file path=ppt/notesSlides/notesSlide8.xml><?xml version="1.0" encoding="utf-8"?>
+<p:notes xmlns:a="http://schemas.openxmlformats.org/drawingml/2006/main" xmlns:p="http://schemas.openxmlformats.org/presentationml/2006/main" xmlns:r="http://schemas.openxmlformats.org/officeDocument/2006/relationships">
+  <p:cSld>
+    <p:spTree>
+      <p:nvGrpSpPr>
+        <p:cNvPr id="1" name=""/>
+        <p:cNvGrpSpPr/>
+        <p:nvPr/>
+      </p:nvGrpSpPr>
+      <p:grpSpPr>
+        <a:xfrm>
+          <a:off x="0" y="0"/>
+          <a:ext cx="0" cy="0"/>
+          <a:chOff x="0" y="0"/>
+          <a:chExt cx="0" cy="0"/>
+        </a:xfrm>
+      </p:grpSpPr>
+      <p:sp>
+        <p:nvSpPr>
+          <p:cNvPr id="2" name="Slide Image Placeholder 1"/>
+          <p:cNvSpPr>
+            <a:spLocks noGrp="1"/>
+          </p:cNvSpPr>
+          <p:nvPr>
+            <p:ph type="sldImg" idx="2"/>
+          </p:nvPr>
+        </p:nvSpPr>
+        <p:spPr/>
+      </p:sp>
+      <p:sp>
+        <p:nvSpPr>
+          <p:cNvPr id="3" name="Notes Placeholder 2"/>
+          <p:cNvSpPr>
+            <a:spLocks noGrp="1"/>
+          </p:cNvSpPr>
+          <p:nvPr>
+            <p:ph type="body" idx="3" sz="quarter"/>
+          </p:nvPr>
+        </p:nvSpPr>
+        <p:spPr/>
+        <p:txBody>
+          <a:bodyPr/>
+          <a:lstStyle/>
+          <a:p>
+            <a:r>
+              <a:t>Siehe Trainerhandbuch (Sektion 3) für Moderationshinweise, Timing und erwartete Teilnehmerreaktionen.</a:t>
+            </a:r>
+          </a:p>
+        </p:txBody>
+      </p:sp>
+      <p:sp>
+        <p:nvSpPr>
+          <p:cNvPr id="4" name="Slide Number Placeholder 3"/>
+          <p:cNvSpPr>
+            <a:spLocks noGrp="1"/>
+          </p:cNvSpPr>
+          <p:nvPr>
+            <p:ph type="sldNum" idx="5" sz="quarter"/>
+          </p:nvPr>
+        </p:nvSpPr>
+        <p:spPr/>
+      </p:sp>
+    </p:spTree>
+  </p:cSld>
+  <p:clrMapOvr>
+    <a:masterClrMapping/>
+  </p:clrMapOvr>
+</p:notes>
+</file>
+
+<file path=ppt/notesSlides/notesSlide9.xml><?xml version="1.0" encoding="utf-8"?>
+<p:notes xmlns:a="http://schemas.openxmlformats.org/drawingml/2006/main" xmlns:p="http://schemas.openxmlformats.org/presentationml/2006/main" xmlns:r="http://schemas.openxmlformats.org/officeDocument/2006/relationships">
+  <p:cSld>
+    <p:spTree>
+      <p:nvGrpSpPr>
+        <p:cNvPr id="1" name=""/>
+        <p:cNvGrpSpPr/>
+        <p:nvPr/>
+      </p:nvGrpSpPr>
+      <p:grpSpPr>
+        <a:xfrm>
+          <a:off x="0" y="0"/>
+          <a:ext cx="0" cy="0"/>
+          <a:chOff x="0" y="0"/>
+          <a:chExt cx="0" cy="0"/>
+        </a:xfrm>
+      </p:grpSpPr>
+      <p:sp>
+        <p:nvSpPr>
+          <p:cNvPr id="2" name="Slide Image Placeholder 1"/>
+          <p:cNvSpPr>
+            <a:spLocks noGrp="1"/>
+          </p:cNvSpPr>
+          <p:nvPr>
+            <p:ph type="sldImg" idx="2"/>
+          </p:nvPr>
+        </p:nvSpPr>
+        <p:spPr/>
+      </p:sp>
+      <p:sp>
+        <p:nvSpPr>
+          <p:cNvPr id="3" name="Notes Placeholder 2"/>
+          <p:cNvSpPr>
+            <a:spLocks noGrp="1"/>
+          </p:cNvSpPr>
+          <p:nvPr>
+            <p:ph type="body" idx="3" sz="quarter"/>
+          </p:nvPr>
+        </p:nvSpPr>
+        <p:spPr/>
+        <p:txBody>
+          <a:bodyPr/>
+          <a:lstStyle/>
+          <a:p>
+            <a:r>
+              <a:t>Siehe Trainerhandbuch (Sektion 3) für Moderationshinweise, Timing und erwartete Teilnehmerreaktionen.</a:t>
+            </a:r>
+          </a:p>
+        </p:txBody>
+      </p:sp>
+      <p:sp>
+        <p:nvSpPr>
+          <p:cNvPr id="4" name="Slide Number Placeholder 3"/>
+          <p:cNvSpPr>
+            <a:spLocks noGrp="1"/>
+          </p:cNvSpPr>
+          <p:nvPr>
+            <p:ph type="sldNum" idx="5" sz="quarter"/>
+          </p:nvPr>
+        </p:nvSpPr>
+        <p:spPr/>
+      </p:sp>
+    </p:spTree>
+  </p:cSld>
+  <p:clrMapOvr>
+    <a:masterClrMapping/>
+  </p:clrMapOvr>
+</p:notes>
 </file>
 
 <file path=ppt/slideLayouts/slideLayout1.xml><?xml version="1.0" encoding="utf-8"?>
@@ -5360,25 +6480,6 @@
               <a:t>Mein wirkungsvollster Trigger für die nächsten 4 Wochen:</a:t>
             </a:r>
           </a:p>
-          <a:p>
-            <a:pPr>
-              <a:spcBef>
-                <a:spcPts val="400"/>
-              </a:spcBef>
-              <a:spcAft>
-                <a:spcPts val="200"/>
-              </a:spcAft>
-            </a:pPr>
-            <a:r>
-              <a:rPr sz="1200">
-                <a:solidFill>
-                  <a:srgbClr val="3D5466"/>
-                </a:solidFill>
-                <a:latin typeface="Arial"/>
-              </a:rPr>
-              <a:t>___________________________________________________________________________</a:t>
-            </a:r>
-          </a:p>
         </p:txBody>
       </p:sp>
       <p:sp>
@@ -5740,25 +6841,6 @@
             <a:spAutoFit/>
           </a:bodyPr>
           <a:lstStyle/>
-          <a:p>
-            <a:pPr>
-              <a:spcBef>
-                <a:spcPts val="400"/>
-              </a:spcBef>
-              <a:spcAft>
-                <a:spcPts val="200"/>
-              </a:spcAft>
-            </a:pPr>
-            <a:r>
-              <a:rPr sz="1200">
-                <a:solidFill>
-                  <a:srgbClr val="3D5466"/>
-                </a:solidFill>
-                <a:latin typeface="Arial"/>
-              </a:rPr>
-              <a:t>Anzahl Datenlücken gesamt: _______ | Größte Schwachstelle: _______________________</a:t>
-            </a:r>
-          </a:p>
           <a:p>
             <a:pPr>
               <a:spcBef>
@@ -9337,4 +10419,324 @@
   </a:objectDefaults>
   <a:extraClrSchemeLst/>
 </a:theme>
+</file>
+
+<file path=ppt/theme/theme2.xml><?xml version="1.0" encoding="utf-8"?>
+<a:theme xmlns:a="http://schemas.openxmlformats.org/drawingml/2006/main" name="Office Theme">
+  <a:themeElements>
+    <a:clrScheme name="Office">
+      <a:dk1>
+        <a:sysClr val="windowText" lastClr="000000"/>
+      </a:dk1>
+      <a:lt1>
+        <a:sysClr val="window" lastClr="FFFFFF"/>
+      </a:lt1>
+      <a:dk2>
+        <a:srgbClr val="1F497D"/>
+      </a:dk2>
+      <a:lt2>
+        <a:srgbClr val="EEECE1"/>
+      </a:lt2>
+      <a:accent1>
+        <a:srgbClr val="4F81BD"/>
+      </a:accent1>
+      <a:accent2>
+        <a:srgbClr val="C0504D"/>
+      </a:accent2>
+      <a:accent3>
+        <a:srgbClr val="9BBB59"/>
+      </a:accent3>
+      <a:accent4>
+        <a:srgbClr val="8064A2"/>
+      </a:accent4>
+      <a:accent5>
+        <a:srgbClr val="4BACC6"/>
+      </a:accent5>
+      <a:accent6>
+        <a:srgbClr val="F79646"/>
+      </a:accent6>
+      <a:hlink>
+        <a:srgbClr val="0000FF"/>
+      </a:hlink>
+      <a:folHlink>
+        <a:srgbClr val="800080"/>
+      </a:folHlink>
+    </a:clrScheme>
+    <a:fontScheme name="Office">
+      <a:majorFont>
+        <a:latin typeface="Calibri"/>
+        <a:ea typeface=""/>
+        <a:cs typeface=""/>
+        <a:font script="Jpan" typeface="ＭＳ Ｐゴシック"/>
+        <a:font script="Hang" typeface="맑은 고딕"/>
+        <a:font script="Hans" typeface="宋体"/>
+        <a:font script="Hant" typeface="新細明體"/>
+        <a:font script="Arab" typeface="Times New Roman"/>
+        <a:font script="Hebr" typeface="Times New Roman"/>
+        <a:font script="Thai" typeface="Angsana New"/>
+        <a:font script="Ethi" typeface="Nyala"/>
+        <a:font script="Beng" typeface="Vrinda"/>
+        <a:font script="Gujr" typeface="Shruti"/>
+        <a:font script="Khmr" typeface="MoolBoran"/>
+        <a:font script="Knda" typeface="Tunga"/>
+        <a:font script="Guru" typeface="Raavi"/>
+        <a:font script="Cans" typeface="Euphemia"/>
+        <a:font script="Cher" typeface="Plantagenet Cherokee"/>
+        <a:font script="Yiii" typeface="Microsoft Yi Baiti"/>
+        <a:font script="Tibt" typeface="Microsoft Himalaya"/>
+        <a:font script="Thaa" typeface="MV Boli"/>
+        <a:font script="Deva" typeface="Mangal"/>
+        <a:font script="Telu" typeface="Gautami"/>
+        <a:font script="Taml" typeface="Latha"/>
+        <a:font script="Syrc" typeface="Estrangelo Edessa"/>
+        <a:font script="Orya" typeface="Kalinga"/>
+        <a:font script="Mlym" typeface="Kartika"/>
+        <a:font script="Laoo" typeface="DokChampa"/>
+        <a:font script="Sinh" typeface="Iskoola Pota"/>
+        <a:font script="Mong" typeface="Mongolian Baiti"/>
+        <a:font script="Viet" typeface="Times New Roman"/>
+        <a:font script="Uigh" typeface="Microsoft Uighur"/>
+        <a:font script="Geor" typeface="Sylfaen"/>
+      </a:majorFont>
+      <a:minorFont>
+        <a:latin typeface="Calibri"/>
+        <a:ea typeface=""/>
+        <a:cs typeface=""/>
+        <a:font script="Jpan" typeface="ＭＳ Ｐゴシック"/>
+        <a:font script="Hang" typeface="맑은 고딕"/>
+        <a:font script="Hans" typeface="宋体"/>
+        <a:font script="Hant" typeface="新細明體"/>
+        <a:font script="Arab" typeface="Arial"/>
+        <a:font script="Hebr" typeface="Arial"/>
+        <a:font script="Thai" typeface="Cordia New"/>
+        <a:font script="Ethi" typeface="Nyala"/>
+        <a:font script="Beng" typeface="Vrinda"/>
+        <a:font script="Gujr" typeface="Shruti"/>
+        <a:font script="Khmr" typeface="DaunPenh"/>
+        <a:font script="Knda" typeface="Tunga"/>
+        <a:font script="Guru" typeface="Raavi"/>
+        <a:font script="Cans" typeface="Euphemia"/>
+        <a:font script="Cher" typeface="Plantagenet Cherokee"/>
+        <a:font script="Yiii" typeface="Microsoft Yi Baiti"/>
+        <a:font script="Tibt" typeface="Microsoft Himalaya"/>
+        <a:font script="Thaa" typeface="MV Boli"/>
+        <a:font script="Deva" typeface="Mangal"/>
+        <a:font script="Telu" typeface="Gautami"/>
+        <a:font script="Taml" typeface="Latha"/>
+        <a:font script="Syrc" typeface="Estrangelo Edessa"/>
+        <a:font script="Orya" typeface="Kalinga"/>
+        <a:font script="Mlym" typeface="Kartika"/>
+        <a:font script="Laoo" typeface="DokChampa"/>
+        <a:font script="Sinh" typeface="Iskoola Pota"/>
+        <a:font script="Mong" typeface="Mongolian Baiti"/>
+        <a:font script="Viet" typeface="Arial"/>
+        <a:font script="Uigh" typeface="Microsoft Uighur"/>
+        <a:font script="Geor" typeface="Sylfaen"/>
+      </a:minorFont>
+    </a:fontScheme>
+    <a:fmtScheme name="Office">
+      <a:fillStyleLst>
+        <a:solidFill>
+          <a:schemeClr val="phClr"/>
+        </a:solidFill>
+        <a:gradFill rotWithShape="1">
+          <a:gsLst>
+            <a:gs pos="0">
+              <a:schemeClr val="phClr">
+                <a:tint val="50000"/>
+                <a:satMod val="300000"/>
+              </a:schemeClr>
+            </a:gs>
+            <a:gs pos="35000">
+              <a:schemeClr val="phClr">
+                <a:tint val="37000"/>
+                <a:satMod val="300000"/>
+              </a:schemeClr>
+            </a:gs>
+            <a:gs pos="100000">
+              <a:schemeClr val="phClr">
+                <a:tint val="15000"/>
+                <a:satMod val="350000"/>
+              </a:schemeClr>
+            </a:gs>
+          </a:gsLst>
+          <a:lin ang="16200000" scaled="1"/>
+        </a:gradFill>
+        <a:gradFill rotWithShape="1">
+          <a:gsLst>
+            <a:gs pos="0">
+              <a:schemeClr val="phClr">
+                <a:tint val="100000"/>
+                <a:shade val="100000"/>
+                <a:satMod val="130000"/>
+              </a:schemeClr>
+            </a:gs>
+            <a:gs pos="100000">
+              <a:schemeClr val="phClr">
+                <a:tint val="50000"/>
+                <a:shade val="100000"/>
+                <a:satMod val="350000"/>
+              </a:schemeClr>
+            </a:gs>
+          </a:gsLst>
+          <a:lin ang="16200000" scaled="0"/>
+        </a:gradFill>
+      </a:fillStyleLst>
+      <a:lnStyleLst>
+        <a:ln w="9525" cap="flat" cmpd="sng" algn="ctr">
+          <a:solidFill>
+            <a:schemeClr val="phClr">
+              <a:shade val="95000"/>
+              <a:satMod val="105000"/>
+            </a:schemeClr>
+          </a:solidFill>
+          <a:prstDash val="solid"/>
+        </a:ln>
+        <a:ln w="25400" cap="flat" cmpd="sng" algn="ctr">
+          <a:solidFill>
+            <a:schemeClr val="phClr"/>
+          </a:solidFill>
+          <a:prstDash val="solid"/>
+        </a:ln>
+        <a:ln w="38100" cap="flat" cmpd="sng" algn="ctr">
+          <a:solidFill>
+            <a:schemeClr val="phClr"/>
+          </a:solidFill>
+          <a:prstDash val="solid"/>
+        </a:ln>
+      </a:lnStyleLst>
+      <a:effectStyleLst>
+        <a:effectStyle>
+          <a:effectLst>
+            <a:outerShdw blurRad="40000" dist="20000" dir="5400000" rotWithShape="0">
+              <a:srgbClr val="000000">
+                <a:alpha val="38000"/>
+              </a:srgbClr>
+            </a:outerShdw>
+          </a:effectLst>
+        </a:effectStyle>
+        <a:effectStyle>
+          <a:effectLst>
+            <a:outerShdw blurRad="40000" dist="23000" dir="5400000" rotWithShape="0">
+              <a:srgbClr val="000000">
+                <a:alpha val="35000"/>
+              </a:srgbClr>
+            </a:outerShdw>
+          </a:effectLst>
+        </a:effectStyle>
+        <a:effectStyle>
+          <a:effectLst>
+            <a:outerShdw blurRad="40000" dist="23000" dir="5400000" rotWithShape="0">
+              <a:srgbClr val="000000">
+                <a:alpha val="35000"/>
+              </a:srgbClr>
+            </a:outerShdw>
+          </a:effectLst>
+          <a:scene3d>
+            <a:camera prst="orthographicFront">
+              <a:rot lat="0" lon="0" rev="0"/>
+            </a:camera>
+            <a:lightRig rig="threePt" dir="t">
+              <a:rot lat="0" lon="0" rev="1200000"/>
+            </a:lightRig>
+          </a:scene3d>
+          <a:sp3d>
+            <a:bevelT w="63500" h="25400"/>
+          </a:sp3d>
+        </a:effectStyle>
+      </a:effectStyleLst>
+      <a:bgFillStyleLst>
+        <a:solidFill>
+          <a:schemeClr val="phClr"/>
+        </a:solidFill>
+        <a:gradFill rotWithShape="1">
+          <a:gsLst>
+            <a:gs pos="0">
+              <a:schemeClr val="phClr">
+                <a:tint val="40000"/>
+                <a:satMod val="350000"/>
+              </a:schemeClr>
+            </a:gs>
+            <a:gs pos="40000">
+              <a:schemeClr val="phClr">
+                <a:tint val="45000"/>
+                <a:shade val="99000"/>
+                <a:satMod val="350000"/>
+              </a:schemeClr>
+            </a:gs>
+            <a:gs pos="100000">
+              <a:schemeClr val="phClr">
+                <a:shade val="20000"/>
+                <a:satMod val="255000"/>
+              </a:schemeClr>
+            </a:gs>
+          </a:gsLst>
+          <a:path path="circle">
+            <a:fillToRect l="50000" t="-80000" r="50000" b="180000"/>
+          </a:path>
+        </a:gradFill>
+        <a:gradFill rotWithShape="1">
+          <a:gsLst>
+            <a:gs pos="0">
+              <a:schemeClr val="phClr">
+                <a:tint val="80000"/>
+                <a:satMod val="300000"/>
+              </a:schemeClr>
+            </a:gs>
+            <a:gs pos="100000">
+              <a:schemeClr val="phClr">
+                <a:shade val="30000"/>
+                <a:satMod val="200000"/>
+              </a:schemeClr>
+            </a:gs>
+          </a:gsLst>
+          <a:path path="circle">
+            <a:fillToRect l="50000" t="50000" r="50000" b="50000"/>
+          </a:path>
+        </a:gradFill>
+      </a:bgFillStyleLst>
+    </a:fmtScheme>
+  </a:themeElements>
+  <a:objectDefaults>
+    <a:spDef>
+      <a:spPr/>
+      <a:bodyPr/>
+      <a:lstStyle/>
+      <a:style>
+        <a:lnRef idx="1">
+          <a:schemeClr val="accent1"/>
+        </a:lnRef>
+        <a:fillRef idx="3">
+          <a:schemeClr val="accent1"/>
+        </a:fillRef>
+        <a:effectRef idx="2">
+          <a:schemeClr val="accent1"/>
+        </a:effectRef>
+        <a:fontRef idx="minor">
+          <a:schemeClr val="lt1"/>
+        </a:fontRef>
+      </a:style>
+    </a:spDef>
+    <a:lnDef>
+      <a:spPr/>
+      <a:bodyPr/>
+      <a:lstStyle/>
+      <a:style>
+        <a:lnRef idx="2">
+          <a:schemeClr val="accent1"/>
+        </a:lnRef>
+        <a:fillRef idx="0">
+          <a:schemeClr val="accent1"/>
+        </a:fillRef>
+        <a:effectRef idx="1">
+          <a:schemeClr val="accent1"/>
+        </a:effectRef>
+        <a:fontRef idx="minor">
+          <a:schemeClr val="tx1"/>
+        </a:fontRef>
+      </a:style>
+    </a:lnDef>
+  </a:objectDefaults>
+  <a:extraClrSchemeLst/>
+</a:theme>
 </file>
--- a/protected-downloads/praesentation/M18.pptx
+++ b/protected-downloads/praesentation/M18.pptx
@@ -6822,49 +6822,7 @@
       </p:sp>
       <p:sp>
         <p:nvSpPr>
-          <p:cNvPr id="8" name="TextBox 7"/>
-          <p:cNvSpPr txBox="1"/>
-          <p:nvPr/>
-        </p:nvSpPr>
-        <p:spPr>
-          <a:xfrm>
-            <a:off x="685800" y="1417320"/>
-            <a:ext cx="10817352" cy="5029200"/>
-          </a:xfrm>
-          <a:prstGeom prst="rect">
-            <a:avLst/>
-          </a:prstGeom>
-          <a:noFill/>
-        </p:spPr>
-        <p:txBody>
-          <a:bodyPr wrap="square">
-            <a:spAutoFit/>
-          </a:bodyPr>
-          <a:lstStyle/>
-          <a:p>
-            <a:pPr>
-              <a:spcBef>
-                <a:spcPts val="400"/>
-              </a:spcBef>
-              <a:spcAft>
-                <a:spcPts val="200"/>
-              </a:spcAft>
-            </a:pPr>
-            <a:r>
-              <a:rPr sz="1200">
-                <a:solidFill>
-                  <a:srgbClr val="3D5466"/>
-                </a:solidFill>
-                <a:latin typeface="Arial"/>
-              </a:rPr>
-              <a:t># 5. PRAXISTRANSFER</a:t>
-            </a:r>
-          </a:p>
-        </p:txBody>
-      </p:sp>
-      <p:sp>
-        <p:nvSpPr>
-          <p:cNvPr id="9" name="Rectangle 8"/>
+          <p:cNvPr id="8" name="Rectangle 7"/>
           <p:cNvSpPr/>
           <p:nvPr/>
         </p:nvSpPr>
@@ -6907,7 +6865,7 @@
       </p:sp>
       <p:sp>
         <p:nvSpPr>
-          <p:cNvPr id="10" name="TextBox 9"/>
+          <p:cNvPr id="9" name="TextBox 8"/>
           <p:cNvSpPr txBox="1"/>
           <p:nvPr/>
         </p:nvSpPr>

--- a/protected-downloads/praesentation/M18.pptx
+++ b/protected-downloads/praesentation/M18.pptx
@@ -8,7 +8,7 @@
     <p:sldId id="256" r:id="rId7"/>
     <p:sldId id="257" r:id="rId8"/>
     <p:sldId id="258" r:id="rId9"/>
-    <p:sldId id="259" r:id="rId11"/>
+    <p:sldId id="259" r:id="rId10"/>
     <p:sldId id="260" r:id="rId12"/>
     <p:sldId id="261" r:id="rId13"/>
     <p:sldId id="262" r:id="rId14"/>
@@ -19,6 +19,7 @@
     <p:sldId id="267" r:id="rId19"/>
     <p:sldId id="268" r:id="rId20"/>
     <p:sldId id="269" r:id="rId21"/>
+    <p:sldId id="270" r:id="rId22"/>
   </p:sldIdLst>
   <p:sldSz cx="12188952" cy="6858000" type="screen4x3"/>
   <p:notesSz cx="6858000" cy="9144000"/>
@@ -5033,7 +5034,7 @@
                 </a:solidFill>
                 <a:latin typeface="Source Serif 4"/>
               </a:rPr>
-              <a:t>Was ist erlaubt – was nicht?</a:t>
+              <a:t>Datenqualitäts-Audit im eigenen Bestand</a:t>
             </a:r>
           </a:p>
         </p:txBody>
@@ -5075,7 +5076,7 @@
                 </a:solidFill>
                 <a:latin typeface="Arial"/>
               </a:rPr>
-              <a:t>Kundendaten dürfen für Vertriebszwecke genutzt werden, wenn:</a:t>
+              <a:t>Führen Sie einmalig pro Jahr einen strukturierten Datencheck durch:</a:t>
             </a:r>
           </a:p>
           <a:p>
@@ -5094,7 +5095,7 @@
                 </a:solidFill>
                 <a:latin typeface="Arial"/>
               </a:rPr>
-              <a:t>▸  Eine Rechtsgrundlage besteht (Art. 6 DSGVO): Bei Bankbeziehungen gilt üblicherweise das berechtigte Interesse (Art. 6 Abs. 1 lit. f DSGVO) für Bestandskundenpflege und -beratung</a:t>
+              <a:t>▸  In agree eine Bestandsliste Ihrer Firmenkunden aufrufen (Weg je nach Bankinstallation: Bestandsbetreuer-Cockpit oder Listenabfrage über agree-Auswertungskomponente – lassen Sie sich das einmalig von Ihrem IT-Koordinator zeigen, da ein standardisierter „Lückenanalyse"-Menüpunkt nicht in jeder Installation verfügbar ist). Alternativ: Export als Excel aus dem Bestandscockpit und manuelle Filterung.</a:t>
             </a:r>
           </a:p>
           <a:p>
@@ -5113,7 +5114,7 @@
                 </a:solidFill>
                 <a:latin typeface="Arial"/>
               </a:rPr>
-              <a:t>▸  Die Nutzung dem Kunden gegenüber transparent gemacht wird (Datenschutzerklärung)</a:t>
+              <a:t>▸  Für alle Kunden mit &gt; 500k Kreditvolumen prüfen: Geburtsdatum, Branche, Gesellschafterstruktur, Jahresabschluss-Datum (Arbeitsblatt B als Checkliste nutzen)</a:t>
             </a:r>
           </a:p>
           <a:p>
@@ -5132,7 +5133,26 @@
                 </a:solidFill>
                 <a:latin typeface="Arial"/>
               </a:rPr>
-              <a:t>▸  Keine sensiblen Daten (Art. 9 DSGVO) ohne explizite Einwilligung verarbeitet werden</a:t>
+              <a:t>▸  Fehler in den nächsten drei Kundengesprächen schließen (gezielt im Gespräch erfragen)</a:t>
+            </a:r>
+          </a:p>
+          <a:p>
+            <a:pPr>
+              <a:spcBef>
+                <a:spcPts val="400"/>
+              </a:spcBef>
+              <a:spcAft>
+                <a:spcPts val="200"/>
+              </a:spcAft>
+            </a:pPr>
+            <a:r>
+              <a:rPr sz="1200">
+                <a:solidFill>
+                  <a:srgbClr val="3D5466"/>
+                </a:solidFill>
+                <a:latin typeface="Arial"/>
+              </a:rPr>
+              <a:t>## 4.4 DSGVO-konforme Datennutzung im Vertrieb</a:t>
             </a:r>
           </a:p>
         </p:txBody>
@@ -5470,14 +5490,113 @@
                 </a:solidFill>
                 <a:latin typeface="Source Serif 4"/>
               </a:rPr>
-              <a:t>Verbundpartner-Einwilligung: Pflichtcheck vor jeder Übergabe</a:t>
-            </a:r>
-          </a:p>
-        </p:txBody>
-      </p:sp>
-      <p:sp>
-        <p:nvSpPr>
-          <p:cNvPr id="8" name="Rectangle 7"/>
+              <a:t>Was ist erlaubt – was nicht?</a:t>
+            </a:r>
+          </a:p>
+        </p:txBody>
+      </p:sp>
+      <p:sp>
+        <p:nvSpPr>
+          <p:cNvPr id="8" name="TextBox 7"/>
+          <p:cNvSpPr txBox="1"/>
+          <p:nvPr/>
+        </p:nvSpPr>
+        <p:spPr>
+          <a:xfrm>
+            <a:off x="685800" y="1417320"/>
+            <a:ext cx="10817352" cy="5029200"/>
+          </a:xfrm>
+          <a:prstGeom prst="rect">
+            <a:avLst/>
+          </a:prstGeom>
+          <a:noFill/>
+        </p:spPr>
+        <p:txBody>
+          <a:bodyPr wrap="square">
+            <a:spAutoFit/>
+          </a:bodyPr>
+          <a:lstStyle/>
+          <a:p>
+            <a:pPr>
+              <a:spcBef>
+                <a:spcPts val="400"/>
+              </a:spcBef>
+              <a:spcAft>
+                <a:spcPts val="200"/>
+              </a:spcAft>
+            </a:pPr>
+            <a:r>
+              <a:rPr sz="1200">
+                <a:solidFill>
+                  <a:srgbClr val="3D5466"/>
+                </a:solidFill>
+                <a:latin typeface="Arial"/>
+              </a:rPr>
+              <a:t>Kundendaten dürfen für Vertriebszwecke genutzt werden, wenn:</a:t>
+            </a:r>
+          </a:p>
+          <a:p>
+            <a:pPr>
+              <a:spcBef>
+                <a:spcPts val="400"/>
+              </a:spcBef>
+              <a:spcAft>
+                <a:spcPts val="200"/>
+              </a:spcAft>
+            </a:pPr>
+            <a:r>
+              <a:rPr sz="1300">
+                <a:solidFill>
+                  <a:srgbClr val="3D5466"/>
+                </a:solidFill>
+                <a:latin typeface="Arial"/>
+              </a:rPr>
+              <a:t>▸  Eine Rechtsgrundlage besteht (Art. 6 DSGVO): Bei Bankbeziehungen gilt üblicherweise das berechtigte Interesse (Art. 6 Abs. 1 lit. f DSGVO) für Bestandskundenpflege und -beratung</a:t>
+            </a:r>
+          </a:p>
+          <a:p>
+            <a:pPr>
+              <a:spcBef>
+                <a:spcPts val="400"/>
+              </a:spcBef>
+              <a:spcAft>
+                <a:spcPts val="200"/>
+              </a:spcAft>
+            </a:pPr>
+            <a:r>
+              <a:rPr sz="1300">
+                <a:solidFill>
+                  <a:srgbClr val="3D5466"/>
+                </a:solidFill>
+                <a:latin typeface="Arial"/>
+              </a:rPr>
+              <a:t>▸  Die Nutzung dem Kunden gegenüber transparent gemacht wird (Datenschutzerklärung)</a:t>
+            </a:r>
+          </a:p>
+          <a:p>
+            <a:pPr>
+              <a:spcBef>
+                <a:spcPts val="400"/>
+              </a:spcBef>
+              <a:spcAft>
+                <a:spcPts val="200"/>
+              </a:spcAft>
+            </a:pPr>
+            <a:r>
+              <a:rPr sz="1300">
+                <a:solidFill>
+                  <a:srgbClr val="3D5466"/>
+                </a:solidFill>
+                <a:latin typeface="Arial"/>
+              </a:rPr>
+              <a:t>▸  Keine sensiblen Daten (Art. 9 DSGVO) ohne explizite Einwilligung verarbeitet werden</a:t>
+            </a:r>
+          </a:p>
+        </p:txBody>
+      </p:sp>
+      <p:sp>
+        <p:nvSpPr>
+          <p:cNvPr id="9" name="Rectangle 8"/>
           <p:cNvSpPr/>
           <p:nvPr/>
         </p:nvSpPr>
@@ -5520,7 +5639,7 @@
       </p:sp>
       <p:sp>
         <p:nvSpPr>
-          <p:cNvPr id="9" name="TextBox 8"/>
+          <p:cNvPr id="10" name="TextBox 9"/>
           <p:cNvSpPr txBox="1"/>
           <p:nvPr/>
         </p:nvSpPr>
@@ -5808,265 +5927,14 @@
                 </a:solidFill>
                 <a:latin typeface="Source Serif 4"/>
               </a:rPr>
-              <a:t>Transparenz als Vertrauensmoment</a:t>
-            </a:r>
-          </a:p>
-        </p:txBody>
-      </p:sp>
-      <p:sp>
-        <p:nvSpPr>
-          <p:cNvPr id="8" name="TextBox 7"/>
-          <p:cNvSpPr txBox="1"/>
-          <p:nvPr/>
-        </p:nvSpPr>
-        <p:spPr>
-          <a:xfrm>
-            <a:off x="685800" y="1417320"/>
-            <a:ext cx="10817352" cy="5029200"/>
-          </a:xfrm>
-          <a:prstGeom prst="rect">
-            <a:avLst/>
-          </a:prstGeom>
-          <a:noFill/>
-        </p:spPr>
-        <p:txBody>
-          <a:bodyPr wrap="square">
-            <a:spAutoFit/>
-          </a:bodyPr>
-          <a:lstStyle/>
-          <a:p>
-            <a:pPr>
-              <a:spcBef>
-                <a:spcPts val="400"/>
-              </a:spcBef>
-              <a:spcAft>
-                <a:spcPts val="200"/>
-              </a:spcAft>
-            </a:pPr>
-            <a:r>
-              <a:rPr sz="1200">
-                <a:solidFill>
-                  <a:srgbClr val="3D5466"/>
-                </a:solidFill>
-                <a:latin typeface="Arial"/>
-              </a:rPr>
-              <a:t>## 4.5 Praxiscase: Drei Trigger, drei Gespräche</a:t>
-            </a:r>
-          </a:p>
-          <a:p>
-            <a:pPr>
-              <a:spcBef>
-                <a:spcPts val="400"/>
-              </a:spcBef>
-              <a:spcAft>
-                <a:spcPts val="200"/>
-              </a:spcAft>
-            </a:pPr>
-            <a:r>
-              <a:rPr sz="1200">
-                <a:solidFill>
-                  <a:srgbClr val="3D5466"/>
-                </a:solidFill>
-                <a:latin typeface="Arial"/>
-              </a:rPr>
-              <a:t>Ausgangssituation</a:t>
-            </a:r>
-          </a:p>
-          <a:p>
-            <a:pPr>
-              <a:spcBef>
-                <a:spcPts val="400"/>
-              </a:spcBef>
-              <a:spcAft>
-                <a:spcPts val="200"/>
-              </a:spcAft>
-            </a:pPr>
-            <a:r>
-              <a:rPr sz="1200">
-                <a:solidFill>
-                  <a:srgbClr val="3D5466"/>
-                </a:solidFill>
-                <a:latin typeface="Arial"/>
-              </a:rPr>
-              <a:t>Beraterin Anna Schreiber hat 38 Firmenkunden. Sie etabliert eine neue Montagsroutine: 20 Minuten agree-Triggerliste durcharbeiten. Was findet sie in der ersten Woche?</a:t>
-            </a:r>
-          </a:p>
-          <a:p>
-            <a:pPr>
-              <a:spcBef>
-                <a:spcPts val="400"/>
-              </a:spcBef>
-              <a:spcAft>
-                <a:spcPts val="200"/>
-              </a:spcAft>
-            </a:pPr>
-            <a:r>
-              <a:rPr sz="1200">
-                <a:solidFill>
-                  <a:srgbClr val="3D5466"/>
-                </a:solidFill>
-                <a:latin typeface="Arial"/>
-              </a:rPr>
-              <a:t>Trigger 1: Transaktional – Auslandszahlung erstmals aufgetaucht</a:t>
-            </a:r>
-          </a:p>
-          <a:p>
-            <a:pPr>
-              <a:spcBef>
-                <a:spcPts val="400"/>
-              </a:spcBef>
-              <a:spcAft>
-                <a:spcPts val="200"/>
-              </a:spcAft>
-            </a:pPr>
-            <a:r>
-              <a:rPr sz="1200">
-                <a:solidFill>
-                  <a:srgbClr val="3D5466"/>
-                </a:solidFill>
-                <a:latin typeface="Arial"/>
-              </a:rPr>
-              <a:t>Trigger 2: Ratingbasiert – Prolongation in 5 Monaten</a:t>
-            </a:r>
-          </a:p>
-          <a:p>
-            <a:pPr>
-              <a:spcBef>
-                <a:spcPts val="400"/>
-              </a:spcBef>
-              <a:spcAft>
-                <a:spcPts val="200"/>
-              </a:spcAft>
-            </a:pPr>
-            <a:r>
-              <a:rPr sz="1200">
-                <a:solidFill>
-                  <a:srgbClr val="3D5466"/>
-                </a:solidFill>
-                <a:latin typeface="Arial"/>
-              </a:rPr>
-              <a:t>Trigger 3: Lebensereignis – Gesellschafterin 58 Jahre</a:t>
-            </a:r>
-          </a:p>
-          <a:p>
-            <a:pPr>
-              <a:spcBef>
-                <a:spcPts val="400"/>
-              </a:spcBef>
-              <a:spcAft>
-                <a:spcPts val="200"/>
-              </a:spcAft>
-            </a:pPr>
-            <a:r>
-              <a:rPr sz="1200">
-                <a:solidFill>
-                  <a:srgbClr val="3D5466"/>
-                </a:solidFill>
-                <a:latin typeface="Arial"/>
-              </a:rPr>
-              <a:t>Ergebnis in 4 Wochen</a:t>
-            </a:r>
-          </a:p>
-          <a:p>
-            <a:pPr>
-              <a:spcBef>
-                <a:spcPts val="400"/>
-              </a:spcBef>
-              <a:spcAft>
-                <a:spcPts val="200"/>
-              </a:spcAft>
-            </a:pPr>
-            <a:r>
-              <a:rPr sz="1200">
-                <a:solidFill>
-                  <a:srgbClr val="3D5466"/>
-                </a:solidFill>
-                <a:latin typeface="Arial"/>
-              </a:rPr>
-              <a:t>Anna hat mit drei Triggern drei Gespräche initiiert – alle mit konkretem Ergebnis. Kein Gespräch war ein „Kaltanruf". Alle hatten eine evidenzbasierte Gesprächseröffnung.</a:t>
-            </a:r>
-          </a:p>
-          <a:p>
-            <a:pPr>
-              <a:spcBef>
-                <a:spcPts val="400"/>
-              </a:spcBef>
-              <a:spcAft>
-                <a:spcPts val="200"/>
-              </a:spcAft>
-            </a:pPr>
-            <a:r>
-              <a:rPr sz="1200">
-                <a:solidFill>
-                  <a:srgbClr val="3D5466"/>
-                </a:solidFill>
-                <a:latin typeface="Arial"/>
-              </a:rPr>
-              <a:t>Reflexionsfragen</a:t>
-            </a:r>
-          </a:p>
-          <a:p>
-            <a:pPr>
-              <a:spcBef>
-                <a:spcPts val="400"/>
-              </a:spcBef>
-              <a:spcAft>
-                <a:spcPts val="200"/>
-              </a:spcAft>
-            </a:pPr>
-            <a:r>
-              <a:rPr sz="1300">
-                <a:solidFill>
-                  <a:srgbClr val="3D5466"/>
-                </a:solidFill>
-                <a:latin typeface="Arial"/>
-              </a:rPr>
-              <a:t>▸  Welche der drei Trigger-Typen ist in Ihrem Bestand am häufigsten verfügbar?</a:t>
-            </a:r>
-          </a:p>
-          <a:p>
-            <a:pPr>
-              <a:spcBef>
-                <a:spcPts val="400"/>
-              </a:spcBef>
-              <a:spcAft>
-                <a:spcPts val="200"/>
-              </a:spcAft>
-            </a:pPr>
-            <a:r>
-              <a:rPr sz="1300">
-                <a:solidFill>
-                  <a:srgbClr val="3D5466"/>
-                </a:solidFill>
-                <a:latin typeface="Arial"/>
-              </a:rPr>
-              <a:t>▸  Wo in agree würden Sie morgen früh mit der Triggersuche anfangen?</a:t>
-            </a:r>
-          </a:p>
-          <a:p>
-            <a:pPr>
-              <a:spcBef>
-                <a:spcPts val="400"/>
-              </a:spcBef>
-              <a:spcAft>
-                <a:spcPts val="200"/>
-              </a:spcAft>
-            </a:pPr>
-            <a:r>
-              <a:rPr sz="1300">
-                <a:solidFill>
-                  <a:srgbClr val="3D5466"/>
-                </a:solidFill>
-                <a:latin typeface="Arial"/>
-              </a:rPr>
-              <a:t>▸  Wie würden Sie dem Kunden Becker erklären, warum Sie angerufen haben – ohne dass er sich überwacht fühlt?</a:t>
-            </a:r>
-          </a:p>
-        </p:txBody>
-      </p:sp>
-      <p:sp>
-        <p:nvSpPr>
-          <p:cNvPr id="9" name="Rectangle 8"/>
+              <a:t>Verbundpartner-Einwilligung: Pflichtcheck vor jeder Übergabe</a:t>
+            </a:r>
+          </a:p>
+        </p:txBody>
+      </p:sp>
+      <p:sp>
+        <p:nvSpPr>
+          <p:cNvPr id="8" name="Rectangle 7"/>
           <p:cNvSpPr/>
           <p:nvPr/>
         </p:nvSpPr>
@@ -6109,7 +5977,7 @@
       </p:sp>
       <p:sp>
         <p:nvSpPr>
-          <p:cNvPr id="10" name="TextBox 9"/>
+          <p:cNvPr id="9" name="TextBox 8"/>
           <p:cNvSpPr txBox="1"/>
           <p:nvPr/>
         </p:nvSpPr>
@@ -6397,7 +6265,7 @@
                 </a:solidFill>
                 <a:latin typeface="Source Serif 4"/>
               </a:rPr>
-              <a:t>Arbeitsblatt A: Meine Trigger-Bibliothek</a:t>
+              <a:t>Transparenz als Vertrauensmoment</a:t>
             </a:r>
           </a:p>
         </p:txBody>
@@ -6439,7 +6307,7 @@
                 </a:solidFill>
                 <a:latin typeface="Arial"/>
               </a:rPr>
-              <a:t>(Nutzen Sie die Priorisierungstabelle aus Sec 4.6, um Ihren wirkungsvollsten Trigger zu bestimmen)</a:t>
+              <a:t>## 4.5 Praxiscase: Drei Trigger, drei Gespräche</a:t>
             </a:r>
           </a:p>
           <a:p>
@@ -6458,7 +6326,7 @@
                 </a:solidFill>
                 <a:latin typeface="Arial"/>
               </a:rPr>
-              <a:t>Ergänzen Sie für Ihren Bestand die relevantesten Trigger je Typ:</a:t>
+              <a:t>Ausgangssituation</a:t>
             </a:r>
           </a:p>
           <a:p>
@@ -6477,7 +6345,178 @@
                 </a:solidFill>
                 <a:latin typeface="Arial"/>
               </a:rPr>
-              <a:t>Mein wirkungsvollster Trigger für die nächsten 4 Wochen:</a:t>
+              <a:t>Beraterin Anna Schreiber hat 38 Firmenkunden. Sie etabliert eine neue Montagsroutine: 20 Minuten agree-Triggerliste durcharbeiten. Was findet sie in der ersten Woche?</a:t>
+            </a:r>
+          </a:p>
+          <a:p>
+            <a:pPr>
+              <a:spcBef>
+                <a:spcPts val="400"/>
+              </a:spcBef>
+              <a:spcAft>
+                <a:spcPts val="200"/>
+              </a:spcAft>
+            </a:pPr>
+            <a:r>
+              <a:rPr sz="1200">
+                <a:solidFill>
+                  <a:srgbClr val="3D5466"/>
+                </a:solidFill>
+                <a:latin typeface="Arial"/>
+              </a:rPr>
+              <a:t>Trigger 1: Transaktional – Auslandszahlung erstmals aufgetaucht</a:t>
+            </a:r>
+          </a:p>
+          <a:p>
+            <a:pPr>
+              <a:spcBef>
+                <a:spcPts val="400"/>
+              </a:spcBef>
+              <a:spcAft>
+                <a:spcPts val="200"/>
+              </a:spcAft>
+            </a:pPr>
+            <a:r>
+              <a:rPr sz="1200">
+                <a:solidFill>
+                  <a:srgbClr val="3D5466"/>
+                </a:solidFill>
+                <a:latin typeface="Arial"/>
+              </a:rPr>
+              <a:t>Trigger 2: Ratingbasiert – Prolongation in 5 Monaten</a:t>
+            </a:r>
+          </a:p>
+          <a:p>
+            <a:pPr>
+              <a:spcBef>
+                <a:spcPts val="400"/>
+              </a:spcBef>
+              <a:spcAft>
+                <a:spcPts val="200"/>
+              </a:spcAft>
+            </a:pPr>
+            <a:r>
+              <a:rPr sz="1200">
+                <a:solidFill>
+                  <a:srgbClr val="3D5466"/>
+                </a:solidFill>
+                <a:latin typeface="Arial"/>
+              </a:rPr>
+              <a:t>Trigger 3: Lebensereignis – Gesellschafterin 58 Jahre</a:t>
+            </a:r>
+          </a:p>
+          <a:p>
+            <a:pPr>
+              <a:spcBef>
+                <a:spcPts val="400"/>
+              </a:spcBef>
+              <a:spcAft>
+                <a:spcPts val="200"/>
+              </a:spcAft>
+            </a:pPr>
+            <a:r>
+              <a:rPr sz="1200">
+                <a:solidFill>
+                  <a:srgbClr val="3D5466"/>
+                </a:solidFill>
+                <a:latin typeface="Arial"/>
+              </a:rPr>
+              <a:t>Ergebnis in 4 Wochen</a:t>
+            </a:r>
+          </a:p>
+          <a:p>
+            <a:pPr>
+              <a:spcBef>
+                <a:spcPts val="400"/>
+              </a:spcBef>
+              <a:spcAft>
+                <a:spcPts val="200"/>
+              </a:spcAft>
+            </a:pPr>
+            <a:r>
+              <a:rPr sz="1200">
+                <a:solidFill>
+                  <a:srgbClr val="3D5466"/>
+                </a:solidFill>
+                <a:latin typeface="Arial"/>
+              </a:rPr>
+              <a:t>Anna hat mit drei Triggern drei Gespräche initiiert – alle mit konkretem Ergebnis. Kein Gespräch war ein „Kaltanruf". Alle hatten eine evidenzbasierte Gesprächseröffnung.</a:t>
+            </a:r>
+          </a:p>
+          <a:p>
+            <a:pPr>
+              <a:spcBef>
+                <a:spcPts val="400"/>
+              </a:spcBef>
+              <a:spcAft>
+                <a:spcPts val="200"/>
+              </a:spcAft>
+            </a:pPr>
+            <a:r>
+              <a:rPr sz="1200">
+                <a:solidFill>
+                  <a:srgbClr val="3D5466"/>
+                </a:solidFill>
+                <a:latin typeface="Arial"/>
+              </a:rPr>
+              <a:t>Reflexionsfragen</a:t>
+            </a:r>
+          </a:p>
+          <a:p>
+            <a:pPr>
+              <a:spcBef>
+                <a:spcPts val="400"/>
+              </a:spcBef>
+              <a:spcAft>
+                <a:spcPts val="200"/>
+              </a:spcAft>
+            </a:pPr>
+            <a:r>
+              <a:rPr sz="1300">
+                <a:solidFill>
+                  <a:srgbClr val="3D5466"/>
+                </a:solidFill>
+                <a:latin typeface="Arial"/>
+              </a:rPr>
+              <a:t>▸  Welche der drei Trigger-Typen ist in Ihrem Bestand am häufigsten verfügbar?</a:t>
+            </a:r>
+          </a:p>
+          <a:p>
+            <a:pPr>
+              <a:spcBef>
+                <a:spcPts val="400"/>
+              </a:spcBef>
+              <a:spcAft>
+                <a:spcPts val="200"/>
+              </a:spcAft>
+            </a:pPr>
+            <a:r>
+              <a:rPr sz="1300">
+                <a:solidFill>
+                  <a:srgbClr val="3D5466"/>
+                </a:solidFill>
+                <a:latin typeface="Arial"/>
+              </a:rPr>
+              <a:t>▸  Wo in agree würden Sie morgen früh mit der Triggersuche anfangen?</a:t>
+            </a:r>
+          </a:p>
+          <a:p>
+            <a:pPr>
+              <a:spcBef>
+                <a:spcPts val="400"/>
+              </a:spcBef>
+              <a:spcAft>
+                <a:spcPts val="200"/>
+              </a:spcAft>
+            </a:pPr>
+            <a:r>
+              <a:rPr sz="1300">
+                <a:solidFill>
+                  <a:srgbClr val="3D5466"/>
+                </a:solidFill>
+                <a:latin typeface="Arial"/>
+              </a:rPr>
+              <a:t>▸  Wie würden Sie dem Kunden Becker erklären, warum Sie angerufen haben – ohne dass er sich überwacht fühlt?</a:t>
             </a:r>
           </a:p>
         </p:txBody>
@@ -6815,6 +6854,424 @@
                 </a:solidFill>
                 <a:latin typeface="Source Serif 4"/>
               </a:rPr>
+              <a:t>Arbeitsblatt A: Meine Trigger-Bibliothek</a:t>
+            </a:r>
+          </a:p>
+        </p:txBody>
+      </p:sp>
+      <p:sp>
+        <p:nvSpPr>
+          <p:cNvPr id="8" name="TextBox 7"/>
+          <p:cNvSpPr txBox="1"/>
+          <p:nvPr/>
+        </p:nvSpPr>
+        <p:spPr>
+          <a:xfrm>
+            <a:off x="685800" y="1417320"/>
+            <a:ext cx="10817352" cy="5029200"/>
+          </a:xfrm>
+          <a:prstGeom prst="rect">
+            <a:avLst/>
+          </a:prstGeom>
+          <a:noFill/>
+        </p:spPr>
+        <p:txBody>
+          <a:bodyPr wrap="square">
+            <a:spAutoFit/>
+          </a:bodyPr>
+          <a:lstStyle/>
+          <a:p>
+            <a:pPr>
+              <a:spcBef>
+                <a:spcPts val="400"/>
+              </a:spcBef>
+              <a:spcAft>
+                <a:spcPts val="200"/>
+              </a:spcAft>
+            </a:pPr>
+            <a:r>
+              <a:rPr sz="1200">
+                <a:solidFill>
+                  <a:srgbClr val="3D5466"/>
+                </a:solidFill>
+                <a:latin typeface="Arial"/>
+              </a:rPr>
+              <a:t>(Nutzen Sie die Priorisierungstabelle aus Sec 4.6, um Ihren wirkungsvollsten Trigger zu bestimmen)</a:t>
+            </a:r>
+          </a:p>
+          <a:p>
+            <a:pPr>
+              <a:spcBef>
+                <a:spcPts val="400"/>
+              </a:spcBef>
+              <a:spcAft>
+                <a:spcPts val="200"/>
+              </a:spcAft>
+            </a:pPr>
+            <a:r>
+              <a:rPr sz="1200">
+                <a:solidFill>
+                  <a:srgbClr val="3D5466"/>
+                </a:solidFill>
+                <a:latin typeface="Arial"/>
+              </a:rPr>
+              <a:t>Ergänzen Sie für Ihren Bestand die relevantesten Trigger je Typ:</a:t>
+            </a:r>
+          </a:p>
+          <a:p>
+            <a:pPr>
+              <a:spcBef>
+                <a:spcPts val="400"/>
+              </a:spcBef>
+              <a:spcAft>
+                <a:spcPts val="200"/>
+              </a:spcAft>
+            </a:pPr>
+            <a:r>
+              <a:rPr sz="1200">
+                <a:solidFill>
+                  <a:srgbClr val="3D5466"/>
+                </a:solidFill>
+                <a:latin typeface="Arial"/>
+              </a:rPr>
+              <a:t>Mein wirkungsvollster Trigger für die nächsten 4 Wochen:</a:t>
+            </a:r>
+          </a:p>
+        </p:txBody>
+      </p:sp>
+      <p:sp>
+        <p:nvSpPr>
+          <p:cNvPr id="9" name="Rectangle 8"/>
+          <p:cNvSpPr/>
+          <p:nvPr/>
+        </p:nvSpPr>
+        <p:spPr>
+          <a:xfrm>
+            <a:off x="0" y="6510528"/>
+            <a:ext cx="12188952" cy="347472"/>
+          </a:xfrm>
+          <a:prstGeom prst="rect">
+            <a:avLst/>
+          </a:prstGeom>
+          <a:solidFill>
+            <a:srgbClr val="0A1937"/>
+          </a:solidFill>
+          <a:ln>
+            <a:noFill/>
+          </a:ln>
+        </p:spPr>
+        <p:style>
+          <a:lnRef idx="1">
+            <a:schemeClr val="accent1"/>
+          </a:lnRef>
+          <a:fillRef idx="3">
+            <a:schemeClr val="accent1"/>
+          </a:fillRef>
+          <a:effectRef idx="2">
+            <a:schemeClr val="accent1"/>
+          </a:effectRef>
+          <a:fontRef idx="minor">
+            <a:schemeClr val="lt1"/>
+          </a:fontRef>
+        </p:style>
+        <p:txBody>
+          <a:bodyPr rtlCol="0" anchor="ctr"/>
+          <a:lstStyle/>
+          <a:p>
+            <a:pPr algn="ctr"/>
+          </a:p>
+        </p:txBody>
+      </p:sp>
+      <p:sp>
+        <p:nvSpPr>
+          <p:cNvPr id="10" name="TextBox 9"/>
+          <p:cNvSpPr txBox="1"/>
+          <p:nvPr/>
+        </p:nvSpPr>
+        <p:spPr>
+          <a:xfrm>
+            <a:off x="685800" y="6583680"/>
+            <a:ext cx="6490411" cy="256032"/>
+          </a:xfrm>
+          <a:prstGeom prst="rect">
+            <a:avLst/>
+          </a:prstGeom>
+          <a:noFill/>
+        </p:spPr>
+        <p:txBody>
+          <a:bodyPr wrap="none">
+            <a:spAutoFit/>
+          </a:bodyPr>
+          <a:lstStyle/>
+          <a:p>
+            <a:pPr algn="l"/>
+            <a:r>
+              <a:rPr sz="700">
+                <a:solidFill>
+                  <a:srgbClr val="A0B4D2"/>
+                </a:solidFill>
+                <a:latin typeface="JetBrains Mono"/>
+              </a:rPr>
+              <a:t>Benedikt Zoller Coaching  ·  FKB Campus  ·  M18</a:t>
+            </a:r>
+          </a:p>
+        </p:txBody>
+      </p:sp>
+    </p:spTree>
+  </p:cSld>
+  <p:clrMapOvr>
+    <a:masterClrMapping/>
+  </p:clrMapOvr>
+</p:sld>
+</file>
+
+<file path=ppt/slides/slide15.xml><?xml version="1.0" encoding="utf-8"?>
+<p:sld xmlns:a="http://schemas.openxmlformats.org/drawingml/2006/main" xmlns:p="http://schemas.openxmlformats.org/presentationml/2006/main" xmlns:r="http://schemas.openxmlformats.org/officeDocument/2006/relationships">
+  <p:cSld>
+    <p:spTree>
+      <p:nvGrpSpPr>
+        <p:cNvPr id="1" name=""/>
+        <p:cNvGrpSpPr/>
+        <p:nvPr/>
+      </p:nvGrpSpPr>
+      <p:grpSpPr/>
+      <p:sp>
+        <p:nvSpPr>
+          <p:cNvPr id="2" name="Rectangle 1"/>
+          <p:cNvSpPr/>
+          <p:nvPr/>
+        </p:nvSpPr>
+        <p:spPr>
+          <a:xfrm>
+            <a:off x="0" y="0"/>
+            <a:ext cx="12188952" cy="6858000"/>
+          </a:xfrm>
+          <a:prstGeom prst="rect">
+            <a:avLst/>
+          </a:prstGeom>
+          <a:solidFill>
+            <a:srgbClr val="EDEDF3"/>
+          </a:solidFill>
+          <a:ln>
+            <a:noFill/>
+          </a:ln>
+        </p:spPr>
+        <p:style>
+          <a:lnRef idx="1">
+            <a:schemeClr val="accent1"/>
+          </a:lnRef>
+          <a:fillRef idx="3">
+            <a:schemeClr val="accent1"/>
+          </a:fillRef>
+          <a:effectRef idx="2">
+            <a:schemeClr val="accent1"/>
+          </a:effectRef>
+          <a:fontRef idx="minor">
+            <a:schemeClr val="lt1"/>
+          </a:fontRef>
+        </p:style>
+        <p:txBody>
+          <a:bodyPr rtlCol="0" anchor="ctr"/>
+          <a:lstStyle/>
+          <a:p>
+            <a:pPr algn="ctr"/>
+          </a:p>
+        </p:txBody>
+      </p:sp>
+      <p:sp>
+        <p:nvSpPr>
+          <p:cNvPr id="3" name="Rectangle 2"/>
+          <p:cNvSpPr/>
+          <p:nvPr/>
+        </p:nvSpPr>
+        <p:spPr>
+          <a:xfrm>
+            <a:off x="0" y="0"/>
+            <a:ext cx="12188952" cy="50292"/>
+          </a:xfrm>
+          <a:prstGeom prst="rect">
+            <a:avLst/>
+          </a:prstGeom>
+          <a:solidFill>
+            <a:srgbClr val="1F2C56"/>
+          </a:solidFill>
+          <a:ln>
+            <a:noFill/>
+          </a:ln>
+        </p:spPr>
+        <p:style>
+          <a:lnRef idx="1">
+            <a:schemeClr val="accent1"/>
+          </a:lnRef>
+          <a:fillRef idx="3">
+            <a:schemeClr val="accent1"/>
+          </a:fillRef>
+          <a:effectRef idx="2">
+            <a:schemeClr val="accent1"/>
+          </a:effectRef>
+          <a:fontRef idx="minor">
+            <a:schemeClr val="lt1"/>
+          </a:fontRef>
+        </p:style>
+        <p:txBody>
+          <a:bodyPr rtlCol="0" anchor="ctr"/>
+          <a:lstStyle/>
+          <a:p>
+            <a:pPr algn="ctr"/>
+          </a:p>
+        </p:txBody>
+      </p:sp>
+      <p:sp>
+        <p:nvSpPr>
+          <p:cNvPr id="4" name="TextBox 3"/>
+          <p:cNvSpPr txBox="1"/>
+          <p:nvPr/>
+        </p:nvSpPr>
+        <p:spPr>
+          <a:xfrm>
+            <a:off x="685800" y="109728"/>
+            <a:ext cx="10817352" cy="228600"/>
+          </a:xfrm>
+          <a:prstGeom prst="rect">
+            <a:avLst/>
+          </a:prstGeom>
+          <a:noFill/>
+        </p:spPr>
+        <p:txBody>
+          <a:bodyPr wrap="none">
+            <a:spAutoFit/>
+          </a:bodyPr>
+          <a:lstStyle/>
+          <a:p>
+            <a:pPr algn="l"/>
+            <a:r>
+              <a:rPr sz="750">
+                <a:solidFill>
+                  <a:srgbClr val="78808C"/>
+                </a:solidFill>
+                <a:latin typeface="JetBrains Mono"/>
+              </a:rPr>
+              <a:t>M18  ·  INHALT</a:t>
+            </a:r>
+          </a:p>
+        </p:txBody>
+      </p:sp>
+      <p:sp>
+        <p:nvSpPr>
+          <p:cNvPr id="5" name="Rectangle 4"/>
+          <p:cNvSpPr/>
+          <p:nvPr/>
+        </p:nvSpPr>
+        <p:spPr>
+          <a:xfrm>
+            <a:off x="0" y="1234440"/>
+            <a:ext cx="12188952" cy="12700"/>
+          </a:xfrm>
+          <a:prstGeom prst="rect">
+            <a:avLst/>
+          </a:prstGeom>
+          <a:solidFill>
+            <a:srgbClr val="D8DFE4"/>
+          </a:solidFill>
+          <a:ln>
+            <a:noFill/>
+          </a:ln>
+        </p:spPr>
+        <p:style>
+          <a:lnRef idx="1">
+            <a:schemeClr val="accent1"/>
+          </a:lnRef>
+          <a:fillRef idx="3">
+            <a:schemeClr val="accent1"/>
+          </a:fillRef>
+          <a:effectRef idx="2">
+            <a:schemeClr val="accent1"/>
+          </a:effectRef>
+          <a:fontRef idx="minor">
+            <a:schemeClr val="lt1"/>
+          </a:fontRef>
+        </p:style>
+        <p:txBody>
+          <a:bodyPr rtlCol="0" anchor="ctr"/>
+          <a:lstStyle/>
+          <a:p>
+            <a:pPr algn="ctr"/>
+          </a:p>
+        </p:txBody>
+      </p:sp>
+      <p:sp>
+        <p:nvSpPr>
+          <p:cNvPr id="6" name="Rectangle 5"/>
+          <p:cNvSpPr/>
+          <p:nvPr/>
+        </p:nvSpPr>
+        <p:spPr>
+          <a:xfrm>
+            <a:off x="685800" y="502920"/>
+            <a:ext cx="36576" cy="658368"/>
+          </a:xfrm>
+          <a:prstGeom prst="rect">
+            <a:avLst/>
+          </a:prstGeom>
+          <a:solidFill>
+            <a:srgbClr val="D9C089"/>
+          </a:solidFill>
+          <a:ln>
+            <a:noFill/>
+          </a:ln>
+        </p:spPr>
+        <p:style>
+          <a:lnRef idx="1">
+            <a:schemeClr val="accent1"/>
+          </a:lnRef>
+          <a:fillRef idx="3">
+            <a:schemeClr val="accent1"/>
+          </a:fillRef>
+          <a:effectRef idx="2">
+            <a:schemeClr val="accent1"/>
+          </a:effectRef>
+          <a:fontRef idx="minor">
+            <a:schemeClr val="lt1"/>
+          </a:fontRef>
+        </p:style>
+        <p:txBody>
+          <a:bodyPr rtlCol="0" anchor="ctr"/>
+          <a:lstStyle/>
+          <a:p>
+            <a:pPr algn="ctr"/>
+          </a:p>
+        </p:txBody>
+      </p:sp>
+      <p:sp>
+        <p:nvSpPr>
+          <p:cNvPr id="7" name="TextBox 6"/>
+          <p:cNvSpPr txBox="1"/>
+          <p:nvPr/>
+        </p:nvSpPr>
+        <p:spPr>
+          <a:xfrm>
+            <a:off x="813816" y="502920"/>
+            <a:ext cx="10634472" cy="685800"/>
+          </a:xfrm>
+          <a:prstGeom prst="rect">
+            <a:avLst/>
+          </a:prstGeom>
+          <a:noFill/>
+        </p:spPr>
+        <p:txBody>
+          <a:bodyPr wrap="square">
+            <a:spAutoFit/>
+          </a:bodyPr>
+          <a:lstStyle/>
+          <a:p>
+            <a:pPr algn="l"/>
+            <a:r>
+              <a:rPr sz="2400" b="1" i="0">
+                <a:solidFill>
+                  <a:srgbClr val="1F2C56"/>
+                </a:solidFill>
+                <a:latin typeface="Source Serif 4"/>
+              </a:rPr>
               <a:t>Arbeitsblatt B: Datenqualitäts-Audit (Top-10-Kunden)</a:t>
             </a:r>
           </a:p>
@@ -7032,7 +7489,7 @@
                 </a:solidFill>
                 <a:latin typeface="JetBrains Mono"/>
               </a:rPr>
-              <a:t>LERNZIELE  ·  M18</a:t>
+              <a:t>ÜBERBLICK  ·  M18</a:t>
             </a:r>
           </a:p>
         </p:txBody>
@@ -7110,7 +7567,7 @@
                 </a:solidFill>
                 <a:latin typeface="Source Serif 4"/>
               </a:rPr>
-              <a:t>Was Sie heute mitnehmen</a:t>
+              <a:t>Worum geht es heute</a:t>
             </a:r>
           </a:p>
         </p:txBody>
@@ -7123,8 +7580,8 @@
         </p:nvSpPr>
         <p:spPr>
           <a:xfrm>
-            <a:off x="685800" y="1371600"/>
-            <a:ext cx="10817352" cy="5120640"/>
+            <a:off x="685800" y="1737360"/>
+            <a:ext cx="9720072" cy="4206240"/>
           </a:xfrm>
           <a:prstGeom prst="rect">
             <a:avLst/>
@@ -7138,97 +7595,50 @@
           <a:lstStyle/>
           <a:p>
             <a:pPr>
-              <a:spcBef>
-                <a:spcPts val="800"/>
-              </a:spcBef>
               <a:spcAft>
-                <a:spcPts val="200"/>
+                <a:spcPts val="1200"/>
               </a:spcAft>
             </a:pPr>
             <a:r>
-              <a:rPr sz="1400">
+              <a:rPr sz="1700">
                 <a:solidFill>
                   <a:srgbClr val="3D5466"/>
                 </a:solidFill>
                 <a:latin typeface="Arial"/>
               </a:rPr>
-              <a:t>▸  Mindestens fünf Trigger-Ereignisse aus agree-Daten identifizieren und priorisieren</a:t>
+              <a:t>In den Bestandsdaten Ihrer Bank stecken Vertriebsanlässe, die nie jemand hebt.</a:t>
             </a:r>
           </a:p>
           <a:p>
             <a:pPr>
-              <a:spcBef>
-                <a:spcPts val="800"/>
-              </a:spcBef>
               <a:spcAft>
-                <a:spcPts val="200"/>
+                <a:spcPts val="1200"/>
               </a:spcAft>
             </a:pPr>
             <a:r>
-              <a:rPr sz="1400">
+              <a:rPr sz="1700">
                 <a:solidFill>
                   <a:srgbClr val="3D5466"/>
                 </a:solidFill>
                 <a:latin typeface="Arial"/>
               </a:rPr>
-              <a:t>▸  Datenqualität des CRM-Bestands analysieren und Lücken benennen</a:t>
+              <a:t>Sie lernen Trigger-Typen kennen und bauen mit Excel/Power BI eigene Auswertungen für die systematische Anlasserkennung.</a:t>
             </a:r>
           </a:p>
           <a:p>
             <a:pPr>
-              <a:spcBef>
-                <a:spcPts val="800"/>
-              </a:spcBef>
               <a:spcAft>
-                <a:spcPts val="200"/>
+                <a:spcPts val="1200"/>
               </a:spcAft>
             </a:pPr>
             <a:r>
-              <a:rPr sz="1400">
+              <a:rPr sz="1700">
                 <a:solidFill>
                   <a:srgbClr val="3D5466"/>
                 </a:solidFill>
                 <a:latin typeface="Arial"/>
               </a:rPr>
-              <a:t>▸  Reaktiven und trigger-basierten Vertrieb unterscheiden und erläutern</a:t>
-            </a:r>
-          </a:p>
-          <a:p>
-            <a:pPr>
-              <a:spcBef>
-                <a:spcPts val="800"/>
-              </a:spcBef>
-              <a:spcAft>
-                <a:spcPts val="200"/>
-              </a:spcAft>
-            </a:pPr>
-            <a:r>
-              <a:rPr sz="1400">
-                <a:solidFill>
-                  <a:srgbClr val="3D5466"/>
-                </a:solidFill>
-                <a:latin typeface="Arial"/>
-              </a:rPr>
-              <a:t>▸  Drei Trigger-Typen hinsichtlich Vorlaufzeit und Wirksamkeit bewerten</a:t>
-            </a:r>
-          </a:p>
-          <a:p>
-            <a:pPr>
-              <a:spcBef>
-                <a:spcPts val="800"/>
-              </a:spcBef>
-              <a:spcAft>
-                <a:spcPts val="200"/>
-              </a:spcAft>
-            </a:pPr>
-            <a:r>
-              <a:rPr sz="1400">
-                <a:solidFill>
-                  <a:srgbClr val="3D5466"/>
-                </a:solidFill>
-                <a:latin typeface="Arial"/>
-              </a:rPr>
-              <a:t>▸  Grundsätze der DSGVO-konformen Datennutzung im Vertriebskontext anwenden</a:t>
+              <a:t>Danach generieren Sie Vertriebsimpulse aus Daten – statt auf den Zufall zu warten.</a:t>
             </a:r>
           </a:p>
         </p:txBody>
@@ -7445,7 +7855,7 @@
                 </a:solidFill>
                 <a:latin typeface="JetBrains Mono"/>
               </a:rPr>
-              <a:t>M18  ·  INHALT</a:t>
+              <a:t>LERNZIELE  ·  M18</a:t>
             </a:r>
           </a:p>
         </p:txBody>
@@ -7495,57 +7905,14 @@
       </p:sp>
       <p:sp>
         <p:nvSpPr>
-          <p:cNvPr id="6" name="Rectangle 5"/>
-          <p:cNvSpPr/>
+          <p:cNvPr id="6" name="TextBox 5"/>
+          <p:cNvSpPr txBox="1"/>
           <p:nvPr/>
         </p:nvSpPr>
         <p:spPr>
           <a:xfrm>
             <a:off x="685800" y="502920"/>
-            <a:ext cx="36576" cy="658368"/>
-          </a:xfrm>
-          <a:prstGeom prst="rect">
-            <a:avLst/>
-          </a:prstGeom>
-          <a:solidFill>
-            <a:srgbClr val="D9C089"/>
-          </a:solidFill>
-          <a:ln>
-            <a:noFill/>
-          </a:ln>
-        </p:spPr>
-        <p:style>
-          <a:lnRef idx="1">
-            <a:schemeClr val="accent1"/>
-          </a:lnRef>
-          <a:fillRef idx="3">
-            <a:schemeClr val="accent1"/>
-          </a:fillRef>
-          <a:effectRef idx="2">
-            <a:schemeClr val="accent1"/>
-          </a:effectRef>
-          <a:fontRef idx="minor">
-            <a:schemeClr val="lt1"/>
-          </a:fontRef>
-        </p:style>
-        <p:txBody>
-          <a:bodyPr rtlCol="0" anchor="ctr"/>
-          <a:lstStyle/>
-          <a:p>
-            <a:pPr algn="ctr"/>
-          </a:p>
-        </p:txBody>
-      </p:sp>
-      <p:sp>
-        <p:nvSpPr>
-          <p:cNvPr id="7" name="TextBox 6"/>
-          <p:cNvSpPr txBox="1"/>
-          <p:nvPr/>
-        </p:nvSpPr>
-        <p:spPr>
-          <a:xfrm>
-            <a:off x="813816" y="502920"/>
-            <a:ext cx="10634472" cy="685800"/>
+            <a:ext cx="10817352" cy="658368"/>
           </a:xfrm>
           <a:prstGeom prst="rect">
             <a:avLst/>
@@ -7560,27 +7927,27 @@
           <a:p>
             <a:pPr algn="l"/>
             <a:r>
-              <a:rPr sz="2400" b="1" i="0">
+              <a:rPr sz="2600" b="1" i="0">
                 <a:solidFill>
                   <a:srgbClr val="1F2C56"/>
                 </a:solidFill>
                 <a:latin typeface="Source Serif 4"/>
               </a:rPr>
-              <a:t>Vom Zufallskontakt zum Signal-gesteuerten Gespräch</a:t>
-            </a:r>
-          </a:p>
-        </p:txBody>
-      </p:sp>
-      <p:sp>
-        <p:nvSpPr>
-          <p:cNvPr id="8" name="TextBox 7"/>
+              <a:t>Was Sie heute mitnehmen</a:t>
+            </a:r>
+          </a:p>
+        </p:txBody>
+      </p:sp>
+      <p:sp>
+        <p:nvSpPr>
+          <p:cNvPr id="7" name="TextBox 6"/>
           <p:cNvSpPr txBox="1"/>
           <p:nvPr/>
         </p:nvSpPr>
         <p:spPr>
           <a:xfrm>
-            <a:off x="685800" y="1417320"/>
-            <a:ext cx="10817352" cy="5029200"/>
+            <a:off x="685800" y="1371600"/>
+            <a:ext cx="10817352" cy="5120640"/>
           </a:xfrm>
           <a:prstGeom prst="rect">
             <a:avLst/>
@@ -7595,27 +7962,103 @@
           <a:p>
             <a:pPr>
               <a:spcBef>
-                <a:spcPts val="600"/>
+                <a:spcPts val="800"/>
               </a:spcBef>
               <a:spcAft>
                 <a:spcPts val="200"/>
               </a:spcAft>
             </a:pPr>
             <a:r>
-              <a:rPr sz="1200" i="1">
+              <a:rPr sz="1400">
                 <a:solidFill>
                   <a:srgbClr val="3D5466"/>
                 </a:solidFill>
                 <a:latin typeface="Arial"/>
               </a:rPr>
-              <a:t>→  Datengetriebener Vertrieb bedeutet nicht, Kunden zu überwachen. Es bedeutet, die Signale zu lesen, die der Kunde ohnehin sendet – und im richtigen Moment präsent zu sein.</a:t>
-            </a:r>
-          </a:p>
-        </p:txBody>
-      </p:sp>
-      <p:sp>
-        <p:nvSpPr>
-          <p:cNvPr id="9" name="Rectangle 8"/>
+              <a:t>▸  Mindestens fünf Trigger-Ereignisse aus agree-Daten identifizieren und priorisieren</a:t>
+            </a:r>
+          </a:p>
+          <a:p>
+            <a:pPr>
+              <a:spcBef>
+                <a:spcPts val="800"/>
+              </a:spcBef>
+              <a:spcAft>
+                <a:spcPts val="200"/>
+              </a:spcAft>
+            </a:pPr>
+            <a:r>
+              <a:rPr sz="1400">
+                <a:solidFill>
+                  <a:srgbClr val="3D5466"/>
+                </a:solidFill>
+                <a:latin typeface="Arial"/>
+              </a:rPr>
+              <a:t>▸  Datenqualität des CRM-Bestands analysieren und Lücken benennen</a:t>
+            </a:r>
+          </a:p>
+          <a:p>
+            <a:pPr>
+              <a:spcBef>
+                <a:spcPts val="800"/>
+              </a:spcBef>
+              <a:spcAft>
+                <a:spcPts val="200"/>
+              </a:spcAft>
+            </a:pPr>
+            <a:r>
+              <a:rPr sz="1400">
+                <a:solidFill>
+                  <a:srgbClr val="3D5466"/>
+                </a:solidFill>
+                <a:latin typeface="Arial"/>
+              </a:rPr>
+              <a:t>▸  Reaktiven und trigger-basierten Vertrieb unterscheiden und erläutern</a:t>
+            </a:r>
+          </a:p>
+          <a:p>
+            <a:pPr>
+              <a:spcBef>
+                <a:spcPts val="800"/>
+              </a:spcBef>
+              <a:spcAft>
+                <a:spcPts val="200"/>
+              </a:spcAft>
+            </a:pPr>
+            <a:r>
+              <a:rPr sz="1400">
+                <a:solidFill>
+                  <a:srgbClr val="3D5466"/>
+                </a:solidFill>
+                <a:latin typeface="Arial"/>
+              </a:rPr>
+              <a:t>▸  Drei Trigger-Typen hinsichtlich Vorlaufzeit und Wirksamkeit bewerten</a:t>
+            </a:r>
+          </a:p>
+          <a:p>
+            <a:pPr>
+              <a:spcBef>
+                <a:spcPts val="800"/>
+              </a:spcBef>
+              <a:spcAft>
+                <a:spcPts val="200"/>
+              </a:spcAft>
+            </a:pPr>
+            <a:r>
+              <a:rPr sz="1400">
+                <a:solidFill>
+                  <a:srgbClr val="3D5466"/>
+                </a:solidFill>
+                <a:latin typeface="Arial"/>
+              </a:rPr>
+              <a:t>▸  Grundsätze der DSGVO-konformen Datennutzung im Vertriebskontext anwenden</a:t>
+            </a:r>
+          </a:p>
+        </p:txBody>
+      </p:sp>
+      <p:sp>
+        <p:nvSpPr>
+          <p:cNvPr id="8" name="Rectangle 7"/>
           <p:cNvSpPr/>
           <p:nvPr/>
         </p:nvSpPr>
@@ -7658,7 +8101,7 @@
       </p:sp>
       <p:sp>
         <p:nvSpPr>
-          <p:cNvPr id="10" name="TextBox 9"/>
+          <p:cNvPr id="9" name="TextBox 8"/>
           <p:cNvSpPr txBox="1"/>
           <p:nvPr/>
         </p:nvSpPr>
@@ -7946,7 +8389,7 @@
                 </a:solidFill>
                 <a:latin typeface="Source Serif 4"/>
               </a:rPr>
-              <a:t>Die drei Grundprinzipien</a:t>
+              <a:t>Vom Zufallskontakt zum Signal-gesteuerten Gespräch</a:t>
             </a:r>
           </a:p>
         </p:txBody>
@@ -7975,96 +8418,20 @@
           <a:p>
             <a:pPr>
               <a:spcBef>
-                <a:spcPts val="400"/>
+                <a:spcPts val="600"/>
               </a:spcBef>
               <a:spcAft>
                 <a:spcPts val="200"/>
               </a:spcAft>
             </a:pPr>
             <a:r>
-              <a:rPr sz="1300">
+              <a:rPr sz="1200" i="1">
                 <a:solidFill>
                   <a:srgbClr val="3D5466"/>
                 </a:solidFill>
                 <a:latin typeface="Arial"/>
               </a:rPr>
-              <a:t>▸  Timing schlägt Häufigkeit: Ein Anruf zum richtigen Moment ist wertvoller als zehn Anrufe zum falschen Zeitpunkt.</a:t>
-            </a:r>
-          </a:p>
-          <a:p>
-            <a:pPr>
-              <a:spcBef>
-                <a:spcPts val="400"/>
-              </a:spcBef>
-              <a:spcAft>
-                <a:spcPts val="200"/>
-              </a:spcAft>
-            </a:pPr>
-            <a:r>
-              <a:rPr sz="1300">
-                <a:solidFill>
-                  <a:srgbClr val="3D5466"/>
-                </a:solidFill>
-                <a:latin typeface="Arial"/>
-              </a:rPr>
-              <a:t>▸  Relevanz schlägt Breite: Ein auf den aktuellen Bedarf zugeschnittenes Gespräch überzeugt mehr als eine generische Produktpräsentation.</a:t>
-            </a:r>
-          </a:p>
-          <a:p>
-            <a:pPr>
-              <a:spcBef>
-                <a:spcPts val="400"/>
-              </a:spcBef>
-              <a:spcAft>
-                <a:spcPts val="200"/>
-              </a:spcAft>
-            </a:pPr>
-            <a:r>
-              <a:rPr sz="1300">
-                <a:solidFill>
-                  <a:srgbClr val="3D5466"/>
-                </a:solidFill>
-                <a:latin typeface="Arial"/>
-              </a:rPr>
-              <a:t>▸  Daten sind kein Ersatz für Beziehung: Trigger öffnen die Tür – das Gespräch selbst bleibt menschlich.</a:t>
-            </a:r>
-          </a:p>
-          <a:p>
-            <a:pPr>
-              <a:spcBef>
-                <a:spcPts val="400"/>
-              </a:spcBef>
-              <a:spcAft>
-                <a:spcPts val="200"/>
-              </a:spcAft>
-            </a:pPr>
-            <a:r>
-              <a:rPr sz="1200">
-                <a:solidFill>
-                  <a:srgbClr val="3D5466"/>
-                </a:solidFill>
-                <a:latin typeface="Arial"/>
-              </a:rPr>
-              <a:t>## 4.2 Trigger-Ereignisse: Drei Typen mit unterschiedlicher Logik</a:t>
-            </a:r>
-          </a:p>
-          <a:p>
-            <a:pPr>
-              <a:spcBef>
-                <a:spcPts val="400"/>
-              </a:spcBef>
-              <a:spcAft>
-                <a:spcPts val="200"/>
-              </a:spcAft>
-            </a:pPr>
-            <a:r>
-              <a:rPr sz="1200">
-                <a:solidFill>
-                  <a:srgbClr val="3D5466"/>
-                </a:solidFill>
-                <a:latin typeface="Arial"/>
-              </a:rPr>
-              <a:t>Ein Trigger ist ein Datenpunkt oder ein Ereignis, das mit hoher Wahrscheinlichkeit auf einen aktuellen oder bevorstehenden Beratungsbedarf hinweist. Es gibt drei Typen:</a:t>
+              <a:t>→  Datengetriebener Vertrieb bedeutet nicht, Kunden zu überwachen. Es bedeutet, die Signale zu lesen, die der Kunde ohnehin sendet – und im richtigen Moment präsent zu sein.</a:t>
             </a:r>
           </a:p>
         </p:txBody>
@@ -8402,14 +8769,132 @@
                 </a:solidFill>
                 <a:latin typeface="Source Serif 4"/>
               </a:rPr>
-              <a:t>Typ 1: Transaktionale Trigger (aus agree-Kontodaten)</a:t>
-            </a:r>
-          </a:p>
-        </p:txBody>
-      </p:sp>
-      <p:sp>
-        <p:nvSpPr>
-          <p:cNvPr id="8" name="Rectangle 7"/>
+              <a:t>Die drei Grundprinzipien</a:t>
+            </a:r>
+          </a:p>
+        </p:txBody>
+      </p:sp>
+      <p:sp>
+        <p:nvSpPr>
+          <p:cNvPr id="8" name="TextBox 7"/>
+          <p:cNvSpPr txBox="1"/>
+          <p:nvPr/>
+        </p:nvSpPr>
+        <p:spPr>
+          <a:xfrm>
+            <a:off x="685800" y="1417320"/>
+            <a:ext cx="10817352" cy="5029200"/>
+          </a:xfrm>
+          <a:prstGeom prst="rect">
+            <a:avLst/>
+          </a:prstGeom>
+          <a:noFill/>
+        </p:spPr>
+        <p:txBody>
+          <a:bodyPr wrap="square">
+            <a:spAutoFit/>
+          </a:bodyPr>
+          <a:lstStyle/>
+          <a:p>
+            <a:pPr>
+              <a:spcBef>
+                <a:spcPts val="400"/>
+              </a:spcBef>
+              <a:spcAft>
+                <a:spcPts val="200"/>
+              </a:spcAft>
+            </a:pPr>
+            <a:r>
+              <a:rPr sz="1300">
+                <a:solidFill>
+                  <a:srgbClr val="3D5466"/>
+                </a:solidFill>
+                <a:latin typeface="Arial"/>
+              </a:rPr>
+              <a:t>▸  Timing schlägt Häufigkeit: Ein Anruf zum richtigen Moment ist wertvoller als zehn Anrufe zum falschen Zeitpunkt.</a:t>
+            </a:r>
+          </a:p>
+          <a:p>
+            <a:pPr>
+              <a:spcBef>
+                <a:spcPts val="400"/>
+              </a:spcBef>
+              <a:spcAft>
+                <a:spcPts val="200"/>
+              </a:spcAft>
+            </a:pPr>
+            <a:r>
+              <a:rPr sz="1300">
+                <a:solidFill>
+                  <a:srgbClr val="3D5466"/>
+                </a:solidFill>
+                <a:latin typeface="Arial"/>
+              </a:rPr>
+              <a:t>▸  Relevanz schlägt Breite: Ein auf den aktuellen Bedarf zugeschnittenes Gespräch überzeugt mehr als eine generische Produktpräsentation.</a:t>
+            </a:r>
+          </a:p>
+          <a:p>
+            <a:pPr>
+              <a:spcBef>
+                <a:spcPts val="400"/>
+              </a:spcBef>
+              <a:spcAft>
+                <a:spcPts val="200"/>
+              </a:spcAft>
+            </a:pPr>
+            <a:r>
+              <a:rPr sz="1300">
+                <a:solidFill>
+                  <a:srgbClr val="3D5466"/>
+                </a:solidFill>
+                <a:latin typeface="Arial"/>
+              </a:rPr>
+              <a:t>▸  Daten sind kein Ersatz für Beziehung: Trigger öffnen die Tür – das Gespräch selbst bleibt menschlich.</a:t>
+            </a:r>
+          </a:p>
+          <a:p>
+            <a:pPr>
+              <a:spcBef>
+                <a:spcPts val="400"/>
+              </a:spcBef>
+              <a:spcAft>
+                <a:spcPts val="200"/>
+              </a:spcAft>
+            </a:pPr>
+            <a:r>
+              <a:rPr sz="1200">
+                <a:solidFill>
+                  <a:srgbClr val="3D5466"/>
+                </a:solidFill>
+                <a:latin typeface="Arial"/>
+              </a:rPr>
+              <a:t>## 4.2 Trigger-Ereignisse: Drei Typen mit unterschiedlicher Logik</a:t>
+            </a:r>
+          </a:p>
+          <a:p>
+            <a:pPr>
+              <a:spcBef>
+                <a:spcPts val="400"/>
+              </a:spcBef>
+              <a:spcAft>
+                <a:spcPts val="200"/>
+              </a:spcAft>
+            </a:pPr>
+            <a:r>
+              <a:rPr sz="1200">
+                <a:solidFill>
+                  <a:srgbClr val="3D5466"/>
+                </a:solidFill>
+                <a:latin typeface="Arial"/>
+              </a:rPr>
+              <a:t>Ein Trigger ist ein Datenpunkt oder ein Ereignis, das mit hoher Wahrscheinlichkeit auf einen aktuellen oder bevorstehenden Beratungsbedarf hinweist. Es gibt drei Typen:</a:t>
+            </a:r>
+          </a:p>
+        </p:txBody>
+      </p:sp>
+      <p:sp>
+        <p:nvSpPr>
+          <p:cNvPr id="9" name="Rectangle 8"/>
           <p:cNvSpPr/>
           <p:nvPr/>
         </p:nvSpPr>
@@ -8452,7 +8937,7 @@
       </p:sp>
       <p:sp>
         <p:nvSpPr>
-          <p:cNvPr id="9" name="TextBox 8"/>
+          <p:cNvPr id="10" name="TextBox 9"/>
           <p:cNvSpPr txBox="1"/>
           <p:nvPr/>
         </p:nvSpPr>
@@ -8740,7 +9225,7 @@
                 </a:solidFill>
                 <a:latin typeface="Source Serif 4"/>
               </a:rPr>
-              <a:t>Typ 2: Ratingbasierte Trigger (aus Kreditakte / Frühwarnsystem)</a:t>
+              <a:t>Typ 1: Transaktionale Trigger (aus agree-Kontodaten)</a:t>
             </a:r>
           </a:p>
         </p:txBody>
@@ -9078,94 +9563,14 @@
                 </a:solidFill>
                 <a:latin typeface="Source Serif 4"/>
               </a:rPr>
-              <a:t>Typ 3: Lebensereignisbasierte Trigger (aus CRM-Notizen, externen Quellen)</a:t>
-            </a:r>
-          </a:p>
-        </p:txBody>
-      </p:sp>
-      <p:sp>
-        <p:nvSpPr>
-          <p:cNvPr id="8" name="TextBox 7"/>
-          <p:cNvSpPr txBox="1"/>
-          <p:nvPr/>
-        </p:nvSpPr>
-        <p:spPr>
-          <a:xfrm>
-            <a:off x="685800" y="1417320"/>
-            <a:ext cx="10817352" cy="5029200"/>
-          </a:xfrm>
-          <a:prstGeom prst="rect">
-            <a:avLst/>
-          </a:prstGeom>
-          <a:noFill/>
-        </p:spPr>
-        <p:txBody>
-          <a:bodyPr wrap="square">
-            <a:spAutoFit/>
-          </a:bodyPr>
-          <a:lstStyle/>
-          <a:p>
-            <a:pPr>
-              <a:spcBef>
-                <a:spcPts val="400"/>
-              </a:spcBef>
-              <a:spcAft>
-                <a:spcPts val="200"/>
-              </a:spcAft>
-            </a:pPr>
-            <a:r>
-              <a:rPr sz="1200">
-                <a:solidFill>
-                  <a:srgbClr val="3D5466"/>
-                </a:solidFill>
-                <a:latin typeface="Arial"/>
-              </a:rPr>
-              <a:t>## 4.3 Datenqualität: Die Voraussetzung für alles</a:t>
-            </a:r>
-          </a:p>
-          <a:p>
-            <a:pPr>
-              <a:spcBef>
-                <a:spcPts val="400"/>
-              </a:spcBef>
-              <a:spcAft>
-                <a:spcPts val="200"/>
-              </a:spcAft>
-            </a:pPr>
-            <a:r>
-              <a:rPr sz="1200">
-                <a:solidFill>
-                  <a:srgbClr val="3D5466"/>
-                </a:solidFill>
-                <a:latin typeface="Arial"/>
-              </a:rPr>
-              <a:t>Datengetriebener Vertrieb funktioniert nur, wenn die Datenbasis stimmt. Die häufigsten Qualitätsmängel:</a:t>
-            </a:r>
-          </a:p>
-          <a:p>
-            <a:pPr>
-              <a:spcBef>
-                <a:spcPts val="400"/>
-              </a:spcBef>
-              <a:spcAft>
-                <a:spcPts val="200"/>
-              </a:spcAft>
-            </a:pPr>
-            <a:r>
-              <a:rPr sz="1200">
-                <a:solidFill>
-                  <a:srgbClr val="3D5466"/>
-                </a:solidFill>
-                <a:latin typeface="Arial"/>
-              </a:rPr>
-              <a:t>Faustregel: Daten, die älter als 18 Monate sind, ohne Update, sind für trigger-basierten Vertrieb unzuverlässig.</a:t>
-            </a:r>
-          </a:p>
-        </p:txBody>
-      </p:sp>
-      <p:sp>
-        <p:nvSpPr>
-          <p:cNvPr id="9" name="Rectangle 8"/>
+              <a:t>Typ 2: Ratingbasierte Trigger (aus Kreditakte / Frühwarnsystem)</a:t>
+            </a:r>
+          </a:p>
+        </p:txBody>
+      </p:sp>
+      <p:sp>
+        <p:nvSpPr>
+          <p:cNvPr id="8" name="Rectangle 7"/>
           <p:cNvSpPr/>
           <p:nvPr/>
         </p:nvSpPr>
@@ -9208,7 +9613,7 @@
       </p:sp>
       <p:sp>
         <p:nvSpPr>
-          <p:cNvPr id="10" name="TextBox 9"/>
+          <p:cNvPr id="9" name="TextBox 8"/>
           <p:cNvSpPr txBox="1"/>
           <p:nvPr/>
         </p:nvSpPr>
@@ -9274,7 +9679,7 @@
             <a:avLst/>
           </a:prstGeom>
           <a:solidFill>
-            <a:srgbClr val="FFFFFF"/>
+            <a:srgbClr val="EDEDF3"/>
           </a:solidFill>
           <a:ln>
             <a:noFill/>
@@ -9375,43 +9780,51 @@
                 </a:solidFill>
                 <a:latin typeface="JetBrains Mono"/>
               </a:rPr>
-              <a:t>M18  ·  SCHAUBILD</a:t>
-            </a:r>
-          </a:p>
-        </p:txBody>
-      </p:sp>
-      <p:sp>
-        <p:nvSpPr>
-          <p:cNvPr id="5" name="TextBox 4"/>
-          <p:cNvSpPr txBox="1"/>
-          <p:nvPr/>
-        </p:nvSpPr>
-        <p:spPr>
-          <a:xfrm>
-            <a:off x="685800" y="502920"/>
-            <a:ext cx="10817352" cy="594360"/>
-          </a:xfrm>
-          <a:prstGeom prst="rect">
-            <a:avLst/>
-          </a:prstGeom>
-          <a:noFill/>
-        </p:spPr>
-        <p:txBody>
-          <a:bodyPr wrap="square">
-            <a:spAutoFit/>
-          </a:bodyPr>
-          <a:lstStyle/>
-          <a:p>
-            <a:pPr algn="l"/>
-            <a:r>
-              <a:rPr sz="2000" b="1" i="0">
-                <a:solidFill>
-                  <a:srgbClr val="1F2C56"/>
-                </a:solidFill>
-                <a:latin typeface="Source Serif 4"/>
-              </a:rPr>
-              <a:t>Drei Trigger-Typen im datengetriebenen Vertrieb</a:t>
-            </a:r>
+              <a:t>M18  ·  INHALT</a:t>
+            </a:r>
+          </a:p>
+        </p:txBody>
+      </p:sp>
+      <p:sp>
+        <p:nvSpPr>
+          <p:cNvPr id="5" name="Rectangle 4"/>
+          <p:cNvSpPr/>
+          <p:nvPr/>
+        </p:nvSpPr>
+        <p:spPr>
+          <a:xfrm>
+            <a:off x="0" y="1234440"/>
+            <a:ext cx="12188952" cy="12700"/>
+          </a:xfrm>
+          <a:prstGeom prst="rect">
+            <a:avLst/>
+          </a:prstGeom>
+          <a:solidFill>
+            <a:srgbClr val="D8DFE4"/>
+          </a:solidFill>
+          <a:ln>
+            <a:noFill/>
+          </a:ln>
+        </p:spPr>
+        <p:style>
+          <a:lnRef idx="1">
+            <a:schemeClr val="accent1"/>
+          </a:lnRef>
+          <a:fillRef idx="3">
+            <a:schemeClr val="accent1"/>
+          </a:fillRef>
+          <a:effectRef idx="2">
+            <a:schemeClr val="accent1"/>
+          </a:effectRef>
+          <a:fontRef idx="minor">
+            <a:schemeClr val="lt1"/>
+          </a:fontRef>
+        </p:style>
+        <p:txBody>
+          <a:bodyPr rtlCol="0" anchor="ctr"/>
+          <a:lstStyle/>
+          <a:p>
+            <a:pPr algn="ctr"/>
           </a:p>
         </p:txBody>
       </p:sp>
@@ -9423,8 +9836,8 @@
         </p:nvSpPr>
         <p:spPr>
           <a:xfrm>
-            <a:off x="685800" y="1143000"/>
-            <a:ext cx="10817352" cy="25400"/>
+            <a:off x="685800" y="502920"/>
+            <a:ext cx="36576" cy="658368"/>
           </a:xfrm>
           <a:prstGeom prst="rect">
             <a:avLst/>
@@ -9458,33 +9871,124 @@
           </a:p>
         </p:txBody>
       </p:sp>
-      <p:pic>
-        <p:nvPicPr>
-          <p:cNvPr id="7" name="Picture 6" descr="image.png"/>
-          <p:cNvPicPr>
-            <a:picLocks noChangeAspect="1"/>
-          </p:cNvPicPr>
-          <p:nvPr/>
-        </p:nvPicPr>
-        <p:blipFill>
-          <a:blip r:embed="rId2"/>
-          <a:stretch>
-            <a:fillRect/>
-          </a:stretch>
-        </p:blipFill>
-        <p:spPr>
-          <a:xfrm>
-            <a:off x="2303489" y="1325880"/>
-            <a:ext cx="7581973" cy="4937760"/>
-          </a:xfrm>
-          <a:prstGeom prst="rect">
-            <a:avLst/>
-          </a:prstGeom>
-        </p:spPr>
-      </p:pic>
-      <p:sp>
-        <p:nvSpPr>
-          <p:cNvPr id="8" name="Rectangle 7"/>
+      <p:sp>
+        <p:nvSpPr>
+          <p:cNvPr id="7" name="TextBox 6"/>
+          <p:cNvSpPr txBox="1"/>
+          <p:nvPr/>
+        </p:nvSpPr>
+        <p:spPr>
+          <a:xfrm>
+            <a:off x="813816" y="502920"/>
+            <a:ext cx="10634472" cy="685800"/>
+          </a:xfrm>
+          <a:prstGeom prst="rect">
+            <a:avLst/>
+          </a:prstGeom>
+          <a:noFill/>
+        </p:spPr>
+        <p:txBody>
+          <a:bodyPr wrap="square">
+            <a:spAutoFit/>
+          </a:bodyPr>
+          <a:lstStyle/>
+          <a:p>
+            <a:pPr algn="l"/>
+            <a:r>
+              <a:rPr sz="2400" b="1" i="0">
+                <a:solidFill>
+                  <a:srgbClr val="1F2C56"/>
+                </a:solidFill>
+                <a:latin typeface="Source Serif 4"/>
+              </a:rPr>
+              <a:t>Typ 3: Lebensereignisbasierte Trigger (aus CRM-Notizen, externen Quellen)</a:t>
+            </a:r>
+          </a:p>
+        </p:txBody>
+      </p:sp>
+      <p:sp>
+        <p:nvSpPr>
+          <p:cNvPr id="8" name="TextBox 7"/>
+          <p:cNvSpPr txBox="1"/>
+          <p:nvPr/>
+        </p:nvSpPr>
+        <p:spPr>
+          <a:xfrm>
+            <a:off x="685800" y="1417320"/>
+            <a:ext cx="10817352" cy="5029200"/>
+          </a:xfrm>
+          <a:prstGeom prst="rect">
+            <a:avLst/>
+          </a:prstGeom>
+          <a:noFill/>
+        </p:spPr>
+        <p:txBody>
+          <a:bodyPr wrap="square">
+            <a:spAutoFit/>
+          </a:bodyPr>
+          <a:lstStyle/>
+          <a:p>
+            <a:pPr>
+              <a:spcBef>
+                <a:spcPts val="400"/>
+              </a:spcBef>
+              <a:spcAft>
+                <a:spcPts val="200"/>
+              </a:spcAft>
+            </a:pPr>
+            <a:r>
+              <a:rPr sz="1200">
+                <a:solidFill>
+                  <a:srgbClr val="3D5466"/>
+                </a:solidFill>
+                <a:latin typeface="Arial"/>
+              </a:rPr>
+              <a:t>## 4.3 Datenqualität: Die Voraussetzung für alles</a:t>
+            </a:r>
+          </a:p>
+          <a:p>
+            <a:pPr>
+              <a:spcBef>
+                <a:spcPts val="400"/>
+              </a:spcBef>
+              <a:spcAft>
+                <a:spcPts val="200"/>
+              </a:spcAft>
+            </a:pPr>
+            <a:r>
+              <a:rPr sz="1200">
+                <a:solidFill>
+                  <a:srgbClr val="3D5466"/>
+                </a:solidFill>
+                <a:latin typeface="Arial"/>
+              </a:rPr>
+              <a:t>Datengetriebener Vertrieb funktioniert nur, wenn die Datenbasis stimmt. Die häufigsten Qualitätsmängel:</a:t>
+            </a:r>
+          </a:p>
+          <a:p>
+            <a:pPr>
+              <a:spcBef>
+                <a:spcPts val="400"/>
+              </a:spcBef>
+              <a:spcAft>
+                <a:spcPts val="200"/>
+              </a:spcAft>
+            </a:pPr>
+            <a:r>
+              <a:rPr sz="1200">
+                <a:solidFill>
+                  <a:srgbClr val="3D5466"/>
+                </a:solidFill>
+                <a:latin typeface="Arial"/>
+              </a:rPr>
+              <a:t>Faustregel: Daten, die älter als 18 Monate sind, ohne Update, sind für trigger-basierten Vertrieb unzuverlässig.</a:t>
+            </a:r>
+          </a:p>
+        </p:txBody>
+      </p:sp>
+      <p:sp>
+        <p:nvSpPr>
+          <p:cNvPr id="9" name="Rectangle 8"/>
           <p:cNvSpPr/>
           <p:nvPr/>
         </p:nvSpPr>
@@ -9527,7 +10031,7 @@
       </p:sp>
       <p:sp>
         <p:nvSpPr>
-          <p:cNvPr id="9" name="TextBox 8"/>
+          <p:cNvPr id="10" name="TextBox 9"/>
           <p:cNvSpPr txBox="1"/>
           <p:nvPr/>
         </p:nvSpPr>
@@ -9556,41 +10060,6 @@
                 <a:latin typeface="JetBrains Mono"/>
               </a:rPr>
               <a:t>Benedikt Zoller Coaching  ·  FKB Campus  ·  M18</a:t>
-            </a:r>
-          </a:p>
-        </p:txBody>
-      </p:sp>
-      <p:sp>
-        <p:nvSpPr>
-          <p:cNvPr id="10" name="TextBox 9"/>
-          <p:cNvSpPr txBox="1"/>
-          <p:nvPr/>
-        </p:nvSpPr>
-        <p:spPr>
-          <a:xfrm>
-            <a:off x="7176211" y="6583680"/>
-            <a:ext cx="4326940" cy="256032"/>
-          </a:xfrm>
-          <a:prstGeom prst="rect">
-            <a:avLst/>
-          </a:prstGeom>
-          <a:noFill/>
-        </p:spPr>
-        <p:txBody>
-          <a:bodyPr wrap="none">
-            <a:spAutoFit/>
-          </a:bodyPr>
-          <a:lstStyle/>
-          <a:p>
-            <a:pPr algn="r"/>
-            <a:r>
-              <a:rPr sz="700">
-                <a:solidFill>
-                  <a:srgbClr val="A0B4D2"/>
-                </a:solidFill>
-                <a:latin typeface="JetBrains Mono"/>
-              </a:rPr>
-              <a:t>Schaubild</a:t>
             </a:r>
           </a:p>
         </p:txBody>
@@ -9628,7 +10097,7 @@
             <a:avLst/>
           </a:prstGeom>
           <a:solidFill>
-            <a:srgbClr val="EDEDF3"/>
+            <a:srgbClr val="FFFFFF"/>
           </a:solidFill>
           <a:ln>
             <a:noFill/>
@@ -9729,51 +10198,43 @@
                 </a:solidFill>
                 <a:latin typeface="JetBrains Mono"/>
               </a:rPr>
-              <a:t>M18  ·  INHALT</a:t>
-            </a:r>
-          </a:p>
-        </p:txBody>
-      </p:sp>
-      <p:sp>
-        <p:nvSpPr>
-          <p:cNvPr id="5" name="Rectangle 4"/>
-          <p:cNvSpPr/>
-          <p:nvPr/>
-        </p:nvSpPr>
-        <p:spPr>
-          <a:xfrm>
-            <a:off x="0" y="1234440"/>
-            <a:ext cx="12188952" cy="12700"/>
-          </a:xfrm>
-          <a:prstGeom prst="rect">
-            <a:avLst/>
-          </a:prstGeom>
-          <a:solidFill>
-            <a:srgbClr val="D8DFE4"/>
-          </a:solidFill>
-          <a:ln>
-            <a:noFill/>
-          </a:ln>
-        </p:spPr>
-        <p:style>
-          <a:lnRef idx="1">
-            <a:schemeClr val="accent1"/>
-          </a:lnRef>
-          <a:fillRef idx="3">
-            <a:schemeClr val="accent1"/>
-          </a:fillRef>
-          <a:effectRef idx="2">
-            <a:schemeClr val="accent1"/>
-          </a:effectRef>
-          <a:fontRef idx="minor">
-            <a:schemeClr val="lt1"/>
-          </a:fontRef>
-        </p:style>
-        <p:txBody>
-          <a:bodyPr rtlCol="0" anchor="ctr"/>
-          <a:lstStyle/>
-          <a:p>
-            <a:pPr algn="ctr"/>
+              <a:t>M18  ·  SCHAUBILD</a:t>
+            </a:r>
+          </a:p>
+        </p:txBody>
+      </p:sp>
+      <p:sp>
+        <p:nvSpPr>
+          <p:cNvPr id="5" name="TextBox 4"/>
+          <p:cNvSpPr txBox="1"/>
+          <p:nvPr/>
+        </p:nvSpPr>
+        <p:spPr>
+          <a:xfrm>
+            <a:off x="685800" y="502920"/>
+            <a:ext cx="10817352" cy="594360"/>
+          </a:xfrm>
+          <a:prstGeom prst="rect">
+            <a:avLst/>
+          </a:prstGeom>
+          <a:noFill/>
+        </p:spPr>
+        <p:txBody>
+          <a:bodyPr wrap="square">
+            <a:spAutoFit/>
+          </a:bodyPr>
+          <a:lstStyle/>
+          <a:p>
+            <a:pPr algn="l"/>
+            <a:r>
+              <a:rPr sz="2000" b="1" i="0">
+                <a:solidFill>
+                  <a:srgbClr val="1F2C56"/>
+                </a:solidFill>
+                <a:latin typeface="Source Serif 4"/>
+              </a:rPr>
+              <a:t>Drei Trigger-Typen im datengetriebenen Vertrieb</a:t>
+            </a:r>
           </a:p>
         </p:txBody>
       </p:sp>
@@ -9785,8 +10246,8 @@
         </p:nvSpPr>
         <p:spPr>
           <a:xfrm>
-            <a:off x="685800" y="502920"/>
-            <a:ext cx="36576" cy="658368"/>
+            <a:off x="685800" y="1143000"/>
+            <a:ext cx="10817352" cy="25400"/>
           </a:xfrm>
           <a:prstGeom prst="rect">
             <a:avLst/>
@@ -9820,162 +10281,33 @@
           </a:p>
         </p:txBody>
       </p:sp>
-      <p:sp>
-        <p:nvSpPr>
-          <p:cNvPr id="7" name="TextBox 6"/>
-          <p:cNvSpPr txBox="1"/>
-          <p:nvPr/>
-        </p:nvSpPr>
-        <p:spPr>
-          <a:xfrm>
-            <a:off x="813816" y="502920"/>
-            <a:ext cx="10634472" cy="685800"/>
-          </a:xfrm>
-          <a:prstGeom prst="rect">
-            <a:avLst/>
-          </a:prstGeom>
-          <a:noFill/>
-        </p:spPr>
-        <p:txBody>
-          <a:bodyPr wrap="square">
-            <a:spAutoFit/>
-          </a:bodyPr>
-          <a:lstStyle/>
-          <a:p>
-            <a:pPr algn="l"/>
-            <a:r>
-              <a:rPr sz="2400" b="1" i="0">
-                <a:solidFill>
-                  <a:srgbClr val="1F2C56"/>
-                </a:solidFill>
-                <a:latin typeface="Source Serif 4"/>
-              </a:rPr>
-              <a:t>Datenqualitäts-Audit im eigenen Bestand</a:t>
-            </a:r>
-          </a:p>
-        </p:txBody>
-      </p:sp>
-      <p:sp>
-        <p:nvSpPr>
-          <p:cNvPr id="8" name="TextBox 7"/>
-          <p:cNvSpPr txBox="1"/>
-          <p:nvPr/>
-        </p:nvSpPr>
-        <p:spPr>
-          <a:xfrm>
-            <a:off x="685800" y="1417320"/>
-            <a:ext cx="10817352" cy="5029200"/>
-          </a:xfrm>
-          <a:prstGeom prst="rect">
-            <a:avLst/>
-          </a:prstGeom>
-          <a:noFill/>
-        </p:spPr>
-        <p:txBody>
-          <a:bodyPr wrap="square">
-            <a:spAutoFit/>
-          </a:bodyPr>
-          <a:lstStyle/>
-          <a:p>
-            <a:pPr>
-              <a:spcBef>
-                <a:spcPts val="400"/>
-              </a:spcBef>
-              <a:spcAft>
-                <a:spcPts val="200"/>
-              </a:spcAft>
-            </a:pPr>
-            <a:r>
-              <a:rPr sz="1200">
-                <a:solidFill>
-                  <a:srgbClr val="3D5466"/>
-                </a:solidFill>
-                <a:latin typeface="Arial"/>
-              </a:rPr>
-              <a:t>Führen Sie einmalig pro Jahr einen strukturierten Datencheck durch:</a:t>
-            </a:r>
-          </a:p>
-          <a:p>
-            <a:pPr>
-              <a:spcBef>
-                <a:spcPts val="400"/>
-              </a:spcBef>
-              <a:spcAft>
-                <a:spcPts val="200"/>
-              </a:spcAft>
-            </a:pPr>
-            <a:r>
-              <a:rPr sz="1300">
-                <a:solidFill>
-                  <a:srgbClr val="3D5466"/>
-                </a:solidFill>
-                <a:latin typeface="Arial"/>
-              </a:rPr>
-              <a:t>▸  In agree eine Bestandsliste Ihrer Firmenkunden aufrufen (Weg je nach Bankinstallation: Bestandsbetreuer-Cockpit oder Listenabfrage über agree-Auswertungskomponente – lassen Sie sich das einmalig von Ihrem IT-Koordinator zeigen, da ein standardisierter „Lückenanalyse"-Menüpunkt nicht in jeder Installation verfügbar ist). Alternativ: Export als Excel aus dem Bestandscockpit und manuelle Filterung.</a:t>
-            </a:r>
-          </a:p>
-          <a:p>
-            <a:pPr>
-              <a:spcBef>
-                <a:spcPts val="400"/>
-              </a:spcBef>
-              <a:spcAft>
-                <a:spcPts val="200"/>
-              </a:spcAft>
-            </a:pPr>
-            <a:r>
-              <a:rPr sz="1300">
-                <a:solidFill>
-                  <a:srgbClr val="3D5466"/>
-                </a:solidFill>
-                <a:latin typeface="Arial"/>
-              </a:rPr>
-              <a:t>▸  Für alle Kunden mit &gt; 500k Kreditvolumen prüfen: Geburtsdatum, Branche, Gesellschafterstruktur, Jahresabschluss-Datum (Arbeitsblatt B als Checkliste nutzen)</a:t>
-            </a:r>
-          </a:p>
-          <a:p>
-            <a:pPr>
-              <a:spcBef>
-                <a:spcPts val="400"/>
-              </a:spcBef>
-              <a:spcAft>
-                <a:spcPts val="200"/>
-              </a:spcAft>
-            </a:pPr>
-            <a:r>
-              <a:rPr sz="1300">
-                <a:solidFill>
-                  <a:srgbClr val="3D5466"/>
-                </a:solidFill>
-                <a:latin typeface="Arial"/>
-              </a:rPr>
-              <a:t>▸  Fehler in den nächsten drei Kundengesprächen schließen (gezielt im Gespräch erfragen)</a:t>
-            </a:r>
-          </a:p>
-          <a:p>
-            <a:pPr>
-              <a:spcBef>
-                <a:spcPts val="400"/>
-              </a:spcBef>
-              <a:spcAft>
-                <a:spcPts val="200"/>
-              </a:spcAft>
-            </a:pPr>
-            <a:r>
-              <a:rPr sz="1200">
-                <a:solidFill>
-                  <a:srgbClr val="3D5466"/>
-                </a:solidFill>
-                <a:latin typeface="Arial"/>
-              </a:rPr>
-              <a:t>## 4.4 DSGVO-konforme Datennutzung im Vertrieb</a:t>
-            </a:r>
-          </a:p>
-        </p:txBody>
-      </p:sp>
-      <p:sp>
-        <p:nvSpPr>
-          <p:cNvPr id="9" name="Rectangle 8"/>
+      <p:pic>
+        <p:nvPicPr>
+          <p:cNvPr id="7" name="Picture 6" descr="image.png"/>
+          <p:cNvPicPr>
+            <a:picLocks noChangeAspect="1"/>
+          </p:cNvPicPr>
+          <p:nvPr/>
+        </p:nvPicPr>
+        <p:blipFill>
+          <a:blip r:embed="rId2"/>
+          <a:stretch>
+            <a:fillRect/>
+          </a:stretch>
+        </p:blipFill>
+        <p:spPr>
+          <a:xfrm>
+            <a:off x="2303489" y="1325880"/>
+            <a:ext cx="7581973" cy="4937760"/>
+          </a:xfrm>
+          <a:prstGeom prst="rect">
+            <a:avLst/>
+          </a:prstGeom>
+        </p:spPr>
+      </p:pic>
+      <p:sp>
+        <p:nvSpPr>
+          <p:cNvPr id="8" name="Rectangle 7"/>
           <p:cNvSpPr/>
           <p:nvPr/>
         </p:nvSpPr>
@@ -10018,7 +10350,7 @@
       </p:sp>
       <p:sp>
         <p:nvSpPr>
-          <p:cNvPr id="10" name="TextBox 9"/>
+          <p:cNvPr id="9" name="TextBox 8"/>
           <p:cNvSpPr txBox="1"/>
           <p:nvPr/>
         </p:nvSpPr>
@@ -10047,6 +10379,41 @@
                 <a:latin typeface="JetBrains Mono"/>
               </a:rPr>
               <a:t>Benedikt Zoller Coaching  ·  FKB Campus  ·  M18</a:t>
+            </a:r>
+          </a:p>
+        </p:txBody>
+      </p:sp>
+      <p:sp>
+        <p:nvSpPr>
+          <p:cNvPr id="10" name="TextBox 9"/>
+          <p:cNvSpPr txBox="1"/>
+          <p:nvPr/>
+        </p:nvSpPr>
+        <p:spPr>
+          <a:xfrm>
+            <a:off x="7176211" y="6583680"/>
+            <a:ext cx="4326940" cy="256032"/>
+          </a:xfrm>
+          <a:prstGeom prst="rect">
+            <a:avLst/>
+          </a:prstGeom>
+          <a:noFill/>
+        </p:spPr>
+        <p:txBody>
+          <a:bodyPr wrap="none">
+            <a:spAutoFit/>
+          </a:bodyPr>
+          <a:lstStyle/>
+          <a:p>
+            <a:pPr algn="r"/>
+            <a:r>
+              <a:rPr sz="700">
+                <a:solidFill>
+                  <a:srgbClr val="A0B4D2"/>
+                </a:solidFill>
+                <a:latin typeface="JetBrains Mono"/>
+              </a:rPr>
+              <a:t>Schaubild</a:t>
             </a:r>
           </a:p>
         </p:txBody>

--- a/protected-downloads/praesentation/M18.pptx
+++ b/protected-downloads/praesentation/M18.pptx
@@ -19,7 +19,6 @@
     <p:sldId id="267" r:id="rId19"/>
     <p:sldId id="268" r:id="rId20"/>
     <p:sldId id="269" r:id="rId21"/>
-    <p:sldId id="270" r:id="rId22"/>
   </p:sldIdLst>
   <p:sldSz cx="12188952" cy="6858000" type="screen4x3"/>
   <p:notesSz cx="6858000" cy="9144000"/>
@@ -516,147 +515,7 @@
           <a:lstStyle/>
           <a:p>
             <a:r>
-              <a:t>Siehe Trainerhandbuch (Sektion 3) für Moderationshinweise, Timing und erwartete Teilnehmerreaktionen.</a:t>
-            </a:r>
-          </a:p>
-        </p:txBody>
-      </p:sp>
-      <p:sp>
-        <p:nvSpPr>
-          <p:cNvPr id="4" name="Slide Number Placeholder 3"/>
-          <p:cNvSpPr>
-            <a:spLocks noGrp="1"/>
-          </p:cNvSpPr>
-          <p:nvPr>
-            <p:ph type="sldNum" idx="5" sz="quarter"/>
-          </p:nvPr>
-        </p:nvSpPr>
-        <p:spPr/>
-      </p:sp>
-    </p:spTree>
-  </p:cSld>
-  <p:clrMapOvr>
-    <a:masterClrMapping/>
-  </p:clrMapOvr>
-</p:notes>
-</file>
-
-<file path=ppt/notesSlides/notesSlide10.xml><?xml version="1.0" encoding="utf-8"?>
-<p:notes xmlns:a="http://schemas.openxmlformats.org/drawingml/2006/main" xmlns:p="http://schemas.openxmlformats.org/presentationml/2006/main" xmlns:r="http://schemas.openxmlformats.org/officeDocument/2006/relationships">
-  <p:cSld>
-    <p:spTree>
-      <p:nvGrpSpPr>
-        <p:cNvPr id="1" name=""/>
-        <p:cNvGrpSpPr/>
-        <p:nvPr/>
-      </p:nvGrpSpPr>
-      <p:grpSpPr>
-        <a:xfrm>
-          <a:off x="0" y="0"/>
-          <a:ext cx="0" cy="0"/>
-          <a:chOff x="0" y="0"/>
-          <a:chExt cx="0" cy="0"/>
-        </a:xfrm>
-      </p:grpSpPr>
-      <p:sp>
-        <p:nvSpPr>
-          <p:cNvPr id="2" name="Slide Image Placeholder 1"/>
-          <p:cNvSpPr>
-            <a:spLocks noGrp="1"/>
-          </p:cNvSpPr>
-          <p:nvPr>
-            <p:ph type="sldImg" idx="2"/>
-          </p:nvPr>
-        </p:nvSpPr>
-        <p:spPr/>
-      </p:sp>
-      <p:sp>
-        <p:nvSpPr>
-          <p:cNvPr id="3" name="Notes Placeholder 2"/>
-          <p:cNvSpPr>
-            <a:spLocks noGrp="1"/>
-          </p:cNvSpPr>
-          <p:nvPr>
-            <p:ph type="body" idx="3" sz="quarter"/>
-          </p:nvPr>
-        </p:nvSpPr>
-        <p:spPr/>
-        <p:txBody>
-          <a:bodyPr/>
-          <a:lstStyle/>
-          <a:p>
-            <a:r>
-              <a:t>Siehe Trainerhandbuch (Sektion 3) für Moderationshinweise, Timing und erwartete Teilnehmerreaktionen.</a:t>
-            </a:r>
-          </a:p>
-        </p:txBody>
-      </p:sp>
-      <p:sp>
-        <p:nvSpPr>
-          <p:cNvPr id="4" name="Slide Number Placeholder 3"/>
-          <p:cNvSpPr>
-            <a:spLocks noGrp="1"/>
-          </p:cNvSpPr>
-          <p:nvPr>
-            <p:ph type="sldNum" idx="5" sz="quarter"/>
-          </p:nvPr>
-        </p:nvSpPr>
-        <p:spPr/>
-      </p:sp>
-    </p:spTree>
-  </p:cSld>
-  <p:clrMapOvr>
-    <a:masterClrMapping/>
-  </p:clrMapOvr>
-</p:notes>
-</file>
-
-<file path=ppt/notesSlides/notesSlide11.xml><?xml version="1.0" encoding="utf-8"?>
-<p:notes xmlns:a="http://schemas.openxmlformats.org/drawingml/2006/main" xmlns:p="http://schemas.openxmlformats.org/presentationml/2006/main" xmlns:r="http://schemas.openxmlformats.org/officeDocument/2006/relationships">
-  <p:cSld>
-    <p:spTree>
-      <p:nvGrpSpPr>
-        <p:cNvPr id="1" name=""/>
-        <p:cNvGrpSpPr/>
-        <p:nvPr/>
-      </p:nvGrpSpPr>
-      <p:grpSpPr>
-        <a:xfrm>
-          <a:off x="0" y="0"/>
-          <a:ext cx="0" cy="0"/>
-          <a:chOff x="0" y="0"/>
-          <a:chExt cx="0" cy="0"/>
-        </a:xfrm>
-      </p:grpSpPr>
-      <p:sp>
-        <p:nvSpPr>
-          <p:cNvPr id="2" name="Slide Image Placeholder 1"/>
-          <p:cNvSpPr>
-            <a:spLocks noGrp="1"/>
-          </p:cNvSpPr>
-          <p:nvPr>
-            <p:ph type="sldImg" idx="2"/>
-          </p:nvPr>
-        </p:nvSpPr>
-        <p:spPr/>
-      </p:sp>
-      <p:sp>
-        <p:nvSpPr>
-          <p:cNvPr id="3" name="Notes Placeholder 2"/>
-          <p:cNvSpPr>
-            <a:spLocks noGrp="1"/>
-          </p:cNvSpPr>
-          <p:nvPr>
-            <p:ph type="body" idx="3" sz="quarter"/>
-          </p:nvPr>
-        </p:nvSpPr>
-        <p:spPr/>
-        <p:txBody>
-          <a:bodyPr/>
-          <a:lstStyle/>
-          <a:p>
-            <a:r>
-              <a:t>Siehe Trainerhandbuch (Sektion 3) für Moderationshinweise, Timing und erwartete Teilnehmerreaktionen.</a:t>
+              <a:t>Agenda aus dem Ablaufplan (Sektion 3.1). Timing und Pausen siehe Trainerhandbuch.</a:t>
             </a:r>
           </a:p>
         </p:txBody>
@@ -1102,76 +961,6 @@
 </file>
 
 <file path=ppt/notesSlides/notesSlide8.xml><?xml version="1.0" encoding="utf-8"?>
-<p:notes xmlns:a="http://schemas.openxmlformats.org/drawingml/2006/main" xmlns:p="http://schemas.openxmlformats.org/presentationml/2006/main" xmlns:r="http://schemas.openxmlformats.org/officeDocument/2006/relationships">
-  <p:cSld>
-    <p:spTree>
-      <p:nvGrpSpPr>
-        <p:cNvPr id="1" name=""/>
-        <p:cNvGrpSpPr/>
-        <p:nvPr/>
-      </p:nvGrpSpPr>
-      <p:grpSpPr>
-        <a:xfrm>
-          <a:off x="0" y="0"/>
-          <a:ext cx="0" cy="0"/>
-          <a:chOff x="0" y="0"/>
-          <a:chExt cx="0" cy="0"/>
-        </a:xfrm>
-      </p:grpSpPr>
-      <p:sp>
-        <p:nvSpPr>
-          <p:cNvPr id="2" name="Slide Image Placeholder 1"/>
-          <p:cNvSpPr>
-            <a:spLocks noGrp="1"/>
-          </p:cNvSpPr>
-          <p:nvPr>
-            <p:ph type="sldImg" idx="2"/>
-          </p:nvPr>
-        </p:nvSpPr>
-        <p:spPr/>
-      </p:sp>
-      <p:sp>
-        <p:nvSpPr>
-          <p:cNvPr id="3" name="Notes Placeholder 2"/>
-          <p:cNvSpPr>
-            <a:spLocks noGrp="1"/>
-          </p:cNvSpPr>
-          <p:nvPr>
-            <p:ph type="body" idx="3" sz="quarter"/>
-          </p:nvPr>
-        </p:nvSpPr>
-        <p:spPr/>
-        <p:txBody>
-          <a:bodyPr/>
-          <a:lstStyle/>
-          <a:p>
-            <a:r>
-              <a:t>Siehe Trainerhandbuch (Sektion 3) für Moderationshinweise, Timing und erwartete Teilnehmerreaktionen.</a:t>
-            </a:r>
-          </a:p>
-        </p:txBody>
-      </p:sp>
-      <p:sp>
-        <p:nvSpPr>
-          <p:cNvPr id="4" name="Slide Number Placeholder 3"/>
-          <p:cNvSpPr>
-            <a:spLocks noGrp="1"/>
-          </p:cNvSpPr>
-          <p:nvPr>
-            <p:ph type="sldNum" idx="5" sz="quarter"/>
-          </p:nvPr>
-        </p:nvSpPr>
-        <p:spPr/>
-      </p:sp>
-    </p:spTree>
-  </p:cSld>
-  <p:clrMapOvr>
-    <a:masterClrMapping/>
-  </p:clrMapOvr>
-</p:notes>
-</file>
-
-<file path=ppt/notesSlides/notesSlide9.xml><?xml version="1.0" encoding="utf-8"?>
 <p:notes xmlns:a="http://schemas.openxmlformats.org/drawingml/2006/main" xmlns:p="http://schemas.openxmlformats.org/presentationml/2006/main" xmlns:r="http://schemas.openxmlformats.org/officeDocument/2006/relationships">
   <p:cSld>
     <p:spTree>
@@ -5034,7 +4823,7 @@
                 </a:solidFill>
                 <a:latin typeface="Source Serif 4"/>
               </a:rPr>
-              <a:t>Datenqualitäts-Audit im eigenen Bestand</a:t>
+              <a:t>Was ist erlaubt – was nicht?</a:t>
             </a:r>
           </a:p>
         </p:txBody>
@@ -5070,13 +4859,13 @@
               </a:spcAft>
             </a:pPr>
             <a:r>
-              <a:rPr sz="1200">
+              <a:rPr sz="1300">
                 <a:solidFill>
                   <a:srgbClr val="3D5466"/>
                 </a:solidFill>
                 <a:latin typeface="Arial"/>
               </a:rPr>
-              <a:t>Führen Sie einmalig pro Jahr einen strukturierten Datencheck durch:</a:t>
+              <a:t>▸  Kundendaten dürfen für Vertriebszwecke genutzt werden, wenn:</a:t>
             </a:r>
           </a:p>
           <a:p>
@@ -5095,7 +4884,7 @@
                 </a:solidFill>
                 <a:latin typeface="Arial"/>
               </a:rPr>
-              <a:t>▸  In agree eine Bestandsliste Ihrer Firmenkunden aufrufen (Weg je nach Bankinstallation: Bestandsbetreuer-Cockpit oder Listenabfrage über agree-Auswertungskomponente – lassen Sie sich das einmalig von Ihrem IT-Koordinator zeigen, da ein standardisierter „Lückenanalyse"-Menüpunkt nicht in jeder Installation verfügbar ist). Alternativ: Export als Excel aus dem Bestandscockpit und manuelle Filterung.</a:t>
+              <a:t>▸  Eine Rechtsgrundlage besteht (Art. 6 DSGVO): Bei Bankbeziehungen gilt üblicherweise das berechtigte Interesse (Art. 6 Abs. 1 lit. f DSGVO) für Bestandskundenpflege und -beratung</a:t>
             </a:r>
           </a:p>
           <a:p>
@@ -5114,7 +4903,7 @@
                 </a:solidFill>
                 <a:latin typeface="Arial"/>
               </a:rPr>
-              <a:t>▸  Für alle Kunden mit &gt; 500k Kreditvolumen prüfen: Geburtsdatum, Branche, Gesellschafterstruktur, Jahresabschluss-Datum (Arbeitsblatt B als Checkliste nutzen)</a:t>
+              <a:t>▸  Die Nutzung dem Kunden gegenüber transparent gemacht wird (Datenschutzerklärung)</a:t>
             </a:r>
           </a:p>
           <a:p>
@@ -5133,26 +4922,7 @@
                 </a:solidFill>
                 <a:latin typeface="Arial"/>
               </a:rPr>
-              <a:t>▸  Fehler in den nächsten drei Kundengesprächen schließen (gezielt im Gespräch erfragen)</a:t>
-            </a:r>
-          </a:p>
-          <a:p>
-            <a:pPr>
-              <a:spcBef>
-                <a:spcPts val="400"/>
-              </a:spcBef>
-              <a:spcAft>
-                <a:spcPts val="200"/>
-              </a:spcAft>
-            </a:pPr>
-            <a:r>
-              <a:rPr sz="1200">
-                <a:solidFill>
-                  <a:srgbClr val="3D5466"/>
-                </a:solidFill>
-                <a:latin typeface="Arial"/>
-              </a:rPr>
-              <a:t>## 4.4 DSGVO-konforme Datennutzung im Vertrieb</a:t>
+              <a:t>▸  Keine sensiblen Daten (Art. 9 DSGVO) ohne explizite Einwilligung verarbeitet werden</a:t>
             </a:r>
           </a:p>
         </p:txBody>
@@ -5490,7 +5260,7 @@
                 </a:solidFill>
                 <a:latin typeface="Source Serif 4"/>
               </a:rPr>
-              <a:t>Was ist erlaubt – was nicht?</a:t>
+              <a:t>Transparenz als Vertrauensmoment</a:t>
             </a:r>
           </a:p>
         </p:txBody>
@@ -5526,13 +5296,13 @@
               </a:spcAft>
             </a:pPr>
             <a:r>
-              <a:rPr sz="1200">
+              <a:rPr sz="1300">
                 <a:solidFill>
                   <a:srgbClr val="3D5466"/>
                 </a:solidFill>
                 <a:latin typeface="Arial"/>
               </a:rPr>
-              <a:t>Kundendaten dürfen für Vertriebszwecke genutzt werden, wenn:</a:t>
+              <a:t>▸  ## 4.5 Praxiscase: Drei Trigger, drei Gespräche</a:t>
             </a:r>
           </a:p>
           <a:p>
@@ -5551,7 +5321,7 @@
                 </a:solidFill>
                 <a:latin typeface="Arial"/>
               </a:rPr>
-              <a:t>▸  Eine Rechtsgrundlage besteht (Art. 6 DSGVO): Bei Bankbeziehungen gilt üblicherweise das berechtigte Interesse (Art. 6 Abs. 1 lit. f DSGVO) für Bestandskundenpflege und -beratung</a:t>
+              <a:t>▸  Ausgangssituation</a:t>
             </a:r>
           </a:p>
           <a:p>
@@ -5570,7 +5340,7 @@
                 </a:solidFill>
                 <a:latin typeface="Arial"/>
               </a:rPr>
-              <a:t>▸  Die Nutzung dem Kunden gegenüber transparent gemacht wird (Datenschutzerklärung)</a:t>
+              <a:t>▸  Beraterin Anna Schreiber hat 38 Firmenkunden. Sie etabliert eine neue Montagsroutine: 20 Minuten agree-Triggerliste durcharbeiten. Was findet sie in der ersten Woche?</a:t>
             </a:r>
           </a:p>
           <a:p>
@@ -5589,7 +5359,159 @@
                 </a:solidFill>
                 <a:latin typeface="Arial"/>
               </a:rPr>
-              <a:t>▸  Keine sensiblen Daten (Art. 9 DSGVO) ohne explizite Einwilligung verarbeitet werden</a:t>
+              <a:t>▸  Trigger 1: Transaktional – Auslandszahlung erstmals aufgetaucht</a:t>
+            </a:r>
+          </a:p>
+          <a:p>
+            <a:pPr>
+              <a:spcBef>
+                <a:spcPts val="400"/>
+              </a:spcBef>
+              <a:spcAft>
+                <a:spcPts val="200"/>
+              </a:spcAft>
+            </a:pPr>
+            <a:r>
+              <a:rPr sz="1300">
+                <a:solidFill>
+                  <a:srgbClr val="3D5466"/>
+                </a:solidFill>
+                <a:latin typeface="Arial"/>
+              </a:rPr>
+              <a:t>▸  Trigger 2: Ratingbasiert – Prolongation in 5 Monaten</a:t>
+            </a:r>
+          </a:p>
+          <a:p>
+            <a:pPr>
+              <a:spcBef>
+                <a:spcPts val="400"/>
+              </a:spcBef>
+              <a:spcAft>
+                <a:spcPts val="200"/>
+              </a:spcAft>
+            </a:pPr>
+            <a:r>
+              <a:rPr sz="1300">
+                <a:solidFill>
+                  <a:srgbClr val="3D5466"/>
+                </a:solidFill>
+                <a:latin typeface="Arial"/>
+              </a:rPr>
+              <a:t>▸  Trigger 3: Lebensereignis – Gesellschafterin 58 Jahre</a:t>
+            </a:r>
+          </a:p>
+          <a:p>
+            <a:pPr>
+              <a:spcBef>
+                <a:spcPts val="400"/>
+              </a:spcBef>
+              <a:spcAft>
+                <a:spcPts val="200"/>
+              </a:spcAft>
+            </a:pPr>
+            <a:r>
+              <a:rPr sz="1300">
+                <a:solidFill>
+                  <a:srgbClr val="3D5466"/>
+                </a:solidFill>
+                <a:latin typeface="Arial"/>
+              </a:rPr>
+              <a:t>▸  Ergebnis in 4 Wochen</a:t>
+            </a:r>
+          </a:p>
+          <a:p>
+            <a:pPr>
+              <a:spcBef>
+                <a:spcPts val="400"/>
+              </a:spcBef>
+              <a:spcAft>
+                <a:spcPts val="200"/>
+              </a:spcAft>
+            </a:pPr>
+            <a:r>
+              <a:rPr sz="1300">
+                <a:solidFill>
+                  <a:srgbClr val="3D5466"/>
+                </a:solidFill>
+                <a:latin typeface="Arial"/>
+              </a:rPr>
+              <a:t>▸  Anna hat mit drei Triggern drei Gespräche initiiert – alle mit konkretem Ergebnis. Kein Gespräch war ein „Kaltanruf". Alle hatten eine evidenzbasierte Gesprächseröffnung.</a:t>
+            </a:r>
+          </a:p>
+          <a:p>
+            <a:pPr>
+              <a:spcBef>
+                <a:spcPts val="400"/>
+              </a:spcBef>
+              <a:spcAft>
+                <a:spcPts val="200"/>
+              </a:spcAft>
+            </a:pPr>
+            <a:r>
+              <a:rPr sz="1300">
+                <a:solidFill>
+                  <a:srgbClr val="3D5466"/>
+                </a:solidFill>
+                <a:latin typeface="Arial"/>
+              </a:rPr>
+              <a:t>▸  Reflexionsfragen</a:t>
+            </a:r>
+          </a:p>
+          <a:p>
+            <a:pPr>
+              <a:spcBef>
+                <a:spcPts val="400"/>
+              </a:spcBef>
+              <a:spcAft>
+                <a:spcPts val="200"/>
+              </a:spcAft>
+            </a:pPr>
+            <a:r>
+              <a:rPr sz="1300">
+                <a:solidFill>
+                  <a:srgbClr val="3D5466"/>
+                </a:solidFill>
+                <a:latin typeface="Arial"/>
+              </a:rPr>
+              <a:t>▸  Welche der drei Trigger-Typen ist in Ihrem Bestand am häufigsten verfügbar?</a:t>
+            </a:r>
+          </a:p>
+          <a:p>
+            <a:pPr>
+              <a:spcBef>
+                <a:spcPts val="400"/>
+              </a:spcBef>
+              <a:spcAft>
+                <a:spcPts val="200"/>
+              </a:spcAft>
+            </a:pPr>
+            <a:r>
+              <a:rPr sz="1300">
+                <a:solidFill>
+                  <a:srgbClr val="3D5466"/>
+                </a:solidFill>
+                <a:latin typeface="Arial"/>
+              </a:rPr>
+              <a:t>▸  Wo in agree würden Sie morgen früh mit der Triggersuche anfangen?</a:t>
+            </a:r>
+          </a:p>
+          <a:p>
+            <a:pPr>
+              <a:spcBef>
+                <a:spcPts val="400"/>
+              </a:spcBef>
+              <a:spcAft>
+                <a:spcPts val="200"/>
+              </a:spcAft>
+            </a:pPr>
+            <a:r>
+              <a:rPr sz="1300">
+                <a:solidFill>
+                  <a:srgbClr val="3D5466"/>
+                </a:solidFill>
+                <a:latin typeface="Arial"/>
+              </a:rPr>
+              <a:t>▸  Wie würden Sie dem Kunden Becker erklären, warum Sie angerufen haben – ohne dass er sich überwacht fühlt?</a:t>
             </a:r>
           </a:p>
         </p:txBody>
@@ -5927,14 +5849,94 @@
                 </a:solidFill>
                 <a:latin typeface="Source Serif 4"/>
               </a:rPr>
-              <a:t>Verbundpartner-Einwilligung: Pflichtcheck vor jeder Übergabe</a:t>
-            </a:r>
-          </a:p>
-        </p:txBody>
-      </p:sp>
-      <p:sp>
-        <p:nvSpPr>
-          <p:cNvPr id="8" name="Rectangle 7"/>
+              <a:t>Arbeitsblatt A: Meine Trigger-Bibliothek</a:t>
+            </a:r>
+          </a:p>
+        </p:txBody>
+      </p:sp>
+      <p:sp>
+        <p:nvSpPr>
+          <p:cNvPr id="8" name="TextBox 7"/>
+          <p:cNvSpPr txBox="1"/>
+          <p:nvPr/>
+        </p:nvSpPr>
+        <p:spPr>
+          <a:xfrm>
+            <a:off x="685800" y="1417320"/>
+            <a:ext cx="10817352" cy="5029200"/>
+          </a:xfrm>
+          <a:prstGeom prst="rect">
+            <a:avLst/>
+          </a:prstGeom>
+          <a:noFill/>
+        </p:spPr>
+        <p:txBody>
+          <a:bodyPr wrap="square">
+            <a:spAutoFit/>
+          </a:bodyPr>
+          <a:lstStyle/>
+          <a:p>
+            <a:pPr>
+              <a:spcBef>
+                <a:spcPts val="400"/>
+              </a:spcBef>
+              <a:spcAft>
+                <a:spcPts val="200"/>
+              </a:spcAft>
+            </a:pPr>
+            <a:r>
+              <a:rPr sz="1300">
+                <a:solidFill>
+                  <a:srgbClr val="3D5466"/>
+                </a:solidFill>
+                <a:latin typeface="Arial"/>
+              </a:rPr>
+              <a:t>▸  (Nutzen Sie die Priorisierungstabelle aus Sec 4.6, um Ihren wirkungsvollsten Trigger zu bestimmen)</a:t>
+            </a:r>
+          </a:p>
+          <a:p>
+            <a:pPr>
+              <a:spcBef>
+                <a:spcPts val="400"/>
+              </a:spcBef>
+              <a:spcAft>
+                <a:spcPts val="200"/>
+              </a:spcAft>
+            </a:pPr>
+            <a:r>
+              <a:rPr sz="1300">
+                <a:solidFill>
+                  <a:srgbClr val="3D5466"/>
+                </a:solidFill>
+                <a:latin typeface="Arial"/>
+              </a:rPr>
+              <a:t>▸  Ergänzen Sie für Ihren Bestand die relevantesten Trigger je Typ:</a:t>
+            </a:r>
+          </a:p>
+          <a:p>
+            <a:pPr>
+              <a:spcBef>
+                <a:spcPts val="400"/>
+              </a:spcBef>
+              <a:spcAft>
+                <a:spcPts val="200"/>
+              </a:spcAft>
+            </a:pPr>
+            <a:r>
+              <a:rPr sz="1300">
+                <a:solidFill>
+                  <a:srgbClr val="3D5466"/>
+                </a:solidFill>
+                <a:latin typeface="Arial"/>
+              </a:rPr>
+              <a:t>▸  Mein wirkungsvollster Trigger für die nächsten 4 Wochen:</a:t>
+            </a:r>
+          </a:p>
+        </p:txBody>
+      </p:sp>
+      <p:sp>
+        <p:nvSpPr>
+          <p:cNvPr id="9" name="Rectangle 8"/>
           <p:cNvSpPr/>
           <p:nvPr/>
         </p:nvSpPr>
@@ -5977,7 +5979,7 @@
       </p:sp>
       <p:sp>
         <p:nvSpPr>
-          <p:cNvPr id="9" name="TextBox 8"/>
+          <p:cNvPr id="10" name="TextBox 9"/>
           <p:cNvSpPr txBox="1"/>
           <p:nvPr/>
         </p:nvSpPr>
@@ -6043,7 +6045,7 @@
             <a:avLst/>
           </a:prstGeom>
           <a:solidFill>
-            <a:srgbClr val="EDEDF3"/>
+            <a:srgbClr val="FFFFFF"/>
           </a:solidFill>
           <a:ln>
             <a:noFill/>
@@ -6144,51 +6146,43 @@
                 </a:solidFill>
                 <a:latin typeface="JetBrains Mono"/>
               </a:rPr>
-              <a:t>M18  ·  INHALT</a:t>
-            </a:r>
-          </a:p>
-        </p:txBody>
-      </p:sp>
-      <p:sp>
-        <p:nvSpPr>
-          <p:cNvPr id="5" name="Rectangle 4"/>
-          <p:cNvSpPr/>
-          <p:nvPr/>
-        </p:nvSpPr>
-        <p:spPr>
-          <a:xfrm>
-            <a:off x="0" y="1234440"/>
-            <a:ext cx="12188952" cy="12700"/>
-          </a:xfrm>
-          <a:prstGeom prst="rect">
-            <a:avLst/>
-          </a:prstGeom>
-          <a:solidFill>
-            <a:srgbClr val="D8DFE4"/>
-          </a:solidFill>
-          <a:ln>
-            <a:noFill/>
-          </a:ln>
-        </p:spPr>
-        <p:style>
-          <a:lnRef idx="1">
-            <a:schemeClr val="accent1"/>
-          </a:lnRef>
-          <a:fillRef idx="3">
-            <a:schemeClr val="accent1"/>
-          </a:fillRef>
-          <a:effectRef idx="2">
-            <a:schemeClr val="accent1"/>
-          </a:effectRef>
-          <a:fontRef idx="minor">
-            <a:schemeClr val="lt1"/>
-          </a:fontRef>
-        </p:style>
-        <p:txBody>
-          <a:bodyPr rtlCol="0" anchor="ctr"/>
-          <a:lstStyle/>
-          <a:p>
-            <a:pPr algn="ctr"/>
+              <a:t>M18  ·  ÜBERSICHT</a:t>
+            </a:r>
+          </a:p>
+        </p:txBody>
+      </p:sp>
+      <p:sp>
+        <p:nvSpPr>
+          <p:cNvPr id="5" name="TextBox 4"/>
+          <p:cNvSpPr txBox="1"/>
+          <p:nvPr/>
+        </p:nvSpPr>
+        <p:spPr>
+          <a:xfrm>
+            <a:off x="685800" y="502920"/>
+            <a:ext cx="10817352" cy="594360"/>
+          </a:xfrm>
+          <a:prstGeom prst="rect">
+            <a:avLst/>
+          </a:prstGeom>
+          <a:noFill/>
+        </p:spPr>
+        <p:txBody>
+          <a:bodyPr wrap="square">
+            <a:spAutoFit/>
+          </a:bodyPr>
+          <a:lstStyle/>
+          <a:p>
+            <a:pPr algn="l"/>
+            <a:r>
+              <a:rPr sz="2000" b="1" i="0">
+                <a:solidFill>
+                  <a:srgbClr val="1F2C56"/>
+                </a:solidFill>
+                <a:latin typeface="Source Serif 4"/>
+              </a:rPr>
+              <a:t>Arbeitsblatt A: Meine Trigger-Bibliothek</a:t>
+            </a:r>
           </a:p>
         </p:txBody>
       </p:sp>
@@ -6200,8 +6194,8 @@
         </p:nvSpPr>
         <p:spPr>
           <a:xfrm>
-            <a:off x="685800" y="502920"/>
-            <a:ext cx="36576" cy="658368"/>
+            <a:off x="685800" y="1143000"/>
+            <a:ext cx="10817352" cy="25400"/>
           </a:xfrm>
           <a:prstGeom prst="rect">
             <a:avLst/>
@@ -6235,295 +6229,391 @@
           </a:p>
         </p:txBody>
       </p:sp>
-      <p:sp>
-        <p:nvSpPr>
-          <p:cNvPr id="7" name="TextBox 6"/>
-          <p:cNvSpPr txBox="1"/>
-          <p:nvPr/>
-        </p:nvSpPr>
-        <p:spPr>
-          <a:xfrm>
-            <a:off x="813816" y="502920"/>
-            <a:ext cx="10634472" cy="685800"/>
-          </a:xfrm>
-          <a:prstGeom prst="rect">
-            <a:avLst/>
-          </a:prstGeom>
-          <a:noFill/>
-        </p:spPr>
-        <p:txBody>
-          <a:bodyPr wrap="square">
-            <a:spAutoFit/>
-          </a:bodyPr>
-          <a:lstStyle/>
-          <a:p>
-            <a:pPr algn="l"/>
-            <a:r>
-              <a:rPr sz="2400" b="1" i="0">
-                <a:solidFill>
-                  <a:srgbClr val="1F2C56"/>
-                </a:solidFill>
-                <a:latin typeface="Source Serif 4"/>
-              </a:rPr>
-              <a:t>Transparenz als Vertrauensmoment</a:t>
-            </a:r>
-          </a:p>
-        </p:txBody>
-      </p:sp>
-      <p:sp>
-        <p:nvSpPr>
-          <p:cNvPr id="8" name="TextBox 7"/>
-          <p:cNvSpPr txBox="1"/>
-          <p:nvPr/>
-        </p:nvSpPr>
-        <p:spPr>
-          <a:xfrm>
-            <a:off x="685800" y="1417320"/>
-            <a:ext cx="10817352" cy="5029200"/>
-          </a:xfrm>
-          <a:prstGeom prst="rect">
-            <a:avLst/>
-          </a:prstGeom>
-          <a:noFill/>
-        </p:spPr>
-        <p:txBody>
-          <a:bodyPr wrap="square">
-            <a:spAutoFit/>
-          </a:bodyPr>
-          <a:lstStyle/>
-          <a:p>
-            <a:pPr>
-              <a:spcBef>
-                <a:spcPts val="400"/>
-              </a:spcBef>
-              <a:spcAft>
-                <a:spcPts val="200"/>
-              </a:spcAft>
-            </a:pPr>
-            <a:r>
-              <a:rPr sz="1200">
-                <a:solidFill>
-                  <a:srgbClr val="3D5466"/>
-                </a:solidFill>
-                <a:latin typeface="Arial"/>
-              </a:rPr>
-              <a:t>## 4.5 Praxiscase: Drei Trigger, drei Gespräche</a:t>
-            </a:r>
-          </a:p>
-          <a:p>
-            <a:pPr>
-              <a:spcBef>
-                <a:spcPts val="400"/>
-              </a:spcBef>
-              <a:spcAft>
-                <a:spcPts val="200"/>
-              </a:spcAft>
-            </a:pPr>
-            <a:r>
-              <a:rPr sz="1200">
-                <a:solidFill>
-                  <a:srgbClr val="3D5466"/>
-                </a:solidFill>
-                <a:latin typeface="Arial"/>
-              </a:rPr>
-              <a:t>Ausgangssituation</a:t>
-            </a:r>
-          </a:p>
-          <a:p>
-            <a:pPr>
-              <a:spcBef>
-                <a:spcPts val="400"/>
-              </a:spcBef>
-              <a:spcAft>
-                <a:spcPts val="200"/>
-              </a:spcAft>
-            </a:pPr>
-            <a:r>
-              <a:rPr sz="1200">
-                <a:solidFill>
-                  <a:srgbClr val="3D5466"/>
-                </a:solidFill>
-                <a:latin typeface="Arial"/>
-              </a:rPr>
-              <a:t>Beraterin Anna Schreiber hat 38 Firmenkunden. Sie etabliert eine neue Montagsroutine: 20 Minuten agree-Triggerliste durcharbeiten. Was findet sie in der ersten Woche?</a:t>
-            </a:r>
-          </a:p>
-          <a:p>
-            <a:pPr>
-              <a:spcBef>
-                <a:spcPts val="400"/>
-              </a:spcBef>
-              <a:spcAft>
-                <a:spcPts val="200"/>
-              </a:spcAft>
-            </a:pPr>
-            <a:r>
-              <a:rPr sz="1200">
-                <a:solidFill>
-                  <a:srgbClr val="3D5466"/>
-                </a:solidFill>
-                <a:latin typeface="Arial"/>
-              </a:rPr>
-              <a:t>Trigger 1: Transaktional – Auslandszahlung erstmals aufgetaucht</a:t>
-            </a:r>
-          </a:p>
-          <a:p>
-            <a:pPr>
-              <a:spcBef>
-                <a:spcPts val="400"/>
-              </a:spcBef>
-              <a:spcAft>
-                <a:spcPts val="200"/>
-              </a:spcAft>
-            </a:pPr>
-            <a:r>
-              <a:rPr sz="1200">
-                <a:solidFill>
-                  <a:srgbClr val="3D5466"/>
-                </a:solidFill>
-                <a:latin typeface="Arial"/>
-              </a:rPr>
-              <a:t>Trigger 2: Ratingbasiert – Prolongation in 5 Monaten</a:t>
-            </a:r>
-          </a:p>
-          <a:p>
-            <a:pPr>
-              <a:spcBef>
-                <a:spcPts val="400"/>
-              </a:spcBef>
-              <a:spcAft>
-                <a:spcPts val="200"/>
-              </a:spcAft>
-            </a:pPr>
-            <a:r>
-              <a:rPr sz="1200">
-                <a:solidFill>
-                  <a:srgbClr val="3D5466"/>
-                </a:solidFill>
-                <a:latin typeface="Arial"/>
-              </a:rPr>
-              <a:t>Trigger 3: Lebensereignis – Gesellschafterin 58 Jahre</a:t>
-            </a:r>
-          </a:p>
-          <a:p>
-            <a:pPr>
-              <a:spcBef>
-                <a:spcPts val="400"/>
-              </a:spcBef>
-              <a:spcAft>
-                <a:spcPts val="200"/>
-              </a:spcAft>
-            </a:pPr>
-            <a:r>
-              <a:rPr sz="1200">
-                <a:solidFill>
-                  <a:srgbClr val="3D5466"/>
-                </a:solidFill>
-                <a:latin typeface="Arial"/>
-              </a:rPr>
-              <a:t>Ergebnis in 4 Wochen</a:t>
-            </a:r>
-          </a:p>
-          <a:p>
-            <a:pPr>
-              <a:spcBef>
-                <a:spcPts val="400"/>
-              </a:spcBef>
-              <a:spcAft>
-                <a:spcPts val="200"/>
-              </a:spcAft>
-            </a:pPr>
-            <a:r>
-              <a:rPr sz="1200">
-                <a:solidFill>
-                  <a:srgbClr val="3D5466"/>
-                </a:solidFill>
-                <a:latin typeface="Arial"/>
-              </a:rPr>
-              <a:t>Anna hat mit drei Triggern drei Gespräche initiiert – alle mit konkretem Ergebnis. Kein Gespräch war ein „Kaltanruf". Alle hatten eine evidenzbasierte Gesprächseröffnung.</a:t>
-            </a:r>
-          </a:p>
-          <a:p>
-            <a:pPr>
-              <a:spcBef>
-                <a:spcPts val="400"/>
-              </a:spcBef>
-              <a:spcAft>
-                <a:spcPts val="200"/>
-              </a:spcAft>
-            </a:pPr>
-            <a:r>
-              <a:rPr sz="1200">
-                <a:solidFill>
-                  <a:srgbClr val="3D5466"/>
-                </a:solidFill>
-                <a:latin typeface="Arial"/>
-              </a:rPr>
-              <a:t>Reflexionsfragen</a:t>
-            </a:r>
-          </a:p>
-          <a:p>
-            <a:pPr>
-              <a:spcBef>
-                <a:spcPts val="400"/>
-              </a:spcBef>
-              <a:spcAft>
-                <a:spcPts val="200"/>
-              </a:spcAft>
-            </a:pPr>
-            <a:r>
-              <a:rPr sz="1300">
-                <a:solidFill>
-                  <a:srgbClr val="3D5466"/>
-                </a:solidFill>
-                <a:latin typeface="Arial"/>
-              </a:rPr>
-              <a:t>▸  Welche der drei Trigger-Typen ist in Ihrem Bestand am häufigsten verfügbar?</a:t>
-            </a:r>
-          </a:p>
-          <a:p>
-            <a:pPr>
-              <a:spcBef>
-                <a:spcPts val="400"/>
-              </a:spcBef>
-              <a:spcAft>
-                <a:spcPts val="200"/>
-              </a:spcAft>
-            </a:pPr>
-            <a:r>
-              <a:rPr sz="1300">
-                <a:solidFill>
-                  <a:srgbClr val="3D5466"/>
-                </a:solidFill>
-                <a:latin typeface="Arial"/>
-              </a:rPr>
-              <a:t>▸  Wo in agree würden Sie morgen früh mit der Triggersuche anfangen?</a:t>
-            </a:r>
-          </a:p>
-          <a:p>
-            <a:pPr>
-              <a:spcBef>
-                <a:spcPts val="400"/>
-              </a:spcBef>
-              <a:spcAft>
-                <a:spcPts val="200"/>
-              </a:spcAft>
-            </a:pPr>
-            <a:r>
-              <a:rPr sz="1300">
-                <a:solidFill>
-                  <a:srgbClr val="3D5466"/>
-                </a:solidFill>
-                <a:latin typeface="Arial"/>
-              </a:rPr>
-              <a:t>▸  Wie würden Sie dem Kunden Becker erklären, warum Sie angerufen haben – ohne dass er sich überwacht fühlt?</a:t>
-            </a:r>
-          </a:p>
-        </p:txBody>
-      </p:sp>
-      <p:sp>
-        <p:nvSpPr>
-          <p:cNvPr id="9" name="Rectangle 8"/>
+      <p:graphicFrame>
+        <p:nvGraphicFramePr>
+          <p:cNvPr id="7" name="Table 6"/>
+          <p:cNvGraphicFramePr>
+            <a:graphicFrameLocks noGrp="1"/>
+          </p:cNvGraphicFramePr>
+          <p:nvPr/>
+        </p:nvGraphicFramePr>
+        <p:xfrm>
+          <a:off x="685800" y="1417320"/>
+          <a:ext cx="10817352" cy="2688336"/>
+        </p:xfrm>
+        <a:graphic>
+          <a:graphicData uri="http://schemas.openxmlformats.org/drawingml/2006/table">
+            <a:tbl>
+              <a:tblPr firstRow="1" bandRow="1">
+                <a:tableStyleId>{5C22544A-7EE6-4342-B048-85BDC9FD1C3A}</a:tableStyleId>
+              </a:tblPr>
+              <a:tblGrid>
+                <a:gridCol w="2704338"/>
+                <a:gridCol w="2704338"/>
+                <a:gridCol w="2704338"/>
+                <a:gridCol w="2704338"/>
+              </a:tblGrid>
+              <a:tr h="384048">
+                <a:tc>
+                  <a:txBody>
+                    <a:bodyPr/>
+                    <a:lstStyle/>
+                    <a:p>
+                      <a:r>
+                        <a:rPr sz="1100" b="1">
+                          <a:solidFill>
+                            <a:srgbClr val="FFFFFF"/>
+                          </a:solidFill>
+                          <a:latin typeface="Arial"/>
+                        </a:rPr>
+                        <a:t>Trigger-Typ</a:t>
+                      </a:r>
+                    </a:p>
+                  </a:txBody>
+                  <a:tcPr>
+                    <a:solidFill>
+                      <a:srgbClr val="1F2C56"/>
+                    </a:solidFill>
+                  </a:tcPr>
+                </a:tc>
+                <a:tc>
+                  <a:txBody>
+                    <a:bodyPr/>
+                    <a:lstStyle/>
+                    <a:p>
+                      <a:r>
+                        <a:rPr sz="1100" b="1">
+                          <a:solidFill>
+                            <a:srgbClr val="FFFFFF"/>
+                          </a:solidFill>
+                          <a:latin typeface="Arial"/>
+                        </a:rPr>
+                        <a:t>Datensignal</a:t>
+                      </a:r>
+                    </a:p>
+                  </a:txBody>
+                  <a:tcPr>
+                    <a:solidFill>
+                      <a:srgbClr val="1F2C56"/>
+                    </a:solidFill>
+                  </a:tcPr>
+                </a:tc>
+                <a:tc>
+                  <a:txBody>
+                    <a:bodyPr/>
+                    <a:lstStyle/>
+                    <a:p>
+                      <a:r>
+                        <a:rPr sz="1100" b="1">
+                          <a:solidFill>
+                            <a:srgbClr val="FFFFFF"/>
+                          </a:solidFill>
+                          <a:latin typeface="Arial"/>
+                        </a:rPr>
+                        <a:t>agree-Quelle</a:t>
+                      </a:r>
+                    </a:p>
+                  </a:txBody>
+                  <a:tcPr>
+                    <a:solidFill>
+                      <a:srgbClr val="1F2C56"/>
+                    </a:solidFill>
+                  </a:tcPr>
+                </a:tc>
+                <a:tc>
+                  <a:txBody>
+                    <a:bodyPr/>
+                    <a:lstStyle/>
+                    <a:p>
+                      <a:r>
+                        <a:rPr sz="1100" b="1">
+                          <a:solidFill>
+                            <a:srgbClr val="FFFFFF"/>
+                          </a:solidFill>
+                          <a:latin typeface="Arial"/>
+                        </a:rPr>
+                        <a:t>Möglicher Bedarf</a:t>
+                      </a:r>
+                    </a:p>
+                  </a:txBody>
+                  <a:tcPr>
+                    <a:solidFill>
+                      <a:srgbClr val="1F2C56"/>
+                    </a:solidFill>
+                  </a:tcPr>
+                </a:tc>
+              </a:tr>
+              <a:tr h="384048">
+                <a:tc>
+                  <a:txBody>
+                    <a:bodyPr/>
+                    <a:lstStyle/>
+                    <a:p>
+                      <a:r>
+                        <a:rPr sz="1050">
+                          <a:solidFill>
+                            <a:srgbClr val="3D5466"/>
+                          </a:solidFill>
+                          <a:latin typeface="Arial"/>
+                        </a:rPr>
+                        <a:t>Transaktional</a:t>
+                      </a:r>
+                    </a:p>
+                  </a:txBody>
+                  <a:tcPr/>
+                </a:tc>
+                <a:tc>
+                  <a:txBody>
+                    <a:bodyPr/>
+                    <a:lstStyle/>
+                    <a:p/>
+                  </a:txBody>
+                  <a:tcPr/>
+                </a:tc>
+                <a:tc>
+                  <a:txBody>
+                    <a:bodyPr/>
+                    <a:lstStyle/>
+                    <a:p/>
+                  </a:txBody>
+                  <a:tcPr/>
+                </a:tc>
+                <a:tc>
+                  <a:txBody>
+                    <a:bodyPr/>
+                    <a:lstStyle/>
+                    <a:p/>
+                  </a:txBody>
+                  <a:tcPr/>
+                </a:tc>
+              </a:tr>
+              <a:tr h="384048">
+                <a:tc>
+                  <a:txBody>
+                    <a:bodyPr/>
+                    <a:lstStyle/>
+                    <a:p>
+                      <a:r>
+                        <a:rPr sz="1050">
+                          <a:solidFill>
+                            <a:srgbClr val="3D5466"/>
+                          </a:solidFill>
+                          <a:latin typeface="Arial"/>
+                        </a:rPr>
+                        <a:t>Transaktional</a:t>
+                      </a:r>
+                    </a:p>
+                  </a:txBody>
+                  <a:tcPr/>
+                </a:tc>
+                <a:tc>
+                  <a:txBody>
+                    <a:bodyPr/>
+                    <a:lstStyle/>
+                    <a:p/>
+                  </a:txBody>
+                  <a:tcPr/>
+                </a:tc>
+                <a:tc>
+                  <a:txBody>
+                    <a:bodyPr/>
+                    <a:lstStyle/>
+                    <a:p/>
+                  </a:txBody>
+                  <a:tcPr/>
+                </a:tc>
+                <a:tc>
+                  <a:txBody>
+                    <a:bodyPr/>
+                    <a:lstStyle/>
+                    <a:p/>
+                  </a:txBody>
+                  <a:tcPr/>
+                </a:tc>
+              </a:tr>
+              <a:tr h="384048">
+                <a:tc>
+                  <a:txBody>
+                    <a:bodyPr/>
+                    <a:lstStyle/>
+                    <a:p>
+                      <a:r>
+                        <a:rPr sz="1050">
+                          <a:solidFill>
+                            <a:srgbClr val="3D5466"/>
+                          </a:solidFill>
+                          <a:latin typeface="Arial"/>
+                        </a:rPr>
+                        <a:t>Ratingbasiert</a:t>
+                      </a:r>
+                    </a:p>
+                  </a:txBody>
+                  <a:tcPr/>
+                </a:tc>
+                <a:tc>
+                  <a:txBody>
+                    <a:bodyPr/>
+                    <a:lstStyle/>
+                    <a:p/>
+                  </a:txBody>
+                  <a:tcPr/>
+                </a:tc>
+                <a:tc>
+                  <a:txBody>
+                    <a:bodyPr/>
+                    <a:lstStyle/>
+                    <a:p/>
+                  </a:txBody>
+                  <a:tcPr/>
+                </a:tc>
+                <a:tc>
+                  <a:txBody>
+                    <a:bodyPr/>
+                    <a:lstStyle/>
+                    <a:p/>
+                  </a:txBody>
+                  <a:tcPr/>
+                </a:tc>
+              </a:tr>
+              <a:tr h="384048">
+                <a:tc>
+                  <a:txBody>
+                    <a:bodyPr/>
+                    <a:lstStyle/>
+                    <a:p>
+                      <a:r>
+                        <a:rPr sz="1050">
+                          <a:solidFill>
+                            <a:srgbClr val="3D5466"/>
+                          </a:solidFill>
+                          <a:latin typeface="Arial"/>
+                        </a:rPr>
+                        <a:t>Ratingbasiert</a:t>
+                      </a:r>
+                    </a:p>
+                  </a:txBody>
+                  <a:tcPr/>
+                </a:tc>
+                <a:tc>
+                  <a:txBody>
+                    <a:bodyPr/>
+                    <a:lstStyle/>
+                    <a:p/>
+                  </a:txBody>
+                  <a:tcPr/>
+                </a:tc>
+                <a:tc>
+                  <a:txBody>
+                    <a:bodyPr/>
+                    <a:lstStyle/>
+                    <a:p/>
+                  </a:txBody>
+                  <a:tcPr/>
+                </a:tc>
+                <a:tc>
+                  <a:txBody>
+                    <a:bodyPr/>
+                    <a:lstStyle/>
+                    <a:p/>
+                  </a:txBody>
+                  <a:tcPr/>
+                </a:tc>
+              </a:tr>
+              <a:tr h="384048">
+                <a:tc>
+                  <a:txBody>
+                    <a:bodyPr/>
+                    <a:lstStyle/>
+                    <a:p>
+                      <a:r>
+                        <a:rPr sz="1050">
+                          <a:solidFill>
+                            <a:srgbClr val="3D5466"/>
+                          </a:solidFill>
+                          <a:latin typeface="Arial"/>
+                        </a:rPr>
+                        <a:t>Lebensereignis</a:t>
+                      </a:r>
+                    </a:p>
+                  </a:txBody>
+                  <a:tcPr/>
+                </a:tc>
+                <a:tc>
+                  <a:txBody>
+                    <a:bodyPr/>
+                    <a:lstStyle/>
+                    <a:p/>
+                  </a:txBody>
+                  <a:tcPr/>
+                </a:tc>
+                <a:tc>
+                  <a:txBody>
+                    <a:bodyPr/>
+                    <a:lstStyle/>
+                    <a:p/>
+                  </a:txBody>
+                  <a:tcPr/>
+                </a:tc>
+                <a:tc>
+                  <a:txBody>
+                    <a:bodyPr/>
+                    <a:lstStyle/>
+                    <a:p/>
+                  </a:txBody>
+                  <a:tcPr/>
+                </a:tc>
+              </a:tr>
+              <a:tr h="384048">
+                <a:tc>
+                  <a:txBody>
+                    <a:bodyPr/>
+                    <a:lstStyle/>
+                    <a:p>
+                      <a:r>
+                        <a:rPr sz="1050">
+                          <a:solidFill>
+                            <a:srgbClr val="3D5466"/>
+                          </a:solidFill>
+                          <a:latin typeface="Arial"/>
+                        </a:rPr>
+                        <a:t>Lebensereignis</a:t>
+                      </a:r>
+                    </a:p>
+                  </a:txBody>
+                  <a:tcPr/>
+                </a:tc>
+                <a:tc>
+                  <a:txBody>
+                    <a:bodyPr/>
+                    <a:lstStyle/>
+                    <a:p/>
+                  </a:txBody>
+                  <a:tcPr/>
+                </a:tc>
+                <a:tc>
+                  <a:txBody>
+                    <a:bodyPr/>
+                    <a:lstStyle/>
+                    <a:p/>
+                  </a:txBody>
+                  <a:tcPr/>
+                </a:tc>
+                <a:tc>
+                  <a:txBody>
+                    <a:bodyPr/>
+                    <a:lstStyle/>
+                    <a:p/>
+                  </a:txBody>
+                  <a:tcPr/>
+                </a:tc>
+              </a:tr>
+            </a:tbl>
+          </a:graphicData>
+        </a:graphic>
+      </p:graphicFrame>
+      <p:sp>
+        <p:nvSpPr>
+          <p:cNvPr id="8" name="Rectangle 7"/>
           <p:cNvSpPr/>
           <p:nvPr/>
         </p:nvSpPr>
@@ -6566,7 +6656,7 @@
       </p:sp>
       <p:sp>
         <p:nvSpPr>
-          <p:cNvPr id="10" name="TextBox 9"/>
+          <p:cNvPr id="9" name="TextBox 8"/>
           <p:cNvSpPr txBox="1"/>
           <p:nvPr/>
         </p:nvSpPr>
@@ -6595,6 +6685,41 @@
                 <a:latin typeface="JetBrains Mono"/>
               </a:rPr>
               <a:t>Benedikt Zoller Coaching  ·  FKB Campus  ·  M18</a:t>
+            </a:r>
+          </a:p>
+        </p:txBody>
+      </p:sp>
+      <p:sp>
+        <p:nvSpPr>
+          <p:cNvPr id="10" name="TextBox 9"/>
+          <p:cNvSpPr txBox="1"/>
+          <p:nvPr/>
+        </p:nvSpPr>
+        <p:spPr>
+          <a:xfrm>
+            <a:off x="7176211" y="6583680"/>
+            <a:ext cx="4326940" cy="256032"/>
+          </a:xfrm>
+          <a:prstGeom prst="rect">
+            <a:avLst/>
+          </a:prstGeom>
+          <a:noFill/>
+        </p:spPr>
+        <p:txBody>
+          <a:bodyPr wrap="none">
+            <a:spAutoFit/>
+          </a:bodyPr>
+          <a:lstStyle/>
+          <a:p>
+            <a:pPr algn="r"/>
+            <a:r>
+              <a:rPr sz="700">
+                <a:solidFill>
+                  <a:srgbClr val="A0B4D2"/>
+                </a:solidFill>
+                <a:latin typeface="JetBrains Mono"/>
+              </a:rPr>
+              <a:t>Übersicht</a:t>
             </a:r>
           </a:p>
         </p:txBody>
@@ -6632,7 +6757,7 @@
             <a:avLst/>
           </a:prstGeom>
           <a:solidFill>
-            <a:srgbClr val="EDEDF3"/>
+            <a:srgbClr val="FFFFFF"/>
           </a:solidFill>
           <a:ln>
             <a:noFill/>
@@ -6733,51 +6858,43 @@
                 </a:solidFill>
                 <a:latin typeface="JetBrains Mono"/>
               </a:rPr>
-              <a:t>M18  ·  INHALT</a:t>
-            </a:r>
-          </a:p>
-        </p:txBody>
-      </p:sp>
-      <p:sp>
-        <p:nvSpPr>
-          <p:cNvPr id="5" name="Rectangle 4"/>
-          <p:cNvSpPr/>
-          <p:nvPr/>
-        </p:nvSpPr>
-        <p:spPr>
-          <a:xfrm>
-            <a:off x="0" y="1234440"/>
-            <a:ext cx="12188952" cy="12700"/>
-          </a:xfrm>
-          <a:prstGeom prst="rect">
-            <a:avLst/>
-          </a:prstGeom>
-          <a:solidFill>
-            <a:srgbClr val="D8DFE4"/>
-          </a:solidFill>
-          <a:ln>
-            <a:noFill/>
-          </a:ln>
-        </p:spPr>
-        <p:style>
-          <a:lnRef idx="1">
-            <a:schemeClr val="accent1"/>
-          </a:lnRef>
-          <a:fillRef idx="3">
-            <a:schemeClr val="accent1"/>
-          </a:fillRef>
-          <a:effectRef idx="2">
-            <a:schemeClr val="accent1"/>
-          </a:effectRef>
-          <a:fontRef idx="minor">
-            <a:schemeClr val="lt1"/>
-          </a:fontRef>
-        </p:style>
-        <p:txBody>
-          <a:bodyPr rtlCol="0" anchor="ctr"/>
-          <a:lstStyle/>
-          <a:p>
-            <a:pPr algn="ctr"/>
+              <a:t>M18  ·  ÜBERSICHT</a:t>
+            </a:r>
+          </a:p>
+        </p:txBody>
+      </p:sp>
+      <p:sp>
+        <p:nvSpPr>
+          <p:cNvPr id="5" name="TextBox 4"/>
+          <p:cNvSpPr txBox="1"/>
+          <p:nvPr/>
+        </p:nvSpPr>
+        <p:spPr>
+          <a:xfrm>
+            <a:off x="685800" y="502920"/>
+            <a:ext cx="10817352" cy="594360"/>
+          </a:xfrm>
+          <a:prstGeom prst="rect">
+            <a:avLst/>
+          </a:prstGeom>
+          <a:noFill/>
+        </p:spPr>
+        <p:txBody>
+          <a:bodyPr wrap="square">
+            <a:spAutoFit/>
+          </a:bodyPr>
+          <a:lstStyle/>
+          <a:p>
+            <a:pPr algn="l"/>
+            <a:r>
+              <a:rPr sz="2000" b="1" i="0">
+                <a:solidFill>
+                  <a:srgbClr val="1F2C56"/>
+                </a:solidFill>
+                <a:latin typeface="Source Serif 4"/>
+              </a:rPr>
+              <a:t>Arbeitsblatt B: Datenqualitäts-Audit (Top-10-Kunden)</a:t>
+            </a:r>
           </a:p>
         </p:txBody>
       </p:sp>
@@ -6789,8 +6906,8 @@
         </p:nvSpPr>
         <p:spPr>
           <a:xfrm>
-            <a:off x="685800" y="502920"/>
-            <a:ext cx="36576" cy="658368"/>
+            <a:off x="685800" y="1143000"/>
+            <a:ext cx="10817352" cy="25400"/>
           </a:xfrm>
           <a:prstGeom prst="rect">
             <a:avLst/>
@@ -6824,124 +6941,360 @@
           </a:p>
         </p:txBody>
       </p:sp>
-      <p:sp>
-        <p:nvSpPr>
-          <p:cNvPr id="7" name="TextBox 6"/>
-          <p:cNvSpPr txBox="1"/>
-          <p:nvPr/>
-        </p:nvSpPr>
-        <p:spPr>
-          <a:xfrm>
-            <a:off x="813816" y="502920"/>
-            <a:ext cx="10634472" cy="685800"/>
-          </a:xfrm>
-          <a:prstGeom prst="rect">
-            <a:avLst/>
-          </a:prstGeom>
-          <a:noFill/>
-        </p:spPr>
-        <p:txBody>
-          <a:bodyPr wrap="square">
-            <a:spAutoFit/>
-          </a:bodyPr>
-          <a:lstStyle/>
-          <a:p>
-            <a:pPr algn="l"/>
-            <a:r>
-              <a:rPr sz="2400" b="1" i="0">
-                <a:solidFill>
-                  <a:srgbClr val="1F2C56"/>
-                </a:solidFill>
-                <a:latin typeface="Source Serif 4"/>
-              </a:rPr>
-              <a:t>Arbeitsblatt A: Meine Trigger-Bibliothek</a:t>
-            </a:r>
-          </a:p>
-        </p:txBody>
-      </p:sp>
-      <p:sp>
-        <p:nvSpPr>
-          <p:cNvPr id="8" name="TextBox 7"/>
-          <p:cNvSpPr txBox="1"/>
-          <p:nvPr/>
-        </p:nvSpPr>
-        <p:spPr>
-          <a:xfrm>
-            <a:off x="685800" y="1417320"/>
-            <a:ext cx="10817352" cy="5029200"/>
-          </a:xfrm>
-          <a:prstGeom prst="rect">
-            <a:avLst/>
-          </a:prstGeom>
-          <a:noFill/>
-        </p:spPr>
-        <p:txBody>
-          <a:bodyPr wrap="square">
-            <a:spAutoFit/>
-          </a:bodyPr>
-          <a:lstStyle/>
-          <a:p>
-            <a:pPr>
-              <a:spcBef>
-                <a:spcPts val="400"/>
-              </a:spcBef>
-              <a:spcAft>
-                <a:spcPts val="200"/>
-              </a:spcAft>
-            </a:pPr>
-            <a:r>
-              <a:rPr sz="1200">
-                <a:solidFill>
-                  <a:srgbClr val="3D5466"/>
-                </a:solidFill>
-                <a:latin typeface="Arial"/>
-              </a:rPr>
-              <a:t>(Nutzen Sie die Priorisierungstabelle aus Sec 4.6, um Ihren wirkungsvollsten Trigger zu bestimmen)</a:t>
-            </a:r>
-          </a:p>
-          <a:p>
-            <a:pPr>
-              <a:spcBef>
-                <a:spcPts val="400"/>
-              </a:spcBef>
-              <a:spcAft>
-                <a:spcPts val="200"/>
-              </a:spcAft>
-            </a:pPr>
-            <a:r>
-              <a:rPr sz="1200">
-                <a:solidFill>
-                  <a:srgbClr val="3D5466"/>
-                </a:solidFill>
-                <a:latin typeface="Arial"/>
-              </a:rPr>
-              <a:t>Ergänzen Sie für Ihren Bestand die relevantesten Trigger je Typ:</a:t>
-            </a:r>
-          </a:p>
-          <a:p>
-            <a:pPr>
-              <a:spcBef>
-                <a:spcPts val="400"/>
-              </a:spcBef>
-              <a:spcAft>
-                <a:spcPts val="200"/>
-              </a:spcAft>
-            </a:pPr>
-            <a:r>
-              <a:rPr sz="1200">
-                <a:solidFill>
-                  <a:srgbClr val="3D5466"/>
-                </a:solidFill>
-                <a:latin typeface="Arial"/>
-              </a:rPr>
-              <a:t>Mein wirkungsvollster Trigger für die nächsten 4 Wochen:</a:t>
-            </a:r>
-          </a:p>
-        </p:txBody>
-      </p:sp>
-      <p:sp>
-        <p:nvSpPr>
-          <p:cNvPr id="9" name="Rectangle 8"/>
+      <p:graphicFrame>
+        <p:nvGraphicFramePr>
+          <p:cNvPr id="7" name="Table 6"/>
+          <p:cNvGraphicFramePr>
+            <a:graphicFrameLocks noGrp="1"/>
+          </p:cNvGraphicFramePr>
+          <p:nvPr/>
+        </p:nvGraphicFramePr>
+        <p:xfrm>
+          <a:off x="685800" y="1417320"/>
+          <a:ext cx="10817352" cy="2304288"/>
+        </p:xfrm>
+        <a:graphic>
+          <a:graphicData uri="http://schemas.openxmlformats.org/drawingml/2006/table">
+            <a:tbl>
+              <a:tblPr firstRow="1" bandRow="1">
+                <a:tableStyleId>{5C22544A-7EE6-4342-B048-85BDC9FD1C3A}</a:tableStyleId>
+              </a:tblPr>
+              <a:tblGrid>
+                <a:gridCol w="2163470"/>
+                <a:gridCol w="2163470"/>
+                <a:gridCol w="2163470"/>
+                <a:gridCol w="2163470"/>
+                <a:gridCol w="2163472"/>
+              </a:tblGrid>
+              <a:tr h="384048">
+                <a:tc>
+                  <a:txBody>
+                    <a:bodyPr/>
+                    <a:lstStyle/>
+                    <a:p>
+                      <a:r>
+                        <a:rPr sz="1100" b="1">
+                          <a:solidFill>
+                            <a:srgbClr val="FFFFFF"/>
+                          </a:solidFill>
+                          <a:latin typeface="Arial"/>
+                        </a:rPr>
+                        <a:t>Kunde (anonymisiert)</a:t>
+                      </a:r>
+                    </a:p>
+                  </a:txBody>
+                  <a:tcPr>
+                    <a:solidFill>
+                      <a:srgbClr val="1F2C56"/>
+                    </a:solidFill>
+                  </a:tcPr>
+                </a:tc>
+                <a:tc>
+                  <a:txBody>
+                    <a:bodyPr/>
+                    <a:lstStyle/>
+                    <a:p>
+                      <a:r>
+                        <a:rPr sz="1100" b="1">
+                          <a:solidFill>
+                            <a:srgbClr val="FFFFFF"/>
+                          </a:solidFill>
+                          <a:latin typeface="Arial"/>
+                        </a:rPr>
+                        <a:t>Geburtsdatum ✓/✗</a:t>
+                      </a:r>
+                    </a:p>
+                  </a:txBody>
+                  <a:tcPr>
+                    <a:solidFill>
+                      <a:srgbClr val="1F2C56"/>
+                    </a:solidFill>
+                  </a:tcPr>
+                </a:tc>
+                <a:tc>
+                  <a:txBody>
+                    <a:bodyPr/>
+                    <a:lstStyle/>
+                    <a:p>
+                      <a:r>
+                        <a:rPr sz="1100" b="1">
+                          <a:solidFill>
+                            <a:srgbClr val="FFFFFF"/>
+                          </a:solidFill>
+                          <a:latin typeface="Arial"/>
+                        </a:rPr>
+                        <a:t>Branche korrekt ✓/✗</a:t>
+                      </a:r>
+                    </a:p>
+                  </a:txBody>
+                  <a:tcPr>
+                    <a:solidFill>
+                      <a:srgbClr val="1F2C56"/>
+                    </a:solidFill>
+                  </a:tcPr>
+                </a:tc>
+                <a:tc>
+                  <a:txBody>
+                    <a:bodyPr/>
+                    <a:lstStyle/>
+                    <a:p>
+                      <a:r>
+                        <a:rPr sz="1100" b="1">
+                          <a:solidFill>
+                            <a:srgbClr val="FFFFFF"/>
+                          </a:solidFill>
+                          <a:latin typeface="Arial"/>
+                        </a:rPr>
+                        <a:t>JA aktuell ✓/✗</a:t>
+                      </a:r>
+                    </a:p>
+                  </a:txBody>
+                  <a:tcPr>
+                    <a:solidFill>
+                      <a:srgbClr val="1F2C56"/>
+                    </a:solidFill>
+                  </a:tcPr>
+                </a:tc>
+                <a:tc>
+                  <a:txBody>
+                    <a:bodyPr/>
+                    <a:lstStyle/>
+                    <a:p>
+                      <a:r>
+                        <a:rPr sz="1100" b="1">
+                          <a:solidFill>
+                            <a:srgbClr val="FFFFFF"/>
+                          </a:solidFill>
+                          <a:latin typeface="Arial"/>
+                        </a:rPr>
+                        <a:t>Verbund aktuell ✓/✗</a:t>
+                      </a:r>
+                    </a:p>
+                  </a:txBody>
+                  <a:tcPr>
+                    <a:solidFill>
+                      <a:srgbClr val="1F2C56"/>
+                    </a:solidFill>
+                  </a:tcPr>
+                </a:tc>
+              </a:tr>
+              <a:tr h="384048">
+                <a:tc>
+                  <a:txBody>
+                    <a:bodyPr/>
+                    <a:lstStyle/>
+                    <a:p/>
+                  </a:txBody>
+                  <a:tcPr/>
+                </a:tc>
+                <a:tc>
+                  <a:txBody>
+                    <a:bodyPr/>
+                    <a:lstStyle/>
+                    <a:p/>
+                  </a:txBody>
+                  <a:tcPr/>
+                </a:tc>
+                <a:tc>
+                  <a:txBody>
+                    <a:bodyPr/>
+                    <a:lstStyle/>
+                    <a:p/>
+                  </a:txBody>
+                  <a:tcPr/>
+                </a:tc>
+                <a:tc>
+                  <a:txBody>
+                    <a:bodyPr/>
+                    <a:lstStyle/>
+                    <a:p/>
+                  </a:txBody>
+                  <a:tcPr/>
+                </a:tc>
+                <a:tc>
+                  <a:txBody>
+                    <a:bodyPr/>
+                    <a:lstStyle/>
+                    <a:p/>
+                  </a:txBody>
+                  <a:tcPr/>
+                </a:tc>
+              </a:tr>
+              <a:tr h="384048">
+                <a:tc>
+                  <a:txBody>
+                    <a:bodyPr/>
+                    <a:lstStyle/>
+                    <a:p/>
+                  </a:txBody>
+                  <a:tcPr/>
+                </a:tc>
+                <a:tc>
+                  <a:txBody>
+                    <a:bodyPr/>
+                    <a:lstStyle/>
+                    <a:p/>
+                  </a:txBody>
+                  <a:tcPr/>
+                </a:tc>
+                <a:tc>
+                  <a:txBody>
+                    <a:bodyPr/>
+                    <a:lstStyle/>
+                    <a:p/>
+                  </a:txBody>
+                  <a:tcPr/>
+                </a:tc>
+                <a:tc>
+                  <a:txBody>
+                    <a:bodyPr/>
+                    <a:lstStyle/>
+                    <a:p/>
+                  </a:txBody>
+                  <a:tcPr/>
+                </a:tc>
+                <a:tc>
+                  <a:txBody>
+                    <a:bodyPr/>
+                    <a:lstStyle/>
+                    <a:p/>
+                  </a:txBody>
+                  <a:tcPr/>
+                </a:tc>
+              </a:tr>
+              <a:tr h="384048">
+                <a:tc>
+                  <a:txBody>
+                    <a:bodyPr/>
+                    <a:lstStyle/>
+                    <a:p/>
+                  </a:txBody>
+                  <a:tcPr/>
+                </a:tc>
+                <a:tc>
+                  <a:txBody>
+                    <a:bodyPr/>
+                    <a:lstStyle/>
+                    <a:p/>
+                  </a:txBody>
+                  <a:tcPr/>
+                </a:tc>
+                <a:tc>
+                  <a:txBody>
+                    <a:bodyPr/>
+                    <a:lstStyle/>
+                    <a:p/>
+                  </a:txBody>
+                  <a:tcPr/>
+                </a:tc>
+                <a:tc>
+                  <a:txBody>
+                    <a:bodyPr/>
+                    <a:lstStyle/>
+                    <a:p/>
+                  </a:txBody>
+                  <a:tcPr/>
+                </a:tc>
+                <a:tc>
+                  <a:txBody>
+                    <a:bodyPr/>
+                    <a:lstStyle/>
+                    <a:p/>
+                  </a:txBody>
+                  <a:tcPr/>
+                </a:tc>
+              </a:tr>
+              <a:tr h="384048">
+                <a:tc>
+                  <a:txBody>
+                    <a:bodyPr/>
+                    <a:lstStyle/>
+                    <a:p/>
+                  </a:txBody>
+                  <a:tcPr/>
+                </a:tc>
+                <a:tc>
+                  <a:txBody>
+                    <a:bodyPr/>
+                    <a:lstStyle/>
+                    <a:p/>
+                  </a:txBody>
+                  <a:tcPr/>
+                </a:tc>
+                <a:tc>
+                  <a:txBody>
+                    <a:bodyPr/>
+                    <a:lstStyle/>
+                    <a:p/>
+                  </a:txBody>
+                  <a:tcPr/>
+                </a:tc>
+                <a:tc>
+                  <a:txBody>
+                    <a:bodyPr/>
+                    <a:lstStyle/>
+                    <a:p/>
+                  </a:txBody>
+                  <a:tcPr/>
+                </a:tc>
+                <a:tc>
+                  <a:txBody>
+                    <a:bodyPr/>
+                    <a:lstStyle/>
+                    <a:p/>
+                  </a:txBody>
+                  <a:tcPr/>
+                </a:tc>
+              </a:tr>
+              <a:tr h="384048">
+                <a:tc>
+                  <a:txBody>
+                    <a:bodyPr/>
+                    <a:lstStyle/>
+                    <a:p/>
+                  </a:txBody>
+                  <a:tcPr/>
+                </a:tc>
+                <a:tc>
+                  <a:txBody>
+                    <a:bodyPr/>
+                    <a:lstStyle/>
+                    <a:p/>
+                  </a:txBody>
+                  <a:tcPr/>
+                </a:tc>
+                <a:tc>
+                  <a:txBody>
+                    <a:bodyPr/>
+                    <a:lstStyle/>
+                    <a:p/>
+                  </a:txBody>
+                  <a:tcPr/>
+                </a:tc>
+                <a:tc>
+                  <a:txBody>
+                    <a:bodyPr/>
+                    <a:lstStyle/>
+                    <a:p/>
+                  </a:txBody>
+                  <a:tcPr/>
+                </a:tc>
+                <a:tc>
+                  <a:txBody>
+                    <a:bodyPr/>
+                    <a:lstStyle/>
+                    <a:p/>
+                  </a:txBody>
+                  <a:tcPr/>
+                </a:tc>
+              </a:tr>
+            </a:tbl>
+          </a:graphicData>
+        </a:graphic>
+      </p:graphicFrame>
+      <p:sp>
+        <p:nvSpPr>
+          <p:cNvPr id="8" name="Rectangle 7"/>
           <p:cNvSpPr/>
           <p:nvPr/>
         </p:nvSpPr>
@@ -6984,7 +7337,7 @@
       </p:sp>
       <p:sp>
         <p:nvSpPr>
-          <p:cNvPr id="10" name="TextBox 9"/>
+          <p:cNvPr id="9" name="TextBox 8"/>
           <p:cNvSpPr txBox="1"/>
           <p:nvPr/>
         </p:nvSpPr>
@@ -7017,120 +7370,16 @@
           </a:p>
         </p:txBody>
       </p:sp>
-    </p:spTree>
-  </p:cSld>
-  <p:clrMapOvr>
-    <a:masterClrMapping/>
-  </p:clrMapOvr>
-</p:sld>
-</file>
-
-<file path=ppt/slides/slide15.xml><?xml version="1.0" encoding="utf-8"?>
-<p:sld xmlns:a="http://schemas.openxmlformats.org/drawingml/2006/main" xmlns:p="http://schemas.openxmlformats.org/presentationml/2006/main" xmlns:r="http://schemas.openxmlformats.org/officeDocument/2006/relationships">
-  <p:cSld>
-    <p:spTree>
-      <p:nvGrpSpPr>
-        <p:cNvPr id="1" name=""/>
-        <p:cNvGrpSpPr/>
-        <p:nvPr/>
-      </p:nvGrpSpPr>
-      <p:grpSpPr/>
-      <p:sp>
-        <p:nvSpPr>
-          <p:cNvPr id="2" name="Rectangle 1"/>
-          <p:cNvSpPr/>
-          <p:nvPr/>
-        </p:nvSpPr>
-        <p:spPr>
-          <a:xfrm>
-            <a:off x="0" y="0"/>
-            <a:ext cx="12188952" cy="6858000"/>
-          </a:xfrm>
-          <a:prstGeom prst="rect">
-            <a:avLst/>
-          </a:prstGeom>
-          <a:solidFill>
-            <a:srgbClr val="EDEDF3"/>
-          </a:solidFill>
-          <a:ln>
-            <a:noFill/>
-          </a:ln>
-        </p:spPr>
-        <p:style>
-          <a:lnRef idx="1">
-            <a:schemeClr val="accent1"/>
-          </a:lnRef>
-          <a:fillRef idx="3">
-            <a:schemeClr val="accent1"/>
-          </a:fillRef>
-          <a:effectRef idx="2">
-            <a:schemeClr val="accent1"/>
-          </a:effectRef>
-          <a:fontRef idx="minor">
-            <a:schemeClr val="lt1"/>
-          </a:fontRef>
-        </p:style>
-        <p:txBody>
-          <a:bodyPr rtlCol="0" anchor="ctr"/>
-          <a:lstStyle/>
-          <a:p>
-            <a:pPr algn="ctr"/>
-          </a:p>
-        </p:txBody>
-      </p:sp>
-      <p:sp>
-        <p:nvSpPr>
-          <p:cNvPr id="3" name="Rectangle 2"/>
-          <p:cNvSpPr/>
-          <p:nvPr/>
-        </p:nvSpPr>
-        <p:spPr>
-          <a:xfrm>
-            <a:off x="0" y="0"/>
-            <a:ext cx="12188952" cy="50292"/>
-          </a:xfrm>
-          <a:prstGeom prst="rect">
-            <a:avLst/>
-          </a:prstGeom>
-          <a:solidFill>
-            <a:srgbClr val="1F2C56"/>
-          </a:solidFill>
-          <a:ln>
-            <a:noFill/>
-          </a:ln>
-        </p:spPr>
-        <p:style>
-          <a:lnRef idx="1">
-            <a:schemeClr val="accent1"/>
-          </a:lnRef>
-          <a:fillRef idx="3">
-            <a:schemeClr val="accent1"/>
-          </a:fillRef>
-          <a:effectRef idx="2">
-            <a:schemeClr val="accent1"/>
-          </a:effectRef>
-          <a:fontRef idx="minor">
-            <a:schemeClr val="lt1"/>
-          </a:fontRef>
-        </p:style>
-        <p:txBody>
-          <a:bodyPr rtlCol="0" anchor="ctr"/>
-          <a:lstStyle/>
-          <a:p>
-            <a:pPr algn="ctr"/>
-          </a:p>
-        </p:txBody>
-      </p:sp>
-      <p:sp>
-        <p:nvSpPr>
-          <p:cNvPr id="4" name="TextBox 3"/>
+      <p:sp>
+        <p:nvSpPr>
+          <p:cNvPr id="10" name="TextBox 9"/>
           <p:cNvSpPr txBox="1"/>
           <p:nvPr/>
         </p:nvSpPr>
         <p:spPr>
           <a:xfrm>
-            <a:off x="685800" y="109728"/>
-            <a:ext cx="10817352" cy="228600"/>
+            <a:off x="7176211" y="6583680"/>
+            <a:ext cx="4326940" cy="256032"/>
           </a:xfrm>
           <a:prstGeom prst="rect">
             <a:avLst/>
@@ -7143,214 +7392,15 @@
           </a:bodyPr>
           <a:lstStyle/>
           <a:p>
-            <a:pPr algn="l"/>
-            <a:r>
-              <a:rPr sz="750">
-                <a:solidFill>
-                  <a:srgbClr val="78808C"/>
+            <a:pPr algn="r"/>
+            <a:r>
+              <a:rPr sz="700">
+                <a:solidFill>
+                  <a:srgbClr val="A0B4D2"/>
                 </a:solidFill>
                 <a:latin typeface="JetBrains Mono"/>
               </a:rPr>
-              <a:t>M18  ·  INHALT</a:t>
-            </a:r>
-          </a:p>
-        </p:txBody>
-      </p:sp>
-      <p:sp>
-        <p:nvSpPr>
-          <p:cNvPr id="5" name="Rectangle 4"/>
-          <p:cNvSpPr/>
-          <p:nvPr/>
-        </p:nvSpPr>
-        <p:spPr>
-          <a:xfrm>
-            <a:off x="0" y="1234440"/>
-            <a:ext cx="12188952" cy="12700"/>
-          </a:xfrm>
-          <a:prstGeom prst="rect">
-            <a:avLst/>
-          </a:prstGeom>
-          <a:solidFill>
-            <a:srgbClr val="D8DFE4"/>
-          </a:solidFill>
-          <a:ln>
-            <a:noFill/>
-          </a:ln>
-        </p:spPr>
-        <p:style>
-          <a:lnRef idx="1">
-            <a:schemeClr val="accent1"/>
-          </a:lnRef>
-          <a:fillRef idx="3">
-            <a:schemeClr val="accent1"/>
-          </a:fillRef>
-          <a:effectRef idx="2">
-            <a:schemeClr val="accent1"/>
-          </a:effectRef>
-          <a:fontRef idx="minor">
-            <a:schemeClr val="lt1"/>
-          </a:fontRef>
-        </p:style>
-        <p:txBody>
-          <a:bodyPr rtlCol="0" anchor="ctr"/>
-          <a:lstStyle/>
-          <a:p>
-            <a:pPr algn="ctr"/>
-          </a:p>
-        </p:txBody>
-      </p:sp>
-      <p:sp>
-        <p:nvSpPr>
-          <p:cNvPr id="6" name="Rectangle 5"/>
-          <p:cNvSpPr/>
-          <p:nvPr/>
-        </p:nvSpPr>
-        <p:spPr>
-          <a:xfrm>
-            <a:off x="685800" y="502920"/>
-            <a:ext cx="36576" cy="658368"/>
-          </a:xfrm>
-          <a:prstGeom prst="rect">
-            <a:avLst/>
-          </a:prstGeom>
-          <a:solidFill>
-            <a:srgbClr val="D9C089"/>
-          </a:solidFill>
-          <a:ln>
-            <a:noFill/>
-          </a:ln>
-        </p:spPr>
-        <p:style>
-          <a:lnRef idx="1">
-            <a:schemeClr val="accent1"/>
-          </a:lnRef>
-          <a:fillRef idx="3">
-            <a:schemeClr val="accent1"/>
-          </a:fillRef>
-          <a:effectRef idx="2">
-            <a:schemeClr val="accent1"/>
-          </a:effectRef>
-          <a:fontRef idx="minor">
-            <a:schemeClr val="lt1"/>
-          </a:fontRef>
-        </p:style>
-        <p:txBody>
-          <a:bodyPr rtlCol="0" anchor="ctr"/>
-          <a:lstStyle/>
-          <a:p>
-            <a:pPr algn="ctr"/>
-          </a:p>
-        </p:txBody>
-      </p:sp>
-      <p:sp>
-        <p:nvSpPr>
-          <p:cNvPr id="7" name="TextBox 6"/>
-          <p:cNvSpPr txBox="1"/>
-          <p:nvPr/>
-        </p:nvSpPr>
-        <p:spPr>
-          <a:xfrm>
-            <a:off x="813816" y="502920"/>
-            <a:ext cx="10634472" cy="685800"/>
-          </a:xfrm>
-          <a:prstGeom prst="rect">
-            <a:avLst/>
-          </a:prstGeom>
-          <a:noFill/>
-        </p:spPr>
-        <p:txBody>
-          <a:bodyPr wrap="square">
-            <a:spAutoFit/>
-          </a:bodyPr>
-          <a:lstStyle/>
-          <a:p>
-            <a:pPr algn="l"/>
-            <a:r>
-              <a:rPr sz="2400" b="1" i="0">
-                <a:solidFill>
-                  <a:srgbClr val="1F2C56"/>
-                </a:solidFill>
-                <a:latin typeface="Source Serif 4"/>
-              </a:rPr>
-              <a:t>Arbeitsblatt B: Datenqualitäts-Audit (Top-10-Kunden)</a:t>
-            </a:r>
-          </a:p>
-        </p:txBody>
-      </p:sp>
-      <p:sp>
-        <p:nvSpPr>
-          <p:cNvPr id="8" name="Rectangle 7"/>
-          <p:cNvSpPr/>
-          <p:nvPr/>
-        </p:nvSpPr>
-        <p:spPr>
-          <a:xfrm>
-            <a:off x="0" y="6510528"/>
-            <a:ext cx="12188952" cy="347472"/>
-          </a:xfrm>
-          <a:prstGeom prst="rect">
-            <a:avLst/>
-          </a:prstGeom>
-          <a:solidFill>
-            <a:srgbClr val="0A1937"/>
-          </a:solidFill>
-          <a:ln>
-            <a:noFill/>
-          </a:ln>
-        </p:spPr>
-        <p:style>
-          <a:lnRef idx="1">
-            <a:schemeClr val="accent1"/>
-          </a:lnRef>
-          <a:fillRef idx="3">
-            <a:schemeClr val="accent1"/>
-          </a:fillRef>
-          <a:effectRef idx="2">
-            <a:schemeClr val="accent1"/>
-          </a:effectRef>
-          <a:fontRef idx="minor">
-            <a:schemeClr val="lt1"/>
-          </a:fontRef>
-        </p:style>
-        <p:txBody>
-          <a:bodyPr rtlCol="0" anchor="ctr"/>
-          <a:lstStyle/>
-          <a:p>
-            <a:pPr algn="ctr"/>
-          </a:p>
-        </p:txBody>
-      </p:sp>
-      <p:sp>
-        <p:nvSpPr>
-          <p:cNvPr id="9" name="TextBox 8"/>
-          <p:cNvSpPr txBox="1"/>
-          <p:nvPr/>
-        </p:nvSpPr>
-        <p:spPr>
-          <a:xfrm>
-            <a:off x="685800" y="6583680"/>
-            <a:ext cx="6490411" cy="256032"/>
-          </a:xfrm>
-          <a:prstGeom prst="rect">
-            <a:avLst/>
-          </a:prstGeom>
-          <a:noFill/>
-        </p:spPr>
-        <p:txBody>
-          <a:bodyPr wrap="none">
-            <a:spAutoFit/>
-          </a:bodyPr>
-          <a:lstStyle/>
-          <a:p>
-            <a:pPr algn="l"/>
-            <a:r>
-              <a:rPr sz="700">
-                <a:solidFill>
-                  <a:srgbClr val="A0B4D2"/>
-                </a:solidFill>
-                <a:latin typeface="JetBrains Mono"/>
-              </a:rPr>
-              <a:t>Benedikt Zoller Coaching  ·  FKB Campus  ·  M18</a:t>
+              <a:t>Übersicht</a:t>
             </a:r>
           </a:p>
         </p:txBody>
@@ -8268,7 +8318,7 @@
                 </a:solidFill>
                 <a:latin typeface="JetBrains Mono"/>
               </a:rPr>
-              <a:t>M18  ·  INHALT</a:t>
+              <a:t>AGENDA  ·  M18</a:t>
             </a:r>
           </a:p>
         </p:txBody>
@@ -8318,57 +8368,14 @@
       </p:sp>
       <p:sp>
         <p:nvSpPr>
-          <p:cNvPr id="6" name="Rectangle 5"/>
-          <p:cNvSpPr/>
+          <p:cNvPr id="6" name="TextBox 5"/>
+          <p:cNvSpPr txBox="1"/>
           <p:nvPr/>
         </p:nvSpPr>
         <p:spPr>
           <a:xfrm>
             <a:off x="685800" y="502920"/>
-            <a:ext cx="36576" cy="658368"/>
-          </a:xfrm>
-          <a:prstGeom prst="rect">
-            <a:avLst/>
-          </a:prstGeom>
-          <a:solidFill>
-            <a:srgbClr val="D9C089"/>
-          </a:solidFill>
-          <a:ln>
-            <a:noFill/>
-          </a:ln>
-        </p:spPr>
-        <p:style>
-          <a:lnRef idx="1">
-            <a:schemeClr val="accent1"/>
-          </a:lnRef>
-          <a:fillRef idx="3">
-            <a:schemeClr val="accent1"/>
-          </a:fillRef>
-          <a:effectRef idx="2">
-            <a:schemeClr val="accent1"/>
-          </a:effectRef>
-          <a:fontRef idx="minor">
-            <a:schemeClr val="lt1"/>
-          </a:fontRef>
-        </p:style>
-        <p:txBody>
-          <a:bodyPr rtlCol="0" anchor="ctr"/>
-          <a:lstStyle/>
-          <a:p>
-            <a:pPr algn="ctr"/>
-          </a:p>
-        </p:txBody>
-      </p:sp>
-      <p:sp>
-        <p:nvSpPr>
-          <p:cNvPr id="7" name="TextBox 6"/>
-          <p:cNvSpPr txBox="1"/>
-          <p:nvPr/>
-        </p:nvSpPr>
-        <p:spPr>
-          <a:xfrm>
-            <a:off x="813816" y="502920"/>
-            <a:ext cx="10634472" cy="685800"/>
+            <a:ext cx="10817352" cy="658368"/>
           </a:xfrm>
           <a:prstGeom prst="rect">
             <a:avLst/>
@@ -8383,27 +8390,27 @@
           <a:p>
             <a:pPr algn="l"/>
             <a:r>
-              <a:rPr sz="2400" b="1" i="0">
+              <a:rPr sz="2600" b="1" i="0">
                 <a:solidFill>
                   <a:srgbClr val="1F2C56"/>
                 </a:solidFill>
                 <a:latin typeface="Source Serif 4"/>
               </a:rPr>
-              <a:t>Vom Zufallskontakt zum Signal-gesteuerten Gespräch</a:t>
-            </a:r>
-          </a:p>
-        </p:txBody>
-      </p:sp>
-      <p:sp>
-        <p:nvSpPr>
-          <p:cNvPr id="8" name="TextBox 7"/>
+              <a:t>So läuft das Modul</a:t>
+            </a:r>
+          </a:p>
+        </p:txBody>
+      </p:sp>
+      <p:sp>
+        <p:nvSpPr>
+          <p:cNvPr id="7" name="TextBox 6"/>
           <p:cNvSpPr txBox="1"/>
           <p:nvPr/>
         </p:nvSpPr>
         <p:spPr>
           <a:xfrm>
-            <a:off x="685800" y="1417320"/>
-            <a:ext cx="10817352" cy="5029200"/>
+            <a:off x="685800" y="1463040"/>
+            <a:ext cx="10817352" cy="4937760"/>
           </a:xfrm>
           <a:prstGeom prst="rect">
             <a:avLst/>
@@ -8418,27 +8425,369 @@
           <a:p>
             <a:pPr>
               <a:spcBef>
-                <a:spcPts val="600"/>
+                <a:spcPts val="400"/>
               </a:spcBef>
               <a:spcAft>
-                <a:spcPts val="200"/>
+                <a:spcPts val="100"/>
               </a:spcAft>
             </a:pPr>
             <a:r>
-              <a:rPr sz="1200" i="1">
+              <a:rPr sz="900">
+                <a:solidFill>
+                  <a:srgbClr val="78808C"/>
+                </a:solidFill>
+                <a:latin typeface="Consolas"/>
+              </a:rPr>
+              <a:t>00:00       </a:t>
+            </a:r>
+            <a:r>
+              <a:rPr sz="1200" b="1">
                 <a:solidFill>
                   <a:srgbClr val="3D5466"/>
                 </a:solidFill>
                 <a:latin typeface="Arial"/>
               </a:rPr>
-              <a:t>→  Datengetriebener Vertrieb bedeutet nicht, Kunden zu überwachen. Es bedeutet, die Signale zu lesen, die der Kunde ohnehin sendet – und im richtigen Moment präsent zu sein.</a:t>
-            </a:r>
-          </a:p>
-        </p:txBody>
-      </p:sp>
-      <p:sp>
-        <p:nvSpPr>
-          <p:cNvPr id="9" name="Rectangle 8"/>
+              <a:t>  Einstieg</a:t>
+            </a:r>
+            <a:r>
+              <a:rPr sz="900">
+                <a:solidFill>
+                  <a:srgbClr val="78808C"/>
+                </a:solidFill>
+                <a:latin typeface="Arial"/>
+              </a:rPr>
+              <a:t>  ·  Blitzlicht</a:t>
+            </a:r>
+          </a:p>
+          <a:p>
+            <a:pPr>
+              <a:spcBef>
+                <a:spcPts val="400"/>
+              </a:spcBef>
+              <a:spcAft>
+                <a:spcPts val="100"/>
+              </a:spcAft>
+            </a:pPr>
+            <a:r>
+              <a:rPr sz="900">
+                <a:solidFill>
+                  <a:srgbClr val="78808C"/>
+                </a:solidFill>
+                <a:latin typeface="Consolas"/>
+              </a:rPr>
+              <a:t>00:08       </a:t>
+            </a:r>
+            <a:r>
+              <a:rPr sz="1200" b="1">
+                <a:solidFill>
+                  <a:srgbClr val="3D5466"/>
+                </a:solidFill>
+                <a:latin typeface="Arial"/>
+              </a:rPr>
+              <a:t>  Theorie-Block I</a:t>
+            </a:r>
+            <a:r>
+              <a:rPr sz="900">
+                <a:solidFill>
+                  <a:srgbClr val="78808C"/>
+                </a:solidFill>
+                <a:latin typeface="Arial"/>
+              </a:rPr>
+              <a:t>  ·  Vortrag + Folie</a:t>
+            </a:r>
+          </a:p>
+          <a:p>
+            <a:pPr>
+              <a:spcBef>
+                <a:spcPts val="400"/>
+              </a:spcBef>
+              <a:spcAft>
+                <a:spcPts val="100"/>
+              </a:spcAft>
+            </a:pPr>
+            <a:r>
+              <a:rPr sz="900">
+                <a:solidFill>
+                  <a:srgbClr val="78808C"/>
+                </a:solidFill>
+                <a:latin typeface="Consolas"/>
+              </a:rPr>
+              <a:t>00:23       </a:t>
+            </a:r>
+            <a:r>
+              <a:rPr sz="1200" b="1">
+                <a:solidFill>
+                  <a:srgbClr val="3D5466"/>
+                </a:solidFill>
+                <a:latin typeface="Arial"/>
+              </a:rPr>
+              <a:t>  Live-Demo</a:t>
+            </a:r>
+            <a:r>
+              <a:rPr sz="900">
+                <a:solidFill>
+                  <a:srgbClr val="78808C"/>
+                </a:solidFill>
+                <a:latin typeface="Arial"/>
+              </a:rPr>
+              <a:t>  ·  Beamer-Demo</a:t>
+            </a:r>
+          </a:p>
+          <a:p>
+            <a:pPr>
+              <a:spcBef>
+                <a:spcPts val="400"/>
+              </a:spcBef>
+              <a:spcAft>
+                <a:spcPts val="100"/>
+              </a:spcAft>
+            </a:pPr>
+            <a:r>
+              <a:rPr sz="900">
+                <a:solidFill>
+                  <a:srgbClr val="78808C"/>
+                </a:solidFill>
+                <a:latin typeface="Consolas"/>
+              </a:rPr>
+              <a:t>00:38       </a:t>
+            </a:r>
+            <a:r>
+              <a:rPr sz="1200" b="1">
+                <a:solidFill>
+                  <a:srgbClr val="3D5466"/>
+                </a:solidFill>
+                <a:latin typeface="Arial"/>
+              </a:rPr>
+              <a:t>  Einzelübung I</a:t>
+            </a:r>
+            <a:r>
+              <a:rPr sz="900">
+                <a:solidFill>
+                  <a:srgbClr val="78808C"/>
+                </a:solidFill>
+                <a:latin typeface="Arial"/>
+              </a:rPr>
+              <a:t>  ·  agree-Einzelarbeit</a:t>
+            </a:r>
+          </a:p>
+          <a:p>
+            <a:pPr>
+              <a:spcBef>
+                <a:spcPts val="400"/>
+              </a:spcBef>
+              <a:spcAft>
+                <a:spcPts val="100"/>
+              </a:spcAft>
+            </a:pPr>
+            <a:r>
+              <a:rPr sz="900">
+                <a:solidFill>
+                  <a:srgbClr val="78808C"/>
+                </a:solidFill>
+                <a:latin typeface="Consolas"/>
+              </a:rPr>
+              <a:t>01:08       </a:t>
+            </a:r>
+            <a:r>
+              <a:rPr sz="1200" b="1">
+                <a:solidFill>
+                  <a:srgbClr val="3D5466"/>
+                </a:solidFill>
+                <a:latin typeface="Arial"/>
+              </a:rPr>
+              <a:t>  Partnercheck</a:t>
+            </a:r>
+            <a:r>
+              <a:rPr sz="900">
+                <a:solidFill>
+                  <a:srgbClr val="78808C"/>
+                </a:solidFill>
+                <a:latin typeface="Arial"/>
+              </a:rPr>
+              <a:t>  ·  Partnerarbeit</a:t>
+            </a:r>
+          </a:p>
+          <a:p>
+            <a:pPr>
+              <a:spcBef>
+                <a:spcPts val="400"/>
+              </a:spcBef>
+              <a:spcAft>
+                <a:spcPts val="100"/>
+              </a:spcAft>
+            </a:pPr>
+            <a:r>
+              <a:rPr sz="900">
+                <a:solidFill>
+                  <a:srgbClr val="78808C"/>
+                </a:solidFill>
+                <a:latin typeface="Consolas"/>
+              </a:rPr>
+              <a:t>01:13       </a:t>
+            </a:r>
+            <a:r>
+              <a:rPr sz="1200" b="1">
+                <a:solidFill>
+                  <a:srgbClr val="3D5466"/>
+                </a:solidFill>
+                <a:latin typeface="Arial"/>
+              </a:rPr>
+              <a:t>  Transfer-Abschluss</a:t>
+            </a:r>
+            <a:r>
+              <a:rPr sz="900">
+                <a:solidFill>
+                  <a:srgbClr val="78808C"/>
+                </a:solidFill>
+                <a:latin typeface="Arial"/>
+              </a:rPr>
+              <a:t>  ·  Kartenabfrage</a:t>
+            </a:r>
+          </a:p>
+          <a:p>
+            <a:pPr>
+              <a:spcBef>
+                <a:spcPts val="400"/>
+              </a:spcBef>
+              <a:spcAft>
+                <a:spcPts val="100"/>
+              </a:spcAft>
+            </a:pPr>
+            <a:r>
+              <a:rPr sz="900">
+                <a:solidFill>
+                  <a:srgbClr val="78808C"/>
+                </a:solidFill>
+                <a:latin typeface="Consolas"/>
+              </a:rPr>
+              <a:t>01:18       </a:t>
+            </a:r>
+            <a:r>
+              <a:rPr sz="1200" b="1">
+                <a:solidFill>
+                  <a:srgbClr val="3D5466"/>
+                </a:solidFill>
+                <a:latin typeface="Arial"/>
+              </a:rPr>
+              <a:t>  Hinweis Datenqualität</a:t>
+            </a:r>
+            <a:r>
+              <a:rPr sz="900">
+                <a:solidFill>
+                  <a:srgbClr val="78808C"/>
+                </a:solidFill>
+                <a:latin typeface="Arial"/>
+              </a:rPr>
+              <a:t>  ·  Kurzerklärung</a:t>
+            </a:r>
+          </a:p>
+          <a:p>
+            <a:pPr>
+              <a:spcBef>
+                <a:spcPts val="400"/>
+              </a:spcBef>
+              <a:spcAft>
+                <a:spcPts val="100"/>
+              </a:spcAft>
+            </a:pPr>
+            <a:r>
+              <a:rPr sz="900">
+                <a:solidFill>
+                  <a:srgbClr val="78808C"/>
+                </a:solidFill>
+                <a:latin typeface="Consolas"/>
+              </a:rPr>
+              <a:t>01:23       </a:t>
+            </a:r>
+            <a:r>
+              <a:rPr sz="1200" b="1">
+                <a:solidFill>
+                  <a:srgbClr val="3D5466"/>
+                </a:solidFill>
+                <a:latin typeface="Arial"/>
+              </a:rPr>
+              <a:t>  Kurz-Wrap-up</a:t>
+            </a:r>
+            <a:r>
+              <a:rPr sz="900">
+                <a:solidFill>
+                  <a:srgbClr val="78808C"/>
+                </a:solidFill>
+                <a:latin typeface="Arial"/>
+              </a:rPr>
+              <a:t>  ·  Frontal</a:t>
+            </a:r>
+          </a:p>
+          <a:p>
+            <a:pPr>
+              <a:spcBef>
+                <a:spcPts val="400"/>
+              </a:spcBef>
+              <a:spcAft>
+                <a:spcPts val="100"/>
+              </a:spcAft>
+            </a:pPr>
+            <a:r>
+              <a:rPr sz="900">
+                <a:solidFill>
+                  <a:srgbClr val="78808C"/>
+                </a:solidFill>
+                <a:latin typeface="Consolas"/>
+              </a:rPr>
+              <a:t>01:28       </a:t>
+            </a:r>
+            <a:r>
+              <a:rPr sz="1200" b="1">
+                <a:solidFill>
+                  <a:srgbClr val="3D5466"/>
+                </a:solidFill>
+                <a:latin typeface="Arial"/>
+              </a:rPr>
+              <a:t>  Feedbackbogen</a:t>
+            </a:r>
+            <a:r>
+              <a:rPr sz="900">
+                <a:solidFill>
+                  <a:srgbClr val="78808C"/>
+                </a:solidFill>
+                <a:latin typeface="Arial"/>
+              </a:rPr>
+              <a:t>  ·  Einzeln</a:t>
+            </a:r>
+          </a:p>
+          <a:p>
+            <a:pPr>
+              <a:spcBef>
+                <a:spcPts val="400"/>
+              </a:spcBef>
+              <a:spcAft>
+                <a:spcPts val="100"/>
+              </a:spcAft>
+            </a:pPr>
+            <a:r>
+              <a:rPr sz="900">
+                <a:solidFill>
+                  <a:srgbClr val="78808C"/>
+                </a:solidFill>
+                <a:latin typeface="Consolas"/>
+              </a:rPr>
+              <a:t>01:30       </a:t>
+            </a:r>
+            <a:r>
+              <a:rPr sz="1200" b="1">
+                <a:solidFill>
+                  <a:srgbClr val="3D5466"/>
+                </a:solidFill>
+                <a:latin typeface="Arial"/>
+              </a:rPr>
+              <a:t>  Ende</a:t>
+            </a:r>
+          </a:p>
+        </p:txBody>
+      </p:sp>
+      <p:sp>
+        <p:nvSpPr>
+          <p:cNvPr id="8" name="Rectangle 7"/>
           <p:cNvSpPr/>
           <p:nvPr/>
         </p:nvSpPr>
@@ -8481,7 +8830,7 @@
       </p:sp>
       <p:sp>
         <p:nvSpPr>
-          <p:cNvPr id="10" name="TextBox 9"/>
+          <p:cNvPr id="9" name="TextBox 8"/>
           <p:cNvSpPr txBox="1"/>
           <p:nvPr/>
         </p:nvSpPr>
@@ -8769,7 +9118,7 @@
                 </a:solidFill>
                 <a:latin typeface="Source Serif 4"/>
               </a:rPr>
-              <a:t>Die drei Grundprinzipien</a:t>
+              <a:t>Vom Zufallskontakt zum Signal-gesteuerten Gespräch</a:t>
             </a:r>
           </a:p>
         </p:txBody>
@@ -8798,96 +9147,20 @@
           <a:p>
             <a:pPr>
               <a:spcBef>
-                <a:spcPts val="400"/>
+                <a:spcPts val="600"/>
               </a:spcBef>
               <a:spcAft>
                 <a:spcPts val="200"/>
               </a:spcAft>
             </a:pPr>
             <a:r>
-              <a:rPr sz="1300">
+              <a:rPr sz="1200" i="1">
                 <a:solidFill>
                   <a:srgbClr val="3D5466"/>
                 </a:solidFill>
                 <a:latin typeface="Arial"/>
               </a:rPr>
-              <a:t>▸  Timing schlägt Häufigkeit: Ein Anruf zum richtigen Moment ist wertvoller als zehn Anrufe zum falschen Zeitpunkt.</a:t>
-            </a:r>
-          </a:p>
-          <a:p>
-            <a:pPr>
-              <a:spcBef>
-                <a:spcPts val="400"/>
-              </a:spcBef>
-              <a:spcAft>
-                <a:spcPts val="200"/>
-              </a:spcAft>
-            </a:pPr>
-            <a:r>
-              <a:rPr sz="1300">
-                <a:solidFill>
-                  <a:srgbClr val="3D5466"/>
-                </a:solidFill>
-                <a:latin typeface="Arial"/>
-              </a:rPr>
-              <a:t>▸  Relevanz schlägt Breite: Ein auf den aktuellen Bedarf zugeschnittenes Gespräch überzeugt mehr als eine generische Produktpräsentation.</a:t>
-            </a:r>
-          </a:p>
-          <a:p>
-            <a:pPr>
-              <a:spcBef>
-                <a:spcPts val="400"/>
-              </a:spcBef>
-              <a:spcAft>
-                <a:spcPts val="200"/>
-              </a:spcAft>
-            </a:pPr>
-            <a:r>
-              <a:rPr sz="1300">
-                <a:solidFill>
-                  <a:srgbClr val="3D5466"/>
-                </a:solidFill>
-                <a:latin typeface="Arial"/>
-              </a:rPr>
-              <a:t>▸  Daten sind kein Ersatz für Beziehung: Trigger öffnen die Tür – das Gespräch selbst bleibt menschlich.</a:t>
-            </a:r>
-          </a:p>
-          <a:p>
-            <a:pPr>
-              <a:spcBef>
-                <a:spcPts val="400"/>
-              </a:spcBef>
-              <a:spcAft>
-                <a:spcPts val="200"/>
-              </a:spcAft>
-            </a:pPr>
-            <a:r>
-              <a:rPr sz="1200">
-                <a:solidFill>
-                  <a:srgbClr val="3D5466"/>
-                </a:solidFill>
-                <a:latin typeface="Arial"/>
-              </a:rPr>
-              <a:t>## 4.2 Trigger-Ereignisse: Drei Typen mit unterschiedlicher Logik</a:t>
-            </a:r>
-          </a:p>
-          <a:p>
-            <a:pPr>
-              <a:spcBef>
-                <a:spcPts val="400"/>
-              </a:spcBef>
-              <a:spcAft>
-                <a:spcPts val="200"/>
-              </a:spcAft>
-            </a:pPr>
-            <a:r>
-              <a:rPr sz="1200">
-                <a:solidFill>
-                  <a:srgbClr val="3D5466"/>
-                </a:solidFill>
-                <a:latin typeface="Arial"/>
-              </a:rPr>
-              <a:t>Ein Trigger ist ein Datenpunkt oder ein Ereignis, das mit hoher Wahrscheinlichkeit auf einen aktuellen oder bevorstehenden Beratungsbedarf hinweist. Es gibt drei Typen:</a:t>
+              <a:t>→  Datengetriebener Vertrieb bedeutet nicht, Kunden zu überwachen. Es bedeutet, die Signale zu lesen, die der Kunde ohnehin sendet – und im richtigen Moment präsent zu sein.</a:t>
             </a:r>
           </a:p>
         </p:txBody>
@@ -9225,14 +9498,132 @@
                 </a:solidFill>
                 <a:latin typeface="Source Serif 4"/>
               </a:rPr>
-              <a:t>Typ 1: Transaktionale Trigger (aus agree-Kontodaten)</a:t>
-            </a:r>
-          </a:p>
-        </p:txBody>
-      </p:sp>
-      <p:sp>
-        <p:nvSpPr>
-          <p:cNvPr id="8" name="Rectangle 7"/>
+              <a:t>Die drei Grundprinzipien</a:t>
+            </a:r>
+          </a:p>
+        </p:txBody>
+      </p:sp>
+      <p:sp>
+        <p:nvSpPr>
+          <p:cNvPr id="8" name="TextBox 7"/>
+          <p:cNvSpPr txBox="1"/>
+          <p:nvPr/>
+        </p:nvSpPr>
+        <p:spPr>
+          <a:xfrm>
+            <a:off x="685800" y="1417320"/>
+            <a:ext cx="10817352" cy="5029200"/>
+          </a:xfrm>
+          <a:prstGeom prst="rect">
+            <a:avLst/>
+          </a:prstGeom>
+          <a:noFill/>
+        </p:spPr>
+        <p:txBody>
+          <a:bodyPr wrap="square">
+            <a:spAutoFit/>
+          </a:bodyPr>
+          <a:lstStyle/>
+          <a:p>
+            <a:pPr>
+              <a:spcBef>
+                <a:spcPts val="400"/>
+              </a:spcBef>
+              <a:spcAft>
+                <a:spcPts val="200"/>
+              </a:spcAft>
+            </a:pPr>
+            <a:r>
+              <a:rPr sz="1300">
+                <a:solidFill>
+                  <a:srgbClr val="3D5466"/>
+                </a:solidFill>
+                <a:latin typeface="Arial"/>
+              </a:rPr>
+              <a:t>▸  Timing schlägt Häufigkeit: Ein Anruf zum richtigen Moment ist wertvoller als zehn Anrufe zum falschen Zeitpunkt.</a:t>
+            </a:r>
+          </a:p>
+          <a:p>
+            <a:pPr>
+              <a:spcBef>
+                <a:spcPts val="400"/>
+              </a:spcBef>
+              <a:spcAft>
+                <a:spcPts val="200"/>
+              </a:spcAft>
+            </a:pPr>
+            <a:r>
+              <a:rPr sz="1300">
+                <a:solidFill>
+                  <a:srgbClr val="3D5466"/>
+                </a:solidFill>
+                <a:latin typeface="Arial"/>
+              </a:rPr>
+              <a:t>▸  Relevanz schlägt Breite: Ein auf den aktuellen Bedarf zugeschnittenes Gespräch überzeugt mehr als eine generische Produktpräsentation.</a:t>
+            </a:r>
+          </a:p>
+          <a:p>
+            <a:pPr>
+              <a:spcBef>
+                <a:spcPts val="400"/>
+              </a:spcBef>
+              <a:spcAft>
+                <a:spcPts val="200"/>
+              </a:spcAft>
+            </a:pPr>
+            <a:r>
+              <a:rPr sz="1300">
+                <a:solidFill>
+                  <a:srgbClr val="3D5466"/>
+                </a:solidFill>
+                <a:latin typeface="Arial"/>
+              </a:rPr>
+              <a:t>▸  Daten sind kein Ersatz für Beziehung: Trigger öffnen die Tür – das Gespräch selbst bleibt menschlich.</a:t>
+            </a:r>
+          </a:p>
+          <a:p>
+            <a:pPr>
+              <a:spcBef>
+                <a:spcPts val="400"/>
+              </a:spcBef>
+              <a:spcAft>
+                <a:spcPts val="200"/>
+              </a:spcAft>
+            </a:pPr>
+            <a:r>
+              <a:rPr sz="1300">
+                <a:solidFill>
+                  <a:srgbClr val="3D5466"/>
+                </a:solidFill>
+                <a:latin typeface="Arial"/>
+              </a:rPr>
+              <a:t>▸  ## 4.2 Trigger-Ereignisse: Drei Typen mit unterschiedlicher Logik</a:t>
+            </a:r>
+          </a:p>
+          <a:p>
+            <a:pPr>
+              <a:spcBef>
+                <a:spcPts val="400"/>
+              </a:spcBef>
+              <a:spcAft>
+                <a:spcPts val="200"/>
+              </a:spcAft>
+            </a:pPr>
+            <a:r>
+              <a:rPr sz="1300">
+                <a:solidFill>
+                  <a:srgbClr val="3D5466"/>
+                </a:solidFill>
+                <a:latin typeface="Arial"/>
+              </a:rPr>
+              <a:t>▸  Ein Trigger ist ein Datenpunkt oder ein Ereignis, das mit hoher Wahrscheinlichkeit auf einen aktuellen oder bevorstehenden Beratungsbedarf hinweist. Es gibt drei Typen:</a:t>
+            </a:r>
+          </a:p>
+        </p:txBody>
+      </p:sp>
+      <p:sp>
+        <p:nvSpPr>
+          <p:cNvPr id="9" name="Rectangle 8"/>
           <p:cNvSpPr/>
           <p:nvPr/>
         </p:nvSpPr>
@@ -9275,7 +9666,7 @@
       </p:sp>
       <p:sp>
         <p:nvSpPr>
-          <p:cNvPr id="9" name="TextBox 8"/>
+          <p:cNvPr id="10" name="TextBox 9"/>
           <p:cNvSpPr txBox="1"/>
           <p:nvPr/>
         </p:nvSpPr>
@@ -9563,14 +9954,94 @@
                 </a:solidFill>
                 <a:latin typeface="Source Serif 4"/>
               </a:rPr>
-              <a:t>Typ 2: Ratingbasierte Trigger (aus Kreditakte / Frühwarnsystem)</a:t>
-            </a:r>
-          </a:p>
-        </p:txBody>
-      </p:sp>
-      <p:sp>
-        <p:nvSpPr>
-          <p:cNvPr id="8" name="Rectangle 7"/>
+              <a:t>Typ 3: Lebensereignisbasierte Trigger (aus CRM-Notizen, externen Quellen)</a:t>
+            </a:r>
+          </a:p>
+        </p:txBody>
+      </p:sp>
+      <p:sp>
+        <p:nvSpPr>
+          <p:cNvPr id="8" name="TextBox 7"/>
+          <p:cNvSpPr txBox="1"/>
+          <p:nvPr/>
+        </p:nvSpPr>
+        <p:spPr>
+          <a:xfrm>
+            <a:off x="685800" y="1417320"/>
+            <a:ext cx="10817352" cy="5029200"/>
+          </a:xfrm>
+          <a:prstGeom prst="rect">
+            <a:avLst/>
+          </a:prstGeom>
+          <a:noFill/>
+        </p:spPr>
+        <p:txBody>
+          <a:bodyPr wrap="square">
+            <a:spAutoFit/>
+          </a:bodyPr>
+          <a:lstStyle/>
+          <a:p>
+            <a:pPr>
+              <a:spcBef>
+                <a:spcPts val="400"/>
+              </a:spcBef>
+              <a:spcAft>
+                <a:spcPts val="200"/>
+              </a:spcAft>
+            </a:pPr>
+            <a:r>
+              <a:rPr sz="1300">
+                <a:solidFill>
+                  <a:srgbClr val="3D5466"/>
+                </a:solidFill>
+                <a:latin typeface="Arial"/>
+              </a:rPr>
+              <a:t>▸  ## 4.3 Datenqualität: Die Voraussetzung für alles</a:t>
+            </a:r>
+          </a:p>
+          <a:p>
+            <a:pPr>
+              <a:spcBef>
+                <a:spcPts val="400"/>
+              </a:spcBef>
+              <a:spcAft>
+                <a:spcPts val="200"/>
+              </a:spcAft>
+            </a:pPr>
+            <a:r>
+              <a:rPr sz="1300">
+                <a:solidFill>
+                  <a:srgbClr val="3D5466"/>
+                </a:solidFill>
+                <a:latin typeface="Arial"/>
+              </a:rPr>
+              <a:t>▸  Datengetriebener Vertrieb funktioniert nur, wenn die Datenbasis stimmt. Die häufigsten Qualitätsmängel:</a:t>
+            </a:r>
+          </a:p>
+          <a:p>
+            <a:pPr>
+              <a:spcBef>
+                <a:spcPts val="400"/>
+              </a:spcBef>
+              <a:spcAft>
+                <a:spcPts val="200"/>
+              </a:spcAft>
+            </a:pPr>
+            <a:r>
+              <a:rPr sz="1300">
+                <a:solidFill>
+                  <a:srgbClr val="3D5466"/>
+                </a:solidFill>
+                <a:latin typeface="Arial"/>
+              </a:rPr>
+              <a:t>▸  Faustregel: Daten, die älter als 18 Monate sind, ohne Update, sind für trigger-basierten Vertrieb unzuverlässig.</a:t>
+            </a:r>
+          </a:p>
+        </p:txBody>
+      </p:sp>
+      <p:sp>
+        <p:nvSpPr>
+          <p:cNvPr id="9" name="Rectangle 8"/>
           <p:cNvSpPr/>
           <p:nvPr/>
         </p:nvSpPr>
@@ -9613,7 +10084,7 @@
       </p:sp>
       <p:sp>
         <p:nvSpPr>
-          <p:cNvPr id="9" name="TextBox 8"/>
+          <p:cNvPr id="10" name="TextBox 9"/>
           <p:cNvSpPr txBox="1"/>
           <p:nvPr/>
         </p:nvSpPr>
@@ -9679,7 +10150,7 @@
             <a:avLst/>
           </a:prstGeom>
           <a:solidFill>
-            <a:srgbClr val="EDEDF3"/>
+            <a:srgbClr val="FFFFFF"/>
           </a:solidFill>
           <a:ln>
             <a:noFill/>
@@ -9780,51 +10251,43 @@
                 </a:solidFill>
                 <a:latin typeface="JetBrains Mono"/>
               </a:rPr>
-              <a:t>M18  ·  INHALT</a:t>
-            </a:r>
-          </a:p>
-        </p:txBody>
-      </p:sp>
-      <p:sp>
-        <p:nvSpPr>
-          <p:cNvPr id="5" name="Rectangle 4"/>
-          <p:cNvSpPr/>
-          <p:nvPr/>
-        </p:nvSpPr>
-        <p:spPr>
-          <a:xfrm>
-            <a:off x="0" y="1234440"/>
-            <a:ext cx="12188952" cy="12700"/>
-          </a:xfrm>
-          <a:prstGeom prst="rect">
-            <a:avLst/>
-          </a:prstGeom>
-          <a:solidFill>
-            <a:srgbClr val="D8DFE4"/>
-          </a:solidFill>
-          <a:ln>
-            <a:noFill/>
-          </a:ln>
-        </p:spPr>
-        <p:style>
-          <a:lnRef idx="1">
-            <a:schemeClr val="accent1"/>
-          </a:lnRef>
-          <a:fillRef idx="3">
-            <a:schemeClr val="accent1"/>
-          </a:fillRef>
-          <a:effectRef idx="2">
-            <a:schemeClr val="accent1"/>
-          </a:effectRef>
-          <a:fontRef idx="minor">
-            <a:schemeClr val="lt1"/>
-          </a:fontRef>
-        </p:style>
-        <p:txBody>
-          <a:bodyPr rtlCol="0" anchor="ctr"/>
-          <a:lstStyle/>
-          <a:p>
-            <a:pPr algn="ctr"/>
+              <a:t>M18  ·  SCHAUBILD</a:t>
+            </a:r>
+          </a:p>
+        </p:txBody>
+      </p:sp>
+      <p:sp>
+        <p:nvSpPr>
+          <p:cNvPr id="5" name="TextBox 4"/>
+          <p:cNvSpPr txBox="1"/>
+          <p:nvPr/>
+        </p:nvSpPr>
+        <p:spPr>
+          <a:xfrm>
+            <a:off x="685800" y="502920"/>
+            <a:ext cx="10817352" cy="594360"/>
+          </a:xfrm>
+          <a:prstGeom prst="rect">
+            <a:avLst/>
+          </a:prstGeom>
+          <a:noFill/>
+        </p:spPr>
+        <p:txBody>
+          <a:bodyPr wrap="square">
+            <a:spAutoFit/>
+          </a:bodyPr>
+          <a:lstStyle/>
+          <a:p>
+            <a:pPr algn="l"/>
+            <a:r>
+              <a:rPr sz="2000" b="1" i="0">
+                <a:solidFill>
+                  <a:srgbClr val="1F2C56"/>
+                </a:solidFill>
+                <a:latin typeface="Source Serif 4"/>
+              </a:rPr>
+              <a:t>Drei Trigger-Typen im datengetriebenen Vertrieb</a:t>
+            </a:r>
           </a:p>
         </p:txBody>
       </p:sp>
@@ -9836,8 +10299,8 @@
         </p:nvSpPr>
         <p:spPr>
           <a:xfrm>
-            <a:off x="685800" y="502920"/>
-            <a:ext cx="36576" cy="658368"/>
+            <a:off x="685800" y="1143000"/>
+            <a:ext cx="10817352" cy="25400"/>
           </a:xfrm>
           <a:prstGeom prst="rect">
             <a:avLst/>
@@ -9871,124 +10334,33 @@
           </a:p>
         </p:txBody>
       </p:sp>
-      <p:sp>
-        <p:nvSpPr>
-          <p:cNvPr id="7" name="TextBox 6"/>
-          <p:cNvSpPr txBox="1"/>
-          <p:nvPr/>
-        </p:nvSpPr>
-        <p:spPr>
-          <a:xfrm>
-            <a:off x="813816" y="502920"/>
-            <a:ext cx="10634472" cy="685800"/>
-          </a:xfrm>
-          <a:prstGeom prst="rect">
-            <a:avLst/>
-          </a:prstGeom>
-          <a:noFill/>
-        </p:spPr>
-        <p:txBody>
-          <a:bodyPr wrap="square">
-            <a:spAutoFit/>
-          </a:bodyPr>
-          <a:lstStyle/>
-          <a:p>
-            <a:pPr algn="l"/>
-            <a:r>
-              <a:rPr sz="2400" b="1" i="0">
-                <a:solidFill>
-                  <a:srgbClr val="1F2C56"/>
-                </a:solidFill>
-                <a:latin typeface="Source Serif 4"/>
-              </a:rPr>
-              <a:t>Typ 3: Lebensereignisbasierte Trigger (aus CRM-Notizen, externen Quellen)</a:t>
-            </a:r>
-          </a:p>
-        </p:txBody>
-      </p:sp>
-      <p:sp>
-        <p:nvSpPr>
-          <p:cNvPr id="8" name="TextBox 7"/>
-          <p:cNvSpPr txBox="1"/>
-          <p:nvPr/>
-        </p:nvSpPr>
-        <p:spPr>
-          <a:xfrm>
-            <a:off x="685800" y="1417320"/>
-            <a:ext cx="10817352" cy="5029200"/>
-          </a:xfrm>
-          <a:prstGeom prst="rect">
-            <a:avLst/>
-          </a:prstGeom>
-          <a:noFill/>
-        </p:spPr>
-        <p:txBody>
-          <a:bodyPr wrap="square">
-            <a:spAutoFit/>
-          </a:bodyPr>
-          <a:lstStyle/>
-          <a:p>
-            <a:pPr>
-              <a:spcBef>
-                <a:spcPts val="400"/>
-              </a:spcBef>
-              <a:spcAft>
-                <a:spcPts val="200"/>
-              </a:spcAft>
-            </a:pPr>
-            <a:r>
-              <a:rPr sz="1200">
-                <a:solidFill>
-                  <a:srgbClr val="3D5466"/>
-                </a:solidFill>
-                <a:latin typeface="Arial"/>
-              </a:rPr>
-              <a:t>## 4.3 Datenqualität: Die Voraussetzung für alles</a:t>
-            </a:r>
-          </a:p>
-          <a:p>
-            <a:pPr>
-              <a:spcBef>
-                <a:spcPts val="400"/>
-              </a:spcBef>
-              <a:spcAft>
-                <a:spcPts val="200"/>
-              </a:spcAft>
-            </a:pPr>
-            <a:r>
-              <a:rPr sz="1200">
-                <a:solidFill>
-                  <a:srgbClr val="3D5466"/>
-                </a:solidFill>
-                <a:latin typeface="Arial"/>
-              </a:rPr>
-              <a:t>Datengetriebener Vertrieb funktioniert nur, wenn die Datenbasis stimmt. Die häufigsten Qualitätsmängel:</a:t>
-            </a:r>
-          </a:p>
-          <a:p>
-            <a:pPr>
-              <a:spcBef>
-                <a:spcPts val="400"/>
-              </a:spcBef>
-              <a:spcAft>
-                <a:spcPts val="200"/>
-              </a:spcAft>
-            </a:pPr>
-            <a:r>
-              <a:rPr sz="1200">
-                <a:solidFill>
-                  <a:srgbClr val="3D5466"/>
-                </a:solidFill>
-                <a:latin typeface="Arial"/>
-              </a:rPr>
-              <a:t>Faustregel: Daten, die älter als 18 Monate sind, ohne Update, sind für trigger-basierten Vertrieb unzuverlässig.</a:t>
-            </a:r>
-          </a:p>
-        </p:txBody>
-      </p:sp>
-      <p:sp>
-        <p:nvSpPr>
-          <p:cNvPr id="9" name="Rectangle 8"/>
+      <p:pic>
+        <p:nvPicPr>
+          <p:cNvPr id="7" name="Picture 6" descr="image.png"/>
+          <p:cNvPicPr>
+            <a:picLocks noChangeAspect="1"/>
+          </p:cNvPicPr>
+          <p:nvPr/>
+        </p:nvPicPr>
+        <p:blipFill>
+          <a:blip r:embed="rId2"/>
+          <a:stretch>
+            <a:fillRect/>
+          </a:stretch>
+        </p:blipFill>
+        <p:spPr>
+          <a:xfrm>
+            <a:off x="2303489" y="1325880"/>
+            <a:ext cx="7581973" cy="4937760"/>
+          </a:xfrm>
+          <a:prstGeom prst="rect">
+            <a:avLst/>
+          </a:prstGeom>
+        </p:spPr>
+      </p:pic>
+      <p:sp>
+        <p:nvSpPr>
+          <p:cNvPr id="8" name="Rectangle 7"/>
           <p:cNvSpPr/>
           <p:nvPr/>
         </p:nvSpPr>
@@ -10031,7 +10403,7 @@
       </p:sp>
       <p:sp>
         <p:nvSpPr>
-          <p:cNvPr id="10" name="TextBox 9"/>
+          <p:cNvPr id="9" name="TextBox 8"/>
           <p:cNvSpPr txBox="1"/>
           <p:nvPr/>
         </p:nvSpPr>
@@ -10060,6 +10432,41 @@
                 <a:latin typeface="JetBrains Mono"/>
               </a:rPr>
               <a:t>Benedikt Zoller Coaching  ·  FKB Campus  ·  M18</a:t>
+            </a:r>
+          </a:p>
+        </p:txBody>
+      </p:sp>
+      <p:sp>
+        <p:nvSpPr>
+          <p:cNvPr id="10" name="TextBox 9"/>
+          <p:cNvSpPr txBox="1"/>
+          <p:nvPr/>
+        </p:nvSpPr>
+        <p:spPr>
+          <a:xfrm>
+            <a:off x="7176211" y="6583680"/>
+            <a:ext cx="4326940" cy="256032"/>
+          </a:xfrm>
+          <a:prstGeom prst="rect">
+            <a:avLst/>
+          </a:prstGeom>
+          <a:noFill/>
+        </p:spPr>
+        <p:txBody>
+          <a:bodyPr wrap="none">
+            <a:spAutoFit/>
+          </a:bodyPr>
+          <a:lstStyle/>
+          <a:p>
+            <a:pPr algn="r"/>
+            <a:r>
+              <a:rPr sz="700">
+                <a:solidFill>
+                  <a:srgbClr val="A0B4D2"/>
+                </a:solidFill>
+                <a:latin typeface="JetBrains Mono"/>
+              </a:rPr>
+              <a:t>Schaubild</a:t>
             </a:r>
           </a:p>
         </p:txBody>
@@ -10097,7 +10504,7 @@
             <a:avLst/>
           </a:prstGeom>
           <a:solidFill>
-            <a:srgbClr val="FFFFFF"/>
+            <a:srgbClr val="EDEDF3"/>
           </a:solidFill>
           <a:ln>
             <a:noFill/>
@@ -10198,43 +10605,51 @@
                 </a:solidFill>
                 <a:latin typeface="JetBrains Mono"/>
               </a:rPr>
-              <a:t>M18  ·  SCHAUBILD</a:t>
-            </a:r>
-          </a:p>
-        </p:txBody>
-      </p:sp>
-      <p:sp>
-        <p:nvSpPr>
-          <p:cNvPr id="5" name="TextBox 4"/>
-          <p:cNvSpPr txBox="1"/>
-          <p:nvPr/>
-        </p:nvSpPr>
-        <p:spPr>
-          <a:xfrm>
-            <a:off x="685800" y="502920"/>
-            <a:ext cx="10817352" cy="594360"/>
-          </a:xfrm>
-          <a:prstGeom prst="rect">
-            <a:avLst/>
-          </a:prstGeom>
-          <a:noFill/>
-        </p:spPr>
-        <p:txBody>
-          <a:bodyPr wrap="square">
-            <a:spAutoFit/>
-          </a:bodyPr>
-          <a:lstStyle/>
-          <a:p>
-            <a:pPr algn="l"/>
-            <a:r>
-              <a:rPr sz="2000" b="1" i="0">
-                <a:solidFill>
-                  <a:srgbClr val="1F2C56"/>
-                </a:solidFill>
-                <a:latin typeface="Source Serif 4"/>
-              </a:rPr>
-              <a:t>Drei Trigger-Typen im datengetriebenen Vertrieb</a:t>
-            </a:r>
+              <a:t>M18  ·  INHALT</a:t>
+            </a:r>
+          </a:p>
+        </p:txBody>
+      </p:sp>
+      <p:sp>
+        <p:nvSpPr>
+          <p:cNvPr id="5" name="Rectangle 4"/>
+          <p:cNvSpPr/>
+          <p:nvPr/>
+        </p:nvSpPr>
+        <p:spPr>
+          <a:xfrm>
+            <a:off x="0" y="1234440"/>
+            <a:ext cx="12188952" cy="12700"/>
+          </a:xfrm>
+          <a:prstGeom prst="rect">
+            <a:avLst/>
+          </a:prstGeom>
+          <a:solidFill>
+            <a:srgbClr val="D8DFE4"/>
+          </a:solidFill>
+          <a:ln>
+            <a:noFill/>
+          </a:ln>
+        </p:spPr>
+        <p:style>
+          <a:lnRef idx="1">
+            <a:schemeClr val="accent1"/>
+          </a:lnRef>
+          <a:fillRef idx="3">
+            <a:schemeClr val="accent1"/>
+          </a:fillRef>
+          <a:effectRef idx="2">
+            <a:schemeClr val="accent1"/>
+          </a:effectRef>
+          <a:fontRef idx="minor">
+            <a:schemeClr val="lt1"/>
+          </a:fontRef>
+        </p:style>
+        <p:txBody>
+          <a:bodyPr rtlCol="0" anchor="ctr"/>
+          <a:lstStyle/>
+          <a:p>
+            <a:pPr algn="ctr"/>
           </a:p>
         </p:txBody>
       </p:sp>
@@ -10246,8 +10661,8 @@
         </p:nvSpPr>
         <p:spPr>
           <a:xfrm>
-            <a:off x="685800" y="1143000"/>
-            <a:ext cx="10817352" cy="25400"/>
+            <a:off x="685800" y="502920"/>
+            <a:ext cx="36576" cy="658368"/>
           </a:xfrm>
           <a:prstGeom prst="rect">
             <a:avLst/>
@@ -10281,33 +10696,162 @@
           </a:p>
         </p:txBody>
       </p:sp>
-      <p:pic>
-        <p:nvPicPr>
-          <p:cNvPr id="7" name="Picture 6" descr="image.png"/>
-          <p:cNvPicPr>
-            <a:picLocks noChangeAspect="1"/>
-          </p:cNvPicPr>
-          <p:nvPr/>
-        </p:nvPicPr>
-        <p:blipFill>
-          <a:blip r:embed="rId2"/>
-          <a:stretch>
-            <a:fillRect/>
-          </a:stretch>
-        </p:blipFill>
-        <p:spPr>
-          <a:xfrm>
-            <a:off x="2303489" y="1325880"/>
-            <a:ext cx="7581973" cy="4937760"/>
-          </a:xfrm>
-          <a:prstGeom prst="rect">
-            <a:avLst/>
-          </a:prstGeom>
-        </p:spPr>
-      </p:pic>
-      <p:sp>
-        <p:nvSpPr>
-          <p:cNvPr id="8" name="Rectangle 7"/>
+      <p:sp>
+        <p:nvSpPr>
+          <p:cNvPr id="7" name="TextBox 6"/>
+          <p:cNvSpPr txBox="1"/>
+          <p:nvPr/>
+        </p:nvSpPr>
+        <p:spPr>
+          <a:xfrm>
+            <a:off x="813816" y="502920"/>
+            <a:ext cx="10634472" cy="685800"/>
+          </a:xfrm>
+          <a:prstGeom prst="rect">
+            <a:avLst/>
+          </a:prstGeom>
+          <a:noFill/>
+        </p:spPr>
+        <p:txBody>
+          <a:bodyPr wrap="square">
+            <a:spAutoFit/>
+          </a:bodyPr>
+          <a:lstStyle/>
+          <a:p>
+            <a:pPr algn="l"/>
+            <a:r>
+              <a:rPr sz="2400" b="1" i="0">
+                <a:solidFill>
+                  <a:srgbClr val="1F2C56"/>
+                </a:solidFill>
+                <a:latin typeface="Source Serif 4"/>
+              </a:rPr>
+              <a:t>Datenqualitäts-Audit im eigenen Bestand</a:t>
+            </a:r>
+          </a:p>
+        </p:txBody>
+      </p:sp>
+      <p:sp>
+        <p:nvSpPr>
+          <p:cNvPr id="8" name="TextBox 7"/>
+          <p:cNvSpPr txBox="1"/>
+          <p:nvPr/>
+        </p:nvSpPr>
+        <p:spPr>
+          <a:xfrm>
+            <a:off x="685800" y="1417320"/>
+            <a:ext cx="10817352" cy="5029200"/>
+          </a:xfrm>
+          <a:prstGeom prst="rect">
+            <a:avLst/>
+          </a:prstGeom>
+          <a:noFill/>
+        </p:spPr>
+        <p:txBody>
+          <a:bodyPr wrap="square">
+            <a:spAutoFit/>
+          </a:bodyPr>
+          <a:lstStyle/>
+          <a:p>
+            <a:pPr>
+              <a:spcBef>
+                <a:spcPts val="400"/>
+              </a:spcBef>
+              <a:spcAft>
+                <a:spcPts val="200"/>
+              </a:spcAft>
+            </a:pPr>
+            <a:r>
+              <a:rPr sz="1300">
+                <a:solidFill>
+                  <a:srgbClr val="3D5466"/>
+                </a:solidFill>
+                <a:latin typeface="Arial"/>
+              </a:rPr>
+              <a:t>▸  Führen Sie einmalig pro Jahr einen strukturierten Datencheck durch:</a:t>
+            </a:r>
+          </a:p>
+          <a:p>
+            <a:pPr>
+              <a:spcBef>
+                <a:spcPts val="400"/>
+              </a:spcBef>
+              <a:spcAft>
+                <a:spcPts val="200"/>
+              </a:spcAft>
+            </a:pPr>
+            <a:r>
+              <a:rPr sz="1300">
+                <a:solidFill>
+                  <a:srgbClr val="3D5466"/>
+                </a:solidFill>
+                <a:latin typeface="Arial"/>
+              </a:rPr>
+              <a:t>▸  In agree eine Bestandsliste Ihrer Firmenkunden aufrufen (Weg je nach Bankinstallation: Bestandsbetreuer-Cockpit oder Listenabfrage über agree-Auswertungskomponente – lassen Sie sich das einmalig von Ihrem IT-Koordinator zeigen, da ein standardisierter „Lückenanalyse"-Menüpunkt nicht in jeder Installation verfügbar ist). Alternativ: Export als Excel aus dem Bestandscockpit und manuelle Filterung.</a:t>
+            </a:r>
+          </a:p>
+          <a:p>
+            <a:pPr>
+              <a:spcBef>
+                <a:spcPts val="400"/>
+              </a:spcBef>
+              <a:spcAft>
+                <a:spcPts val="200"/>
+              </a:spcAft>
+            </a:pPr>
+            <a:r>
+              <a:rPr sz="1300">
+                <a:solidFill>
+                  <a:srgbClr val="3D5466"/>
+                </a:solidFill>
+                <a:latin typeface="Arial"/>
+              </a:rPr>
+              <a:t>▸  Für alle Kunden mit &gt; 500k Kreditvolumen prüfen: Geburtsdatum, Branche, Gesellschafterstruktur, Jahresabschluss-Datum (Arbeitsblatt B als Checkliste nutzen)</a:t>
+            </a:r>
+          </a:p>
+          <a:p>
+            <a:pPr>
+              <a:spcBef>
+                <a:spcPts val="400"/>
+              </a:spcBef>
+              <a:spcAft>
+                <a:spcPts val="200"/>
+              </a:spcAft>
+            </a:pPr>
+            <a:r>
+              <a:rPr sz="1300">
+                <a:solidFill>
+                  <a:srgbClr val="3D5466"/>
+                </a:solidFill>
+                <a:latin typeface="Arial"/>
+              </a:rPr>
+              <a:t>▸  Fehler in den nächsten drei Kundengesprächen schließen (gezielt im Gespräch erfragen)</a:t>
+            </a:r>
+          </a:p>
+          <a:p>
+            <a:pPr>
+              <a:spcBef>
+                <a:spcPts val="400"/>
+              </a:spcBef>
+              <a:spcAft>
+                <a:spcPts val="200"/>
+              </a:spcAft>
+            </a:pPr>
+            <a:r>
+              <a:rPr sz="1300">
+                <a:solidFill>
+                  <a:srgbClr val="3D5466"/>
+                </a:solidFill>
+                <a:latin typeface="Arial"/>
+              </a:rPr>
+              <a:t>▸  ## 4.4 DSGVO-konforme Datennutzung im Vertrieb</a:t>
+            </a:r>
+          </a:p>
+        </p:txBody>
+      </p:sp>
+      <p:sp>
+        <p:nvSpPr>
+          <p:cNvPr id="9" name="Rectangle 8"/>
           <p:cNvSpPr/>
           <p:nvPr/>
         </p:nvSpPr>
@@ -10350,7 +10894,7 @@
       </p:sp>
       <p:sp>
         <p:nvSpPr>
-          <p:cNvPr id="9" name="TextBox 8"/>
+          <p:cNvPr id="10" name="TextBox 9"/>
           <p:cNvSpPr txBox="1"/>
           <p:nvPr/>
         </p:nvSpPr>
@@ -10379,41 +10923,6 @@
                 <a:latin typeface="JetBrains Mono"/>
               </a:rPr>
               <a:t>Benedikt Zoller Coaching  ·  FKB Campus  ·  M18</a:t>
-            </a:r>
-          </a:p>
-        </p:txBody>
-      </p:sp>
-      <p:sp>
-        <p:nvSpPr>
-          <p:cNvPr id="10" name="TextBox 9"/>
-          <p:cNvSpPr txBox="1"/>
-          <p:nvPr/>
-        </p:nvSpPr>
-        <p:spPr>
-          <a:xfrm>
-            <a:off x="7176211" y="6583680"/>
-            <a:ext cx="4326940" cy="256032"/>
-          </a:xfrm>
-          <a:prstGeom prst="rect">
-            <a:avLst/>
-          </a:prstGeom>
-          <a:noFill/>
-        </p:spPr>
-        <p:txBody>
-          <a:bodyPr wrap="none">
-            <a:spAutoFit/>
-          </a:bodyPr>
-          <a:lstStyle/>
-          <a:p>
-            <a:pPr algn="r"/>
-            <a:r>
-              <a:rPr sz="700">
-                <a:solidFill>
-                  <a:srgbClr val="A0B4D2"/>
-                </a:solidFill>
-                <a:latin typeface="JetBrains Mono"/>
-              </a:rPr>
-              <a:t>Schaubild</a:t>
             </a:r>
           </a:p>
         </p:txBody>

--- a/protected-downloads/praesentation/M18.pptx
+++ b/protected-downloads/praesentation/M18.pptx
@@ -4528,7 +4528,7 @@
                 </a:solidFill>
                 <a:latin typeface="JetBrains Mono"/>
               </a:rPr>
-              <a:t>Benedikt Zoller Coaching  ·  FKB Campus  ·  2026</a:t>
+              <a:t>FKB Campus  ·  2026</a:t>
             </a:r>
           </a:p>
         </p:txBody>
@@ -5000,7 +5000,7 @@
                 </a:solidFill>
                 <a:latin typeface="JetBrains Mono"/>
               </a:rPr>
-              <a:t>Benedikt Zoller Coaching  ·  FKB Campus  ·  M18</a:t>
+              <a:t>FKB Campus  ·  M18</a:t>
             </a:r>
           </a:p>
         </p:txBody>
@@ -5589,7 +5589,7 @@
                 </a:solidFill>
                 <a:latin typeface="JetBrains Mono"/>
               </a:rPr>
-              <a:t>Benedikt Zoller Coaching  ·  FKB Campus  ·  M18</a:t>
+              <a:t>FKB Campus  ·  M18</a:t>
             </a:r>
           </a:p>
         </p:txBody>
@@ -6007,7 +6007,7 @@
                 </a:solidFill>
                 <a:latin typeface="JetBrains Mono"/>
               </a:rPr>
-              <a:t>Benedikt Zoller Coaching  ·  FKB Campus  ·  M18</a:t>
+              <a:t>FKB Campus  ·  M18</a:t>
             </a:r>
           </a:p>
         </p:txBody>
@@ -6684,7 +6684,7 @@
                 </a:solidFill>
                 <a:latin typeface="JetBrains Mono"/>
               </a:rPr>
-              <a:t>Benedikt Zoller Coaching  ·  FKB Campus  ·  M18</a:t>
+              <a:t>FKB Campus  ·  M18</a:t>
             </a:r>
           </a:p>
         </p:txBody>
@@ -7365,7 +7365,7 @@
                 </a:solidFill>
                 <a:latin typeface="JetBrains Mono"/>
               </a:rPr>
-              <a:t>Benedikt Zoller Coaching  ·  FKB Campus  ·  M18</a:t>
+              <a:t>FKB Campus  ·  M18</a:t>
             </a:r>
           </a:p>
         </p:txBody>
@@ -7766,7 +7766,7 @@
                 </a:solidFill>
                 <a:latin typeface="JetBrains Mono"/>
               </a:rPr>
-              <a:t>Benedikt Zoller Coaching  ·  FKB Campus  ·  M18</a:t>
+              <a:t>FKB Campus  ·  M18</a:t>
             </a:r>
           </a:p>
         </p:txBody>
@@ -8179,7 +8179,7 @@
                 </a:solidFill>
                 <a:latin typeface="JetBrains Mono"/>
               </a:rPr>
-              <a:t>Benedikt Zoller Coaching  ·  FKB Campus  ·  M18</a:t>
+              <a:t>FKB Campus  ·  M18</a:t>
             </a:r>
           </a:p>
         </p:txBody>
@@ -8858,7 +8858,7 @@
                 </a:solidFill>
                 <a:latin typeface="JetBrains Mono"/>
               </a:rPr>
-              <a:t>Benedikt Zoller Coaching  ·  FKB Campus  ·  M18</a:t>
+              <a:t>FKB Campus  ·  M18</a:t>
             </a:r>
           </a:p>
         </p:txBody>
@@ -9238,7 +9238,7 @@
                 </a:solidFill>
                 <a:latin typeface="JetBrains Mono"/>
               </a:rPr>
-              <a:t>Benedikt Zoller Coaching  ·  FKB Campus  ·  M18</a:t>
+              <a:t>FKB Campus  ·  M18</a:t>
             </a:r>
           </a:p>
         </p:txBody>
@@ -9694,7 +9694,7 @@
                 </a:solidFill>
                 <a:latin typeface="JetBrains Mono"/>
               </a:rPr>
-              <a:t>Benedikt Zoller Coaching  ·  FKB Campus  ·  M18</a:t>
+              <a:t>FKB Campus  ·  M18</a:t>
             </a:r>
           </a:p>
         </p:txBody>
@@ -10112,7 +10112,7 @@
                 </a:solidFill>
                 <a:latin typeface="JetBrains Mono"/>
               </a:rPr>
-              <a:t>Benedikt Zoller Coaching  ·  FKB Campus  ·  M18</a:t>
+              <a:t>FKB Campus  ·  M18</a:t>
             </a:r>
           </a:p>
         </p:txBody>
@@ -10431,7 +10431,7 @@
                 </a:solidFill>
                 <a:latin typeface="JetBrains Mono"/>
               </a:rPr>
-              <a:t>Benedikt Zoller Coaching  ·  FKB Campus  ·  M18</a:t>
+              <a:t>FKB Campus  ·  M18</a:t>
             </a:r>
           </a:p>
         </p:txBody>
@@ -10922,7 +10922,7 @@
                 </a:solidFill>
                 <a:latin typeface="JetBrains Mono"/>
               </a:rPr>
-              <a:t>Benedikt Zoller Coaching  ·  FKB Campus  ·  M18</a:t>
+              <a:t>FKB Campus  ·  M18</a:t>
             </a:r>
           </a:p>
         </p:txBody>

--- a/protected-downloads/praesentation/M18.pptx
+++ b/protected-downloads/praesentation/M18.pptx
@@ -8484,7 +8484,7 @@
                 </a:solidFill>
                 <a:latin typeface="Arial"/>
               </a:rPr>
-              <a:t>  Theorie-Block I</a:t>
+              <a:t>  Theorie-Block I a</a:t>
             </a:r>
             <a:r>
               <a:rPr sz="900">
@@ -8512,7 +8512,7 @@
                 </a:solidFill>
                 <a:latin typeface="Consolas"/>
               </a:rPr>
-              <a:t>00:23       </a:t>
+              <a:t>00:18       </a:t>
             </a:r>
             <a:r>
               <a:rPr sz="1200" b="1">
@@ -8521,7 +8521,7 @@
                 </a:solidFill>
                 <a:latin typeface="Arial"/>
               </a:rPr>
-              <a:t>  Live-Demo</a:t>
+              <a:t>  Theorie-Block I b: DSGVO</a:t>
             </a:r>
             <a:r>
               <a:rPr sz="900">
@@ -8530,7 +8530,7 @@
                 </a:solidFill>
                 <a:latin typeface="Arial"/>
               </a:rPr>
-              <a:t>  ·  Beamer-Demo</a:t>
+              <a:t>  ·  Vortrag + Diskussion</a:t>
             </a:r>
           </a:p>
           <a:p>
@@ -8549,7 +8549,7 @@
                 </a:solidFill>
                 <a:latin typeface="Consolas"/>
               </a:rPr>
-              <a:t>00:38       </a:t>
+              <a:t>00:26       </a:t>
             </a:r>
             <a:r>
               <a:rPr sz="1200" b="1">
@@ -8558,7 +8558,7 @@
                 </a:solidFill>
                 <a:latin typeface="Arial"/>
               </a:rPr>
-              <a:t>  Einzelübung I</a:t>
+              <a:t>  Live-Demo</a:t>
             </a:r>
             <a:r>
               <a:rPr sz="900">
@@ -8567,7 +8567,7 @@
                 </a:solidFill>
                 <a:latin typeface="Arial"/>
               </a:rPr>
-              <a:t>  ·  agree-Einzelarbeit</a:t>
+              <a:t>  ·  Beamer-Demo</a:t>
             </a:r>
           </a:p>
           <a:p>
@@ -8586,7 +8586,7 @@
                 </a:solidFill>
                 <a:latin typeface="Consolas"/>
               </a:rPr>
-              <a:t>01:08       </a:t>
+              <a:t>00:43       </a:t>
             </a:r>
             <a:r>
               <a:rPr sz="1200" b="1">
@@ -8595,7 +8595,7 @@
                 </a:solidFill>
                 <a:latin typeface="Arial"/>
               </a:rPr>
-              <a:t>  Partnercheck</a:t>
+              <a:t>  Einzelübung I</a:t>
             </a:r>
             <a:r>
               <a:rPr sz="900">
@@ -8604,7 +8604,7 @@
                 </a:solidFill>
                 <a:latin typeface="Arial"/>
               </a:rPr>
-              <a:t>  ·  Partnerarbeit</a:t>
+              <a:t>  ·  agree-Einzelarbeit</a:t>
             </a:r>
           </a:p>
           <a:p>
@@ -8632,7 +8632,7 @@
                 </a:solidFill>
                 <a:latin typeface="Arial"/>
               </a:rPr>
-              <a:t>  Transfer-Abschluss</a:t>
+              <a:t>  Partnercheck</a:t>
             </a:r>
             <a:r>
               <a:rPr sz="900">
@@ -8641,7 +8641,7 @@
                 </a:solidFill>
                 <a:latin typeface="Arial"/>
               </a:rPr>
-              <a:t>  ·  Kartenabfrage</a:t>
+              <a:t>  ·  Partnerarbeit</a:t>
             </a:r>
           </a:p>
           <a:p>
@@ -8669,7 +8669,7 @@
                 </a:solidFill>
                 <a:latin typeface="Arial"/>
               </a:rPr>
-              <a:t>  Hinweis Datenqualität</a:t>
+              <a:t>  Transfer-Abschluss</a:t>
             </a:r>
             <a:r>
               <a:rPr sz="900">
@@ -8678,7 +8678,7 @@
                 </a:solidFill>
                 <a:latin typeface="Arial"/>
               </a:rPr>
-              <a:t>  ·  Kurzerklärung</a:t>
+              <a:t>  ·  Kartenabfrage</a:t>
             </a:r>
           </a:p>
           <a:p>
@@ -8697,7 +8697,7 @@
                 </a:solidFill>
                 <a:latin typeface="Consolas"/>
               </a:rPr>
-              <a:t>01:23       </a:t>
+              <a:t>01:24       </a:t>
             </a:r>
             <a:r>
               <a:rPr sz="1200" b="1">
@@ -8706,7 +8706,7 @@
                 </a:solidFill>
                 <a:latin typeface="Arial"/>
               </a:rPr>
-              <a:t>  Kurz-Wrap-up</a:t>
+              <a:t>  Hinweis Datenqualität</a:t>
             </a:r>
             <a:r>
               <a:rPr sz="900">
@@ -8715,7 +8715,7 @@
                 </a:solidFill>
                 <a:latin typeface="Arial"/>
               </a:rPr>
-              <a:t>  ·  Frontal</a:t>
+              <a:t>  ·  Kurzerklärung</a:t>
             </a:r>
           </a:p>
           <a:p>
@@ -8734,7 +8734,7 @@
                 </a:solidFill>
                 <a:latin typeface="Consolas"/>
               </a:rPr>
-              <a:t>01:28       </a:t>
+              <a:t>01:29       </a:t>
             </a:r>
             <a:r>
               <a:rPr sz="1200" b="1">
@@ -8743,7 +8743,7 @@
                 </a:solidFill>
                 <a:latin typeface="Arial"/>
               </a:rPr>
-              <a:t>  Feedbackbogen</a:t>
+              <a:t>  Kurz-Wrap-up</a:t>
             </a:r>
             <a:r>
               <a:rPr sz="900">
@@ -8752,7 +8752,7 @@
                 </a:solidFill>
                 <a:latin typeface="Arial"/>
               </a:rPr>
-              <a:t>  ·  Einzeln</a:t>
+              <a:t>  ·  Frontal</a:t>
             </a:r>
           </a:p>
           <a:p>
@@ -8771,7 +8771,44 @@
                 </a:solidFill>
                 <a:latin typeface="Consolas"/>
               </a:rPr>
-              <a:t>01:30       </a:t>
+              <a:t>01:35       </a:t>
+            </a:r>
+            <a:r>
+              <a:rPr sz="1200" b="1">
+                <a:solidFill>
+                  <a:srgbClr val="3D5466"/>
+                </a:solidFill>
+                <a:latin typeface="Arial"/>
+              </a:rPr>
+              <a:t>  Feedbackbogen</a:t>
+            </a:r>
+            <a:r>
+              <a:rPr sz="900">
+                <a:solidFill>
+                  <a:srgbClr val="78808C"/>
+                </a:solidFill>
+                <a:latin typeface="Arial"/>
+              </a:rPr>
+              <a:t>  ·  Einzeln</a:t>
+            </a:r>
+          </a:p>
+          <a:p>
+            <a:pPr>
+              <a:spcBef>
+                <a:spcPts val="400"/>
+              </a:spcBef>
+              <a:spcAft>
+                <a:spcPts val="100"/>
+              </a:spcAft>
+            </a:pPr>
+            <a:r>
+              <a:rPr sz="900">
+                <a:solidFill>
+                  <a:srgbClr val="78808C"/>
+                </a:solidFill>
+                <a:latin typeface="Consolas"/>
+              </a:rPr>
+              <a:t>01:40       </a:t>
             </a:r>
             <a:r>
               <a:rPr sz="1200" b="1">

--- a/protected-downloads/praesentation/M18.pptx
+++ b/protected-downloads/praesentation/M18.pptx
@@ -4450,7 +4450,7 @@
                 </a:solidFill>
                 <a:latin typeface="Arial"/>
               </a:rPr>
-              <a:t>v0.4</a:t>
+              <a:t>v1.0</a:t>
             </a:r>
           </a:p>
         </p:txBody>

--- a/protected-downloads/praesentation/M18.pptx
+++ b/protected-downloads/praesentation/M18.pptx
@@ -5849,7 +5849,7 @@
                 </a:solidFill>
                 <a:latin typeface="Source Serif 4"/>
               </a:rPr>
-              <a:t>Arbeitsblatt A: Meine Trigger-Bibliothek</a:t>
+              <a:t>AB-1: Mein Bestand – und was ich (noch) nicht sehe: Trigger + Datenlücken</a:t>
             </a:r>
           </a:p>
         </p:txBody>
@@ -6181,7 +6181,7 @@
                 </a:solidFill>
                 <a:latin typeface="Source Serif 4"/>
               </a:rPr>
-              <a:t>Arbeitsblatt A: Meine Trigger-Bibliothek</a:t>
+              <a:t>AB-1: Mein Bestand – und was ich (noch) nicht sehe: Trigger + Datenlücken</a:t>
             </a:r>
           </a:p>
         </p:txBody>
@@ -6893,7 +6893,7 @@
                 </a:solidFill>
                 <a:latin typeface="Source Serif 4"/>
               </a:rPr>
-              <a:t>Arbeitsblatt B: Datenqualitäts-Audit (Top-10-Kunden)</a:t>
+              <a:t>AB-2: Datenqualitäts-Audit (Top-10-Kunden)</a:t>
             </a:r>
           </a:p>
         </p:txBody>

--- a/protected-downloads/praesentation/M18.pptx
+++ b/protected-downloads/praesentation/M18.pptx
@@ -5849,7 +5849,7 @@
                 </a:solidFill>
                 <a:latin typeface="Source Serif 4"/>
               </a:rPr>
-              <a:t>AB-1: Mein Bestand – und was ich (noch) nicht sehe: Trigger + Datenlücken</a:t>
+              <a:t>AB-1: Mein Bestand – Trigger + Datenlücken</a:t>
             </a:r>
           </a:p>
         </p:txBody>
@@ -6181,7 +6181,7 @@
                 </a:solidFill>
                 <a:latin typeface="Source Serif 4"/>
               </a:rPr>
-              <a:t>AB-1: Mein Bestand – und was ich (noch) nicht sehe: Trigger + Datenlücken</a:t>
+              <a:t>AB-1: Mein Bestand – Trigger + Datenlücken</a:t>
             </a:r>
           </a:p>
         </p:txBody>

--- a/protected-downloads/praesentation/M18.pptx
+++ b/protected-downloads/praesentation/M18.pptx
@@ -4125,7 +4125,7 @@
                 <a:solidFill>
                   <a:srgbClr val="C8D2E6"/>
                 </a:solidFill>
-                <a:latin typeface="JetBrains Mono"/>
+                <a:latin typeface="Consolas"/>
               </a:rPr>
               <a:t>FKB CAMPUS  ·  FIRMENKUNDENAKADEMIE  ·  M18</a:t>
             </a:r>
@@ -4160,7 +4160,7 @@
                 <a:solidFill>
                   <a:srgbClr val="FFFFFF"/>
                 </a:solidFill>
-                <a:latin typeface="Source Serif 4"/>
+                <a:latin typeface="Arial"/>
               </a:rPr>
               <a:t>Datengetriebener Vertrieb</a:t>
             </a:r>
@@ -4195,7 +4195,7 @@
                 <a:solidFill>
                   <a:srgbClr val="BECDE6"/>
                 </a:solidFill>
-                <a:latin typeface="Source Serif 4"/>
+                <a:latin typeface="Arial"/>
               </a:rPr>
               <a:t>Trigger-Signale aus agree erkennen und proaktiv nutzen</a:t>
             </a:r>
@@ -4273,7 +4273,7 @@
                 <a:solidFill>
                   <a:srgbClr val="A0B4D2"/>
                 </a:solidFill>
-                <a:latin typeface="JetBrains Mono"/>
+                <a:latin typeface="Consolas"/>
               </a:rPr>
               <a:t>KOMPETENZFELD</a:t>
             </a:r>
@@ -4343,7 +4343,7 @@
                 <a:solidFill>
                   <a:srgbClr val="A0B4D2"/>
                 </a:solidFill>
-                <a:latin typeface="JetBrains Mono"/>
+                <a:latin typeface="Consolas"/>
               </a:rPr>
               <a:t>KOMPETENZSTUFE</a:t>
             </a:r>
@@ -4413,7 +4413,7 @@
                 <a:solidFill>
                   <a:srgbClr val="A0B4D2"/>
                 </a:solidFill>
-                <a:latin typeface="JetBrains Mono"/>
+                <a:latin typeface="Consolas"/>
               </a:rPr>
               <a:t>VERSION</a:t>
             </a:r>
@@ -4526,7 +4526,7 @@
                 <a:solidFill>
                   <a:srgbClr val="96A5BE"/>
                 </a:solidFill>
-                <a:latin typeface="JetBrains Mono"/>
+                <a:latin typeface="Consolas"/>
               </a:rPr>
               <a:t>FKB Campus  ·  2026</a:t>
             </a:r>
@@ -4561,7 +4561,7 @@
                 <a:solidFill>
                   <a:srgbClr val="96A5BE"/>
                 </a:solidFill>
-                <a:latin typeface="JetBrains Mono"/>
+                <a:latin typeface="Consolas"/>
               </a:rPr>
               <a:t>Trainer-Präsentation</a:t>
             </a:r>
@@ -4700,7 +4700,7 @@
                 <a:solidFill>
                   <a:srgbClr val="78808C"/>
                 </a:solidFill>
-                <a:latin typeface="JetBrains Mono"/>
+                <a:latin typeface="Consolas"/>
               </a:rPr>
               <a:t>M18  ·  INHALT</a:t>
             </a:r>
@@ -4821,7 +4821,7 @@
                 <a:solidFill>
                   <a:srgbClr val="1F2C56"/>
                 </a:solidFill>
-                <a:latin typeface="Source Serif 4"/>
+                <a:latin typeface="Arial"/>
               </a:rPr>
               <a:t>Was ist erlaubt – was nicht?</a:t>
             </a:r>
@@ -4837,7 +4837,7 @@
         <p:spPr>
           <a:xfrm>
             <a:off x="685800" y="1417320"/>
-            <a:ext cx="10817352" cy="5029200"/>
+            <a:ext cx="10817352" cy="4892040"/>
           </a:xfrm>
           <a:prstGeom prst="rect">
             <a:avLst/>
@@ -4845,12 +4845,12 @@
           <a:noFill/>
         </p:spPr>
         <p:txBody>
-          <a:bodyPr wrap="square">
+          <a:bodyPr wrap="square" anchor="ctr">
             <a:spAutoFit/>
           </a:bodyPr>
           <a:lstStyle/>
           <a:p>
-            <a:pPr>
+            <a:pPr marL="190500" indent="-190500">
               <a:spcBef>
                 <a:spcPts val="400"/>
               </a:spcBef>
@@ -4869,7 +4869,7 @@
             </a:r>
           </a:p>
           <a:p>
-            <a:pPr>
+            <a:pPr marL="190500" indent="-190500">
               <a:spcBef>
                 <a:spcPts val="400"/>
               </a:spcBef>
@@ -4888,7 +4888,7 @@
             </a:r>
           </a:p>
           <a:p>
-            <a:pPr>
+            <a:pPr marL="190500" indent="-190500">
               <a:spcBef>
                 <a:spcPts val="400"/>
               </a:spcBef>
@@ -4907,7 +4907,7 @@
             </a:r>
           </a:p>
           <a:p>
-            <a:pPr>
+            <a:pPr marL="190500" indent="-190500">
               <a:spcBef>
                 <a:spcPts val="400"/>
               </a:spcBef>
@@ -4998,7 +4998,7 @@
                 <a:solidFill>
                   <a:srgbClr val="A0B4D2"/>
                 </a:solidFill>
-                <a:latin typeface="JetBrains Mono"/>
+                <a:latin typeface="Consolas"/>
               </a:rPr>
               <a:t>FKB Campus  ·  M18</a:t>
             </a:r>
@@ -5137,7 +5137,7 @@
                 <a:solidFill>
                   <a:srgbClr val="78808C"/>
                 </a:solidFill>
-                <a:latin typeface="JetBrains Mono"/>
+                <a:latin typeface="Consolas"/>
               </a:rPr>
               <a:t>M18  ·  INHALT</a:t>
             </a:r>
@@ -5258,7 +5258,7 @@
                 <a:solidFill>
                   <a:srgbClr val="1F2C56"/>
                 </a:solidFill>
-                <a:latin typeface="Source Serif 4"/>
+                <a:latin typeface="Arial"/>
               </a:rPr>
               <a:t>Transparenz als Vertrauensmoment</a:t>
             </a:r>
@@ -5274,7 +5274,7 @@
         <p:spPr>
           <a:xfrm>
             <a:off x="685800" y="1417320"/>
-            <a:ext cx="10817352" cy="5029200"/>
+            <a:ext cx="10817352" cy="4892040"/>
           </a:xfrm>
           <a:prstGeom prst="rect">
             <a:avLst/>
@@ -5287,7 +5287,7 @@
           </a:bodyPr>
           <a:lstStyle/>
           <a:p>
-            <a:pPr>
+            <a:pPr marL="190500" indent="-190500">
               <a:spcBef>
                 <a:spcPts val="400"/>
               </a:spcBef>
@@ -5306,7 +5306,7 @@
             </a:r>
           </a:p>
           <a:p>
-            <a:pPr>
+            <a:pPr marL="190500" indent="-190500">
               <a:spcBef>
                 <a:spcPts val="400"/>
               </a:spcBef>
@@ -5325,7 +5325,7 @@
             </a:r>
           </a:p>
           <a:p>
-            <a:pPr>
+            <a:pPr marL="190500" indent="-190500">
               <a:spcBef>
                 <a:spcPts val="400"/>
               </a:spcBef>
@@ -5344,7 +5344,7 @@
             </a:r>
           </a:p>
           <a:p>
-            <a:pPr>
+            <a:pPr marL="190500" indent="-190500">
               <a:spcBef>
                 <a:spcPts val="400"/>
               </a:spcBef>
@@ -5363,7 +5363,7 @@
             </a:r>
           </a:p>
           <a:p>
-            <a:pPr>
+            <a:pPr marL="190500" indent="-190500">
               <a:spcBef>
                 <a:spcPts val="400"/>
               </a:spcBef>
@@ -5382,7 +5382,7 @@
             </a:r>
           </a:p>
           <a:p>
-            <a:pPr>
+            <a:pPr marL="190500" indent="-190500">
               <a:spcBef>
                 <a:spcPts val="400"/>
               </a:spcBef>
@@ -5401,7 +5401,7 @@
             </a:r>
           </a:p>
           <a:p>
-            <a:pPr>
+            <a:pPr marL="190500" indent="-190500">
               <a:spcBef>
                 <a:spcPts val="400"/>
               </a:spcBef>
@@ -5420,7 +5420,7 @@
             </a:r>
           </a:p>
           <a:p>
-            <a:pPr>
+            <a:pPr marL="190500" indent="-190500">
               <a:spcBef>
                 <a:spcPts val="400"/>
               </a:spcBef>
@@ -5439,7 +5439,7 @@
             </a:r>
           </a:p>
           <a:p>
-            <a:pPr>
+            <a:pPr marL="190500" indent="-190500">
               <a:spcBef>
                 <a:spcPts val="400"/>
               </a:spcBef>
@@ -5458,7 +5458,7 @@
             </a:r>
           </a:p>
           <a:p>
-            <a:pPr>
+            <a:pPr marL="190500" indent="-190500">
               <a:spcBef>
                 <a:spcPts val="400"/>
               </a:spcBef>
@@ -5477,7 +5477,7 @@
             </a:r>
           </a:p>
           <a:p>
-            <a:pPr>
+            <a:pPr marL="190500" indent="-190500">
               <a:spcBef>
                 <a:spcPts val="400"/>
               </a:spcBef>
@@ -5496,7 +5496,7 @@
             </a:r>
           </a:p>
           <a:p>
-            <a:pPr>
+            <a:pPr marL="190500" indent="-190500">
               <a:spcBef>
                 <a:spcPts val="400"/>
               </a:spcBef>
@@ -5587,7 +5587,7 @@
                 <a:solidFill>
                   <a:srgbClr val="A0B4D2"/>
                 </a:solidFill>
-                <a:latin typeface="JetBrains Mono"/>
+                <a:latin typeface="Consolas"/>
               </a:rPr>
               <a:t>FKB Campus  ·  M18</a:t>
             </a:r>
@@ -5726,7 +5726,7 @@
                 <a:solidFill>
                   <a:srgbClr val="78808C"/>
                 </a:solidFill>
-                <a:latin typeface="JetBrains Mono"/>
+                <a:latin typeface="Consolas"/>
               </a:rPr>
               <a:t>M18  ·  INHALT</a:t>
             </a:r>
@@ -5847,7 +5847,7 @@
                 <a:solidFill>
                   <a:srgbClr val="1F2C56"/>
                 </a:solidFill>
-                <a:latin typeface="Source Serif 4"/>
+                <a:latin typeface="Arial"/>
               </a:rPr>
               <a:t>AB-1: Mein Bestand – Trigger + Datenlücken</a:t>
             </a:r>
@@ -5863,7 +5863,7 @@
         <p:spPr>
           <a:xfrm>
             <a:off x="685800" y="1417320"/>
-            <a:ext cx="10817352" cy="5029200"/>
+            <a:ext cx="10817352" cy="4892040"/>
           </a:xfrm>
           <a:prstGeom prst="rect">
             <a:avLst/>
@@ -5871,12 +5871,12 @@
           <a:noFill/>
         </p:spPr>
         <p:txBody>
-          <a:bodyPr wrap="square">
+          <a:bodyPr wrap="square" anchor="ctr">
             <a:spAutoFit/>
           </a:bodyPr>
           <a:lstStyle/>
           <a:p>
-            <a:pPr>
+            <a:pPr marL="190500" indent="-190500">
               <a:spcBef>
                 <a:spcPts val="400"/>
               </a:spcBef>
@@ -5895,7 +5895,7 @@
             </a:r>
           </a:p>
           <a:p>
-            <a:pPr>
+            <a:pPr marL="190500" indent="-190500">
               <a:spcBef>
                 <a:spcPts val="400"/>
               </a:spcBef>
@@ -5914,7 +5914,7 @@
             </a:r>
           </a:p>
           <a:p>
-            <a:pPr>
+            <a:pPr marL="190500" indent="-190500">
               <a:spcBef>
                 <a:spcPts val="400"/>
               </a:spcBef>
@@ -6005,7 +6005,7 @@
                 <a:solidFill>
                   <a:srgbClr val="A0B4D2"/>
                 </a:solidFill>
-                <a:latin typeface="JetBrains Mono"/>
+                <a:latin typeface="Consolas"/>
               </a:rPr>
               <a:t>FKB Campus  ·  M18</a:t>
             </a:r>
@@ -6144,7 +6144,7 @@
                 <a:solidFill>
                   <a:srgbClr val="78808C"/>
                 </a:solidFill>
-                <a:latin typeface="JetBrains Mono"/>
+                <a:latin typeface="Consolas"/>
               </a:rPr>
               <a:t>M18  ·  ÜBERSICHT</a:t>
             </a:r>
@@ -6179,7 +6179,7 @@
                 <a:solidFill>
                   <a:srgbClr val="1F2C56"/>
                 </a:solidFill>
-                <a:latin typeface="Source Serif 4"/>
+                <a:latin typeface="Arial"/>
               </a:rPr>
               <a:t>AB-1: Mein Bestand – Trigger + Datenlücken</a:t>
             </a:r>
@@ -6682,7 +6682,7 @@
                 <a:solidFill>
                   <a:srgbClr val="A0B4D2"/>
                 </a:solidFill>
-                <a:latin typeface="JetBrains Mono"/>
+                <a:latin typeface="Consolas"/>
               </a:rPr>
               <a:t>FKB Campus  ·  M18</a:t>
             </a:r>
@@ -6717,7 +6717,7 @@
                 <a:solidFill>
                   <a:srgbClr val="A0B4D2"/>
                 </a:solidFill>
-                <a:latin typeface="JetBrains Mono"/>
+                <a:latin typeface="Consolas"/>
               </a:rPr>
               <a:t>Übersicht</a:t>
             </a:r>
@@ -6856,7 +6856,7 @@
                 <a:solidFill>
                   <a:srgbClr val="78808C"/>
                 </a:solidFill>
-                <a:latin typeface="JetBrains Mono"/>
+                <a:latin typeface="Consolas"/>
               </a:rPr>
               <a:t>M18  ·  ÜBERSICHT</a:t>
             </a:r>
@@ -6891,7 +6891,7 @@
                 <a:solidFill>
                   <a:srgbClr val="1F2C56"/>
                 </a:solidFill>
-                <a:latin typeface="Source Serif 4"/>
+                <a:latin typeface="Arial"/>
               </a:rPr>
               <a:t>AB-2: Datenqualitäts-Audit (Top-10-Kunden)</a:t>
             </a:r>
@@ -7363,7 +7363,7 @@
                 <a:solidFill>
                   <a:srgbClr val="A0B4D2"/>
                 </a:solidFill>
-                <a:latin typeface="JetBrains Mono"/>
+                <a:latin typeface="Consolas"/>
               </a:rPr>
               <a:t>FKB Campus  ·  M18</a:t>
             </a:r>
@@ -7398,7 +7398,7 @@
                 <a:solidFill>
                   <a:srgbClr val="A0B4D2"/>
                 </a:solidFill>
-                <a:latin typeface="JetBrains Mono"/>
+                <a:latin typeface="Consolas"/>
               </a:rPr>
               <a:t>Übersicht</a:t>
             </a:r>
@@ -7537,7 +7537,7 @@
                 <a:solidFill>
                   <a:srgbClr val="78808C"/>
                 </a:solidFill>
-                <a:latin typeface="JetBrains Mono"/>
+                <a:latin typeface="Consolas"/>
               </a:rPr>
               <a:t>ÜBERBLICK  ·  M18</a:t>
             </a:r>
@@ -7615,7 +7615,7 @@
                 <a:solidFill>
                   <a:srgbClr val="1F2C56"/>
                 </a:solidFill>
-                <a:latin typeface="Source Serif 4"/>
+                <a:latin typeface="Arial"/>
               </a:rPr>
               <a:t>Worum geht es heute</a:t>
             </a:r>
@@ -7764,7 +7764,7 @@
                 <a:solidFill>
                   <a:srgbClr val="A0B4D2"/>
                 </a:solidFill>
-                <a:latin typeface="JetBrains Mono"/>
+                <a:latin typeface="Consolas"/>
               </a:rPr>
               <a:t>FKB Campus  ·  M18</a:t>
             </a:r>
@@ -7903,7 +7903,7 @@
                 <a:solidFill>
                   <a:srgbClr val="78808C"/>
                 </a:solidFill>
-                <a:latin typeface="JetBrains Mono"/>
+                <a:latin typeface="Consolas"/>
               </a:rPr>
               <a:t>LERNZIELE  ·  M18</a:t>
             </a:r>
@@ -7981,7 +7981,7 @@
                 <a:solidFill>
                   <a:srgbClr val="1F2C56"/>
                 </a:solidFill>
-                <a:latin typeface="Source Serif 4"/>
+                <a:latin typeface="Arial"/>
               </a:rPr>
               <a:t>Was Sie heute mitnehmen</a:t>
             </a:r>
@@ -8177,7 +8177,7 @@
                 <a:solidFill>
                   <a:srgbClr val="A0B4D2"/>
                 </a:solidFill>
-                <a:latin typeface="JetBrains Mono"/>
+                <a:latin typeface="Consolas"/>
               </a:rPr>
               <a:t>FKB Campus  ·  M18</a:t>
             </a:r>
@@ -8316,7 +8316,7 @@
                 <a:solidFill>
                   <a:srgbClr val="78808C"/>
                 </a:solidFill>
-                <a:latin typeface="JetBrains Mono"/>
+                <a:latin typeface="Consolas"/>
               </a:rPr>
               <a:t>AGENDA  ·  M18</a:t>
             </a:r>
@@ -8394,7 +8394,7 @@
                 <a:solidFill>
                   <a:srgbClr val="1F2C56"/>
                 </a:solidFill>
-                <a:latin typeface="Source Serif 4"/>
+                <a:latin typeface="Arial"/>
               </a:rPr>
               <a:t>So läuft das Modul</a:t>
             </a:r>
@@ -8893,7 +8893,7 @@
                 <a:solidFill>
                   <a:srgbClr val="A0B4D2"/>
                 </a:solidFill>
-                <a:latin typeface="JetBrains Mono"/>
+                <a:latin typeface="Consolas"/>
               </a:rPr>
               <a:t>FKB Campus  ·  M18</a:t>
             </a:r>
@@ -9032,7 +9032,7 @@
                 <a:solidFill>
                   <a:srgbClr val="78808C"/>
                 </a:solidFill>
-                <a:latin typeface="JetBrains Mono"/>
+                <a:latin typeface="Consolas"/>
               </a:rPr>
               <a:t>M18  ·  INHALT</a:t>
             </a:r>
@@ -9153,7 +9153,7 @@
                 <a:solidFill>
                   <a:srgbClr val="1F2C56"/>
                 </a:solidFill>
-                <a:latin typeface="Source Serif 4"/>
+                <a:latin typeface="Arial"/>
               </a:rPr>
               <a:t>Vom Zufallskontakt zum Signal-gesteuerten Gespräch</a:t>
             </a:r>
@@ -9169,7 +9169,7 @@
         <p:spPr>
           <a:xfrm>
             <a:off x="685800" y="1417320"/>
-            <a:ext cx="10817352" cy="5029200"/>
+            <a:ext cx="10817352" cy="4892040"/>
           </a:xfrm>
           <a:prstGeom prst="rect">
             <a:avLst/>
@@ -9177,12 +9177,12 @@
           <a:noFill/>
         </p:spPr>
         <p:txBody>
-          <a:bodyPr wrap="square">
+          <a:bodyPr wrap="square" anchor="ctr">
             <a:spAutoFit/>
           </a:bodyPr>
           <a:lstStyle/>
           <a:p>
-            <a:pPr>
+            <a:pPr marL="177800" indent="-177800">
               <a:spcBef>
                 <a:spcPts val="600"/>
               </a:spcBef>
@@ -9273,7 +9273,7 @@
                 <a:solidFill>
                   <a:srgbClr val="A0B4D2"/>
                 </a:solidFill>
-                <a:latin typeface="JetBrains Mono"/>
+                <a:latin typeface="Consolas"/>
               </a:rPr>
               <a:t>FKB Campus  ·  M18</a:t>
             </a:r>
@@ -9412,7 +9412,7 @@
                 <a:solidFill>
                   <a:srgbClr val="78808C"/>
                 </a:solidFill>
-                <a:latin typeface="JetBrains Mono"/>
+                <a:latin typeface="Consolas"/>
               </a:rPr>
               <a:t>M18  ·  INHALT</a:t>
             </a:r>
@@ -9533,7 +9533,7 @@
                 <a:solidFill>
                   <a:srgbClr val="1F2C56"/>
                 </a:solidFill>
-                <a:latin typeface="Source Serif 4"/>
+                <a:latin typeface="Arial"/>
               </a:rPr>
               <a:t>Die drei Grundprinzipien</a:t>
             </a:r>
@@ -9549,7 +9549,7 @@
         <p:spPr>
           <a:xfrm>
             <a:off x="685800" y="1417320"/>
-            <a:ext cx="10817352" cy="5029200"/>
+            <a:ext cx="10817352" cy="4892040"/>
           </a:xfrm>
           <a:prstGeom prst="rect">
             <a:avLst/>
@@ -9557,12 +9557,12 @@
           <a:noFill/>
         </p:spPr>
         <p:txBody>
-          <a:bodyPr wrap="square">
+          <a:bodyPr wrap="square" anchor="ctr">
             <a:spAutoFit/>
           </a:bodyPr>
           <a:lstStyle/>
           <a:p>
-            <a:pPr>
+            <a:pPr marL="190500" indent="-190500">
               <a:spcBef>
                 <a:spcPts val="400"/>
               </a:spcBef>
@@ -9581,7 +9581,7 @@
             </a:r>
           </a:p>
           <a:p>
-            <a:pPr>
+            <a:pPr marL="190500" indent="-190500">
               <a:spcBef>
                 <a:spcPts val="400"/>
               </a:spcBef>
@@ -9600,7 +9600,7 @@
             </a:r>
           </a:p>
           <a:p>
-            <a:pPr>
+            <a:pPr marL="190500" indent="-190500">
               <a:spcBef>
                 <a:spcPts val="400"/>
               </a:spcBef>
@@ -9619,7 +9619,7 @@
             </a:r>
           </a:p>
           <a:p>
-            <a:pPr>
+            <a:pPr marL="190500" indent="-190500">
               <a:spcBef>
                 <a:spcPts val="400"/>
               </a:spcBef>
@@ -9638,7 +9638,7 @@
             </a:r>
           </a:p>
           <a:p>
-            <a:pPr>
+            <a:pPr marL="190500" indent="-190500">
               <a:spcBef>
                 <a:spcPts val="400"/>
               </a:spcBef>
@@ -9729,7 +9729,7 @@
                 <a:solidFill>
                   <a:srgbClr val="A0B4D2"/>
                 </a:solidFill>
-                <a:latin typeface="JetBrains Mono"/>
+                <a:latin typeface="Consolas"/>
               </a:rPr>
               <a:t>FKB Campus  ·  M18</a:t>
             </a:r>
@@ -9868,7 +9868,7 @@
                 <a:solidFill>
                   <a:srgbClr val="78808C"/>
                 </a:solidFill>
-                <a:latin typeface="JetBrains Mono"/>
+                <a:latin typeface="Consolas"/>
               </a:rPr>
               <a:t>M18  ·  INHALT</a:t>
             </a:r>
@@ -9989,7 +9989,7 @@
                 <a:solidFill>
                   <a:srgbClr val="1F2C56"/>
                 </a:solidFill>
-                <a:latin typeface="Source Serif 4"/>
+                <a:latin typeface="Arial"/>
               </a:rPr>
               <a:t>Typ 3: Lebensereignisbasierte Trigger (aus CRM-Notizen, externen Quellen)</a:t>
             </a:r>
@@ -10005,7 +10005,7 @@
         <p:spPr>
           <a:xfrm>
             <a:off x="685800" y="1417320"/>
-            <a:ext cx="10817352" cy="5029200"/>
+            <a:ext cx="10817352" cy="4892040"/>
           </a:xfrm>
           <a:prstGeom prst="rect">
             <a:avLst/>
@@ -10013,12 +10013,12 @@
           <a:noFill/>
         </p:spPr>
         <p:txBody>
-          <a:bodyPr wrap="square">
+          <a:bodyPr wrap="square" anchor="ctr">
             <a:spAutoFit/>
           </a:bodyPr>
           <a:lstStyle/>
           <a:p>
-            <a:pPr>
+            <a:pPr marL="190500" indent="-190500">
               <a:spcBef>
                 <a:spcPts val="400"/>
               </a:spcBef>
@@ -10037,7 +10037,7 @@
             </a:r>
           </a:p>
           <a:p>
-            <a:pPr>
+            <a:pPr marL="190500" indent="-190500">
               <a:spcBef>
                 <a:spcPts val="400"/>
               </a:spcBef>
@@ -10056,7 +10056,7 @@
             </a:r>
           </a:p>
           <a:p>
-            <a:pPr>
+            <a:pPr marL="190500" indent="-190500">
               <a:spcBef>
                 <a:spcPts val="400"/>
               </a:spcBef>
@@ -10147,7 +10147,7 @@
                 <a:solidFill>
                   <a:srgbClr val="A0B4D2"/>
                 </a:solidFill>
-                <a:latin typeface="JetBrains Mono"/>
+                <a:latin typeface="Consolas"/>
               </a:rPr>
               <a:t>FKB Campus  ·  M18</a:t>
             </a:r>
@@ -10286,7 +10286,7 @@
                 <a:solidFill>
                   <a:srgbClr val="78808C"/>
                 </a:solidFill>
-                <a:latin typeface="JetBrains Mono"/>
+                <a:latin typeface="Consolas"/>
               </a:rPr>
               <a:t>M18  ·  SCHAUBILD</a:t>
             </a:r>
@@ -10321,7 +10321,7 @@
                 <a:solidFill>
                   <a:srgbClr val="1F2C56"/>
                 </a:solidFill>
-                <a:latin typeface="Source Serif 4"/>
+                <a:latin typeface="Arial"/>
               </a:rPr>
               <a:t>Drei Trigger-Typen im datengetriebenen Vertrieb</a:t>
             </a:r>
@@ -10466,7 +10466,7 @@
                 <a:solidFill>
                   <a:srgbClr val="A0B4D2"/>
                 </a:solidFill>
-                <a:latin typeface="JetBrains Mono"/>
+                <a:latin typeface="Consolas"/>
               </a:rPr>
               <a:t>FKB Campus  ·  M18</a:t>
             </a:r>
@@ -10501,7 +10501,7 @@
                 <a:solidFill>
                   <a:srgbClr val="A0B4D2"/>
                 </a:solidFill>
-                <a:latin typeface="JetBrains Mono"/>
+                <a:latin typeface="Consolas"/>
               </a:rPr>
               <a:t>Schaubild</a:t>
             </a:r>
@@ -10640,7 +10640,7 @@
                 <a:solidFill>
                   <a:srgbClr val="78808C"/>
                 </a:solidFill>
-                <a:latin typeface="JetBrains Mono"/>
+                <a:latin typeface="Consolas"/>
               </a:rPr>
               <a:t>M18  ·  INHALT</a:t>
             </a:r>
@@ -10761,7 +10761,7 @@
                 <a:solidFill>
                   <a:srgbClr val="1F2C56"/>
                 </a:solidFill>
-                <a:latin typeface="Source Serif 4"/>
+                <a:latin typeface="Arial"/>
               </a:rPr>
               <a:t>Datenqualitäts-Audit im eigenen Bestand</a:t>
             </a:r>
@@ -10777,7 +10777,7 @@
         <p:spPr>
           <a:xfrm>
             <a:off x="685800" y="1417320"/>
-            <a:ext cx="10817352" cy="5029200"/>
+            <a:ext cx="10817352" cy="4892040"/>
           </a:xfrm>
           <a:prstGeom prst="rect">
             <a:avLst/>
@@ -10785,12 +10785,12 @@
           <a:noFill/>
         </p:spPr>
         <p:txBody>
-          <a:bodyPr wrap="square">
+          <a:bodyPr wrap="square" anchor="ctr">
             <a:spAutoFit/>
           </a:bodyPr>
           <a:lstStyle/>
           <a:p>
-            <a:pPr>
+            <a:pPr marL="190500" indent="-190500">
               <a:spcBef>
                 <a:spcPts val="400"/>
               </a:spcBef>
@@ -10809,7 +10809,7 @@
             </a:r>
           </a:p>
           <a:p>
-            <a:pPr>
+            <a:pPr marL="190500" indent="-190500">
               <a:spcBef>
                 <a:spcPts val="400"/>
               </a:spcBef>
@@ -10828,7 +10828,7 @@
             </a:r>
           </a:p>
           <a:p>
-            <a:pPr>
+            <a:pPr marL="190500" indent="-190500">
               <a:spcBef>
                 <a:spcPts val="400"/>
               </a:spcBef>
@@ -10847,7 +10847,7 @@
             </a:r>
           </a:p>
           <a:p>
-            <a:pPr>
+            <a:pPr marL="190500" indent="-190500">
               <a:spcBef>
                 <a:spcPts val="400"/>
               </a:spcBef>
@@ -10866,7 +10866,7 @@
             </a:r>
           </a:p>
           <a:p>
-            <a:pPr>
+            <a:pPr marL="190500" indent="-190500">
               <a:spcBef>
                 <a:spcPts val="400"/>
               </a:spcBef>
@@ -10957,7 +10957,7 @@
                 <a:solidFill>
                   <a:srgbClr val="A0B4D2"/>
                 </a:solidFill>
-                <a:latin typeface="JetBrains Mono"/>
+                <a:latin typeface="Consolas"/>
               </a:rPr>
               <a:t>FKB Campus  ·  M18</a:t>
             </a:r>

--- a/protected-downloads/praesentation/M18.pptx
+++ b/protected-downloads/praesentation/M18.pptx
@@ -18,7 +18,6 @@
     <p:sldId id="266" r:id="rId18"/>
     <p:sldId id="267" r:id="rId19"/>
     <p:sldId id="268" r:id="rId20"/>
-    <p:sldId id="269" r:id="rId21"/>
   </p:sldIdLst>
   <p:sldSz cx="12188952" cy="6858000" type="screen4x3"/>
   <p:notesSz cx="6858000" cy="9144000"/>
@@ -585,7 +584,7 @@
           <a:lstStyle/>
           <a:p>
             <a:r>
-              <a:t>Siehe Trainerhandbuch (Sektion 3) für Moderationshinweise, Timing und erwartete Teilnehmerreaktionen.</a:t>
+              <a:t>Einstieg: „Wie fühlt sich ein Anruf an, der mit einem echten Anlass beginnt – gegenüber einem Kaltanruf?"</a:t>
             </a:r>
           </a:p>
         </p:txBody>
@@ -655,7 +654,7 @@
           <a:lstStyle/>
           <a:p>
             <a:r>
-              <a:t>Siehe Trainerhandbuch (Sektion 3) für Moderationshinweise, Timing und erwartete Teilnehmerreaktionen.</a:t>
+              <a:t>Kernbotschaft: das Signal sagt, wann und warum – das Gespräch macht der Mensch.</a:t>
             </a:r>
           </a:p>
         </p:txBody>
@@ -725,7 +724,7 @@
           <a:lstStyle/>
           <a:p>
             <a:r>
-              <a:t>Siehe Trainerhandbuch (Sektion 3) für Moderationshinweise, Timing und erwartete Teilnehmerreaktionen.</a:t>
+              <a:t>Jeder Typ hat eine eigene Ansprache-Logik – der lebensereignisbasierte Trigger ist der sensibelste.</a:t>
             </a:r>
           </a:p>
         </p:txBody>
@@ -795,7 +794,12 @@
           <a:lstStyle/>
           <a:p>
             <a:r>
-              <a:t>Siehe Trainerhandbuch (Sektion 3) für Moderationshinweise, Timing und erwartete Teilnehmerreaktionen.</a:t>
+              <a:t>Vor jeder Verbundpartner-Übergabe die Einwilligung prüfen. Transparenz („Mir ist aufgefallen…") schafft Vertrauen.</a:t>
+            </a:r>
+          </a:p>
+          <a:p>
+            <a:r>
+              <a:t>Moderation (HB Sec 3): Wenn TN ohne M17 im Raum sind: Vor der Demo kurz abfragen – „Wer hat M17 noch nicht gemacht?" – und diese TN bitten, sich auf das Mitschauen zu konzentrieren statt parallel mitzunavigieren. Alternativ ein Zweierteam mit einem M17-erfahrenen TN bilden. M17-Abwesenheit ist kein Ausschlussgrund für M18, aber die Demo-Erwartung muss angepasst werden.</a:t>
             </a:r>
           </a:p>
         </p:txBody>
@@ -865,7 +869,7 @@
           <a:lstStyle/>
           <a:p>
             <a:r>
-              <a:t>Siehe Trainerhandbuch (Sektion 3) für Moderationshinweise, Timing und erwartete Teilnehmerreaktionen.</a:t>
+              <a:t>Praxiscase: je Trigger-Typ ein Gespräch – transaktional, ratingbasiert, lebensereignisbasiert. Die Ansprache unterscheidet sich, der menschliche Kern bleibt.</a:t>
             </a:r>
           </a:p>
         </p:txBody>
@@ -935,7 +939,7 @@
           <a:lstStyle/>
           <a:p>
             <a:r>
-              <a:t>Siehe Trainerhandbuch (Sektion 3) für Moderationshinweise, Timing und erwartete Teilnehmerreaktionen.</a:t>
+              <a:t>Überleitung zum Selbstcheck.</a:t>
             </a:r>
           </a:p>
         </p:txBody>
@@ -1005,7 +1009,7 @@
           <a:lstStyle/>
           <a:p>
             <a:r>
-              <a:t>Siehe Trainerhandbuch (Sektion 3) für Moderationshinweise, Timing und erwartete Teilnehmerreaktionen.</a:t>
+              <a:t>Datenqualitäts-Audit und Selbstcheck als Transferanker.</a:t>
             </a:r>
           </a:p>
         </p:txBody>
@@ -4601,7 +4605,7 @@
             <a:avLst/>
           </a:prstGeom>
           <a:solidFill>
-            <a:srgbClr val="EDEDF3"/>
+            <a:srgbClr val="1F2C56"/>
           </a:solidFill>
           <a:ln>
             <a:noFill/>
@@ -4631,57 +4635,14 @@
       </p:sp>
       <p:sp>
         <p:nvSpPr>
-          <p:cNvPr id="3" name="Rectangle 2"/>
-          <p:cNvSpPr/>
-          <p:nvPr/>
-        </p:nvSpPr>
-        <p:spPr>
-          <a:xfrm>
-            <a:off x="0" y="0"/>
-            <a:ext cx="12188952" cy="50292"/>
-          </a:xfrm>
-          <a:prstGeom prst="rect">
-            <a:avLst/>
-          </a:prstGeom>
-          <a:solidFill>
-            <a:srgbClr val="1F2C56"/>
-          </a:solidFill>
-          <a:ln>
-            <a:noFill/>
-          </a:ln>
-        </p:spPr>
-        <p:style>
-          <a:lnRef idx="1">
-            <a:schemeClr val="accent1"/>
-          </a:lnRef>
-          <a:fillRef idx="3">
-            <a:schemeClr val="accent1"/>
-          </a:fillRef>
-          <a:effectRef idx="2">
-            <a:schemeClr val="accent1"/>
-          </a:effectRef>
-          <a:fontRef idx="minor">
-            <a:schemeClr val="lt1"/>
-          </a:fontRef>
-        </p:style>
-        <p:txBody>
-          <a:bodyPr rtlCol="0" anchor="ctr"/>
-          <a:lstStyle/>
-          <a:p>
-            <a:pPr algn="ctr"/>
-          </a:p>
-        </p:txBody>
-      </p:sp>
-      <p:sp>
-        <p:nvSpPr>
-          <p:cNvPr id="4" name="TextBox 3"/>
+          <p:cNvPr id="3" name="TextBox 2"/>
           <p:cNvSpPr txBox="1"/>
           <p:nvPr/>
         </p:nvSpPr>
         <p:spPr>
           <a:xfrm>
-            <a:off x="685800" y="109728"/>
-            <a:ext cx="10817352" cy="228600"/>
+            <a:off x="685800" y="2377440"/>
+            <a:ext cx="10817352" cy="365760"/>
           </a:xfrm>
           <a:prstGeom prst="rect">
             <a:avLst/>
@@ -4696,70 +4657,27 @@
           <a:p>
             <a:pPr algn="l"/>
             <a:r>
-              <a:rPr sz="750">
-                <a:solidFill>
-                  <a:srgbClr val="78808C"/>
+              <a:rPr sz="1200">
+                <a:solidFill>
+                  <a:srgbClr val="D9C089"/>
                 </a:solidFill>
                 <a:latin typeface="Consolas"/>
               </a:rPr>
-              <a:t>M18  ·  INHALT</a:t>
-            </a:r>
-          </a:p>
-        </p:txBody>
-      </p:sp>
-      <p:sp>
-        <p:nvSpPr>
-          <p:cNvPr id="5" name="Rectangle 4"/>
+              <a:t>FALLARBEIT</a:t>
+            </a:r>
+          </a:p>
+        </p:txBody>
+      </p:sp>
+      <p:sp>
+        <p:nvSpPr>
+          <p:cNvPr id="4" name="Rectangle 3"/>
           <p:cNvSpPr/>
           <p:nvPr/>
         </p:nvSpPr>
         <p:spPr>
           <a:xfrm>
-            <a:off x="0" y="1234440"/>
-            <a:ext cx="12188952" cy="12700"/>
-          </a:xfrm>
-          <a:prstGeom prst="rect">
-            <a:avLst/>
-          </a:prstGeom>
-          <a:solidFill>
-            <a:srgbClr val="D8DFE4"/>
-          </a:solidFill>
-          <a:ln>
-            <a:noFill/>
-          </a:ln>
-        </p:spPr>
-        <p:style>
-          <a:lnRef idx="1">
-            <a:schemeClr val="accent1"/>
-          </a:lnRef>
-          <a:fillRef idx="3">
-            <a:schemeClr val="accent1"/>
-          </a:fillRef>
-          <a:effectRef idx="2">
-            <a:schemeClr val="accent1"/>
-          </a:effectRef>
-          <a:fontRef idx="minor">
-            <a:schemeClr val="lt1"/>
-          </a:fontRef>
-        </p:style>
-        <p:txBody>
-          <a:bodyPr rtlCol="0" anchor="ctr"/>
-          <a:lstStyle/>
-          <a:p>
-            <a:pPr algn="ctr"/>
-          </a:p>
-        </p:txBody>
-      </p:sp>
-      <p:sp>
-        <p:nvSpPr>
-          <p:cNvPr id="6" name="Rectangle 5"/>
-          <p:cNvSpPr/>
-          <p:nvPr/>
-        </p:nvSpPr>
-        <p:spPr>
-          <a:xfrm>
-            <a:off x="685800" y="502920"/>
-            <a:ext cx="36576" cy="658368"/>
+            <a:off x="685800" y="2788920"/>
+            <a:ext cx="548640" cy="38100"/>
           </a:xfrm>
           <a:prstGeom prst="rect">
             <a:avLst/>
@@ -4795,14 +4713,14 @@
       </p:sp>
       <p:sp>
         <p:nvSpPr>
-          <p:cNvPr id="7" name="TextBox 6"/>
+          <p:cNvPr id="5" name="TextBox 4"/>
           <p:cNvSpPr txBox="1"/>
           <p:nvPr/>
         </p:nvSpPr>
         <p:spPr>
           <a:xfrm>
-            <a:off x="813816" y="502920"/>
-            <a:ext cx="10634472" cy="685800"/>
+            <a:off x="685800" y="3017520"/>
+            <a:ext cx="10817352" cy="1463040"/>
           </a:xfrm>
           <a:prstGeom prst="rect">
             <a:avLst/>
@@ -4817,27 +4735,27 @@
           <a:p>
             <a:pPr algn="l"/>
             <a:r>
-              <a:rPr sz="2400" b="1" i="0">
-                <a:solidFill>
-                  <a:srgbClr val="1F2C56"/>
+              <a:rPr sz="4000" b="1" i="0">
+                <a:solidFill>
+                  <a:srgbClr val="FFFFFF"/>
                 </a:solidFill>
                 <a:latin typeface="Arial"/>
               </a:rPr>
-              <a:t>Was ist erlaubt – was nicht?</a:t>
-            </a:r>
-          </a:p>
-        </p:txBody>
-      </p:sp>
-      <p:sp>
-        <p:nvSpPr>
-          <p:cNvPr id="8" name="TextBox 7"/>
+              <a:t>Praxiscase</a:t>
+            </a:r>
+          </a:p>
+        </p:txBody>
+      </p:sp>
+      <p:sp>
+        <p:nvSpPr>
+          <p:cNvPr id="6" name="TextBox 5"/>
           <p:cNvSpPr txBox="1"/>
           <p:nvPr/>
         </p:nvSpPr>
         <p:spPr>
           <a:xfrm>
-            <a:off x="685800" y="1417320"/>
-            <a:ext cx="10817352" cy="4892040"/>
+            <a:off x="685800" y="4480560"/>
+            <a:ext cx="8653881" cy="1280160"/>
           </a:xfrm>
           <a:prstGeom prst="rect">
             <a:avLst/>
@@ -4845,141 +4763,34 @@
           <a:noFill/>
         </p:spPr>
         <p:txBody>
-          <a:bodyPr wrap="square" anchor="ctr">
+          <a:bodyPr wrap="square">
             <a:spAutoFit/>
           </a:bodyPr>
           <a:lstStyle/>
           <a:p>
-            <a:pPr marL="190500" indent="-190500">
-              <a:spcBef>
-                <a:spcPts val="400"/>
-              </a:spcBef>
-              <a:spcAft>
-                <a:spcPts val="200"/>
-              </a:spcAft>
-            </a:pPr>
-            <a:r>
-              <a:rPr sz="1300">
-                <a:solidFill>
-                  <a:srgbClr val="3D5466"/>
+            <a:pPr algn="l"/>
+            <a:r>
+              <a:rPr sz="1600" b="0" i="0">
+                <a:solidFill>
+                  <a:srgbClr val="C8D2E6"/>
                 </a:solidFill>
                 <a:latin typeface="Arial"/>
               </a:rPr>
-              <a:t>▸  Kundendaten dürfen für Vertriebszwecke genutzt werden, wenn:</a:t>
-            </a:r>
-          </a:p>
-          <a:p>
-            <a:pPr marL="190500" indent="-190500">
-              <a:spcBef>
-                <a:spcPts val="400"/>
-              </a:spcBef>
-              <a:spcAft>
-                <a:spcPts val="200"/>
-              </a:spcAft>
-            </a:pPr>
-            <a:r>
-              <a:rPr sz="1300">
-                <a:solidFill>
-                  <a:srgbClr val="3D5466"/>
-                </a:solidFill>
-                <a:latin typeface="Arial"/>
-              </a:rPr>
-              <a:t>▸  Eine Rechtsgrundlage besteht (Art. 6 DSGVO): Bei Bankbeziehungen gilt üblicherweise das berechtigte Interesse (Art. 6 Abs. 1 lit. f DSGVO) für Bestandskundenpflege und -beratung</a:t>
-            </a:r>
-          </a:p>
-          <a:p>
-            <a:pPr marL="190500" indent="-190500">
-              <a:spcBef>
-                <a:spcPts val="400"/>
-              </a:spcBef>
-              <a:spcAft>
-                <a:spcPts val="200"/>
-              </a:spcAft>
-            </a:pPr>
-            <a:r>
-              <a:rPr sz="1300">
-                <a:solidFill>
-                  <a:srgbClr val="3D5466"/>
-                </a:solidFill>
-                <a:latin typeface="Arial"/>
-              </a:rPr>
-              <a:t>▸  Die Nutzung dem Kunden gegenüber transparent gemacht wird (Datenschutzerklärung)</a:t>
-            </a:r>
-          </a:p>
-          <a:p>
-            <a:pPr marL="190500" indent="-190500">
-              <a:spcBef>
-                <a:spcPts val="400"/>
-              </a:spcBef>
-              <a:spcAft>
-                <a:spcPts val="200"/>
-              </a:spcAft>
-            </a:pPr>
-            <a:r>
-              <a:rPr sz="1300">
-                <a:solidFill>
-                  <a:srgbClr val="3D5466"/>
-                </a:solidFill>
-                <a:latin typeface="Arial"/>
-              </a:rPr>
-              <a:t>▸  Keine sensiblen Daten (Art. 9 DSGVO) ohne explizite Einwilligung verarbeitet werden</a:t>
-            </a:r>
-          </a:p>
-        </p:txBody>
-      </p:sp>
-      <p:sp>
-        <p:nvSpPr>
-          <p:cNvPr id="9" name="Rectangle 8"/>
-          <p:cNvSpPr/>
-          <p:nvPr/>
-        </p:nvSpPr>
-        <p:spPr>
-          <a:xfrm>
-            <a:off x="0" y="6510528"/>
-            <a:ext cx="12188952" cy="347472"/>
-          </a:xfrm>
-          <a:prstGeom prst="rect">
-            <a:avLst/>
-          </a:prstGeom>
-          <a:solidFill>
-            <a:srgbClr val="0A1937"/>
-          </a:solidFill>
-          <a:ln>
-            <a:noFill/>
-          </a:ln>
-        </p:spPr>
-        <p:style>
-          <a:lnRef idx="1">
-            <a:schemeClr val="accent1"/>
-          </a:lnRef>
-          <a:fillRef idx="3">
-            <a:schemeClr val="accent1"/>
-          </a:fillRef>
-          <a:effectRef idx="2">
-            <a:schemeClr val="accent1"/>
-          </a:effectRef>
-          <a:fontRef idx="minor">
-            <a:schemeClr val="lt1"/>
-          </a:fontRef>
-        </p:style>
-        <p:txBody>
-          <a:bodyPr rtlCol="0" anchor="ctr"/>
-          <a:lstStyle/>
-          <a:p>
-            <a:pPr algn="ctr"/>
-          </a:p>
-        </p:txBody>
-      </p:sp>
-      <p:sp>
-        <p:nvSpPr>
-          <p:cNvPr id="10" name="TextBox 9"/>
+              <a:t>Aus drei Triggern drei passende Gespräche machen.</a:t>
+            </a:r>
+          </a:p>
+        </p:txBody>
+      </p:sp>
+      <p:sp>
+        <p:nvSpPr>
+          <p:cNvPr id="7" name="TextBox 6"/>
           <p:cNvSpPr txBox="1"/>
           <p:nvPr/>
         </p:nvSpPr>
         <p:spPr>
           <a:xfrm>
-            <a:off x="685800" y="6583680"/>
-            <a:ext cx="6490411" cy="256032"/>
+            <a:off x="685800" y="6355080"/>
+            <a:ext cx="10817352" cy="274320"/>
           </a:xfrm>
           <a:prstGeom prst="rect">
             <a:avLst/>
@@ -4996,7 +4807,7 @@
             <a:r>
               <a:rPr sz="700">
                 <a:solidFill>
-                  <a:srgbClr val="A0B4D2"/>
+                  <a:srgbClr val="8CA0C3"/>
                 </a:solidFill>
                 <a:latin typeface="Consolas"/>
               </a:rPr>
@@ -5139,7 +4950,7 @@
                 </a:solidFill>
                 <a:latin typeface="Consolas"/>
               </a:rPr>
-              <a:t>M18  ·  INHALT</a:t>
+              <a:t>M18  ·  ARBEITSBLATT</a:t>
             </a:r>
           </a:p>
         </p:txBody>
@@ -5260,7 +5071,7 @@
                 </a:solidFill>
                 <a:latin typeface="Arial"/>
               </a:rPr>
-              <a:t>Transparenz als Vertrauensmoment</a:t>
+              <a:t>Drei Trigger, drei Gespräche bearbeiten</a:t>
             </a:r>
           </a:p>
         </p:txBody>
@@ -5273,8 +5084,8 @@
         </p:nvSpPr>
         <p:spPr>
           <a:xfrm>
-            <a:off x="685800" y="1417320"/>
-            <a:ext cx="10817352" cy="4892040"/>
+            <a:off x="685800" y="1554480"/>
+            <a:ext cx="10817352" cy="3840480"/>
           </a:xfrm>
           <a:prstGeom prst="rect">
             <a:avLst/>
@@ -5296,13 +5107,13 @@
               </a:spcAft>
             </a:pPr>
             <a:r>
-              <a:rPr sz="1300">
+              <a:rPr sz="1400">
                 <a:solidFill>
                   <a:srgbClr val="3D5466"/>
                 </a:solidFill>
                 <a:latin typeface="Arial"/>
               </a:rPr>
-              <a:t>▸  ## 4.5 Praxiscase: Drei Trigger, drei Gespräche</a:t>
+              <a:t>▸  Identifizieren Sie in Ihrem Bestand Trigger und Datenlücken (AB-1).</a:t>
             </a:r>
           </a:p>
           <a:p>
@@ -5315,13 +5126,13 @@
               </a:spcAft>
             </a:pPr>
             <a:r>
-              <a:rPr sz="1300">
+              <a:rPr sz="1400">
                 <a:solidFill>
                   <a:srgbClr val="3D5466"/>
                 </a:solidFill>
                 <a:latin typeface="Arial"/>
               </a:rPr>
-              <a:t>▸  Ausgangssituation</a:t>
+              <a:t>▸  Führen Sie ein Datenqualitäts-Audit Ihrer Top-10-Kunden durch (AB-2).</a:t>
             </a:r>
           </a:p>
           <a:p>
@@ -5334,191 +5145,98 @@
               </a:spcAft>
             </a:pPr>
             <a:r>
-              <a:rPr sz="1300">
+              <a:rPr sz="1400">
                 <a:solidFill>
                   <a:srgbClr val="3D5466"/>
                 </a:solidFill>
                 <a:latin typeface="Arial"/>
               </a:rPr>
-              <a:t>▸  Beraterin Anna Schreiber hat 38 Firmenkunden. Sie etabliert eine neue Montagsroutine: 20 Minuten agree-Triggerliste durcharbeiten. Was findet sie in der ersten Woche?</a:t>
-            </a:r>
-          </a:p>
-          <a:p>
-            <a:pPr marL="190500" indent="-190500">
-              <a:spcBef>
-                <a:spcPts val="400"/>
-              </a:spcBef>
-              <a:spcAft>
-                <a:spcPts val="200"/>
-              </a:spcAft>
-            </a:pPr>
-            <a:r>
-              <a:rPr sz="1300">
-                <a:solidFill>
-                  <a:srgbClr val="3D5466"/>
+              <a:t>▸  Entwickeln Sie zu drei Triggern je einen passenden, DSGVO-konformen Gesprächseinstieg.</a:t>
+            </a:r>
+          </a:p>
+        </p:txBody>
+      </p:sp>
+      <p:sp>
+        <p:nvSpPr>
+          <p:cNvPr id="9" name="Rectangle 8"/>
+          <p:cNvSpPr/>
+          <p:nvPr/>
+        </p:nvSpPr>
+        <p:spPr>
+          <a:xfrm>
+            <a:off x="685800" y="5486400"/>
+            <a:ext cx="10817352" cy="640080"/>
+          </a:xfrm>
+          <a:prstGeom prst="rect">
+            <a:avLst/>
+          </a:prstGeom>
+          <a:solidFill>
+            <a:srgbClr val="1F2C56"/>
+          </a:solidFill>
+          <a:ln>
+            <a:noFill/>
+          </a:ln>
+        </p:spPr>
+        <p:style>
+          <a:lnRef idx="1">
+            <a:schemeClr val="accent1"/>
+          </a:lnRef>
+          <a:fillRef idx="3">
+            <a:schemeClr val="accent1"/>
+          </a:fillRef>
+          <a:effectRef idx="2">
+            <a:schemeClr val="accent1"/>
+          </a:effectRef>
+          <a:fontRef idx="minor">
+            <a:schemeClr val="lt1"/>
+          </a:fontRef>
+        </p:style>
+        <p:txBody>
+          <a:bodyPr rtlCol="0" anchor="ctr"/>
+          <a:lstStyle/>
+          <a:p>
+            <a:pPr algn="ctr"/>
+          </a:p>
+        </p:txBody>
+      </p:sp>
+      <p:sp>
+        <p:nvSpPr>
+          <p:cNvPr id="10" name="TextBox 9"/>
+          <p:cNvSpPr txBox="1"/>
+          <p:nvPr/>
+        </p:nvSpPr>
+        <p:spPr>
+          <a:xfrm>
+            <a:off x="868680" y="5596128"/>
+            <a:ext cx="10451592" cy="457200"/>
+          </a:xfrm>
+          <a:prstGeom prst="rect">
+            <a:avLst/>
+          </a:prstGeom>
+          <a:noFill/>
+        </p:spPr>
+        <p:txBody>
+          <a:bodyPr wrap="square">
+            <a:spAutoFit/>
+          </a:bodyPr>
+          <a:lstStyle/>
+          <a:p>
+            <a:pPr algn="l"/>
+            <a:r>
+              <a:rPr sz="1300" b="1" i="0">
+                <a:solidFill>
+                  <a:srgbClr val="FFFFFF"/>
                 </a:solidFill>
                 <a:latin typeface="Arial"/>
               </a:rPr>
-              <a:t>▸  Trigger 1: Transaktional – Auslandszahlung erstmals aufgetaucht</a:t>
-            </a:r>
-          </a:p>
-          <a:p>
-            <a:pPr marL="190500" indent="-190500">
-              <a:spcBef>
-                <a:spcPts val="400"/>
-              </a:spcBef>
-              <a:spcAft>
-                <a:spcPts val="200"/>
-              </a:spcAft>
-            </a:pPr>
-            <a:r>
-              <a:rPr sz="1300">
-                <a:solidFill>
-                  <a:srgbClr val="3D5466"/>
-                </a:solidFill>
-                <a:latin typeface="Arial"/>
-              </a:rPr>
-              <a:t>▸  Trigger 2: Ratingbasiert – Prolongation in 5 Monaten</a:t>
-            </a:r>
-          </a:p>
-          <a:p>
-            <a:pPr marL="190500" indent="-190500">
-              <a:spcBef>
-                <a:spcPts val="400"/>
-              </a:spcBef>
-              <a:spcAft>
-                <a:spcPts val="200"/>
-              </a:spcAft>
-            </a:pPr>
-            <a:r>
-              <a:rPr sz="1300">
-                <a:solidFill>
-                  <a:srgbClr val="3D5466"/>
-                </a:solidFill>
-                <a:latin typeface="Arial"/>
-              </a:rPr>
-              <a:t>▸  Trigger 3: Lebensereignis – Gesellschafterin 58 Jahre</a:t>
-            </a:r>
-          </a:p>
-          <a:p>
-            <a:pPr marL="190500" indent="-190500">
-              <a:spcBef>
-                <a:spcPts val="400"/>
-              </a:spcBef>
-              <a:spcAft>
-                <a:spcPts val="200"/>
-              </a:spcAft>
-            </a:pPr>
-            <a:r>
-              <a:rPr sz="1300">
-                <a:solidFill>
-                  <a:srgbClr val="3D5466"/>
-                </a:solidFill>
-                <a:latin typeface="Arial"/>
-              </a:rPr>
-              <a:t>▸  Ergebnis in 4 Wochen</a:t>
-            </a:r>
-          </a:p>
-          <a:p>
-            <a:pPr marL="190500" indent="-190500">
-              <a:spcBef>
-                <a:spcPts val="400"/>
-              </a:spcBef>
-              <a:spcAft>
-                <a:spcPts val="200"/>
-              </a:spcAft>
-            </a:pPr>
-            <a:r>
-              <a:rPr sz="1300">
-                <a:solidFill>
-                  <a:srgbClr val="3D5466"/>
-                </a:solidFill>
-                <a:latin typeface="Arial"/>
-              </a:rPr>
-              <a:t>▸  Anna hat mit drei Triggern drei Gespräche initiiert – alle mit konkretem Ergebnis. Kein Gespräch war ein „Kaltanruf". Alle hatten eine evidenzbasierte Gesprächseröffnung.</a:t>
-            </a:r>
-          </a:p>
-          <a:p>
-            <a:pPr marL="190500" indent="-190500">
-              <a:spcBef>
-                <a:spcPts val="400"/>
-              </a:spcBef>
-              <a:spcAft>
-                <a:spcPts val="200"/>
-              </a:spcAft>
-            </a:pPr>
-            <a:r>
-              <a:rPr sz="1300">
-                <a:solidFill>
-                  <a:srgbClr val="3D5466"/>
-                </a:solidFill>
-                <a:latin typeface="Arial"/>
-              </a:rPr>
-              <a:t>▸  Reflexionsfragen</a:t>
-            </a:r>
-          </a:p>
-          <a:p>
-            <a:pPr marL="190500" indent="-190500">
-              <a:spcBef>
-                <a:spcPts val="400"/>
-              </a:spcBef>
-              <a:spcAft>
-                <a:spcPts val="200"/>
-              </a:spcAft>
-            </a:pPr>
-            <a:r>
-              <a:rPr sz="1300">
-                <a:solidFill>
-                  <a:srgbClr val="3D5466"/>
-                </a:solidFill>
-                <a:latin typeface="Arial"/>
-              </a:rPr>
-              <a:t>▸  Welche der drei Trigger-Typen ist in Ihrem Bestand am häufigsten verfügbar?</a:t>
-            </a:r>
-          </a:p>
-          <a:p>
-            <a:pPr marL="190500" indent="-190500">
-              <a:spcBef>
-                <a:spcPts val="400"/>
-              </a:spcBef>
-              <a:spcAft>
-                <a:spcPts val="200"/>
-              </a:spcAft>
-            </a:pPr>
-            <a:r>
-              <a:rPr sz="1300">
-                <a:solidFill>
-                  <a:srgbClr val="3D5466"/>
-                </a:solidFill>
-                <a:latin typeface="Arial"/>
-              </a:rPr>
-              <a:t>▸  Wo in agree würden Sie morgen früh mit der Triggersuche anfangen?</a:t>
-            </a:r>
-          </a:p>
-          <a:p>
-            <a:pPr marL="190500" indent="-190500">
-              <a:spcBef>
-                <a:spcPts val="400"/>
-              </a:spcBef>
-              <a:spcAft>
-                <a:spcPts val="200"/>
-              </a:spcAft>
-            </a:pPr>
-            <a:r>
-              <a:rPr sz="1300">
-                <a:solidFill>
-                  <a:srgbClr val="3D5466"/>
-                </a:solidFill>
-                <a:latin typeface="Arial"/>
-              </a:rPr>
-              <a:t>▸  Wie würden Sie dem Kunden Becker erklären, warum Sie angerufen haben – ohne dass er sich überwacht fühlt?</a:t>
-            </a:r>
-          </a:p>
-        </p:txBody>
-      </p:sp>
-      <p:sp>
-        <p:nvSpPr>
-          <p:cNvPr id="9" name="Rectangle 8"/>
+              <a:t>→  Bearbeitung im Teilnehmer-Workbook (Arbeitsblatt mit Ausfüllfeldern)</a:t>
+            </a:r>
+          </a:p>
+        </p:txBody>
+      </p:sp>
+      <p:sp>
+        <p:nvSpPr>
+          <p:cNvPr id="11" name="Rectangle 10"/>
           <p:cNvSpPr/>
           <p:nvPr/>
         </p:nvSpPr>
@@ -5561,7 +5279,7 @@
       </p:sp>
       <p:sp>
         <p:nvSpPr>
-          <p:cNvPr id="10" name="TextBox 9"/>
+          <p:cNvPr id="12" name="TextBox 11"/>
           <p:cNvSpPr txBox="1"/>
           <p:nvPr/>
         </p:nvSpPr>
@@ -5849,7 +5567,7 @@
                 </a:solidFill>
                 <a:latin typeface="Arial"/>
               </a:rPr>
-              <a:t>AB-1: Mein Bestand – Trigger + Datenlücken</a:t>
+              <a:t>Prinzip dieses Moduls</a:t>
             </a:r>
           </a:p>
         </p:txBody>
@@ -5875,6 +5593,25 @@
             <a:spAutoFit/>
           </a:bodyPr>
           <a:lstStyle/>
+          <a:p>
+            <a:pPr marL="177800" indent="-177800">
+              <a:spcBef>
+                <a:spcPts val="600"/>
+              </a:spcBef>
+              <a:spcAft>
+                <a:spcPts val="200"/>
+              </a:spcAft>
+            </a:pPr>
+            <a:r>
+              <a:rPr sz="1200" i="1">
+                <a:solidFill>
+                  <a:srgbClr val="3D5466"/>
+                </a:solidFill>
+                <a:latin typeface="Arial"/>
+              </a:rPr>
+              <a:t>→  Ein Datenpunkt öffnet die Tür – das Gespräch bleibt menschlich.</a:t>
+            </a:r>
+          </a:p>
           <a:p>
             <a:pPr marL="190500" indent="-190500">
               <a:spcBef>
@@ -5891,45 +5628,7 @@
                 </a:solidFill>
                 <a:latin typeface="Arial"/>
               </a:rPr>
-              <a:t>▸  (Nutzen Sie die Priorisierungstabelle aus Sec 4.6, um Ihren wirkungsvollsten Trigger zu bestimmen)</a:t>
-            </a:r>
-          </a:p>
-          <a:p>
-            <a:pPr marL="190500" indent="-190500">
-              <a:spcBef>
-                <a:spcPts val="400"/>
-              </a:spcBef>
-              <a:spcAft>
-                <a:spcPts val="200"/>
-              </a:spcAft>
-            </a:pPr>
-            <a:r>
-              <a:rPr sz="1300">
-                <a:solidFill>
-                  <a:srgbClr val="3D5466"/>
-                </a:solidFill>
-                <a:latin typeface="Arial"/>
-              </a:rPr>
-              <a:t>▸  Ergänzen Sie für Ihren Bestand die relevantesten Trigger je Typ:</a:t>
-            </a:r>
-          </a:p>
-          <a:p>
-            <a:pPr marL="190500" indent="-190500">
-              <a:spcBef>
-                <a:spcPts val="400"/>
-              </a:spcBef>
-              <a:spcAft>
-                <a:spcPts val="200"/>
-              </a:spcAft>
-            </a:pPr>
-            <a:r>
-              <a:rPr sz="1300">
-                <a:solidFill>
-                  <a:srgbClr val="3D5466"/>
-                </a:solidFill>
-                <a:latin typeface="Arial"/>
-              </a:rPr>
-              <a:t>▸  Mein wirkungsvollster Trigger für die nächsten 4 Wochen:</a:t>
+              <a:t>▸  Trigger aus agree machen aus dem Kaltanruf einen Anlass; die Beziehung entsteht trotzdem am Telefon, nicht in der Software.</a:t>
             </a:r>
           </a:p>
         </p:txBody>
@@ -6045,7 +5744,7 @@
             <a:avLst/>
           </a:prstGeom>
           <a:solidFill>
-            <a:srgbClr val="FFFFFF"/>
+            <a:srgbClr val="EDEDF3"/>
           </a:solidFill>
           <a:ln>
             <a:noFill/>
@@ -6146,43 +5845,51 @@
                 </a:solidFill>
                 <a:latin typeface="Consolas"/>
               </a:rPr>
-              <a:t>M18  ·  ÜBERSICHT</a:t>
-            </a:r>
-          </a:p>
-        </p:txBody>
-      </p:sp>
-      <p:sp>
-        <p:nvSpPr>
-          <p:cNvPr id="5" name="TextBox 4"/>
-          <p:cNvSpPr txBox="1"/>
-          <p:nvPr/>
-        </p:nvSpPr>
-        <p:spPr>
-          <a:xfrm>
-            <a:off x="685800" y="502920"/>
-            <a:ext cx="10817352" cy="594360"/>
-          </a:xfrm>
-          <a:prstGeom prst="rect">
-            <a:avLst/>
-          </a:prstGeom>
-          <a:noFill/>
-        </p:spPr>
-        <p:txBody>
-          <a:bodyPr wrap="square">
-            <a:spAutoFit/>
-          </a:bodyPr>
-          <a:lstStyle/>
-          <a:p>
-            <a:pPr algn="l"/>
-            <a:r>
-              <a:rPr sz="2000" b="1" i="0">
-                <a:solidFill>
-                  <a:srgbClr val="1F2C56"/>
-                </a:solidFill>
-                <a:latin typeface="Arial"/>
-              </a:rPr>
-              <a:t>AB-1: Mein Bestand – Trigger + Datenlücken</a:t>
-            </a:r>
+              <a:t>M18  ·  INHALT</a:t>
+            </a:r>
+          </a:p>
+        </p:txBody>
+      </p:sp>
+      <p:sp>
+        <p:nvSpPr>
+          <p:cNvPr id="5" name="Rectangle 4"/>
+          <p:cNvSpPr/>
+          <p:nvPr/>
+        </p:nvSpPr>
+        <p:spPr>
+          <a:xfrm>
+            <a:off x="0" y="1234440"/>
+            <a:ext cx="12188952" cy="12700"/>
+          </a:xfrm>
+          <a:prstGeom prst="rect">
+            <a:avLst/>
+          </a:prstGeom>
+          <a:solidFill>
+            <a:srgbClr val="D8DFE4"/>
+          </a:solidFill>
+          <a:ln>
+            <a:noFill/>
+          </a:ln>
+        </p:spPr>
+        <p:style>
+          <a:lnRef idx="1">
+            <a:schemeClr val="accent1"/>
+          </a:lnRef>
+          <a:fillRef idx="3">
+            <a:schemeClr val="accent1"/>
+          </a:fillRef>
+          <a:effectRef idx="2">
+            <a:schemeClr val="accent1"/>
+          </a:effectRef>
+          <a:fontRef idx="minor">
+            <a:schemeClr val="lt1"/>
+          </a:fontRef>
+        </p:style>
+        <p:txBody>
+          <a:bodyPr rtlCol="0" anchor="ctr"/>
+          <a:lstStyle/>
+          <a:p>
+            <a:pPr algn="ctr"/>
           </a:p>
         </p:txBody>
       </p:sp>
@@ -6194,8 +5901,8 @@
         </p:nvSpPr>
         <p:spPr>
           <a:xfrm>
-            <a:off x="685800" y="1143000"/>
-            <a:ext cx="10817352" cy="25400"/>
+            <a:off x="685800" y="502920"/>
+            <a:ext cx="36576" cy="658368"/>
           </a:xfrm>
           <a:prstGeom prst="rect">
             <a:avLst/>
@@ -6229,391 +5936,124 @@
           </a:p>
         </p:txBody>
       </p:sp>
-      <p:graphicFrame>
-        <p:nvGraphicFramePr>
-          <p:cNvPr id="7" name="Table 6"/>
-          <p:cNvGraphicFramePr>
-            <a:graphicFrameLocks noGrp="1"/>
-          </p:cNvGraphicFramePr>
-          <p:nvPr/>
-        </p:nvGraphicFramePr>
-        <p:xfrm>
-          <a:off x="685800" y="1417320"/>
-          <a:ext cx="10817352" cy="2688336"/>
-        </p:xfrm>
-        <a:graphic>
-          <a:graphicData uri="http://schemas.openxmlformats.org/drawingml/2006/table">
-            <a:tbl>
-              <a:tblPr firstRow="1" bandRow="1">
-                <a:tableStyleId>{5C22544A-7EE6-4342-B048-85BDC9FD1C3A}</a:tableStyleId>
-              </a:tblPr>
-              <a:tblGrid>
-                <a:gridCol w="2704338"/>
-                <a:gridCol w="2704338"/>
-                <a:gridCol w="2704338"/>
-                <a:gridCol w="2704338"/>
-              </a:tblGrid>
-              <a:tr h="384048">
-                <a:tc>
-                  <a:txBody>
-                    <a:bodyPr/>
-                    <a:lstStyle/>
-                    <a:p>
-                      <a:r>
-                        <a:rPr sz="1100" b="1">
-                          <a:solidFill>
-                            <a:srgbClr val="FFFFFF"/>
-                          </a:solidFill>
-                          <a:latin typeface="Arial"/>
-                        </a:rPr>
-                        <a:t>Trigger-Typ</a:t>
-                      </a:r>
-                    </a:p>
-                  </a:txBody>
-                  <a:tcPr>
-                    <a:solidFill>
-                      <a:srgbClr val="1F2C56"/>
-                    </a:solidFill>
-                  </a:tcPr>
-                </a:tc>
-                <a:tc>
-                  <a:txBody>
-                    <a:bodyPr/>
-                    <a:lstStyle/>
-                    <a:p>
-                      <a:r>
-                        <a:rPr sz="1100" b="1">
-                          <a:solidFill>
-                            <a:srgbClr val="FFFFFF"/>
-                          </a:solidFill>
-                          <a:latin typeface="Arial"/>
-                        </a:rPr>
-                        <a:t>Datensignal</a:t>
-                      </a:r>
-                    </a:p>
-                  </a:txBody>
-                  <a:tcPr>
-                    <a:solidFill>
-                      <a:srgbClr val="1F2C56"/>
-                    </a:solidFill>
-                  </a:tcPr>
-                </a:tc>
-                <a:tc>
-                  <a:txBody>
-                    <a:bodyPr/>
-                    <a:lstStyle/>
-                    <a:p>
-                      <a:r>
-                        <a:rPr sz="1100" b="1">
-                          <a:solidFill>
-                            <a:srgbClr val="FFFFFF"/>
-                          </a:solidFill>
-                          <a:latin typeface="Arial"/>
-                        </a:rPr>
-                        <a:t>agree-Quelle</a:t>
-                      </a:r>
-                    </a:p>
-                  </a:txBody>
-                  <a:tcPr>
-                    <a:solidFill>
-                      <a:srgbClr val="1F2C56"/>
-                    </a:solidFill>
-                  </a:tcPr>
-                </a:tc>
-                <a:tc>
-                  <a:txBody>
-                    <a:bodyPr/>
-                    <a:lstStyle/>
-                    <a:p>
-                      <a:r>
-                        <a:rPr sz="1100" b="1">
-                          <a:solidFill>
-                            <a:srgbClr val="FFFFFF"/>
-                          </a:solidFill>
-                          <a:latin typeface="Arial"/>
-                        </a:rPr>
-                        <a:t>Möglicher Bedarf</a:t>
-                      </a:r>
-                    </a:p>
-                  </a:txBody>
-                  <a:tcPr>
-                    <a:solidFill>
-                      <a:srgbClr val="1F2C56"/>
-                    </a:solidFill>
-                  </a:tcPr>
-                </a:tc>
-              </a:tr>
-              <a:tr h="384048">
-                <a:tc>
-                  <a:txBody>
-                    <a:bodyPr/>
-                    <a:lstStyle/>
-                    <a:p>
-                      <a:r>
-                        <a:rPr sz="1050">
-                          <a:solidFill>
-                            <a:srgbClr val="3D5466"/>
-                          </a:solidFill>
-                          <a:latin typeface="Arial"/>
-                        </a:rPr>
-                        <a:t>Transaktional</a:t>
-                      </a:r>
-                    </a:p>
-                  </a:txBody>
-                  <a:tcPr/>
-                </a:tc>
-                <a:tc>
-                  <a:txBody>
-                    <a:bodyPr/>
-                    <a:lstStyle/>
-                    <a:p/>
-                  </a:txBody>
-                  <a:tcPr/>
-                </a:tc>
-                <a:tc>
-                  <a:txBody>
-                    <a:bodyPr/>
-                    <a:lstStyle/>
-                    <a:p/>
-                  </a:txBody>
-                  <a:tcPr/>
-                </a:tc>
-                <a:tc>
-                  <a:txBody>
-                    <a:bodyPr/>
-                    <a:lstStyle/>
-                    <a:p/>
-                  </a:txBody>
-                  <a:tcPr/>
-                </a:tc>
-              </a:tr>
-              <a:tr h="384048">
-                <a:tc>
-                  <a:txBody>
-                    <a:bodyPr/>
-                    <a:lstStyle/>
-                    <a:p>
-                      <a:r>
-                        <a:rPr sz="1050">
-                          <a:solidFill>
-                            <a:srgbClr val="3D5466"/>
-                          </a:solidFill>
-                          <a:latin typeface="Arial"/>
-                        </a:rPr>
-                        <a:t>Transaktional</a:t>
-                      </a:r>
-                    </a:p>
-                  </a:txBody>
-                  <a:tcPr/>
-                </a:tc>
-                <a:tc>
-                  <a:txBody>
-                    <a:bodyPr/>
-                    <a:lstStyle/>
-                    <a:p/>
-                  </a:txBody>
-                  <a:tcPr/>
-                </a:tc>
-                <a:tc>
-                  <a:txBody>
-                    <a:bodyPr/>
-                    <a:lstStyle/>
-                    <a:p/>
-                  </a:txBody>
-                  <a:tcPr/>
-                </a:tc>
-                <a:tc>
-                  <a:txBody>
-                    <a:bodyPr/>
-                    <a:lstStyle/>
-                    <a:p/>
-                  </a:txBody>
-                  <a:tcPr/>
-                </a:tc>
-              </a:tr>
-              <a:tr h="384048">
-                <a:tc>
-                  <a:txBody>
-                    <a:bodyPr/>
-                    <a:lstStyle/>
-                    <a:p>
-                      <a:r>
-                        <a:rPr sz="1050">
-                          <a:solidFill>
-                            <a:srgbClr val="3D5466"/>
-                          </a:solidFill>
-                          <a:latin typeface="Arial"/>
-                        </a:rPr>
-                        <a:t>Ratingbasiert</a:t>
-                      </a:r>
-                    </a:p>
-                  </a:txBody>
-                  <a:tcPr/>
-                </a:tc>
-                <a:tc>
-                  <a:txBody>
-                    <a:bodyPr/>
-                    <a:lstStyle/>
-                    <a:p/>
-                  </a:txBody>
-                  <a:tcPr/>
-                </a:tc>
-                <a:tc>
-                  <a:txBody>
-                    <a:bodyPr/>
-                    <a:lstStyle/>
-                    <a:p/>
-                  </a:txBody>
-                  <a:tcPr/>
-                </a:tc>
-                <a:tc>
-                  <a:txBody>
-                    <a:bodyPr/>
-                    <a:lstStyle/>
-                    <a:p/>
-                  </a:txBody>
-                  <a:tcPr/>
-                </a:tc>
-              </a:tr>
-              <a:tr h="384048">
-                <a:tc>
-                  <a:txBody>
-                    <a:bodyPr/>
-                    <a:lstStyle/>
-                    <a:p>
-                      <a:r>
-                        <a:rPr sz="1050">
-                          <a:solidFill>
-                            <a:srgbClr val="3D5466"/>
-                          </a:solidFill>
-                          <a:latin typeface="Arial"/>
-                        </a:rPr>
-                        <a:t>Ratingbasiert</a:t>
-                      </a:r>
-                    </a:p>
-                  </a:txBody>
-                  <a:tcPr/>
-                </a:tc>
-                <a:tc>
-                  <a:txBody>
-                    <a:bodyPr/>
-                    <a:lstStyle/>
-                    <a:p/>
-                  </a:txBody>
-                  <a:tcPr/>
-                </a:tc>
-                <a:tc>
-                  <a:txBody>
-                    <a:bodyPr/>
-                    <a:lstStyle/>
-                    <a:p/>
-                  </a:txBody>
-                  <a:tcPr/>
-                </a:tc>
-                <a:tc>
-                  <a:txBody>
-                    <a:bodyPr/>
-                    <a:lstStyle/>
-                    <a:p/>
-                  </a:txBody>
-                  <a:tcPr/>
-                </a:tc>
-              </a:tr>
-              <a:tr h="384048">
-                <a:tc>
-                  <a:txBody>
-                    <a:bodyPr/>
-                    <a:lstStyle/>
-                    <a:p>
-                      <a:r>
-                        <a:rPr sz="1050">
-                          <a:solidFill>
-                            <a:srgbClr val="3D5466"/>
-                          </a:solidFill>
-                          <a:latin typeface="Arial"/>
-                        </a:rPr>
-                        <a:t>Lebensereignis</a:t>
-                      </a:r>
-                    </a:p>
-                  </a:txBody>
-                  <a:tcPr/>
-                </a:tc>
-                <a:tc>
-                  <a:txBody>
-                    <a:bodyPr/>
-                    <a:lstStyle/>
-                    <a:p/>
-                  </a:txBody>
-                  <a:tcPr/>
-                </a:tc>
-                <a:tc>
-                  <a:txBody>
-                    <a:bodyPr/>
-                    <a:lstStyle/>
-                    <a:p/>
-                  </a:txBody>
-                  <a:tcPr/>
-                </a:tc>
-                <a:tc>
-                  <a:txBody>
-                    <a:bodyPr/>
-                    <a:lstStyle/>
-                    <a:p/>
-                  </a:txBody>
-                  <a:tcPr/>
-                </a:tc>
-              </a:tr>
-              <a:tr h="384048">
-                <a:tc>
-                  <a:txBody>
-                    <a:bodyPr/>
-                    <a:lstStyle/>
-                    <a:p>
-                      <a:r>
-                        <a:rPr sz="1050">
-                          <a:solidFill>
-                            <a:srgbClr val="3D5466"/>
-                          </a:solidFill>
-                          <a:latin typeface="Arial"/>
-                        </a:rPr>
-                        <a:t>Lebensereignis</a:t>
-                      </a:r>
-                    </a:p>
-                  </a:txBody>
-                  <a:tcPr/>
-                </a:tc>
-                <a:tc>
-                  <a:txBody>
-                    <a:bodyPr/>
-                    <a:lstStyle/>
-                    <a:p/>
-                  </a:txBody>
-                  <a:tcPr/>
-                </a:tc>
-                <a:tc>
-                  <a:txBody>
-                    <a:bodyPr/>
-                    <a:lstStyle/>
-                    <a:p/>
-                  </a:txBody>
-                  <a:tcPr/>
-                </a:tc>
-                <a:tc>
-                  <a:txBody>
-                    <a:bodyPr/>
-                    <a:lstStyle/>
-                    <a:p/>
-                  </a:txBody>
-                  <a:tcPr/>
-                </a:tc>
-              </a:tr>
-            </a:tbl>
-          </a:graphicData>
-        </a:graphic>
-      </p:graphicFrame>
-      <p:sp>
-        <p:nvSpPr>
-          <p:cNvPr id="8" name="Rectangle 7"/>
+      <p:sp>
+        <p:nvSpPr>
+          <p:cNvPr id="7" name="TextBox 6"/>
+          <p:cNvSpPr txBox="1"/>
+          <p:nvPr/>
+        </p:nvSpPr>
+        <p:spPr>
+          <a:xfrm>
+            <a:off x="813816" y="502920"/>
+            <a:ext cx="10634472" cy="685800"/>
+          </a:xfrm>
+          <a:prstGeom prst="rect">
+            <a:avLst/>
+          </a:prstGeom>
+          <a:noFill/>
+        </p:spPr>
+        <p:txBody>
+          <a:bodyPr wrap="square">
+            <a:spAutoFit/>
+          </a:bodyPr>
+          <a:lstStyle/>
+          <a:p>
+            <a:pPr algn="l"/>
+            <a:r>
+              <a:rPr sz="2400" b="1" i="0">
+                <a:solidFill>
+                  <a:srgbClr val="1F2C56"/>
+                </a:solidFill>
+                <a:latin typeface="Arial"/>
+              </a:rPr>
+              <a:t>Reflexion und Selbstcheck</a:t>
+            </a:r>
+          </a:p>
+        </p:txBody>
+      </p:sp>
+      <p:sp>
+        <p:nvSpPr>
+          <p:cNvPr id="8" name="TextBox 7"/>
+          <p:cNvSpPr txBox="1"/>
+          <p:nvPr/>
+        </p:nvSpPr>
+        <p:spPr>
+          <a:xfrm>
+            <a:off x="685800" y="1417320"/>
+            <a:ext cx="10817352" cy="4892040"/>
+          </a:xfrm>
+          <a:prstGeom prst="rect">
+            <a:avLst/>
+          </a:prstGeom>
+          <a:noFill/>
+        </p:spPr>
+        <p:txBody>
+          <a:bodyPr wrap="square" anchor="ctr">
+            <a:spAutoFit/>
+          </a:bodyPr>
+          <a:lstStyle/>
+          <a:p>
+            <a:pPr marL="190500" indent="-190500">
+              <a:spcBef>
+                <a:spcPts val="400"/>
+              </a:spcBef>
+              <a:spcAft>
+                <a:spcPts val="200"/>
+              </a:spcAft>
+            </a:pPr>
+            <a:r>
+              <a:rPr sz="1300">
+                <a:solidFill>
+                  <a:srgbClr val="3D5466"/>
+                </a:solidFill>
+                <a:latin typeface="Arial"/>
+              </a:rPr>
+              <a:t>▸  Welcher Trigger-Typ ist in Ihrem Bestand am ungenutztesten?</a:t>
+            </a:r>
+          </a:p>
+          <a:p>
+            <a:pPr marL="190500" indent="-190500">
+              <a:spcBef>
+                <a:spcPts val="400"/>
+              </a:spcBef>
+              <a:spcAft>
+                <a:spcPts val="200"/>
+              </a:spcAft>
+            </a:pPr>
+            <a:r>
+              <a:rPr sz="1300">
+                <a:solidFill>
+                  <a:srgbClr val="3D5466"/>
+                </a:solidFill>
+                <a:latin typeface="Arial"/>
+              </a:rPr>
+              <a:t>▸  Wo sind Ihre Daten so lückenhaft, dass Trigger untergehen?</a:t>
+            </a:r>
+          </a:p>
+          <a:p>
+            <a:pPr marL="190500" indent="-190500">
+              <a:spcBef>
+                <a:spcPts val="400"/>
+              </a:spcBef>
+              <a:spcAft>
+                <a:spcPts val="200"/>
+              </a:spcAft>
+            </a:pPr>
+            <a:r>
+              <a:rPr sz="1300">
+                <a:solidFill>
+                  <a:srgbClr val="3D5466"/>
+                </a:solidFill>
+                <a:latin typeface="Arial"/>
+              </a:rPr>
+              <a:t>▸  Wie formulieren Sie einen datenbasierten Einstieg transparent und DSGVO-konform?</a:t>
+            </a:r>
+          </a:p>
+        </p:txBody>
+      </p:sp>
+      <p:sp>
+        <p:nvSpPr>
+          <p:cNvPr id="9" name="Rectangle 8"/>
           <p:cNvSpPr/>
           <p:nvPr/>
         </p:nvSpPr>
@@ -6656,7 +6096,7 @@
       </p:sp>
       <p:sp>
         <p:nvSpPr>
-          <p:cNvPr id="9" name="TextBox 8"/>
+          <p:cNvPr id="10" name="TextBox 9"/>
           <p:cNvSpPr txBox="1"/>
           <p:nvPr/>
         </p:nvSpPr>
@@ -6685,722 +6125,6 @@
                 <a:latin typeface="Consolas"/>
               </a:rPr>
               <a:t>FKB Campus  ·  M18</a:t>
-            </a:r>
-          </a:p>
-        </p:txBody>
-      </p:sp>
-      <p:sp>
-        <p:nvSpPr>
-          <p:cNvPr id="10" name="TextBox 9"/>
-          <p:cNvSpPr txBox="1"/>
-          <p:nvPr/>
-        </p:nvSpPr>
-        <p:spPr>
-          <a:xfrm>
-            <a:off x="7176211" y="6583680"/>
-            <a:ext cx="4326940" cy="256032"/>
-          </a:xfrm>
-          <a:prstGeom prst="rect">
-            <a:avLst/>
-          </a:prstGeom>
-          <a:noFill/>
-        </p:spPr>
-        <p:txBody>
-          <a:bodyPr wrap="none">
-            <a:spAutoFit/>
-          </a:bodyPr>
-          <a:lstStyle/>
-          <a:p>
-            <a:pPr algn="r"/>
-            <a:r>
-              <a:rPr sz="700">
-                <a:solidFill>
-                  <a:srgbClr val="A0B4D2"/>
-                </a:solidFill>
-                <a:latin typeface="Consolas"/>
-              </a:rPr>
-              <a:t>Übersicht</a:t>
-            </a:r>
-          </a:p>
-        </p:txBody>
-      </p:sp>
-    </p:spTree>
-  </p:cSld>
-  <p:clrMapOvr>
-    <a:masterClrMapping/>
-  </p:clrMapOvr>
-</p:sld>
-</file>
-
-<file path=ppt/slides/slide14.xml><?xml version="1.0" encoding="utf-8"?>
-<p:sld xmlns:a="http://schemas.openxmlformats.org/drawingml/2006/main" xmlns:p="http://schemas.openxmlformats.org/presentationml/2006/main" xmlns:r="http://schemas.openxmlformats.org/officeDocument/2006/relationships">
-  <p:cSld>
-    <p:spTree>
-      <p:nvGrpSpPr>
-        <p:cNvPr id="1" name=""/>
-        <p:cNvGrpSpPr/>
-        <p:nvPr/>
-      </p:nvGrpSpPr>
-      <p:grpSpPr/>
-      <p:sp>
-        <p:nvSpPr>
-          <p:cNvPr id="2" name="Rectangle 1"/>
-          <p:cNvSpPr/>
-          <p:nvPr/>
-        </p:nvSpPr>
-        <p:spPr>
-          <a:xfrm>
-            <a:off x="0" y="0"/>
-            <a:ext cx="12188952" cy="6858000"/>
-          </a:xfrm>
-          <a:prstGeom prst="rect">
-            <a:avLst/>
-          </a:prstGeom>
-          <a:solidFill>
-            <a:srgbClr val="FFFFFF"/>
-          </a:solidFill>
-          <a:ln>
-            <a:noFill/>
-          </a:ln>
-        </p:spPr>
-        <p:style>
-          <a:lnRef idx="1">
-            <a:schemeClr val="accent1"/>
-          </a:lnRef>
-          <a:fillRef idx="3">
-            <a:schemeClr val="accent1"/>
-          </a:fillRef>
-          <a:effectRef idx="2">
-            <a:schemeClr val="accent1"/>
-          </a:effectRef>
-          <a:fontRef idx="minor">
-            <a:schemeClr val="lt1"/>
-          </a:fontRef>
-        </p:style>
-        <p:txBody>
-          <a:bodyPr rtlCol="0" anchor="ctr"/>
-          <a:lstStyle/>
-          <a:p>
-            <a:pPr algn="ctr"/>
-          </a:p>
-        </p:txBody>
-      </p:sp>
-      <p:sp>
-        <p:nvSpPr>
-          <p:cNvPr id="3" name="Rectangle 2"/>
-          <p:cNvSpPr/>
-          <p:nvPr/>
-        </p:nvSpPr>
-        <p:spPr>
-          <a:xfrm>
-            <a:off x="0" y="0"/>
-            <a:ext cx="12188952" cy="50292"/>
-          </a:xfrm>
-          <a:prstGeom prst="rect">
-            <a:avLst/>
-          </a:prstGeom>
-          <a:solidFill>
-            <a:srgbClr val="1F2C56"/>
-          </a:solidFill>
-          <a:ln>
-            <a:noFill/>
-          </a:ln>
-        </p:spPr>
-        <p:style>
-          <a:lnRef idx="1">
-            <a:schemeClr val="accent1"/>
-          </a:lnRef>
-          <a:fillRef idx="3">
-            <a:schemeClr val="accent1"/>
-          </a:fillRef>
-          <a:effectRef idx="2">
-            <a:schemeClr val="accent1"/>
-          </a:effectRef>
-          <a:fontRef idx="minor">
-            <a:schemeClr val="lt1"/>
-          </a:fontRef>
-        </p:style>
-        <p:txBody>
-          <a:bodyPr rtlCol="0" anchor="ctr"/>
-          <a:lstStyle/>
-          <a:p>
-            <a:pPr algn="ctr"/>
-          </a:p>
-        </p:txBody>
-      </p:sp>
-      <p:sp>
-        <p:nvSpPr>
-          <p:cNvPr id="4" name="TextBox 3"/>
-          <p:cNvSpPr txBox="1"/>
-          <p:nvPr/>
-        </p:nvSpPr>
-        <p:spPr>
-          <a:xfrm>
-            <a:off x="685800" y="109728"/>
-            <a:ext cx="10817352" cy="228600"/>
-          </a:xfrm>
-          <a:prstGeom prst="rect">
-            <a:avLst/>
-          </a:prstGeom>
-          <a:noFill/>
-        </p:spPr>
-        <p:txBody>
-          <a:bodyPr wrap="none">
-            <a:spAutoFit/>
-          </a:bodyPr>
-          <a:lstStyle/>
-          <a:p>
-            <a:pPr algn="l"/>
-            <a:r>
-              <a:rPr sz="750">
-                <a:solidFill>
-                  <a:srgbClr val="78808C"/>
-                </a:solidFill>
-                <a:latin typeface="Consolas"/>
-              </a:rPr>
-              <a:t>M18  ·  ÜBERSICHT</a:t>
-            </a:r>
-          </a:p>
-        </p:txBody>
-      </p:sp>
-      <p:sp>
-        <p:nvSpPr>
-          <p:cNvPr id="5" name="TextBox 4"/>
-          <p:cNvSpPr txBox="1"/>
-          <p:nvPr/>
-        </p:nvSpPr>
-        <p:spPr>
-          <a:xfrm>
-            <a:off x="685800" y="502920"/>
-            <a:ext cx="10817352" cy="594360"/>
-          </a:xfrm>
-          <a:prstGeom prst="rect">
-            <a:avLst/>
-          </a:prstGeom>
-          <a:noFill/>
-        </p:spPr>
-        <p:txBody>
-          <a:bodyPr wrap="square">
-            <a:spAutoFit/>
-          </a:bodyPr>
-          <a:lstStyle/>
-          <a:p>
-            <a:pPr algn="l"/>
-            <a:r>
-              <a:rPr sz="2000" b="1" i="0">
-                <a:solidFill>
-                  <a:srgbClr val="1F2C56"/>
-                </a:solidFill>
-                <a:latin typeface="Arial"/>
-              </a:rPr>
-              <a:t>AB-2: Datenqualitäts-Audit (Top-10-Kunden)</a:t>
-            </a:r>
-          </a:p>
-        </p:txBody>
-      </p:sp>
-      <p:sp>
-        <p:nvSpPr>
-          <p:cNvPr id="6" name="Rectangle 5"/>
-          <p:cNvSpPr/>
-          <p:nvPr/>
-        </p:nvSpPr>
-        <p:spPr>
-          <a:xfrm>
-            <a:off x="685800" y="1143000"/>
-            <a:ext cx="10817352" cy="25400"/>
-          </a:xfrm>
-          <a:prstGeom prst="rect">
-            <a:avLst/>
-          </a:prstGeom>
-          <a:solidFill>
-            <a:srgbClr val="D9C089"/>
-          </a:solidFill>
-          <a:ln>
-            <a:noFill/>
-          </a:ln>
-        </p:spPr>
-        <p:style>
-          <a:lnRef idx="1">
-            <a:schemeClr val="accent1"/>
-          </a:lnRef>
-          <a:fillRef idx="3">
-            <a:schemeClr val="accent1"/>
-          </a:fillRef>
-          <a:effectRef idx="2">
-            <a:schemeClr val="accent1"/>
-          </a:effectRef>
-          <a:fontRef idx="minor">
-            <a:schemeClr val="lt1"/>
-          </a:fontRef>
-        </p:style>
-        <p:txBody>
-          <a:bodyPr rtlCol="0" anchor="ctr"/>
-          <a:lstStyle/>
-          <a:p>
-            <a:pPr algn="ctr"/>
-          </a:p>
-        </p:txBody>
-      </p:sp>
-      <p:graphicFrame>
-        <p:nvGraphicFramePr>
-          <p:cNvPr id="7" name="Table 6"/>
-          <p:cNvGraphicFramePr>
-            <a:graphicFrameLocks noGrp="1"/>
-          </p:cNvGraphicFramePr>
-          <p:nvPr/>
-        </p:nvGraphicFramePr>
-        <p:xfrm>
-          <a:off x="685800" y="1417320"/>
-          <a:ext cx="10817352" cy="2304288"/>
-        </p:xfrm>
-        <a:graphic>
-          <a:graphicData uri="http://schemas.openxmlformats.org/drawingml/2006/table">
-            <a:tbl>
-              <a:tblPr firstRow="1" bandRow="1">
-                <a:tableStyleId>{5C22544A-7EE6-4342-B048-85BDC9FD1C3A}</a:tableStyleId>
-              </a:tblPr>
-              <a:tblGrid>
-                <a:gridCol w="2163470"/>
-                <a:gridCol w="2163470"/>
-                <a:gridCol w="2163470"/>
-                <a:gridCol w="2163470"/>
-                <a:gridCol w="2163472"/>
-              </a:tblGrid>
-              <a:tr h="384048">
-                <a:tc>
-                  <a:txBody>
-                    <a:bodyPr/>
-                    <a:lstStyle/>
-                    <a:p>
-                      <a:r>
-                        <a:rPr sz="1100" b="1">
-                          <a:solidFill>
-                            <a:srgbClr val="FFFFFF"/>
-                          </a:solidFill>
-                          <a:latin typeface="Arial"/>
-                        </a:rPr>
-                        <a:t>Kunde (anonymisiert)</a:t>
-                      </a:r>
-                    </a:p>
-                  </a:txBody>
-                  <a:tcPr>
-                    <a:solidFill>
-                      <a:srgbClr val="1F2C56"/>
-                    </a:solidFill>
-                  </a:tcPr>
-                </a:tc>
-                <a:tc>
-                  <a:txBody>
-                    <a:bodyPr/>
-                    <a:lstStyle/>
-                    <a:p>
-                      <a:r>
-                        <a:rPr sz="1100" b="1">
-                          <a:solidFill>
-                            <a:srgbClr val="FFFFFF"/>
-                          </a:solidFill>
-                          <a:latin typeface="Arial"/>
-                        </a:rPr>
-                        <a:t>Geburtsdatum ✓/✗</a:t>
-                      </a:r>
-                    </a:p>
-                  </a:txBody>
-                  <a:tcPr>
-                    <a:solidFill>
-                      <a:srgbClr val="1F2C56"/>
-                    </a:solidFill>
-                  </a:tcPr>
-                </a:tc>
-                <a:tc>
-                  <a:txBody>
-                    <a:bodyPr/>
-                    <a:lstStyle/>
-                    <a:p>
-                      <a:r>
-                        <a:rPr sz="1100" b="1">
-                          <a:solidFill>
-                            <a:srgbClr val="FFFFFF"/>
-                          </a:solidFill>
-                          <a:latin typeface="Arial"/>
-                        </a:rPr>
-                        <a:t>Branche korrekt ✓/✗</a:t>
-                      </a:r>
-                    </a:p>
-                  </a:txBody>
-                  <a:tcPr>
-                    <a:solidFill>
-                      <a:srgbClr val="1F2C56"/>
-                    </a:solidFill>
-                  </a:tcPr>
-                </a:tc>
-                <a:tc>
-                  <a:txBody>
-                    <a:bodyPr/>
-                    <a:lstStyle/>
-                    <a:p>
-                      <a:r>
-                        <a:rPr sz="1100" b="1">
-                          <a:solidFill>
-                            <a:srgbClr val="FFFFFF"/>
-                          </a:solidFill>
-                          <a:latin typeface="Arial"/>
-                        </a:rPr>
-                        <a:t>JA aktuell ✓/✗</a:t>
-                      </a:r>
-                    </a:p>
-                  </a:txBody>
-                  <a:tcPr>
-                    <a:solidFill>
-                      <a:srgbClr val="1F2C56"/>
-                    </a:solidFill>
-                  </a:tcPr>
-                </a:tc>
-                <a:tc>
-                  <a:txBody>
-                    <a:bodyPr/>
-                    <a:lstStyle/>
-                    <a:p>
-                      <a:r>
-                        <a:rPr sz="1100" b="1">
-                          <a:solidFill>
-                            <a:srgbClr val="FFFFFF"/>
-                          </a:solidFill>
-                          <a:latin typeface="Arial"/>
-                        </a:rPr>
-                        <a:t>Verbund aktuell ✓/✗</a:t>
-                      </a:r>
-                    </a:p>
-                  </a:txBody>
-                  <a:tcPr>
-                    <a:solidFill>
-                      <a:srgbClr val="1F2C56"/>
-                    </a:solidFill>
-                  </a:tcPr>
-                </a:tc>
-              </a:tr>
-              <a:tr h="384048">
-                <a:tc>
-                  <a:txBody>
-                    <a:bodyPr/>
-                    <a:lstStyle/>
-                    <a:p/>
-                  </a:txBody>
-                  <a:tcPr/>
-                </a:tc>
-                <a:tc>
-                  <a:txBody>
-                    <a:bodyPr/>
-                    <a:lstStyle/>
-                    <a:p/>
-                  </a:txBody>
-                  <a:tcPr/>
-                </a:tc>
-                <a:tc>
-                  <a:txBody>
-                    <a:bodyPr/>
-                    <a:lstStyle/>
-                    <a:p/>
-                  </a:txBody>
-                  <a:tcPr/>
-                </a:tc>
-                <a:tc>
-                  <a:txBody>
-                    <a:bodyPr/>
-                    <a:lstStyle/>
-                    <a:p/>
-                  </a:txBody>
-                  <a:tcPr/>
-                </a:tc>
-                <a:tc>
-                  <a:txBody>
-                    <a:bodyPr/>
-                    <a:lstStyle/>
-                    <a:p/>
-                  </a:txBody>
-                  <a:tcPr/>
-                </a:tc>
-              </a:tr>
-              <a:tr h="384048">
-                <a:tc>
-                  <a:txBody>
-                    <a:bodyPr/>
-                    <a:lstStyle/>
-                    <a:p/>
-                  </a:txBody>
-                  <a:tcPr/>
-                </a:tc>
-                <a:tc>
-                  <a:txBody>
-                    <a:bodyPr/>
-                    <a:lstStyle/>
-                    <a:p/>
-                  </a:txBody>
-                  <a:tcPr/>
-                </a:tc>
-                <a:tc>
-                  <a:txBody>
-                    <a:bodyPr/>
-                    <a:lstStyle/>
-                    <a:p/>
-                  </a:txBody>
-                  <a:tcPr/>
-                </a:tc>
-                <a:tc>
-                  <a:txBody>
-                    <a:bodyPr/>
-                    <a:lstStyle/>
-                    <a:p/>
-                  </a:txBody>
-                  <a:tcPr/>
-                </a:tc>
-                <a:tc>
-                  <a:txBody>
-                    <a:bodyPr/>
-                    <a:lstStyle/>
-                    <a:p/>
-                  </a:txBody>
-                  <a:tcPr/>
-                </a:tc>
-              </a:tr>
-              <a:tr h="384048">
-                <a:tc>
-                  <a:txBody>
-                    <a:bodyPr/>
-                    <a:lstStyle/>
-                    <a:p/>
-                  </a:txBody>
-                  <a:tcPr/>
-                </a:tc>
-                <a:tc>
-                  <a:txBody>
-                    <a:bodyPr/>
-                    <a:lstStyle/>
-                    <a:p/>
-                  </a:txBody>
-                  <a:tcPr/>
-                </a:tc>
-                <a:tc>
-                  <a:txBody>
-                    <a:bodyPr/>
-                    <a:lstStyle/>
-                    <a:p/>
-                  </a:txBody>
-                  <a:tcPr/>
-                </a:tc>
-                <a:tc>
-                  <a:txBody>
-                    <a:bodyPr/>
-                    <a:lstStyle/>
-                    <a:p/>
-                  </a:txBody>
-                  <a:tcPr/>
-                </a:tc>
-                <a:tc>
-                  <a:txBody>
-                    <a:bodyPr/>
-                    <a:lstStyle/>
-                    <a:p/>
-                  </a:txBody>
-                  <a:tcPr/>
-                </a:tc>
-              </a:tr>
-              <a:tr h="384048">
-                <a:tc>
-                  <a:txBody>
-                    <a:bodyPr/>
-                    <a:lstStyle/>
-                    <a:p/>
-                  </a:txBody>
-                  <a:tcPr/>
-                </a:tc>
-                <a:tc>
-                  <a:txBody>
-                    <a:bodyPr/>
-                    <a:lstStyle/>
-                    <a:p/>
-                  </a:txBody>
-                  <a:tcPr/>
-                </a:tc>
-                <a:tc>
-                  <a:txBody>
-                    <a:bodyPr/>
-                    <a:lstStyle/>
-                    <a:p/>
-                  </a:txBody>
-                  <a:tcPr/>
-                </a:tc>
-                <a:tc>
-                  <a:txBody>
-                    <a:bodyPr/>
-                    <a:lstStyle/>
-                    <a:p/>
-                  </a:txBody>
-                  <a:tcPr/>
-                </a:tc>
-                <a:tc>
-                  <a:txBody>
-                    <a:bodyPr/>
-                    <a:lstStyle/>
-                    <a:p/>
-                  </a:txBody>
-                  <a:tcPr/>
-                </a:tc>
-              </a:tr>
-              <a:tr h="384048">
-                <a:tc>
-                  <a:txBody>
-                    <a:bodyPr/>
-                    <a:lstStyle/>
-                    <a:p/>
-                  </a:txBody>
-                  <a:tcPr/>
-                </a:tc>
-                <a:tc>
-                  <a:txBody>
-                    <a:bodyPr/>
-                    <a:lstStyle/>
-                    <a:p/>
-                  </a:txBody>
-                  <a:tcPr/>
-                </a:tc>
-                <a:tc>
-                  <a:txBody>
-                    <a:bodyPr/>
-                    <a:lstStyle/>
-                    <a:p/>
-                  </a:txBody>
-                  <a:tcPr/>
-                </a:tc>
-                <a:tc>
-                  <a:txBody>
-                    <a:bodyPr/>
-                    <a:lstStyle/>
-                    <a:p/>
-                  </a:txBody>
-                  <a:tcPr/>
-                </a:tc>
-                <a:tc>
-                  <a:txBody>
-                    <a:bodyPr/>
-                    <a:lstStyle/>
-                    <a:p/>
-                  </a:txBody>
-                  <a:tcPr/>
-                </a:tc>
-              </a:tr>
-            </a:tbl>
-          </a:graphicData>
-        </a:graphic>
-      </p:graphicFrame>
-      <p:sp>
-        <p:nvSpPr>
-          <p:cNvPr id="8" name="Rectangle 7"/>
-          <p:cNvSpPr/>
-          <p:nvPr/>
-        </p:nvSpPr>
-        <p:spPr>
-          <a:xfrm>
-            <a:off x="0" y="6510528"/>
-            <a:ext cx="12188952" cy="347472"/>
-          </a:xfrm>
-          <a:prstGeom prst="rect">
-            <a:avLst/>
-          </a:prstGeom>
-          <a:solidFill>
-            <a:srgbClr val="0A1937"/>
-          </a:solidFill>
-          <a:ln>
-            <a:noFill/>
-          </a:ln>
-        </p:spPr>
-        <p:style>
-          <a:lnRef idx="1">
-            <a:schemeClr val="accent1"/>
-          </a:lnRef>
-          <a:fillRef idx="3">
-            <a:schemeClr val="accent1"/>
-          </a:fillRef>
-          <a:effectRef idx="2">
-            <a:schemeClr val="accent1"/>
-          </a:effectRef>
-          <a:fontRef idx="minor">
-            <a:schemeClr val="lt1"/>
-          </a:fontRef>
-        </p:style>
-        <p:txBody>
-          <a:bodyPr rtlCol="0" anchor="ctr"/>
-          <a:lstStyle/>
-          <a:p>
-            <a:pPr algn="ctr"/>
-          </a:p>
-        </p:txBody>
-      </p:sp>
-      <p:sp>
-        <p:nvSpPr>
-          <p:cNvPr id="9" name="TextBox 8"/>
-          <p:cNvSpPr txBox="1"/>
-          <p:nvPr/>
-        </p:nvSpPr>
-        <p:spPr>
-          <a:xfrm>
-            <a:off x="685800" y="6583680"/>
-            <a:ext cx="6490411" cy="256032"/>
-          </a:xfrm>
-          <a:prstGeom prst="rect">
-            <a:avLst/>
-          </a:prstGeom>
-          <a:noFill/>
-        </p:spPr>
-        <p:txBody>
-          <a:bodyPr wrap="none">
-            <a:spAutoFit/>
-          </a:bodyPr>
-          <a:lstStyle/>
-          <a:p>
-            <a:pPr algn="l"/>
-            <a:r>
-              <a:rPr sz="700">
-                <a:solidFill>
-                  <a:srgbClr val="A0B4D2"/>
-                </a:solidFill>
-                <a:latin typeface="Consolas"/>
-              </a:rPr>
-              <a:t>FKB Campus  ·  M18</a:t>
-            </a:r>
-          </a:p>
-        </p:txBody>
-      </p:sp>
-      <p:sp>
-        <p:nvSpPr>
-          <p:cNvPr id="10" name="TextBox 9"/>
-          <p:cNvSpPr txBox="1"/>
-          <p:nvPr/>
-        </p:nvSpPr>
-        <p:spPr>
-          <a:xfrm>
-            <a:off x="7176211" y="6583680"/>
-            <a:ext cx="4326940" cy="256032"/>
-          </a:xfrm>
-          <a:prstGeom prst="rect">
-            <a:avLst/>
-          </a:prstGeom>
-          <a:noFill/>
-        </p:spPr>
-        <p:txBody>
-          <a:bodyPr wrap="none">
-            <a:spAutoFit/>
-          </a:bodyPr>
-          <a:lstStyle/>
-          <a:p>
-            <a:pPr algn="r"/>
-            <a:r>
-              <a:rPr sz="700">
-                <a:solidFill>
-                  <a:srgbClr val="A0B4D2"/>
-                </a:solidFill>
-                <a:latin typeface="Consolas"/>
-              </a:rPr>
-              <a:t>Übersicht</a:t>
             </a:r>
           </a:p>
         </p:txBody>
@@ -9155,7 +7879,7 @@
                 </a:solidFill>
                 <a:latin typeface="Arial"/>
               </a:rPr>
-              <a:t>Vom Zufallskontakt zum Signal-gesteuerten Gespräch</a:t>
+              <a:t>Ein Datenpunkt öffnet die Tür – das Gespräch bleibt menschlich</a:t>
             </a:r>
           </a:p>
         </p:txBody>
@@ -9197,7 +7921,45 @@
                 </a:solidFill>
                 <a:latin typeface="Arial"/>
               </a:rPr>
-              <a:t>→  Datengetriebener Vertrieb bedeutet nicht, Kunden zu überwachen. Es bedeutet, die Signale zu lesen, die der Kunde ohnehin sendet – und im richtigen Moment präsent zu sein.</a:t>
+              <a:t>→  Ein Datenpunkt öffnet die Tür – das Gespräch bleibt menschlich.</a:t>
+            </a:r>
+          </a:p>
+          <a:p>
+            <a:pPr marL="190500" indent="-190500">
+              <a:spcBef>
+                <a:spcPts val="400"/>
+              </a:spcBef>
+              <a:spcAft>
+                <a:spcPts val="200"/>
+              </a:spcAft>
+            </a:pPr>
+            <a:r>
+              <a:rPr sz="1300">
+                <a:solidFill>
+                  <a:srgbClr val="3D5466"/>
+                </a:solidFill>
+                <a:latin typeface="Arial"/>
+              </a:rPr>
+              <a:t>▸  Trigger aus agree machen aus dem Kaltanruf einen Anlass.</a:t>
+            </a:r>
+          </a:p>
+          <a:p>
+            <a:pPr marL="190500" indent="-190500">
+              <a:spcBef>
+                <a:spcPts val="400"/>
+              </a:spcBef>
+              <a:spcAft>
+                <a:spcPts val="200"/>
+              </a:spcAft>
+            </a:pPr>
+            <a:r>
+              <a:rPr sz="1300">
+                <a:solidFill>
+                  <a:srgbClr val="3D5466"/>
+                </a:solidFill>
+                <a:latin typeface="Arial"/>
+              </a:rPr>
+              <a:t>▸  Die Beziehung entsteht trotzdem am Telefon, nicht in der Software.</a:t>
             </a:r>
           </a:p>
         </p:txBody>
@@ -9535,7 +8297,7 @@
                 </a:solidFill>
                 <a:latin typeface="Arial"/>
               </a:rPr>
-              <a:t>Die drei Grundprinzipien</a:t>
+              <a:t>Vom Zufallskontakt zum signalgesteuerten Gespräch</a:t>
             </a:r>
           </a:p>
         </p:txBody>
@@ -9561,6 +8323,25 @@
             <a:spAutoFit/>
           </a:bodyPr>
           <a:lstStyle/>
+          <a:p>
+            <a:pPr marL="177800" indent="-177800">
+              <a:spcBef>
+                <a:spcPts val="600"/>
+              </a:spcBef>
+              <a:spcAft>
+                <a:spcPts val="200"/>
+              </a:spcAft>
+            </a:pPr>
+            <a:r>
+              <a:rPr sz="1200" i="1">
+                <a:solidFill>
+                  <a:srgbClr val="3D5466"/>
+                </a:solidFill>
+                <a:latin typeface="Arial"/>
+              </a:rPr>
+              <a:t>→  Datengetriebener Vertrieb ersetzt den Zufall durch das Signal – der richtige Kunde zur richtigen Zeit.</a:t>
+            </a:r>
+          </a:p>
           <a:p>
             <a:pPr marL="190500" indent="-190500">
               <a:spcBef>
@@ -9577,7 +8358,7 @@
                 </a:solidFill>
                 <a:latin typeface="Arial"/>
               </a:rPr>
-              <a:t>▸  Timing schlägt Häufigkeit: Ein Anruf zum richtigen Moment ist wertvoller als zehn Anrufe zum falschen Zeitpunkt.</a:t>
+              <a:t>▸  Drei Grundprinzipien: Signal statt Zufall, Relevanz statt Masse, Anlass statt Angebot.</a:t>
             </a:r>
           </a:p>
           <a:p>
@@ -9596,64 +8377,7 @@
                 </a:solidFill>
                 <a:latin typeface="Arial"/>
               </a:rPr>
-              <a:t>▸  Relevanz schlägt Breite: Ein auf den aktuellen Bedarf zugeschnittenes Gespräch überzeugt mehr als eine generische Produktpräsentation.</a:t>
-            </a:r>
-          </a:p>
-          <a:p>
-            <a:pPr marL="190500" indent="-190500">
-              <a:spcBef>
-                <a:spcPts val="400"/>
-              </a:spcBef>
-              <a:spcAft>
-                <a:spcPts val="200"/>
-              </a:spcAft>
-            </a:pPr>
-            <a:r>
-              <a:rPr sz="1300">
-                <a:solidFill>
-                  <a:srgbClr val="3D5466"/>
-                </a:solidFill>
-                <a:latin typeface="Arial"/>
-              </a:rPr>
-              <a:t>▸  Daten sind kein Ersatz für Beziehung: Trigger öffnen die Tür – das Gespräch selbst bleibt menschlich.</a:t>
-            </a:r>
-          </a:p>
-          <a:p>
-            <a:pPr marL="190500" indent="-190500">
-              <a:spcBef>
-                <a:spcPts val="400"/>
-              </a:spcBef>
-              <a:spcAft>
-                <a:spcPts val="200"/>
-              </a:spcAft>
-            </a:pPr>
-            <a:r>
-              <a:rPr sz="1300">
-                <a:solidFill>
-                  <a:srgbClr val="3D5466"/>
-                </a:solidFill>
-                <a:latin typeface="Arial"/>
-              </a:rPr>
-              <a:t>▸  ## 4.2 Trigger-Ereignisse: Drei Typen mit unterschiedlicher Logik</a:t>
-            </a:r>
-          </a:p>
-          <a:p>
-            <a:pPr marL="190500" indent="-190500">
-              <a:spcBef>
-                <a:spcPts val="400"/>
-              </a:spcBef>
-              <a:spcAft>
-                <a:spcPts val="200"/>
-              </a:spcAft>
-            </a:pPr>
-            <a:r>
-              <a:rPr sz="1300">
-                <a:solidFill>
-                  <a:srgbClr val="3D5466"/>
-                </a:solidFill>
-                <a:latin typeface="Arial"/>
-              </a:rPr>
-              <a:t>▸  Ein Trigger ist ein Datenpunkt oder ein Ereignis, das mit hoher Wahrscheinlichkeit auf einen aktuellen oder bevorstehenden Beratungsbedarf hinweist. Es gibt drei Typen:</a:t>
+              <a:t>▸  Der Trigger ist der Türöffner, nicht das Verkaufsargument.</a:t>
             </a:r>
           </a:p>
         </p:txBody>
@@ -9991,7 +8715,7 @@
                 </a:solidFill>
                 <a:latin typeface="Arial"/>
               </a:rPr>
-              <a:t>Typ 3: Lebensereignisbasierte Trigger (aus CRM-Notizen, externen Quellen)</a:t>
+              <a:t>Drei Trigger-Typen mit unterschiedlicher Logik</a:t>
             </a:r>
           </a:p>
         </p:txBody>
@@ -10017,6 +8741,25 @@
             <a:spAutoFit/>
           </a:bodyPr>
           <a:lstStyle/>
+          <a:p>
+            <a:pPr marL="177800" indent="-177800">
+              <a:spcBef>
+                <a:spcPts val="600"/>
+              </a:spcBef>
+              <a:spcAft>
+                <a:spcPts val="200"/>
+              </a:spcAft>
+            </a:pPr>
+            <a:r>
+              <a:rPr sz="1200" i="1">
+                <a:solidFill>
+                  <a:srgbClr val="3D5466"/>
+                </a:solidFill>
+                <a:latin typeface="Arial"/>
+              </a:rPr>
+              <a:t>→  Nicht jeder Trigger ist gleich – transaktional, ratingbasiert und lebensereignisbasiert brauchen unterschiedliche Ansprache.</a:t>
+            </a:r>
+          </a:p>
           <a:p>
             <a:pPr marL="190500" indent="-190500">
               <a:spcBef>
@@ -10033,7 +8776,7 @@
                 </a:solidFill>
                 <a:latin typeface="Arial"/>
               </a:rPr>
-              <a:t>▸  ## 4.3 Datenqualität: Die Voraussetzung für alles</a:t>
+              <a:t>▸  Transaktional (aus agree-Kontodaten): Zahlungseingänge, Liquiditätssprünge.</a:t>
             </a:r>
           </a:p>
           <a:p>
@@ -10052,7 +8795,7 @@
                 </a:solidFill>
                 <a:latin typeface="Arial"/>
               </a:rPr>
-              <a:t>▸  Datengetriebener Vertrieb funktioniert nur, wenn die Datenbasis stimmt. Die häufigsten Qualitätsmängel:</a:t>
+              <a:t>▸  Ratingbasiert (aus Kreditakte/Frühwarnsystem): Veränderungen im Risikobild.</a:t>
             </a:r>
           </a:p>
           <a:p>
@@ -10071,7 +8814,7 @@
                 </a:solidFill>
                 <a:latin typeface="Arial"/>
               </a:rPr>
-              <a:t>▸  Faustregel: Daten, die älter als 18 Monate sind, ohne Update, sind für trigger-basierten Vertrieb unzuverlässig.</a:t>
+              <a:t>▸  Lebensereignisbasiert (aus CRM/externen Quellen): Nachfolge, Investition, Wechsel.</a:t>
             </a:r>
           </a:p>
         </p:txBody>
@@ -10763,7 +9506,7 @@
                 </a:solidFill>
                 <a:latin typeface="Arial"/>
               </a:rPr>
-              <a:t>Datenqualitäts-Audit im eigenen Bestand</a:t>
+              <a:t>Datenqualität und DSGVO: die Voraussetzung</a:t>
             </a:r>
           </a:p>
         </p:txBody>
@@ -10789,6 +9532,25 @@
             <a:spAutoFit/>
           </a:bodyPr>
           <a:lstStyle/>
+          <a:p>
+            <a:pPr marL="177800" indent="-177800">
+              <a:spcBef>
+                <a:spcPts val="600"/>
+              </a:spcBef>
+              <a:spcAft>
+                <a:spcPts val="200"/>
+              </a:spcAft>
+            </a:pPr>
+            <a:r>
+              <a:rPr sz="1200" i="1">
+                <a:solidFill>
+                  <a:srgbClr val="3D5466"/>
+                </a:solidFill>
+                <a:latin typeface="Arial"/>
+              </a:rPr>
+              <a:t>→  Datengetriebener Vertrieb steht und fällt mit der Datenqualität – und mit der Rechtssicherheit.</a:t>
+            </a:r>
+          </a:p>
           <a:p>
             <a:pPr marL="190500" indent="-190500">
               <a:spcBef>
@@ -10805,7 +9567,7 @@
                 </a:solidFill>
                 <a:latin typeface="Arial"/>
               </a:rPr>
-              <a:t>▸  Führen Sie einmalig pro Jahr einen strukturierten Datencheck durch:</a:t>
+              <a:t>▸  Datenqualitäts-Audit im eigenen Bestand: Lücken sichtbar machen.</a:t>
             </a:r>
           </a:p>
           <a:p>
@@ -10824,7 +9586,7 @@
                 </a:solidFill>
                 <a:latin typeface="Arial"/>
               </a:rPr>
-              <a:t>▸  In agree eine Bestandsliste Ihrer Firmenkunden aufrufen (Weg je nach Bankinstallation: Bestandsbetreuer-Cockpit oder Listenabfrage über agree-Auswertungskomponente – lassen Sie sich das einmalig von Ihrem IT-Koordinator zeigen, da ein standardisierter „Lückenanalyse"-Menüpunkt nicht in jeder Installation verfügbar ist). Alternativ: Export als Excel aus dem Bestandscockpit und manuelle Filterung.</a:t>
+              <a:t>▸  DSGVO: was erlaubt ist, was nicht; Verbundpartner-Einwilligung als Pflichtcheck vor jeder Übergabe.</a:t>
             </a:r>
           </a:p>
           <a:p>
@@ -10843,45 +9605,7 @@
                 </a:solidFill>
                 <a:latin typeface="Arial"/>
               </a:rPr>
-              <a:t>▸  Für alle Kunden mit &gt; 500k Kreditvolumen prüfen: Geburtsdatum, Branche, Gesellschafterstruktur, Jahresabschluss-Datum (Arbeitsblatt B als Checkliste nutzen)</a:t>
-            </a:r>
-          </a:p>
-          <a:p>
-            <a:pPr marL="190500" indent="-190500">
-              <a:spcBef>
-                <a:spcPts val="400"/>
-              </a:spcBef>
-              <a:spcAft>
-                <a:spcPts val="200"/>
-              </a:spcAft>
-            </a:pPr>
-            <a:r>
-              <a:rPr sz="1300">
-                <a:solidFill>
-                  <a:srgbClr val="3D5466"/>
-                </a:solidFill>
-                <a:latin typeface="Arial"/>
-              </a:rPr>
-              <a:t>▸  Fehler in den nächsten drei Kundengesprächen schließen (gezielt im Gespräch erfragen)</a:t>
-            </a:r>
-          </a:p>
-          <a:p>
-            <a:pPr marL="190500" indent="-190500">
-              <a:spcBef>
-                <a:spcPts val="400"/>
-              </a:spcBef>
-              <a:spcAft>
-                <a:spcPts val="200"/>
-              </a:spcAft>
-            </a:pPr>
-            <a:r>
-              <a:rPr sz="1300">
-                <a:solidFill>
-                  <a:srgbClr val="3D5466"/>
-                </a:solidFill>
-                <a:latin typeface="Arial"/>
-              </a:rPr>
-              <a:t>▸  ## 4.4 DSGVO-konforme Datennutzung im Vertrieb</a:t>
+              <a:t>▸  Transparenz gegenüber dem Kunden ist ein Vertrauensmoment, kein Risiko.</a:t>
             </a:r>
           </a:p>
         </p:txBody>
